--- a/docs/plots/carbo/jx_carbo_linsubhr_ratio_anemia2.pptx
+++ b/docs/plots/carbo/jx_carbo_linsubhr_ratio_anemia2.pptx
@@ -3003,551 +3003,557 @@
           <p:spPr>
             <a:xfrm>
               <a:off x="817517" y="1896563"/>
-              <a:ext cx="7370972" cy="3570173"/>
+              <a:ext cx="7370972" cy="3560662"/>
             </a:xfrm>
             <a:custGeom>
               <a:avLst/>
               <a:pathLst>
-                <a:path w="7370972" h="3570173">
+                <a:path w="7370972" h="3560662">
                   <a:moveTo>
-                    <a:pt x="959025" y="0"/>
+                    <a:pt x="840831" y="0"/>
                   </a:moveTo>
                   <a:lnTo>
-                    <a:pt x="1004981" y="98797"/>
-                  </a:lnTo>
-                  <a:lnTo>
-                    <a:pt x="1082615" y="258212"/>
-                  </a:lnTo>
-                  <a:lnTo>
-                    <a:pt x="1160249" y="410477"/>
-                  </a:lnTo>
-                  <a:lnTo>
-                    <a:pt x="1237883" y="555912"/>
-                  </a:lnTo>
-                  <a:lnTo>
-                    <a:pt x="1315517" y="694822"/>
-                  </a:lnTo>
-                  <a:lnTo>
-                    <a:pt x="1393151" y="827502"/>
-                  </a:lnTo>
-                  <a:lnTo>
-                    <a:pt x="1470785" y="954230"/>
-                  </a:lnTo>
-                  <a:lnTo>
-                    <a:pt x="1548419" y="1075273"/>
-                  </a:lnTo>
-                  <a:lnTo>
-                    <a:pt x="1626053" y="1190887"/>
-                  </a:lnTo>
-                  <a:lnTo>
-                    <a:pt x="1703687" y="1301314"/>
-                  </a:lnTo>
-                  <a:lnTo>
-                    <a:pt x="1781321" y="1406788"/>
-                  </a:lnTo>
-                  <a:lnTo>
-                    <a:pt x="1858955" y="1507531"/>
-                  </a:lnTo>
-                  <a:lnTo>
-                    <a:pt x="1936589" y="1603755"/>
-                  </a:lnTo>
-                  <a:lnTo>
-                    <a:pt x="2014223" y="1695662"/>
-                  </a:lnTo>
-                  <a:lnTo>
-                    <a:pt x="2091857" y="1783447"/>
-                  </a:lnTo>
-                  <a:lnTo>
-                    <a:pt x="2169491" y="1867294"/>
-                  </a:lnTo>
-                  <a:lnTo>
-                    <a:pt x="2247125" y="1947380"/>
-                  </a:lnTo>
-                  <a:lnTo>
-                    <a:pt x="2324759" y="2023873"/>
-                  </a:lnTo>
-                  <a:lnTo>
-                    <a:pt x="2402393" y="2096935"/>
-                  </a:lnTo>
-                  <a:lnTo>
-                    <a:pt x="2480027" y="2166720"/>
-                  </a:lnTo>
-                  <a:lnTo>
-                    <a:pt x="2557661" y="2233374"/>
-                  </a:lnTo>
-                  <a:lnTo>
-                    <a:pt x="2635295" y="2297039"/>
-                  </a:lnTo>
-                  <a:lnTo>
-                    <a:pt x="2712930" y="2357847"/>
-                  </a:lnTo>
-                  <a:lnTo>
-                    <a:pt x="2790564" y="2415928"/>
-                  </a:lnTo>
-                  <a:lnTo>
-                    <a:pt x="2868198" y="2471404"/>
-                  </a:lnTo>
-                  <a:lnTo>
-                    <a:pt x="2945832" y="2524391"/>
-                  </a:lnTo>
-                  <a:lnTo>
-                    <a:pt x="3023466" y="2575001"/>
-                  </a:lnTo>
-                  <a:lnTo>
-                    <a:pt x="3101100" y="2623341"/>
-                  </a:lnTo>
-                  <a:lnTo>
-                    <a:pt x="3178734" y="2669513"/>
-                  </a:lnTo>
-                  <a:lnTo>
-                    <a:pt x="3256368" y="2713613"/>
-                  </a:lnTo>
-                  <a:lnTo>
-                    <a:pt x="3334002" y="2755736"/>
-                  </a:lnTo>
-                  <a:lnTo>
-                    <a:pt x="3411636" y="2784441"/>
-                  </a:lnTo>
-                  <a:lnTo>
-                    <a:pt x="3489270" y="2788921"/>
-                  </a:lnTo>
-                  <a:lnTo>
-                    <a:pt x="3566904" y="2793377"/>
-                  </a:lnTo>
-                  <a:lnTo>
-                    <a:pt x="3644538" y="2797810"/>
-                  </a:lnTo>
-                  <a:lnTo>
-                    <a:pt x="3722172" y="2802220"/>
-                  </a:lnTo>
-                  <a:lnTo>
-                    <a:pt x="3799806" y="2806607"/>
-                  </a:lnTo>
-                  <a:lnTo>
-                    <a:pt x="3877440" y="2810972"/>
-                  </a:lnTo>
-                  <a:lnTo>
-                    <a:pt x="3955074" y="2815314"/>
-                  </a:lnTo>
-                  <a:lnTo>
-                    <a:pt x="4032708" y="2819634"/>
-                  </a:lnTo>
-                  <a:lnTo>
-                    <a:pt x="4110342" y="2823931"/>
-                  </a:lnTo>
-                  <a:lnTo>
-                    <a:pt x="4187976" y="2828207"/>
-                  </a:lnTo>
-                  <a:lnTo>
-                    <a:pt x="4265610" y="2832460"/>
-                  </a:lnTo>
-                  <a:lnTo>
-                    <a:pt x="4343244" y="2836691"/>
-                  </a:lnTo>
-                  <a:lnTo>
-                    <a:pt x="4420879" y="2840901"/>
-                  </a:lnTo>
-                  <a:lnTo>
-                    <a:pt x="4498513" y="2845089"/>
-                  </a:lnTo>
-                  <a:lnTo>
-                    <a:pt x="4576147" y="2849255"/>
-                  </a:lnTo>
-                  <a:lnTo>
-                    <a:pt x="4653781" y="2853400"/>
-                  </a:lnTo>
-                  <a:lnTo>
-                    <a:pt x="4731415" y="2857523"/>
-                  </a:lnTo>
-                  <a:lnTo>
-                    <a:pt x="4809049" y="2861625"/>
-                  </a:lnTo>
-                  <a:lnTo>
-                    <a:pt x="4886683" y="2865706"/>
-                  </a:lnTo>
-                  <a:lnTo>
-                    <a:pt x="4964317" y="2869766"/>
-                  </a:lnTo>
-                  <a:lnTo>
-                    <a:pt x="5041951" y="2873805"/>
-                  </a:lnTo>
-                  <a:lnTo>
-                    <a:pt x="5119585" y="2877823"/>
-                  </a:lnTo>
-                  <a:lnTo>
-                    <a:pt x="5197219" y="2881820"/>
-                  </a:lnTo>
-                  <a:lnTo>
-                    <a:pt x="5274853" y="2885797"/>
-                  </a:lnTo>
-                  <a:lnTo>
-                    <a:pt x="5352487" y="2889753"/>
-                  </a:lnTo>
-                  <a:lnTo>
-                    <a:pt x="5430121" y="2893689"/>
-                  </a:lnTo>
-                  <a:lnTo>
-                    <a:pt x="5507755" y="2897605"/>
-                  </a:lnTo>
-                  <a:lnTo>
-                    <a:pt x="5585389" y="2901500"/>
-                  </a:lnTo>
-                  <a:lnTo>
-                    <a:pt x="5663023" y="2905375"/>
-                  </a:lnTo>
-                  <a:lnTo>
-                    <a:pt x="5740657" y="2909230"/>
-                  </a:lnTo>
-                  <a:lnTo>
-                    <a:pt x="5818291" y="2913066"/>
-                  </a:lnTo>
-                  <a:lnTo>
-                    <a:pt x="5895925" y="2916881"/>
-                  </a:lnTo>
-                  <a:lnTo>
-                    <a:pt x="5973559" y="2920677"/>
-                  </a:lnTo>
-                  <a:lnTo>
-                    <a:pt x="6051193" y="2924453"/>
-                  </a:lnTo>
-                  <a:lnTo>
-                    <a:pt x="6128827" y="2928210"/>
-                  </a:lnTo>
-                  <a:lnTo>
-                    <a:pt x="6206462" y="2931947"/>
-                  </a:lnTo>
-                  <a:lnTo>
-                    <a:pt x="6284096" y="2935666"/>
-                  </a:lnTo>
-                  <a:lnTo>
-                    <a:pt x="6361730" y="2939364"/>
-                  </a:lnTo>
-                  <a:lnTo>
-                    <a:pt x="6439364" y="2943044"/>
-                  </a:lnTo>
-                  <a:lnTo>
-                    <a:pt x="6516998" y="2946705"/>
-                  </a:lnTo>
-                  <a:lnTo>
-                    <a:pt x="6594632" y="2950347"/>
-                  </a:lnTo>
-                  <a:lnTo>
-                    <a:pt x="6672266" y="2953970"/>
-                  </a:lnTo>
-                  <a:lnTo>
-                    <a:pt x="6749900" y="2957575"/>
-                  </a:lnTo>
-                  <a:lnTo>
-                    <a:pt x="6827534" y="2961161"/>
-                  </a:lnTo>
-                  <a:lnTo>
-                    <a:pt x="6905168" y="2964728"/>
-                  </a:lnTo>
-                  <a:lnTo>
-                    <a:pt x="6982802" y="2968277"/>
-                  </a:lnTo>
-                  <a:lnTo>
-                    <a:pt x="7060436" y="2971808"/>
-                  </a:lnTo>
-                  <a:lnTo>
-                    <a:pt x="7138070" y="2975320"/>
-                  </a:lnTo>
-                  <a:lnTo>
-                    <a:pt x="7215704" y="2978815"/>
-                  </a:lnTo>
-                  <a:lnTo>
-                    <a:pt x="7293338" y="2982291"/>
-                  </a:lnTo>
-                  <a:lnTo>
-                    <a:pt x="7370972" y="2985749"/>
-                  </a:lnTo>
-                  <a:lnTo>
-                    <a:pt x="7370972" y="3570173"/>
-                  </a:lnTo>
-                  <a:lnTo>
-                    <a:pt x="7293338" y="3566300"/>
-                  </a:lnTo>
-                  <a:lnTo>
-                    <a:pt x="7215704" y="3562244"/>
-                  </a:lnTo>
-                  <a:lnTo>
-                    <a:pt x="7138070" y="3557999"/>
-                  </a:lnTo>
-                  <a:lnTo>
-                    <a:pt x="7060436" y="3553554"/>
-                  </a:lnTo>
-                  <a:lnTo>
-                    <a:pt x="6982802" y="3548901"/>
-                  </a:lnTo>
-                  <a:lnTo>
-                    <a:pt x="6905168" y="3544028"/>
-                  </a:lnTo>
-                  <a:lnTo>
-                    <a:pt x="6827534" y="3538927"/>
-                  </a:lnTo>
-                  <a:lnTo>
-                    <a:pt x="6749900" y="3533587"/>
-                  </a:lnTo>
-                  <a:lnTo>
-                    <a:pt x="6672266" y="3527995"/>
-                  </a:lnTo>
-                  <a:lnTo>
-                    <a:pt x="6594632" y="3522142"/>
-                  </a:lnTo>
-                  <a:lnTo>
-                    <a:pt x="6516998" y="3516013"/>
-                  </a:lnTo>
-                  <a:lnTo>
-                    <a:pt x="6439364" y="3509596"/>
-                  </a:lnTo>
-                  <a:lnTo>
-                    <a:pt x="6361730" y="3502878"/>
-                  </a:lnTo>
-                  <a:lnTo>
-                    <a:pt x="6284096" y="3495844"/>
-                  </a:lnTo>
-                  <a:lnTo>
-                    <a:pt x="6206462" y="3488480"/>
-                  </a:lnTo>
-                  <a:lnTo>
-                    <a:pt x="6128827" y="3480771"/>
-                  </a:lnTo>
-                  <a:lnTo>
-                    <a:pt x="6051193" y="3472699"/>
-                  </a:lnTo>
-                  <a:lnTo>
-                    <a:pt x="5973559" y="3464248"/>
-                  </a:lnTo>
-                  <a:lnTo>
-                    <a:pt x="5895925" y="3455400"/>
-                  </a:lnTo>
-                  <a:lnTo>
-                    <a:pt x="5818291" y="3446137"/>
-                  </a:lnTo>
-                  <a:lnTo>
-                    <a:pt x="5740657" y="3436439"/>
-                  </a:lnTo>
-                  <a:lnTo>
-                    <a:pt x="5663023" y="3426285"/>
-                  </a:lnTo>
-                  <a:lnTo>
-                    <a:pt x="5585389" y="3415654"/>
-                  </a:lnTo>
-                  <a:lnTo>
-                    <a:pt x="5507755" y="3404524"/>
-                  </a:lnTo>
-                  <a:lnTo>
-                    <a:pt x="5430121" y="3392872"/>
-                  </a:lnTo>
-                  <a:lnTo>
-                    <a:pt x="5352487" y="3380672"/>
-                  </a:lnTo>
-                  <a:lnTo>
-                    <a:pt x="5274853" y="3367899"/>
-                  </a:lnTo>
-                  <a:lnTo>
-                    <a:pt x="5197219" y="3354526"/>
-                  </a:lnTo>
-                  <a:lnTo>
-                    <a:pt x="5119585" y="3340525"/>
-                  </a:lnTo>
-                  <a:lnTo>
-                    <a:pt x="5041951" y="3325867"/>
-                  </a:lnTo>
-                  <a:lnTo>
-                    <a:pt x="4964317" y="3310520"/>
-                  </a:lnTo>
-                  <a:lnTo>
-                    <a:pt x="4886683" y="3294453"/>
-                  </a:lnTo>
-                  <a:lnTo>
-                    <a:pt x="4809049" y="3277631"/>
-                  </a:lnTo>
-                  <a:lnTo>
-                    <a:pt x="4731415" y="3260019"/>
-                  </a:lnTo>
-                  <a:lnTo>
-                    <a:pt x="4653781" y="3241580"/>
-                  </a:lnTo>
-                  <a:lnTo>
-                    <a:pt x="4576147" y="3222275"/>
-                  </a:lnTo>
-                  <a:lnTo>
-                    <a:pt x="4498513" y="3202063"/>
-                  </a:lnTo>
-                  <a:lnTo>
-                    <a:pt x="4420879" y="3180902"/>
-                  </a:lnTo>
-                  <a:lnTo>
-                    <a:pt x="4343244" y="3158747"/>
-                  </a:lnTo>
-                  <a:lnTo>
-                    <a:pt x="4265610" y="3135552"/>
-                  </a:lnTo>
-                  <a:lnTo>
-                    <a:pt x="4187976" y="3111267"/>
-                  </a:lnTo>
-                  <a:lnTo>
-                    <a:pt x="4110342" y="3085842"/>
-                  </a:lnTo>
-                  <a:lnTo>
-                    <a:pt x="4032708" y="3059223"/>
-                  </a:lnTo>
-                  <a:lnTo>
-                    <a:pt x="3955074" y="3031354"/>
-                  </a:lnTo>
-                  <a:lnTo>
-                    <a:pt x="3877440" y="3002175"/>
-                  </a:lnTo>
-                  <a:lnTo>
-                    <a:pt x="3799806" y="2971627"/>
-                  </a:lnTo>
-                  <a:lnTo>
-                    <a:pt x="3722172" y="2939644"/>
-                  </a:lnTo>
-                  <a:lnTo>
-                    <a:pt x="3644538" y="2906159"/>
-                  </a:lnTo>
-                  <a:lnTo>
-                    <a:pt x="3566904" y="2871101"/>
-                  </a:lnTo>
-                  <a:lnTo>
-                    <a:pt x="3489270" y="2834396"/>
-                  </a:lnTo>
-                  <a:lnTo>
-                    <a:pt x="3411636" y="2795968"/>
-                  </a:lnTo>
-                  <a:lnTo>
-                    <a:pt x="3334002" y="2779939"/>
-                  </a:lnTo>
-                  <a:lnTo>
-                    <a:pt x="3256368" y="2775413"/>
-                  </a:lnTo>
-                  <a:lnTo>
-                    <a:pt x="3178734" y="2770864"/>
-                  </a:lnTo>
-                  <a:lnTo>
-                    <a:pt x="3101100" y="2766291"/>
-                  </a:lnTo>
-                  <a:lnTo>
-                    <a:pt x="3023466" y="2761695"/>
-                  </a:lnTo>
-                  <a:lnTo>
-                    <a:pt x="2945832" y="2757075"/>
-                  </a:lnTo>
-                  <a:lnTo>
-                    <a:pt x="2868198" y="2752430"/>
-                  </a:lnTo>
-                  <a:lnTo>
-                    <a:pt x="2790564" y="2747762"/>
-                  </a:lnTo>
-                  <a:lnTo>
-                    <a:pt x="2712930" y="2743070"/>
-                  </a:lnTo>
-                  <a:lnTo>
-                    <a:pt x="2635295" y="2738353"/>
-                  </a:lnTo>
-                  <a:lnTo>
-                    <a:pt x="2557661" y="2733611"/>
-                  </a:lnTo>
-                  <a:lnTo>
-                    <a:pt x="2480027" y="2728845"/>
-                  </a:lnTo>
-                  <a:lnTo>
-                    <a:pt x="2402393" y="2724055"/>
-                  </a:lnTo>
-                  <a:lnTo>
-                    <a:pt x="2324759" y="2719239"/>
-                  </a:lnTo>
-                  <a:lnTo>
-                    <a:pt x="2247125" y="2714399"/>
-                  </a:lnTo>
-                  <a:lnTo>
-                    <a:pt x="2169491" y="2709533"/>
-                  </a:lnTo>
-                  <a:lnTo>
-                    <a:pt x="2091857" y="2704642"/>
-                  </a:lnTo>
-                  <a:lnTo>
-                    <a:pt x="2014223" y="2699726"/>
-                  </a:lnTo>
-                  <a:lnTo>
-                    <a:pt x="1936589" y="2694785"/>
-                  </a:lnTo>
-                  <a:lnTo>
-                    <a:pt x="1858955" y="2689817"/>
-                  </a:lnTo>
-                  <a:lnTo>
-                    <a:pt x="1781321" y="2684824"/>
-                  </a:lnTo>
-                  <a:lnTo>
-                    <a:pt x="1703687" y="2679805"/>
-                  </a:lnTo>
-                  <a:lnTo>
-                    <a:pt x="1626053" y="2674760"/>
-                  </a:lnTo>
-                  <a:lnTo>
-                    <a:pt x="1548419" y="2669689"/>
-                  </a:lnTo>
-                  <a:lnTo>
-                    <a:pt x="1470785" y="2664592"/>
-                  </a:lnTo>
-                  <a:lnTo>
-                    <a:pt x="1393151" y="2659468"/>
-                  </a:lnTo>
-                  <a:lnTo>
-                    <a:pt x="1315517" y="2654318"/>
-                  </a:lnTo>
-                  <a:lnTo>
-                    <a:pt x="1237883" y="2649140"/>
-                  </a:lnTo>
-                  <a:lnTo>
-                    <a:pt x="1160249" y="2643937"/>
-                  </a:lnTo>
-                  <a:lnTo>
-                    <a:pt x="1082615" y="2638706"/>
-                  </a:lnTo>
-                  <a:lnTo>
-                    <a:pt x="1004981" y="2633447"/>
-                  </a:lnTo>
-                  <a:lnTo>
-                    <a:pt x="927346" y="2628162"/>
-                  </a:lnTo>
-                  <a:lnTo>
-                    <a:pt x="849712" y="2622849"/>
-                  </a:lnTo>
-                  <a:lnTo>
-                    <a:pt x="772078" y="2617509"/>
-                  </a:lnTo>
-                  <a:lnTo>
-                    <a:pt x="694444" y="2612141"/>
-                  </a:lnTo>
-                  <a:lnTo>
-                    <a:pt x="616810" y="2606745"/>
-                  </a:lnTo>
-                  <a:lnTo>
-                    <a:pt x="539176" y="2601321"/>
-                  </a:lnTo>
-                  <a:lnTo>
-                    <a:pt x="461542" y="2595869"/>
-                  </a:lnTo>
-                  <a:lnTo>
-                    <a:pt x="383908" y="2590389"/>
-                  </a:lnTo>
-                  <a:lnTo>
-                    <a:pt x="306274" y="2584880"/>
-                  </a:lnTo>
-                  <a:lnTo>
-                    <a:pt x="228640" y="2579343"/>
-                  </a:lnTo>
-                  <a:lnTo>
-                    <a:pt x="151006" y="2573777"/>
-                  </a:lnTo>
-                  <a:lnTo>
-                    <a:pt x="73372" y="2568182"/>
-                  </a:lnTo>
-                  <a:lnTo>
-                    <a:pt x="0" y="2562867"/>
+                    <a:pt x="849712" y="18600"/>
+                  </a:lnTo>
+                  <a:lnTo>
+                    <a:pt x="927346" y="174224"/>
+                  </a:lnTo>
+                  <a:lnTo>
+                    <a:pt x="1004981" y="323184"/>
+                  </a:lnTo>
+                  <a:lnTo>
+                    <a:pt x="1082615" y="465765"/>
+                  </a:lnTo>
+                  <a:lnTo>
+                    <a:pt x="1160249" y="602240"/>
+                  </a:lnTo>
+                  <a:lnTo>
+                    <a:pt x="1237883" y="732871"/>
+                  </a:lnTo>
+                  <a:lnTo>
+                    <a:pt x="1315517" y="857907"/>
+                  </a:lnTo>
+                  <a:lnTo>
+                    <a:pt x="1393151" y="977589"/>
+                  </a:lnTo>
+                  <a:lnTo>
+                    <a:pt x="1470785" y="1092145"/>
+                  </a:lnTo>
+                  <a:lnTo>
+                    <a:pt x="1548419" y="1201796"/>
+                  </a:lnTo>
+                  <a:lnTo>
+                    <a:pt x="1626053" y="1306751"/>
+                  </a:lnTo>
+                  <a:lnTo>
+                    <a:pt x="1703687" y="1407212"/>
+                  </a:lnTo>
+                  <a:lnTo>
+                    <a:pt x="1781321" y="1503370"/>
+                  </a:lnTo>
+                  <a:lnTo>
+                    <a:pt x="1858955" y="1595411"/>
+                  </a:lnTo>
+                  <a:lnTo>
+                    <a:pt x="1936589" y="1683510"/>
+                  </a:lnTo>
+                  <a:lnTo>
+                    <a:pt x="2014223" y="1767836"/>
+                  </a:lnTo>
+                  <a:lnTo>
+                    <a:pt x="2091857" y="1848551"/>
+                  </a:lnTo>
+                  <a:lnTo>
+                    <a:pt x="2169491" y="1925810"/>
+                  </a:lnTo>
+                  <a:lnTo>
+                    <a:pt x="2247125" y="1999760"/>
+                  </a:lnTo>
+                  <a:lnTo>
+                    <a:pt x="2324759" y="2070543"/>
+                  </a:lnTo>
+                  <a:lnTo>
+                    <a:pt x="2402393" y="2138295"/>
+                  </a:lnTo>
+                  <a:lnTo>
+                    <a:pt x="2480027" y="2203145"/>
+                  </a:lnTo>
+                  <a:lnTo>
+                    <a:pt x="2557661" y="2265218"/>
+                  </a:lnTo>
+                  <a:lnTo>
+                    <a:pt x="2635295" y="2324634"/>
+                  </a:lnTo>
+                  <a:lnTo>
+                    <a:pt x="2712930" y="2381504"/>
+                  </a:lnTo>
+                  <a:lnTo>
+                    <a:pt x="2790564" y="2435940"/>
+                  </a:lnTo>
+                  <a:lnTo>
+                    <a:pt x="2868198" y="2488044"/>
+                  </a:lnTo>
+                  <a:lnTo>
+                    <a:pt x="2945832" y="2537917"/>
+                  </a:lnTo>
+                  <a:lnTo>
+                    <a:pt x="3023466" y="2585654"/>
+                  </a:lnTo>
+                  <a:lnTo>
+                    <a:pt x="3101100" y="2631346"/>
+                  </a:lnTo>
+                  <a:lnTo>
+                    <a:pt x="3178734" y="2675083"/>
+                  </a:lnTo>
+                  <a:lnTo>
+                    <a:pt x="3256368" y="2716946"/>
+                  </a:lnTo>
+                  <a:lnTo>
+                    <a:pt x="3334002" y="2757016"/>
+                  </a:lnTo>
+                  <a:lnTo>
+                    <a:pt x="3411636" y="2783161"/>
+                  </a:lnTo>
+                  <a:lnTo>
+                    <a:pt x="3489270" y="2783755"/>
+                  </a:lnTo>
+                  <a:lnTo>
+                    <a:pt x="3566904" y="2784349"/>
+                  </a:lnTo>
+                  <a:lnTo>
+                    <a:pt x="3644538" y="2784942"/>
+                  </a:lnTo>
+                  <a:lnTo>
+                    <a:pt x="3722172" y="2785534"/>
+                  </a:lnTo>
+                  <a:lnTo>
+                    <a:pt x="3799806" y="2786127"/>
+                  </a:lnTo>
+                  <a:lnTo>
+                    <a:pt x="3877440" y="2786719"/>
+                  </a:lnTo>
+                  <a:lnTo>
+                    <a:pt x="3955074" y="2787310"/>
+                  </a:lnTo>
+                  <a:lnTo>
+                    <a:pt x="4032708" y="2787901"/>
+                  </a:lnTo>
+                  <a:lnTo>
+                    <a:pt x="4110342" y="2788492"/>
+                  </a:lnTo>
+                  <a:lnTo>
+                    <a:pt x="4187976" y="2789082"/>
+                  </a:lnTo>
+                  <a:lnTo>
+                    <a:pt x="4265610" y="2789672"/>
+                  </a:lnTo>
+                  <a:lnTo>
+                    <a:pt x="4343244" y="2790262"/>
+                  </a:lnTo>
+                  <a:lnTo>
+                    <a:pt x="4420879" y="2790851"/>
+                  </a:lnTo>
+                  <a:lnTo>
+                    <a:pt x="4498513" y="2791439"/>
+                  </a:lnTo>
+                  <a:lnTo>
+                    <a:pt x="4576147" y="2792028"/>
+                  </a:lnTo>
+                  <a:lnTo>
+                    <a:pt x="4653781" y="2792615"/>
+                  </a:lnTo>
+                  <a:lnTo>
+                    <a:pt x="4731415" y="2793203"/>
+                  </a:lnTo>
+                  <a:lnTo>
+                    <a:pt x="4809049" y="2793790"/>
+                  </a:lnTo>
+                  <a:lnTo>
+                    <a:pt x="4886683" y="2794377"/>
+                  </a:lnTo>
+                  <a:lnTo>
+                    <a:pt x="4964317" y="2794963"/>
+                  </a:lnTo>
+                  <a:lnTo>
+                    <a:pt x="5041951" y="2795549"/>
+                  </a:lnTo>
+                  <a:lnTo>
+                    <a:pt x="5119585" y="2796134"/>
+                  </a:lnTo>
+                  <a:lnTo>
+                    <a:pt x="5197219" y="2796719"/>
+                  </a:lnTo>
+                  <a:lnTo>
+                    <a:pt x="5274853" y="2797304"/>
+                  </a:lnTo>
+                  <a:lnTo>
+                    <a:pt x="5352487" y="2797888"/>
+                  </a:lnTo>
+                  <a:lnTo>
+                    <a:pt x="5430121" y="2798472"/>
+                  </a:lnTo>
+                  <a:lnTo>
+                    <a:pt x="5507755" y="2799056"/>
+                  </a:lnTo>
+                  <a:lnTo>
+                    <a:pt x="5585389" y="2799639"/>
+                  </a:lnTo>
+                  <a:lnTo>
+                    <a:pt x="5663023" y="2800221"/>
+                  </a:lnTo>
+                  <a:lnTo>
+                    <a:pt x="5740657" y="2800804"/>
+                  </a:lnTo>
+                  <a:lnTo>
+                    <a:pt x="5818291" y="2801385"/>
+                  </a:lnTo>
+                  <a:lnTo>
+                    <a:pt x="5895925" y="2801967"/>
+                  </a:lnTo>
+                  <a:lnTo>
+                    <a:pt x="5973559" y="2802548"/>
+                  </a:lnTo>
+                  <a:lnTo>
+                    <a:pt x="6051193" y="2803129"/>
+                  </a:lnTo>
+                  <a:lnTo>
+                    <a:pt x="6128827" y="2803709"/>
+                  </a:lnTo>
+                  <a:lnTo>
+                    <a:pt x="6206462" y="2804289"/>
+                  </a:lnTo>
+                  <a:lnTo>
+                    <a:pt x="6284096" y="2804868"/>
+                  </a:lnTo>
+                  <a:lnTo>
+                    <a:pt x="6361730" y="2805447"/>
+                  </a:lnTo>
+                  <a:lnTo>
+                    <a:pt x="6439364" y="2806026"/>
+                  </a:lnTo>
+                  <a:lnTo>
+                    <a:pt x="6516998" y="2806604"/>
+                  </a:lnTo>
+                  <a:lnTo>
+                    <a:pt x="6594632" y="2807182"/>
+                  </a:lnTo>
+                  <a:lnTo>
+                    <a:pt x="6672266" y="2807760"/>
+                  </a:lnTo>
+                  <a:lnTo>
+                    <a:pt x="6749900" y="2808337"/>
+                  </a:lnTo>
+                  <a:lnTo>
+                    <a:pt x="6827534" y="2808914"/>
+                  </a:lnTo>
+                  <a:lnTo>
+                    <a:pt x="6905168" y="2809490"/>
+                  </a:lnTo>
+                  <a:lnTo>
+                    <a:pt x="6982802" y="2810066"/>
+                  </a:lnTo>
+                  <a:lnTo>
+                    <a:pt x="7060436" y="2810642"/>
+                  </a:lnTo>
+                  <a:lnTo>
+                    <a:pt x="7138070" y="2811217"/>
+                  </a:lnTo>
+                  <a:lnTo>
+                    <a:pt x="7215704" y="2811791"/>
+                  </a:lnTo>
+                  <a:lnTo>
+                    <a:pt x="7293338" y="2812366"/>
+                  </a:lnTo>
+                  <a:lnTo>
+                    <a:pt x="7370972" y="2812940"/>
+                  </a:lnTo>
+                  <a:lnTo>
+                    <a:pt x="7370972" y="3560662"/>
+                  </a:lnTo>
+                  <a:lnTo>
+                    <a:pt x="7293338" y="3556547"/>
+                  </a:lnTo>
+                  <a:lnTo>
+                    <a:pt x="7215704" y="3552247"/>
+                  </a:lnTo>
+                  <a:lnTo>
+                    <a:pt x="7138070" y="3547755"/>
+                  </a:lnTo>
+                  <a:lnTo>
+                    <a:pt x="7060436" y="3543063"/>
+                  </a:lnTo>
+                  <a:lnTo>
+                    <a:pt x="6982802" y="3538160"/>
+                  </a:lnTo>
+                  <a:lnTo>
+                    <a:pt x="6905168" y="3533038"/>
+                  </a:lnTo>
+                  <a:lnTo>
+                    <a:pt x="6827534" y="3527687"/>
+                  </a:lnTo>
+                  <a:lnTo>
+                    <a:pt x="6749900" y="3522097"/>
+                  </a:lnTo>
+                  <a:lnTo>
+                    <a:pt x="6672266" y="3516256"/>
+                  </a:lnTo>
+                  <a:lnTo>
+                    <a:pt x="6594632" y="3510154"/>
+                  </a:lnTo>
+                  <a:lnTo>
+                    <a:pt x="6516998" y="3503779"/>
+                  </a:lnTo>
+                  <a:lnTo>
+                    <a:pt x="6439364" y="3497119"/>
+                  </a:lnTo>
+                  <a:lnTo>
+                    <a:pt x="6361730" y="3490161"/>
+                  </a:lnTo>
+                  <a:lnTo>
+                    <a:pt x="6284096" y="3482891"/>
+                  </a:lnTo>
+                  <a:lnTo>
+                    <a:pt x="6206462" y="3475296"/>
+                  </a:lnTo>
+                  <a:lnTo>
+                    <a:pt x="6128827" y="3467362"/>
+                  </a:lnTo>
+                  <a:lnTo>
+                    <a:pt x="6051193" y="3459072"/>
+                  </a:lnTo>
+                  <a:lnTo>
+                    <a:pt x="5973559" y="3450412"/>
+                  </a:lnTo>
+                  <a:lnTo>
+                    <a:pt x="5895925" y="3441364"/>
+                  </a:lnTo>
+                  <a:lnTo>
+                    <a:pt x="5818291" y="3431912"/>
+                  </a:lnTo>
+                  <a:lnTo>
+                    <a:pt x="5740657" y="3422036"/>
+                  </a:lnTo>
+                  <a:lnTo>
+                    <a:pt x="5663023" y="3411719"/>
+                  </a:lnTo>
+                  <a:lnTo>
+                    <a:pt x="5585389" y="3400940"/>
+                  </a:lnTo>
+                  <a:lnTo>
+                    <a:pt x="5507755" y="3389679"/>
+                  </a:lnTo>
+                  <a:lnTo>
+                    <a:pt x="5430121" y="3377914"/>
+                  </a:lnTo>
+                  <a:lnTo>
+                    <a:pt x="5352487" y="3365622"/>
+                  </a:lnTo>
+                  <a:lnTo>
+                    <a:pt x="5274853" y="3352781"/>
+                  </a:lnTo>
+                  <a:lnTo>
+                    <a:pt x="5197219" y="3339365"/>
+                  </a:lnTo>
+                  <a:lnTo>
+                    <a:pt x="5119585" y="3325349"/>
+                  </a:lnTo>
+                  <a:lnTo>
+                    <a:pt x="5041951" y="3310706"/>
+                  </a:lnTo>
+                  <a:lnTo>
+                    <a:pt x="4964317" y="3295408"/>
+                  </a:lnTo>
+                  <a:lnTo>
+                    <a:pt x="4886683" y="3279425"/>
+                  </a:lnTo>
+                  <a:lnTo>
+                    <a:pt x="4809049" y="3262727"/>
+                  </a:lnTo>
+                  <a:lnTo>
+                    <a:pt x="4731415" y="3245282"/>
+                  </a:lnTo>
+                  <a:lnTo>
+                    <a:pt x="4653781" y="3227057"/>
+                  </a:lnTo>
+                  <a:lnTo>
+                    <a:pt x="4576147" y="3208016"/>
+                  </a:lnTo>
+                  <a:lnTo>
+                    <a:pt x="4498513" y="3188124"/>
+                  </a:lnTo>
+                  <a:lnTo>
+                    <a:pt x="4420879" y="3167341"/>
+                  </a:lnTo>
+                  <a:lnTo>
+                    <a:pt x="4343244" y="3145629"/>
+                  </a:lnTo>
+                  <a:lnTo>
+                    <a:pt x="4265610" y="3122945"/>
+                  </a:lnTo>
+                  <a:lnTo>
+                    <a:pt x="4187976" y="3099246"/>
+                  </a:lnTo>
+                  <a:lnTo>
+                    <a:pt x="4110342" y="3074487"/>
+                  </a:lnTo>
+                  <a:lnTo>
+                    <a:pt x="4032708" y="3048620"/>
+                  </a:lnTo>
+                  <a:lnTo>
+                    <a:pt x="3955074" y="3021596"/>
+                  </a:lnTo>
+                  <a:lnTo>
+                    <a:pt x="3877440" y="2993363"/>
+                  </a:lnTo>
+                  <a:lnTo>
+                    <a:pt x="3799806" y="2963867"/>
+                  </a:lnTo>
+                  <a:lnTo>
+                    <a:pt x="3722172" y="2933051"/>
+                  </a:lnTo>
+                  <a:lnTo>
+                    <a:pt x="3644538" y="2900857"/>
+                  </a:lnTo>
+                  <a:lnTo>
+                    <a:pt x="3566904" y="2867222"/>
+                  </a:lnTo>
+                  <a:lnTo>
+                    <a:pt x="3489270" y="2832082"/>
+                  </a:lnTo>
+                  <a:lnTo>
+                    <a:pt x="3411636" y="2795370"/>
+                  </a:lnTo>
+                  <a:lnTo>
+                    <a:pt x="3334002" y="2782567"/>
+                  </a:lnTo>
+                  <a:lnTo>
+                    <a:pt x="3256368" y="2781972"/>
+                  </a:lnTo>
+                  <a:lnTo>
+                    <a:pt x="3178734" y="2781377"/>
+                  </a:lnTo>
+                  <a:lnTo>
+                    <a:pt x="3101100" y="2780781"/>
+                  </a:lnTo>
+                  <a:lnTo>
+                    <a:pt x="3023466" y="2780186"/>
+                  </a:lnTo>
+                  <a:lnTo>
+                    <a:pt x="2945832" y="2779589"/>
+                  </a:lnTo>
+                  <a:lnTo>
+                    <a:pt x="2868198" y="2778992"/>
+                  </a:lnTo>
+                  <a:lnTo>
+                    <a:pt x="2790564" y="2778395"/>
+                  </a:lnTo>
+                  <a:lnTo>
+                    <a:pt x="2712930" y="2777798"/>
+                  </a:lnTo>
+                  <a:lnTo>
+                    <a:pt x="2635295" y="2777200"/>
+                  </a:lnTo>
+                  <a:lnTo>
+                    <a:pt x="2557661" y="2776601"/>
+                  </a:lnTo>
+                  <a:lnTo>
+                    <a:pt x="2480027" y="2776002"/>
+                  </a:lnTo>
+                  <a:lnTo>
+                    <a:pt x="2402393" y="2775403"/>
+                  </a:lnTo>
+                  <a:lnTo>
+                    <a:pt x="2324759" y="2774804"/>
+                  </a:lnTo>
+                  <a:lnTo>
+                    <a:pt x="2247125" y="2774203"/>
+                  </a:lnTo>
+                  <a:lnTo>
+                    <a:pt x="2169491" y="2773603"/>
+                  </a:lnTo>
+                  <a:lnTo>
+                    <a:pt x="2091857" y="2773002"/>
+                  </a:lnTo>
+                  <a:lnTo>
+                    <a:pt x="2014223" y="2772401"/>
+                  </a:lnTo>
+                  <a:lnTo>
+                    <a:pt x="1936589" y="2771799"/>
+                  </a:lnTo>
+                  <a:lnTo>
+                    <a:pt x="1858955" y="2771197"/>
+                  </a:lnTo>
+                  <a:lnTo>
+                    <a:pt x="1781321" y="2770595"/>
+                  </a:lnTo>
+                  <a:lnTo>
+                    <a:pt x="1703687" y="2769992"/>
+                  </a:lnTo>
+                  <a:lnTo>
+                    <a:pt x="1626053" y="2769388"/>
+                  </a:lnTo>
+                  <a:lnTo>
+                    <a:pt x="1548419" y="2768785"/>
+                  </a:lnTo>
+                  <a:lnTo>
+                    <a:pt x="1470785" y="2768180"/>
+                  </a:lnTo>
+                  <a:lnTo>
+                    <a:pt x="1393151" y="2767576"/>
+                  </a:lnTo>
+                  <a:lnTo>
+                    <a:pt x="1315517" y="2766971"/>
+                  </a:lnTo>
+                  <a:lnTo>
+                    <a:pt x="1237883" y="2766366"/>
+                  </a:lnTo>
+                  <a:lnTo>
+                    <a:pt x="1160249" y="2765760"/>
+                  </a:lnTo>
+                  <a:lnTo>
+                    <a:pt x="1082615" y="2765153"/>
+                  </a:lnTo>
+                  <a:lnTo>
+                    <a:pt x="1004981" y="2764547"/>
+                  </a:lnTo>
+                  <a:lnTo>
+                    <a:pt x="927346" y="2763940"/>
+                  </a:lnTo>
+                  <a:lnTo>
+                    <a:pt x="849712" y="2763332"/>
+                  </a:lnTo>
+                  <a:lnTo>
+                    <a:pt x="772078" y="2762724"/>
+                  </a:lnTo>
+                  <a:lnTo>
+                    <a:pt x="694444" y="2762116"/>
+                  </a:lnTo>
+                  <a:lnTo>
+                    <a:pt x="616810" y="2761507"/>
+                  </a:lnTo>
+                  <a:lnTo>
+                    <a:pt x="539176" y="2760898"/>
+                  </a:lnTo>
+                  <a:lnTo>
+                    <a:pt x="461542" y="2760289"/>
+                  </a:lnTo>
+                  <a:lnTo>
+                    <a:pt x="383908" y="2759679"/>
+                  </a:lnTo>
+                  <a:lnTo>
+                    <a:pt x="306274" y="2759068"/>
+                  </a:lnTo>
+                  <a:lnTo>
+                    <a:pt x="228640" y="2758458"/>
+                  </a:lnTo>
+                  <a:lnTo>
+                    <a:pt x="151006" y="2757846"/>
+                  </a:lnTo>
+                  <a:lnTo>
+                    <a:pt x="73372" y="2757235"/>
+                  </a:lnTo>
+                  <a:lnTo>
+                    <a:pt x="0" y="2756656"/>
                   </a:lnTo>
                   <a:close/>
                 </a:path>
@@ -3573,264 +3579,270 @@
           </p:nvSpPr>
           <p:spPr>
             <a:xfrm>
-              <a:off x="1776543" y="1896563"/>
-              <a:ext cx="6411946" cy="2985749"/>
+              <a:off x="1658349" y="1896563"/>
+              <a:ext cx="6530141" cy="2812940"/>
             </a:xfrm>
             <a:custGeom>
               <a:avLst/>
               <a:pathLst>
-                <a:path w="6411946" h="2985749">
+                <a:path w="6530141" h="2812940">
                   <a:moveTo>
                     <a:pt x="0" y="0"/>
                   </a:moveTo>
                   <a:lnTo>
-                    <a:pt x="45955" y="98797"/>
-                  </a:lnTo>
-                  <a:lnTo>
-                    <a:pt x="123589" y="258212"/>
-                  </a:lnTo>
-                  <a:lnTo>
-                    <a:pt x="201223" y="410477"/>
-                  </a:lnTo>
-                  <a:lnTo>
-                    <a:pt x="278857" y="555912"/>
-                  </a:lnTo>
-                  <a:lnTo>
-                    <a:pt x="356491" y="694822"/>
-                  </a:lnTo>
-                  <a:lnTo>
-                    <a:pt x="434125" y="827502"/>
-                  </a:lnTo>
-                  <a:lnTo>
-                    <a:pt x="511759" y="954230"/>
-                  </a:lnTo>
-                  <a:lnTo>
-                    <a:pt x="589393" y="1075273"/>
-                  </a:lnTo>
-                  <a:lnTo>
-                    <a:pt x="667027" y="1190887"/>
-                  </a:lnTo>
-                  <a:lnTo>
-                    <a:pt x="744661" y="1301314"/>
-                  </a:lnTo>
-                  <a:lnTo>
-                    <a:pt x="822295" y="1406788"/>
-                  </a:lnTo>
-                  <a:lnTo>
-                    <a:pt x="899929" y="1507531"/>
-                  </a:lnTo>
-                  <a:lnTo>
-                    <a:pt x="977563" y="1603755"/>
-                  </a:lnTo>
-                  <a:lnTo>
-                    <a:pt x="1055197" y="1695662"/>
-                  </a:lnTo>
-                  <a:lnTo>
-                    <a:pt x="1132831" y="1783447"/>
-                  </a:lnTo>
-                  <a:lnTo>
-                    <a:pt x="1210465" y="1867294"/>
-                  </a:lnTo>
-                  <a:lnTo>
-                    <a:pt x="1288099" y="1947380"/>
-                  </a:lnTo>
-                  <a:lnTo>
-                    <a:pt x="1365733" y="2023873"/>
-                  </a:lnTo>
-                  <a:lnTo>
-                    <a:pt x="1443368" y="2096935"/>
-                  </a:lnTo>
-                  <a:lnTo>
-                    <a:pt x="1521002" y="2166720"/>
-                  </a:lnTo>
-                  <a:lnTo>
-                    <a:pt x="1598636" y="2233374"/>
-                  </a:lnTo>
-                  <a:lnTo>
-                    <a:pt x="1676270" y="2297039"/>
-                  </a:lnTo>
-                  <a:lnTo>
-                    <a:pt x="1753904" y="2357847"/>
-                  </a:lnTo>
-                  <a:lnTo>
-                    <a:pt x="1831538" y="2415928"/>
-                  </a:lnTo>
-                  <a:lnTo>
-                    <a:pt x="1909172" y="2471404"/>
-                  </a:lnTo>
-                  <a:lnTo>
-                    <a:pt x="1986806" y="2524391"/>
-                  </a:lnTo>
-                  <a:lnTo>
-                    <a:pt x="2064440" y="2575001"/>
-                  </a:lnTo>
-                  <a:lnTo>
-                    <a:pt x="2142074" y="2623341"/>
-                  </a:lnTo>
-                  <a:lnTo>
-                    <a:pt x="2219708" y="2669513"/>
-                  </a:lnTo>
-                  <a:lnTo>
-                    <a:pt x="2297342" y="2713613"/>
-                  </a:lnTo>
-                  <a:lnTo>
-                    <a:pt x="2374976" y="2755736"/>
-                  </a:lnTo>
-                  <a:lnTo>
-                    <a:pt x="2452610" y="2784441"/>
-                  </a:lnTo>
-                  <a:lnTo>
-                    <a:pt x="2530244" y="2788921"/>
-                  </a:lnTo>
-                  <a:lnTo>
-                    <a:pt x="2607878" y="2793377"/>
-                  </a:lnTo>
-                  <a:lnTo>
-                    <a:pt x="2685512" y="2797810"/>
-                  </a:lnTo>
-                  <a:lnTo>
-                    <a:pt x="2763146" y="2802220"/>
-                  </a:lnTo>
-                  <a:lnTo>
-                    <a:pt x="2840780" y="2806607"/>
-                  </a:lnTo>
-                  <a:lnTo>
-                    <a:pt x="2918414" y="2810972"/>
-                  </a:lnTo>
-                  <a:lnTo>
-                    <a:pt x="2996048" y="2815314"/>
-                  </a:lnTo>
-                  <a:lnTo>
-                    <a:pt x="3073682" y="2819634"/>
-                  </a:lnTo>
-                  <a:lnTo>
-                    <a:pt x="3151317" y="2823931"/>
-                  </a:lnTo>
-                  <a:lnTo>
-                    <a:pt x="3228951" y="2828207"/>
-                  </a:lnTo>
-                  <a:lnTo>
-                    <a:pt x="3306585" y="2832460"/>
-                  </a:lnTo>
-                  <a:lnTo>
-                    <a:pt x="3384219" y="2836691"/>
-                  </a:lnTo>
-                  <a:lnTo>
-                    <a:pt x="3461853" y="2840901"/>
-                  </a:lnTo>
-                  <a:lnTo>
-                    <a:pt x="3539487" y="2845089"/>
-                  </a:lnTo>
-                  <a:lnTo>
-                    <a:pt x="3617121" y="2849255"/>
-                  </a:lnTo>
-                  <a:lnTo>
-                    <a:pt x="3694755" y="2853400"/>
-                  </a:lnTo>
-                  <a:lnTo>
-                    <a:pt x="3772389" y="2857523"/>
-                  </a:lnTo>
-                  <a:lnTo>
-                    <a:pt x="3850023" y="2861625"/>
-                  </a:lnTo>
-                  <a:lnTo>
-                    <a:pt x="3927657" y="2865706"/>
-                  </a:lnTo>
-                  <a:lnTo>
-                    <a:pt x="4005291" y="2869766"/>
-                  </a:lnTo>
-                  <a:lnTo>
-                    <a:pt x="4082925" y="2873805"/>
-                  </a:lnTo>
-                  <a:lnTo>
-                    <a:pt x="4160559" y="2877823"/>
-                  </a:lnTo>
-                  <a:lnTo>
-                    <a:pt x="4238193" y="2881820"/>
-                  </a:lnTo>
-                  <a:lnTo>
-                    <a:pt x="4315827" y="2885797"/>
-                  </a:lnTo>
-                  <a:lnTo>
-                    <a:pt x="4393461" y="2889753"/>
-                  </a:lnTo>
-                  <a:lnTo>
-                    <a:pt x="4471095" y="2893689"/>
-                  </a:lnTo>
-                  <a:lnTo>
-                    <a:pt x="4548729" y="2897605"/>
-                  </a:lnTo>
-                  <a:lnTo>
-                    <a:pt x="4626363" y="2901500"/>
-                  </a:lnTo>
-                  <a:lnTo>
-                    <a:pt x="4703997" y="2905375"/>
-                  </a:lnTo>
-                  <a:lnTo>
-                    <a:pt x="4781631" y="2909230"/>
-                  </a:lnTo>
-                  <a:lnTo>
-                    <a:pt x="4859265" y="2913066"/>
-                  </a:lnTo>
-                  <a:lnTo>
-                    <a:pt x="4936900" y="2916881"/>
-                  </a:lnTo>
-                  <a:lnTo>
-                    <a:pt x="5014534" y="2920677"/>
-                  </a:lnTo>
-                  <a:lnTo>
-                    <a:pt x="5092168" y="2924453"/>
-                  </a:lnTo>
-                  <a:lnTo>
-                    <a:pt x="5169802" y="2928210"/>
-                  </a:lnTo>
-                  <a:lnTo>
-                    <a:pt x="5247436" y="2931947"/>
-                  </a:lnTo>
-                  <a:lnTo>
-                    <a:pt x="5325070" y="2935666"/>
-                  </a:lnTo>
-                  <a:lnTo>
-                    <a:pt x="5402704" y="2939364"/>
-                  </a:lnTo>
-                  <a:lnTo>
-                    <a:pt x="5480338" y="2943044"/>
-                  </a:lnTo>
-                  <a:lnTo>
-                    <a:pt x="5557972" y="2946705"/>
-                  </a:lnTo>
-                  <a:lnTo>
-                    <a:pt x="5635606" y="2950347"/>
-                  </a:lnTo>
-                  <a:lnTo>
-                    <a:pt x="5713240" y="2953970"/>
-                  </a:lnTo>
-                  <a:lnTo>
-                    <a:pt x="5790874" y="2957575"/>
-                  </a:lnTo>
-                  <a:lnTo>
-                    <a:pt x="5868508" y="2961161"/>
-                  </a:lnTo>
-                  <a:lnTo>
-                    <a:pt x="5946142" y="2964728"/>
-                  </a:lnTo>
-                  <a:lnTo>
-                    <a:pt x="6023776" y="2968277"/>
-                  </a:lnTo>
-                  <a:lnTo>
-                    <a:pt x="6101410" y="2971808"/>
-                  </a:lnTo>
-                  <a:lnTo>
-                    <a:pt x="6179044" y="2975320"/>
-                  </a:lnTo>
-                  <a:lnTo>
-                    <a:pt x="6256678" y="2978815"/>
-                  </a:lnTo>
-                  <a:lnTo>
-                    <a:pt x="6334312" y="2982291"/>
-                  </a:lnTo>
-                  <a:lnTo>
-                    <a:pt x="6411946" y="2985749"/>
+                    <a:pt x="8881" y="18600"/>
+                  </a:lnTo>
+                  <a:lnTo>
+                    <a:pt x="86515" y="174224"/>
+                  </a:lnTo>
+                  <a:lnTo>
+                    <a:pt x="164149" y="323184"/>
+                  </a:lnTo>
+                  <a:lnTo>
+                    <a:pt x="241783" y="465765"/>
+                  </a:lnTo>
+                  <a:lnTo>
+                    <a:pt x="319417" y="602240"/>
+                  </a:lnTo>
+                  <a:lnTo>
+                    <a:pt x="397051" y="732871"/>
+                  </a:lnTo>
+                  <a:lnTo>
+                    <a:pt x="474685" y="857907"/>
+                  </a:lnTo>
+                  <a:lnTo>
+                    <a:pt x="552319" y="977589"/>
+                  </a:lnTo>
+                  <a:lnTo>
+                    <a:pt x="629953" y="1092145"/>
+                  </a:lnTo>
+                  <a:lnTo>
+                    <a:pt x="707588" y="1201796"/>
+                  </a:lnTo>
+                  <a:lnTo>
+                    <a:pt x="785222" y="1306751"/>
+                  </a:lnTo>
+                  <a:lnTo>
+                    <a:pt x="862856" y="1407212"/>
+                  </a:lnTo>
+                  <a:lnTo>
+                    <a:pt x="940490" y="1503370"/>
+                  </a:lnTo>
+                  <a:lnTo>
+                    <a:pt x="1018124" y="1595411"/>
+                  </a:lnTo>
+                  <a:lnTo>
+                    <a:pt x="1095758" y="1683510"/>
+                  </a:lnTo>
+                  <a:lnTo>
+                    <a:pt x="1173392" y="1767836"/>
+                  </a:lnTo>
+                  <a:lnTo>
+                    <a:pt x="1251026" y="1848551"/>
+                  </a:lnTo>
+                  <a:lnTo>
+                    <a:pt x="1328660" y="1925810"/>
+                  </a:lnTo>
+                  <a:lnTo>
+                    <a:pt x="1406294" y="1999760"/>
+                  </a:lnTo>
+                  <a:lnTo>
+                    <a:pt x="1483928" y="2070543"/>
+                  </a:lnTo>
+                  <a:lnTo>
+                    <a:pt x="1561562" y="2138295"/>
+                  </a:lnTo>
+                  <a:lnTo>
+                    <a:pt x="1639196" y="2203145"/>
+                  </a:lnTo>
+                  <a:lnTo>
+                    <a:pt x="1716830" y="2265218"/>
+                  </a:lnTo>
+                  <a:lnTo>
+                    <a:pt x="1794464" y="2324634"/>
+                  </a:lnTo>
+                  <a:lnTo>
+                    <a:pt x="1872098" y="2381504"/>
+                  </a:lnTo>
+                  <a:lnTo>
+                    <a:pt x="1949732" y="2435940"/>
+                  </a:lnTo>
+                  <a:lnTo>
+                    <a:pt x="2027366" y="2488044"/>
+                  </a:lnTo>
+                  <a:lnTo>
+                    <a:pt x="2105000" y="2537917"/>
+                  </a:lnTo>
+                  <a:lnTo>
+                    <a:pt x="2182634" y="2585654"/>
+                  </a:lnTo>
+                  <a:lnTo>
+                    <a:pt x="2260268" y="2631346"/>
+                  </a:lnTo>
+                  <a:lnTo>
+                    <a:pt x="2337902" y="2675083"/>
+                  </a:lnTo>
+                  <a:lnTo>
+                    <a:pt x="2415536" y="2716946"/>
+                  </a:lnTo>
+                  <a:lnTo>
+                    <a:pt x="2493171" y="2757016"/>
+                  </a:lnTo>
+                  <a:lnTo>
+                    <a:pt x="2570805" y="2783161"/>
+                  </a:lnTo>
+                  <a:lnTo>
+                    <a:pt x="2648439" y="2783755"/>
+                  </a:lnTo>
+                  <a:lnTo>
+                    <a:pt x="2726073" y="2784349"/>
+                  </a:lnTo>
+                  <a:lnTo>
+                    <a:pt x="2803707" y="2784942"/>
+                  </a:lnTo>
+                  <a:lnTo>
+                    <a:pt x="2881341" y="2785534"/>
+                  </a:lnTo>
+                  <a:lnTo>
+                    <a:pt x="2958975" y="2786127"/>
+                  </a:lnTo>
+                  <a:lnTo>
+                    <a:pt x="3036609" y="2786719"/>
+                  </a:lnTo>
+                  <a:lnTo>
+                    <a:pt x="3114243" y="2787310"/>
+                  </a:lnTo>
+                  <a:lnTo>
+                    <a:pt x="3191877" y="2787901"/>
+                  </a:lnTo>
+                  <a:lnTo>
+                    <a:pt x="3269511" y="2788492"/>
+                  </a:lnTo>
+                  <a:lnTo>
+                    <a:pt x="3347145" y="2789082"/>
+                  </a:lnTo>
+                  <a:lnTo>
+                    <a:pt x="3424779" y="2789672"/>
+                  </a:lnTo>
+                  <a:lnTo>
+                    <a:pt x="3502413" y="2790262"/>
+                  </a:lnTo>
+                  <a:lnTo>
+                    <a:pt x="3580047" y="2790851"/>
+                  </a:lnTo>
+                  <a:lnTo>
+                    <a:pt x="3657681" y="2791439"/>
+                  </a:lnTo>
+                  <a:lnTo>
+                    <a:pt x="3735315" y="2792028"/>
+                  </a:lnTo>
+                  <a:lnTo>
+                    <a:pt x="3812949" y="2792615"/>
+                  </a:lnTo>
+                  <a:lnTo>
+                    <a:pt x="3890583" y="2793203"/>
+                  </a:lnTo>
+                  <a:lnTo>
+                    <a:pt x="3968217" y="2793790"/>
+                  </a:lnTo>
+                  <a:lnTo>
+                    <a:pt x="4045851" y="2794377"/>
+                  </a:lnTo>
+                  <a:lnTo>
+                    <a:pt x="4123485" y="2794963"/>
+                  </a:lnTo>
+                  <a:lnTo>
+                    <a:pt x="4201120" y="2795549"/>
+                  </a:lnTo>
+                  <a:lnTo>
+                    <a:pt x="4278754" y="2796134"/>
+                  </a:lnTo>
+                  <a:lnTo>
+                    <a:pt x="4356388" y="2796719"/>
+                  </a:lnTo>
+                  <a:lnTo>
+                    <a:pt x="4434022" y="2797304"/>
+                  </a:lnTo>
+                  <a:lnTo>
+                    <a:pt x="4511656" y="2797888"/>
+                  </a:lnTo>
+                  <a:lnTo>
+                    <a:pt x="4589290" y="2798472"/>
+                  </a:lnTo>
+                  <a:lnTo>
+                    <a:pt x="4666924" y="2799056"/>
+                  </a:lnTo>
+                  <a:lnTo>
+                    <a:pt x="4744558" y="2799639"/>
+                  </a:lnTo>
+                  <a:lnTo>
+                    <a:pt x="4822192" y="2800221"/>
+                  </a:lnTo>
+                  <a:lnTo>
+                    <a:pt x="4899826" y="2800804"/>
+                  </a:lnTo>
+                  <a:lnTo>
+                    <a:pt x="4977460" y="2801385"/>
+                  </a:lnTo>
+                  <a:lnTo>
+                    <a:pt x="5055094" y="2801967"/>
+                  </a:lnTo>
+                  <a:lnTo>
+                    <a:pt x="5132728" y="2802548"/>
+                  </a:lnTo>
+                  <a:lnTo>
+                    <a:pt x="5210362" y="2803129"/>
+                  </a:lnTo>
+                  <a:lnTo>
+                    <a:pt x="5287996" y="2803709"/>
+                  </a:lnTo>
+                  <a:lnTo>
+                    <a:pt x="5365630" y="2804289"/>
+                  </a:lnTo>
+                  <a:lnTo>
+                    <a:pt x="5443264" y="2804868"/>
+                  </a:lnTo>
+                  <a:lnTo>
+                    <a:pt x="5520898" y="2805447"/>
+                  </a:lnTo>
+                  <a:lnTo>
+                    <a:pt x="5598532" y="2806026"/>
+                  </a:lnTo>
+                  <a:lnTo>
+                    <a:pt x="5676166" y="2806604"/>
+                  </a:lnTo>
+                  <a:lnTo>
+                    <a:pt x="5753800" y="2807182"/>
+                  </a:lnTo>
+                  <a:lnTo>
+                    <a:pt x="5831434" y="2807760"/>
+                  </a:lnTo>
+                  <a:lnTo>
+                    <a:pt x="5909069" y="2808337"/>
+                  </a:lnTo>
+                  <a:lnTo>
+                    <a:pt x="5986703" y="2808914"/>
+                  </a:lnTo>
+                  <a:lnTo>
+                    <a:pt x="6064337" y="2809490"/>
+                  </a:lnTo>
+                  <a:lnTo>
+                    <a:pt x="6141971" y="2810066"/>
+                  </a:lnTo>
+                  <a:lnTo>
+                    <a:pt x="6219605" y="2810642"/>
+                  </a:lnTo>
+                  <a:lnTo>
+                    <a:pt x="6297239" y="2811217"/>
+                  </a:lnTo>
+                  <a:lnTo>
+                    <a:pt x="6374873" y="2811791"/>
+                  </a:lnTo>
+                  <a:lnTo>
+                    <a:pt x="6452507" y="2812366"/>
+                  </a:lnTo>
+                  <a:lnTo>
+                    <a:pt x="6530141" y="2812940"/>
                   </a:lnTo>
                 </a:path>
               </a:pathLst>
@@ -3850,297 +3862,297 @@
           </p:nvSpPr>
           <p:spPr>
             <a:xfrm>
-              <a:off x="817517" y="4459431"/>
-              <a:ext cx="7370972" cy="1007305"/>
+              <a:off x="817517" y="4653220"/>
+              <a:ext cx="7370972" cy="804005"/>
             </a:xfrm>
             <a:custGeom>
               <a:avLst/>
               <a:pathLst>
-                <a:path w="7370972" h="1007305">
+                <a:path w="7370972" h="804005">
                   <a:moveTo>
-                    <a:pt x="7370972" y="1007305"/>
+                    <a:pt x="7370972" y="804005"/>
                   </a:moveTo>
                   <a:lnTo>
-                    <a:pt x="7293338" y="1003432"/>
-                  </a:lnTo>
-                  <a:lnTo>
-                    <a:pt x="7215704" y="999377"/>
-                  </a:lnTo>
-                  <a:lnTo>
-                    <a:pt x="7138070" y="995131"/>
-                  </a:lnTo>
-                  <a:lnTo>
-                    <a:pt x="7060436" y="990686"/>
-                  </a:lnTo>
-                  <a:lnTo>
-                    <a:pt x="6982802" y="986033"/>
-                  </a:lnTo>
-                  <a:lnTo>
-                    <a:pt x="6905168" y="981161"/>
-                  </a:lnTo>
-                  <a:lnTo>
-                    <a:pt x="6827534" y="976060"/>
-                  </a:lnTo>
-                  <a:lnTo>
-                    <a:pt x="6749900" y="970719"/>
-                  </a:lnTo>
-                  <a:lnTo>
-                    <a:pt x="6672266" y="965128"/>
-                  </a:lnTo>
-                  <a:lnTo>
-                    <a:pt x="6594632" y="959274"/>
-                  </a:lnTo>
-                  <a:lnTo>
-                    <a:pt x="6516998" y="953145"/>
-                  </a:lnTo>
-                  <a:lnTo>
-                    <a:pt x="6439364" y="946728"/>
-                  </a:lnTo>
-                  <a:lnTo>
-                    <a:pt x="6361730" y="940010"/>
-                  </a:lnTo>
-                  <a:lnTo>
-                    <a:pt x="6284096" y="932976"/>
-                  </a:lnTo>
-                  <a:lnTo>
-                    <a:pt x="6206462" y="925613"/>
-                  </a:lnTo>
-                  <a:lnTo>
-                    <a:pt x="6128827" y="917903"/>
-                  </a:lnTo>
-                  <a:lnTo>
-                    <a:pt x="6051193" y="909831"/>
-                  </a:lnTo>
-                  <a:lnTo>
-                    <a:pt x="5973559" y="901380"/>
-                  </a:lnTo>
-                  <a:lnTo>
-                    <a:pt x="5895925" y="892532"/>
-                  </a:lnTo>
-                  <a:lnTo>
-                    <a:pt x="5818291" y="883269"/>
-                  </a:lnTo>
-                  <a:lnTo>
-                    <a:pt x="5740657" y="873571"/>
-                  </a:lnTo>
-                  <a:lnTo>
-                    <a:pt x="5663023" y="863417"/>
-                  </a:lnTo>
-                  <a:lnTo>
-                    <a:pt x="5585389" y="852786"/>
-                  </a:lnTo>
-                  <a:lnTo>
-                    <a:pt x="5507755" y="841656"/>
-                  </a:lnTo>
-                  <a:lnTo>
-                    <a:pt x="5430121" y="830004"/>
-                  </a:lnTo>
-                  <a:lnTo>
-                    <a:pt x="5352487" y="817804"/>
-                  </a:lnTo>
-                  <a:lnTo>
-                    <a:pt x="5274853" y="805031"/>
-                  </a:lnTo>
-                  <a:lnTo>
-                    <a:pt x="5197219" y="791658"/>
-                  </a:lnTo>
-                  <a:lnTo>
-                    <a:pt x="5119585" y="777658"/>
-                  </a:lnTo>
-                  <a:lnTo>
-                    <a:pt x="5041951" y="762999"/>
-                  </a:lnTo>
-                  <a:lnTo>
-                    <a:pt x="4964317" y="747653"/>
-                  </a:lnTo>
-                  <a:lnTo>
-                    <a:pt x="4886683" y="731585"/>
-                  </a:lnTo>
-                  <a:lnTo>
-                    <a:pt x="4809049" y="714763"/>
-                  </a:lnTo>
-                  <a:lnTo>
-                    <a:pt x="4731415" y="697151"/>
-                  </a:lnTo>
-                  <a:lnTo>
-                    <a:pt x="4653781" y="678712"/>
-                  </a:lnTo>
-                  <a:lnTo>
-                    <a:pt x="4576147" y="659407"/>
-                  </a:lnTo>
-                  <a:lnTo>
-                    <a:pt x="4498513" y="639195"/>
-                  </a:lnTo>
-                  <a:lnTo>
-                    <a:pt x="4420879" y="618034"/>
-                  </a:lnTo>
-                  <a:lnTo>
-                    <a:pt x="4343244" y="595879"/>
-                  </a:lnTo>
-                  <a:lnTo>
-                    <a:pt x="4265610" y="572684"/>
-                  </a:lnTo>
-                  <a:lnTo>
-                    <a:pt x="4187976" y="548399"/>
-                  </a:lnTo>
-                  <a:lnTo>
-                    <a:pt x="4110342" y="522974"/>
-                  </a:lnTo>
-                  <a:lnTo>
-                    <a:pt x="4032708" y="496355"/>
-                  </a:lnTo>
-                  <a:lnTo>
-                    <a:pt x="3955074" y="468486"/>
-                  </a:lnTo>
-                  <a:lnTo>
-                    <a:pt x="3877440" y="439308"/>
-                  </a:lnTo>
-                  <a:lnTo>
-                    <a:pt x="3799806" y="408759"/>
-                  </a:lnTo>
-                  <a:lnTo>
-                    <a:pt x="3722172" y="376776"/>
-                  </a:lnTo>
-                  <a:lnTo>
-                    <a:pt x="3644538" y="343291"/>
-                  </a:lnTo>
-                  <a:lnTo>
-                    <a:pt x="3566904" y="308233"/>
-                  </a:lnTo>
-                  <a:lnTo>
-                    <a:pt x="3489270" y="271529"/>
-                  </a:lnTo>
-                  <a:lnTo>
-                    <a:pt x="3411636" y="233101"/>
-                  </a:lnTo>
-                  <a:lnTo>
-                    <a:pt x="3334002" y="217071"/>
-                  </a:lnTo>
-                  <a:lnTo>
-                    <a:pt x="3256368" y="212546"/>
-                  </a:lnTo>
-                  <a:lnTo>
-                    <a:pt x="3178734" y="207996"/>
-                  </a:lnTo>
-                  <a:lnTo>
-                    <a:pt x="3101100" y="203424"/>
-                  </a:lnTo>
-                  <a:lnTo>
-                    <a:pt x="3023466" y="198827"/>
-                  </a:lnTo>
-                  <a:lnTo>
-                    <a:pt x="2945832" y="194207"/>
-                  </a:lnTo>
-                  <a:lnTo>
-                    <a:pt x="2868198" y="189563"/>
-                  </a:lnTo>
-                  <a:lnTo>
-                    <a:pt x="2790564" y="184894"/>
-                  </a:lnTo>
-                  <a:lnTo>
-                    <a:pt x="2712930" y="180202"/>
-                  </a:lnTo>
-                  <a:lnTo>
-                    <a:pt x="2635295" y="175485"/>
-                  </a:lnTo>
-                  <a:lnTo>
-                    <a:pt x="2557661" y="170744"/>
-                  </a:lnTo>
-                  <a:lnTo>
-                    <a:pt x="2480027" y="165978"/>
-                  </a:lnTo>
-                  <a:lnTo>
-                    <a:pt x="2402393" y="161187"/>
-                  </a:lnTo>
-                  <a:lnTo>
-                    <a:pt x="2324759" y="156371"/>
-                  </a:lnTo>
-                  <a:lnTo>
-                    <a:pt x="2247125" y="151531"/>
-                  </a:lnTo>
-                  <a:lnTo>
-                    <a:pt x="2169491" y="146665"/>
-                  </a:lnTo>
-                  <a:lnTo>
-                    <a:pt x="2091857" y="141775"/>
-                  </a:lnTo>
-                  <a:lnTo>
-                    <a:pt x="2014223" y="136858"/>
-                  </a:lnTo>
-                  <a:lnTo>
-                    <a:pt x="1936589" y="131917"/>
-                  </a:lnTo>
-                  <a:lnTo>
-                    <a:pt x="1858955" y="126950"/>
-                  </a:lnTo>
-                  <a:lnTo>
-                    <a:pt x="1781321" y="121956"/>
-                  </a:lnTo>
-                  <a:lnTo>
-                    <a:pt x="1703687" y="116938"/>
-                  </a:lnTo>
-                  <a:lnTo>
-                    <a:pt x="1626053" y="111893"/>
-                  </a:lnTo>
-                  <a:lnTo>
-                    <a:pt x="1548419" y="106821"/>
-                  </a:lnTo>
-                  <a:lnTo>
-                    <a:pt x="1470785" y="101724"/>
-                  </a:lnTo>
-                  <a:lnTo>
-                    <a:pt x="1393151" y="96600"/>
-                  </a:lnTo>
-                  <a:lnTo>
-                    <a:pt x="1315517" y="91450"/>
-                  </a:lnTo>
-                  <a:lnTo>
-                    <a:pt x="1237883" y="86273"/>
-                  </a:lnTo>
-                  <a:lnTo>
-                    <a:pt x="1160249" y="81069"/>
-                  </a:lnTo>
-                  <a:lnTo>
-                    <a:pt x="1082615" y="75838"/>
-                  </a:lnTo>
-                  <a:lnTo>
-                    <a:pt x="1004981" y="70580"/>
-                  </a:lnTo>
-                  <a:lnTo>
-                    <a:pt x="927346" y="65294"/>
-                  </a:lnTo>
-                  <a:lnTo>
-                    <a:pt x="849712" y="59981"/>
-                  </a:lnTo>
-                  <a:lnTo>
-                    <a:pt x="772078" y="54641"/>
-                  </a:lnTo>
-                  <a:lnTo>
-                    <a:pt x="694444" y="49273"/>
-                  </a:lnTo>
-                  <a:lnTo>
-                    <a:pt x="616810" y="43877"/>
-                  </a:lnTo>
-                  <a:lnTo>
-                    <a:pt x="539176" y="38453"/>
-                  </a:lnTo>
-                  <a:lnTo>
-                    <a:pt x="461542" y="33001"/>
-                  </a:lnTo>
-                  <a:lnTo>
-                    <a:pt x="383908" y="27521"/>
-                  </a:lnTo>
-                  <a:lnTo>
-                    <a:pt x="306274" y="22013"/>
-                  </a:lnTo>
-                  <a:lnTo>
-                    <a:pt x="228640" y="16475"/>
-                  </a:lnTo>
-                  <a:lnTo>
-                    <a:pt x="151006" y="10909"/>
-                  </a:lnTo>
-                  <a:lnTo>
-                    <a:pt x="73372" y="5315"/>
+                    <a:pt x="7293338" y="799890"/>
+                  </a:lnTo>
+                  <a:lnTo>
+                    <a:pt x="7215704" y="795590"/>
+                  </a:lnTo>
+                  <a:lnTo>
+                    <a:pt x="7138070" y="791099"/>
+                  </a:lnTo>
+                  <a:lnTo>
+                    <a:pt x="7060436" y="786406"/>
+                  </a:lnTo>
+                  <a:lnTo>
+                    <a:pt x="6982802" y="781503"/>
+                  </a:lnTo>
+                  <a:lnTo>
+                    <a:pt x="6905168" y="776381"/>
+                  </a:lnTo>
+                  <a:lnTo>
+                    <a:pt x="6827534" y="771030"/>
+                  </a:lnTo>
+                  <a:lnTo>
+                    <a:pt x="6749900" y="765440"/>
+                  </a:lnTo>
+                  <a:lnTo>
+                    <a:pt x="6672266" y="759599"/>
+                  </a:lnTo>
+                  <a:lnTo>
+                    <a:pt x="6594632" y="753497"/>
+                  </a:lnTo>
+                  <a:lnTo>
+                    <a:pt x="6516998" y="747122"/>
+                  </a:lnTo>
+                  <a:lnTo>
+                    <a:pt x="6439364" y="740462"/>
+                  </a:lnTo>
+                  <a:lnTo>
+                    <a:pt x="6361730" y="733504"/>
+                  </a:lnTo>
+                  <a:lnTo>
+                    <a:pt x="6284096" y="726234"/>
+                  </a:lnTo>
+                  <a:lnTo>
+                    <a:pt x="6206462" y="718640"/>
+                  </a:lnTo>
+                  <a:lnTo>
+                    <a:pt x="6128827" y="710705"/>
+                  </a:lnTo>
+                  <a:lnTo>
+                    <a:pt x="6051193" y="702416"/>
+                  </a:lnTo>
+                  <a:lnTo>
+                    <a:pt x="5973559" y="693755"/>
+                  </a:lnTo>
+                  <a:lnTo>
+                    <a:pt x="5895925" y="684707"/>
+                  </a:lnTo>
+                  <a:lnTo>
+                    <a:pt x="5818291" y="675255"/>
+                  </a:lnTo>
+                  <a:lnTo>
+                    <a:pt x="5740657" y="665379"/>
+                  </a:lnTo>
+                  <a:lnTo>
+                    <a:pt x="5663023" y="655062"/>
+                  </a:lnTo>
+                  <a:lnTo>
+                    <a:pt x="5585389" y="644283"/>
+                  </a:lnTo>
+                  <a:lnTo>
+                    <a:pt x="5507755" y="633022"/>
+                  </a:lnTo>
+                  <a:lnTo>
+                    <a:pt x="5430121" y="621257"/>
+                  </a:lnTo>
+                  <a:lnTo>
+                    <a:pt x="5352487" y="608965"/>
+                  </a:lnTo>
+                  <a:lnTo>
+                    <a:pt x="5274853" y="596124"/>
+                  </a:lnTo>
+                  <a:lnTo>
+                    <a:pt x="5197219" y="582708"/>
+                  </a:lnTo>
+                  <a:lnTo>
+                    <a:pt x="5119585" y="568692"/>
+                  </a:lnTo>
+                  <a:lnTo>
+                    <a:pt x="5041951" y="554049"/>
+                  </a:lnTo>
+                  <a:lnTo>
+                    <a:pt x="4964317" y="538751"/>
+                  </a:lnTo>
+                  <a:lnTo>
+                    <a:pt x="4886683" y="522768"/>
+                  </a:lnTo>
+                  <a:lnTo>
+                    <a:pt x="4809049" y="506070"/>
+                  </a:lnTo>
+                  <a:lnTo>
+                    <a:pt x="4731415" y="488625"/>
+                  </a:lnTo>
+                  <a:lnTo>
+                    <a:pt x="4653781" y="470400"/>
+                  </a:lnTo>
+                  <a:lnTo>
+                    <a:pt x="4576147" y="451359"/>
+                  </a:lnTo>
+                  <a:lnTo>
+                    <a:pt x="4498513" y="431467"/>
+                  </a:lnTo>
+                  <a:lnTo>
+                    <a:pt x="4420879" y="410684"/>
+                  </a:lnTo>
+                  <a:lnTo>
+                    <a:pt x="4343244" y="388972"/>
+                  </a:lnTo>
+                  <a:lnTo>
+                    <a:pt x="4265610" y="366288"/>
+                  </a:lnTo>
+                  <a:lnTo>
+                    <a:pt x="4187976" y="342589"/>
+                  </a:lnTo>
+                  <a:lnTo>
+                    <a:pt x="4110342" y="317830"/>
+                  </a:lnTo>
+                  <a:lnTo>
+                    <a:pt x="4032708" y="291964"/>
+                  </a:lnTo>
+                  <a:lnTo>
+                    <a:pt x="3955074" y="264940"/>
+                  </a:lnTo>
+                  <a:lnTo>
+                    <a:pt x="3877440" y="236707"/>
+                  </a:lnTo>
+                  <a:lnTo>
+                    <a:pt x="3799806" y="207210"/>
+                  </a:lnTo>
+                  <a:lnTo>
+                    <a:pt x="3722172" y="176395"/>
+                  </a:lnTo>
+                  <a:lnTo>
+                    <a:pt x="3644538" y="144200"/>
+                  </a:lnTo>
+                  <a:lnTo>
+                    <a:pt x="3566904" y="110565"/>
+                  </a:lnTo>
+                  <a:lnTo>
+                    <a:pt x="3489270" y="75425"/>
+                  </a:lnTo>
+                  <a:lnTo>
+                    <a:pt x="3411636" y="38714"/>
+                  </a:lnTo>
+                  <a:lnTo>
+                    <a:pt x="3334002" y="25910"/>
+                  </a:lnTo>
+                  <a:lnTo>
+                    <a:pt x="3256368" y="25315"/>
+                  </a:lnTo>
+                  <a:lnTo>
+                    <a:pt x="3178734" y="24720"/>
+                  </a:lnTo>
+                  <a:lnTo>
+                    <a:pt x="3101100" y="24125"/>
+                  </a:lnTo>
+                  <a:lnTo>
+                    <a:pt x="3023466" y="23529"/>
+                  </a:lnTo>
+                  <a:lnTo>
+                    <a:pt x="2945832" y="22932"/>
+                  </a:lnTo>
+                  <a:lnTo>
+                    <a:pt x="2868198" y="22336"/>
+                  </a:lnTo>
+                  <a:lnTo>
+                    <a:pt x="2790564" y="21738"/>
+                  </a:lnTo>
+                  <a:lnTo>
+                    <a:pt x="2712930" y="21141"/>
+                  </a:lnTo>
+                  <a:lnTo>
+                    <a:pt x="2635295" y="20543"/>
+                  </a:lnTo>
+                  <a:lnTo>
+                    <a:pt x="2557661" y="19944"/>
+                  </a:lnTo>
+                  <a:lnTo>
+                    <a:pt x="2480027" y="19346"/>
+                  </a:lnTo>
+                  <a:lnTo>
+                    <a:pt x="2402393" y="18746"/>
+                  </a:lnTo>
+                  <a:lnTo>
+                    <a:pt x="2324759" y="18147"/>
+                  </a:lnTo>
+                  <a:lnTo>
+                    <a:pt x="2247125" y="17547"/>
+                  </a:lnTo>
+                  <a:lnTo>
+                    <a:pt x="2169491" y="16946"/>
+                  </a:lnTo>
+                  <a:lnTo>
+                    <a:pt x="2091857" y="16345"/>
+                  </a:lnTo>
+                  <a:lnTo>
+                    <a:pt x="2014223" y="15744"/>
+                  </a:lnTo>
+                  <a:lnTo>
+                    <a:pt x="1936589" y="15142"/>
+                  </a:lnTo>
+                  <a:lnTo>
+                    <a:pt x="1858955" y="14540"/>
+                  </a:lnTo>
+                  <a:lnTo>
+                    <a:pt x="1781321" y="13938"/>
+                  </a:lnTo>
+                  <a:lnTo>
+                    <a:pt x="1703687" y="13335"/>
+                  </a:lnTo>
+                  <a:lnTo>
+                    <a:pt x="1626053" y="12732"/>
+                  </a:lnTo>
+                  <a:lnTo>
+                    <a:pt x="1548419" y="12128"/>
+                  </a:lnTo>
+                  <a:lnTo>
+                    <a:pt x="1470785" y="11524"/>
+                  </a:lnTo>
+                  <a:lnTo>
+                    <a:pt x="1393151" y="10919"/>
+                  </a:lnTo>
+                  <a:lnTo>
+                    <a:pt x="1315517" y="10314"/>
+                  </a:lnTo>
+                  <a:lnTo>
+                    <a:pt x="1237883" y="9709"/>
+                  </a:lnTo>
+                  <a:lnTo>
+                    <a:pt x="1160249" y="9103"/>
+                  </a:lnTo>
+                  <a:lnTo>
+                    <a:pt x="1082615" y="8497"/>
+                  </a:lnTo>
+                  <a:lnTo>
+                    <a:pt x="1004981" y="7890"/>
+                  </a:lnTo>
+                  <a:lnTo>
+                    <a:pt x="927346" y="7283"/>
+                  </a:lnTo>
+                  <a:lnTo>
+                    <a:pt x="849712" y="6676"/>
+                  </a:lnTo>
+                  <a:lnTo>
+                    <a:pt x="772078" y="6068"/>
+                  </a:lnTo>
+                  <a:lnTo>
+                    <a:pt x="694444" y="5459"/>
+                  </a:lnTo>
+                  <a:lnTo>
+                    <a:pt x="616810" y="4851"/>
+                  </a:lnTo>
+                  <a:lnTo>
+                    <a:pt x="539176" y="4241"/>
+                  </a:lnTo>
+                  <a:lnTo>
+                    <a:pt x="461542" y="3632"/>
+                  </a:lnTo>
+                  <a:lnTo>
+                    <a:pt x="383908" y="3022"/>
+                  </a:lnTo>
+                  <a:lnTo>
+                    <a:pt x="306274" y="2412"/>
+                  </a:lnTo>
+                  <a:lnTo>
+                    <a:pt x="228640" y="1801"/>
+                  </a:lnTo>
+                  <a:lnTo>
+                    <a:pt x="151006" y="1190"/>
+                  </a:lnTo>
+                  <a:lnTo>
+                    <a:pt x="73372" y="578"/>
                   </a:lnTo>
                   <a:lnTo>
                     <a:pt x="0" y="0"/>
@@ -4163,300 +4175,300 @@
           </p:nvSpPr>
           <p:spPr>
             <a:xfrm>
-              <a:off x="817517" y="2900499"/>
-              <a:ext cx="7370972" cy="2414188"/>
+              <a:off x="817517" y="3256361"/>
+              <a:ext cx="7370972" cy="2014930"/>
             </a:xfrm>
             <a:custGeom>
               <a:avLst/>
               <a:pathLst>
-                <a:path w="7370972" h="2414188">
+                <a:path w="7370972" h="2014930">
                   <a:moveTo>
                     <a:pt x="0" y="0"/>
                   </a:moveTo>
                   <a:lnTo>
-                    <a:pt x="73372" y="63196"/>
-                  </a:lnTo>
-                  <a:lnTo>
-                    <a:pt x="151006" y="128377"/>
-                  </a:lnTo>
-                  <a:lnTo>
-                    <a:pt x="228640" y="191915"/>
-                  </a:lnTo>
-                  <a:lnTo>
-                    <a:pt x="306274" y="253852"/>
-                  </a:lnTo>
-                  <a:lnTo>
-                    <a:pt x="383908" y="314226"/>
-                  </a:lnTo>
-                  <a:lnTo>
-                    <a:pt x="461542" y="373079"/>
-                  </a:lnTo>
-                  <a:lnTo>
-                    <a:pt x="539176" y="430448"/>
-                  </a:lnTo>
-                  <a:lnTo>
-                    <a:pt x="616810" y="486371"/>
-                  </a:lnTo>
-                  <a:lnTo>
-                    <a:pt x="694444" y="540884"/>
-                  </a:lnTo>
-                  <a:lnTo>
-                    <a:pt x="772078" y="594022"/>
-                  </a:lnTo>
-                  <a:lnTo>
-                    <a:pt x="849712" y="645821"/>
-                  </a:lnTo>
-                  <a:lnTo>
-                    <a:pt x="927346" y="696315"/>
-                  </a:lnTo>
-                  <a:lnTo>
-                    <a:pt x="1004981" y="745535"/>
-                  </a:lnTo>
-                  <a:lnTo>
-                    <a:pt x="1082615" y="793514"/>
-                  </a:lnTo>
-                  <a:lnTo>
-                    <a:pt x="1160249" y="840284"/>
-                  </a:lnTo>
-                  <a:lnTo>
-                    <a:pt x="1237883" y="885875"/>
-                  </a:lnTo>
-                  <a:lnTo>
-                    <a:pt x="1315517" y="930316"/>
-                  </a:lnTo>
-                  <a:lnTo>
-                    <a:pt x="1393151" y="973637"/>
-                  </a:lnTo>
-                  <a:lnTo>
-                    <a:pt x="1470785" y="1015866"/>
-                  </a:lnTo>
-                  <a:lnTo>
-                    <a:pt x="1548419" y="1057030"/>
-                  </a:lnTo>
-                  <a:lnTo>
-                    <a:pt x="1626053" y="1097157"/>
-                  </a:lnTo>
-                  <a:lnTo>
-                    <a:pt x="1703687" y="1136272"/>
-                  </a:lnTo>
-                  <a:lnTo>
-                    <a:pt x="1781321" y="1174400"/>
-                  </a:lnTo>
-                  <a:lnTo>
-                    <a:pt x="1858955" y="1211568"/>
-                  </a:lnTo>
-                  <a:lnTo>
-                    <a:pt x="1936589" y="1247799"/>
-                  </a:lnTo>
-                  <a:lnTo>
-                    <a:pt x="2014223" y="1283116"/>
-                  </a:lnTo>
-                  <a:lnTo>
-                    <a:pt x="2091857" y="1317543"/>
-                  </a:lnTo>
-                  <a:lnTo>
-                    <a:pt x="2169491" y="1351102"/>
-                  </a:lnTo>
-                  <a:lnTo>
-                    <a:pt x="2247125" y="1383814"/>
-                  </a:lnTo>
-                  <a:lnTo>
-                    <a:pt x="2324759" y="1415703"/>
-                  </a:lnTo>
-                  <a:lnTo>
-                    <a:pt x="2402393" y="1446787"/>
-                  </a:lnTo>
-                  <a:lnTo>
-                    <a:pt x="2480027" y="1477088"/>
-                  </a:lnTo>
-                  <a:lnTo>
-                    <a:pt x="2557661" y="1506624"/>
-                  </a:lnTo>
-                  <a:lnTo>
-                    <a:pt x="2635295" y="1535417"/>
-                  </a:lnTo>
-                  <a:lnTo>
-                    <a:pt x="2712930" y="1563483"/>
-                  </a:lnTo>
-                  <a:lnTo>
-                    <a:pt x="2790564" y="1590842"/>
-                  </a:lnTo>
-                  <a:lnTo>
-                    <a:pt x="2868198" y="1617511"/>
-                  </a:lnTo>
-                  <a:lnTo>
-                    <a:pt x="2945832" y="1643507"/>
-                  </a:lnTo>
-                  <a:lnTo>
-                    <a:pt x="3023466" y="1668849"/>
-                  </a:lnTo>
-                  <a:lnTo>
-                    <a:pt x="3101100" y="1693551"/>
-                  </a:lnTo>
-                  <a:lnTo>
-                    <a:pt x="3178734" y="1717631"/>
-                  </a:lnTo>
-                  <a:lnTo>
-                    <a:pt x="3256368" y="1741103"/>
-                  </a:lnTo>
-                  <a:lnTo>
-                    <a:pt x="3334002" y="1763984"/>
-                  </a:lnTo>
-                  <a:lnTo>
-                    <a:pt x="3411636" y="1786288"/>
-                  </a:lnTo>
-                  <a:lnTo>
-                    <a:pt x="3489270" y="1808030"/>
-                  </a:lnTo>
-                  <a:lnTo>
-                    <a:pt x="3566904" y="1829224"/>
-                  </a:lnTo>
-                  <a:lnTo>
-                    <a:pt x="3644538" y="1849883"/>
-                  </a:lnTo>
-                  <a:lnTo>
-                    <a:pt x="3722172" y="1870022"/>
-                  </a:lnTo>
-                  <a:lnTo>
-                    <a:pt x="3799806" y="1889652"/>
-                  </a:lnTo>
-                  <a:lnTo>
-                    <a:pt x="3877440" y="1908788"/>
-                  </a:lnTo>
-                  <a:lnTo>
-                    <a:pt x="3955074" y="1927442"/>
-                  </a:lnTo>
-                  <a:lnTo>
-                    <a:pt x="4032708" y="1945625"/>
-                  </a:lnTo>
-                  <a:lnTo>
-                    <a:pt x="4110342" y="1963350"/>
-                  </a:lnTo>
-                  <a:lnTo>
-                    <a:pt x="4187976" y="1980628"/>
-                  </a:lnTo>
-                  <a:lnTo>
-                    <a:pt x="4265610" y="1997470"/>
-                  </a:lnTo>
-                  <a:lnTo>
-                    <a:pt x="4343244" y="2013888"/>
-                  </a:lnTo>
-                  <a:lnTo>
-                    <a:pt x="4420879" y="2029892"/>
-                  </a:lnTo>
-                  <a:lnTo>
-                    <a:pt x="4498513" y="2045493"/>
-                  </a:lnTo>
-                  <a:lnTo>
-                    <a:pt x="4576147" y="2060700"/>
-                  </a:lnTo>
-                  <a:lnTo>
-                    <a:pt x="4653781" y="2075523"/>
-                  </a:lnTo>
-                  <a:lnTo>
-                    <a:pt x="4731415" y="2089974"/>
-                  </a:lnTo>
-                  <a:lnTo>
-                    <a:pt x="4809049" y="2104059"/>
-                  </a:lnTo>
-                  <a:lnTo>
-                    <a:pt x="4886683" y="2117790"/>
-                  </a:lnTo>
-                  <a:lnTo>
-                    <a:pt x="4964317" y="2131175"/>
-                  </a:lnTo>
-                  <a:lnTo>
-                    <a:pt x="5041951" y="2144222"/>
-                  </a:lnTo>
-                  <a:lnTo>
-                    <a:pt x="5119585" y="2156940"/>
-                  </a:lnTo>
-                  <a:lnTo>
-                    <a:pt x="5197219" y="2169337"/>
-                  </a:lnTo>
-                  <a:lnTo>
-                    <a:pt x="5274853" y="2181422"/>
-                  </a:lnTo>
-                  <a:lnTo>
-                    <a:pt x="5352487" y="2193203"/>
-                  </a:lnTo>
-                  <a:lnTo>
-                    <a:pt x="5430121" y="2204686"/>
-                  </a:lnTo>
-                  <a:lnTo>
-                    <a:pt x="5507755" y="2215880"/>
-                  </a:lnTo>
-                  <a:lnTo>
-                    <a:pt x="5585389" y="2226792"/>
-                  </a:lnTo>
-                  <a:lnTo>
-                    <a:pt x="5663023" y="2237428"/>
-                  </a:lnTo>
-                  <a:lnTo>
-                    <a:pt x="5740657" y="2247797"/>
-                  </a:lnTo>
-                  <a:lnTo>
-                    <a:pt x="5818291" y="2257904"/>
-                  </a:lnTo>
-                  <a:lnTo>
-                    <a:pt x="5895925" y="2267756"/>
-                  </a:lnTo>
-                  <a:lnTo>
-                    <a:pt x="5973559" y="2277360"/>
-                  </a:lnTo>
-                  <a:lnTo>
-                    <a:pt x="6051193" y="2286722"/>
-                  </a:lnTo>
-                  <a:lnTo>
-                    <a:pt x="6128827" y="2295847"/>
-                  </a:lnTo>
-                  <a:lnTo>
-                    <a:pt x="6206462" y="2304743"/>
-                  </a:lnTo>
-                  <a:lnTo>
-                    <a:pt x="6284096" y="2313414"/>
-                  </a:lnTo>
-                  <a:lnTo>
-                    <a:pt x="6361730" y="2321867"/>
-                  </a:lnTo>
-                  <a:lnTo>
-                    <a:pt x="6439364" y="2330107"/>
-                  </a:lnTo>
-                  <a:lnTo>
-                    <a:pt x="6516998" y="2338139"/>
-                  </a:lnTo>
-                  <a:lnTo>
-                    <a:pt x="6594632" y="2345968"/>
-                  </a:lnTo>
-                  <a:lnTo>
-                    <a:pt x="6672266" y="2353601"/>
-                  </a:lnTo>
-                  <a:lnTo>
-                    <a:pt x="6749900" y="2361040"/>
-                  </a:lnTo>
-                  <a:lnTo>
-                    <a:pt x="6827534" y="2368292"/>
-                  </a:lnTo>
-                  <a:lnTo>
-                    <a:pt x="6905168" y="2375362"/>
-                  </a:lnTo>
-                  <a:lnTo>
-                    <a:pt x="6982802" y="2382253"/>
-                  </a:lnTo>
-                  <a:lnTo>
-                    <a:pt x="7060436" y="2388970"/>
-                  </a:lnTo>
-                  <a:lnTo>
-                    <a:pt x="7138070" y="2395518"/>
-                  </a:lnTo>
-                  <a:lnTo>
-                    <a:pt x="7215704" y="2401901"/>
-                  </a:lnTo>
-                  <a:lnTo>
-                    <a:pt x="7293338" y="2408123"/>
-                  </a:lnTo>
-                  <a:lnTo>
-                    <a:pt x="7370972" y="2414188"/>
+                    <a:pt x="73372" y="47688"/>
+                  </a:lnTo>
+                  <a:lnTo>
+                    <a:pt x="151006" y="97038"/>
+                  </a:lnTo>
+                  <a:lnTo>
+                    <a:pt x="228640" y="145303"/>
+                  </a:lnTo>
+                  <a:lnTo>
+                    <a:pt x="306274" y="192507"/>
+                  </a:lnTo>
+                  <a:lnTo>
+                    <a:pt x="383908" y="238674"/>
+                  </a:lnTo>
+                  <a:lnTo>
+                    <a:pt x="461542" y="283825"/>
+                  </a:lnTo>
+                  <a:lnTo>
+                    <a:pt x="539176" y="327985"/>
+                  </a:lnTo>
+                  <a:lnTo>
+                    <a:pt x="616810" y="371173"/>
+                  </a:lnTo>
+                  <a:lnTo>
+                    <a:pt x="694444" y="413413"/>
+                  </a:lnTo>
+                  <a:lnTo>
+                    <a:pt x="772078" y="454723"/>
+                  </a:lnTo>
+                  <a:lnTo>
+                    <a:pt x="849712" y="495126"/>
+                  </a:lnTo>
+                  <a:lnTo>
+                    <a:pt x="927346" y="534641"/>
+                  </a:lnTo>
+                  <a:lnTo>
+                    <a:pt x="1004981" y="573287"/>
+                  </a:lnTo>
+                  <a:lnTo>
+                    <a:pt x="1082615" y="611084"/>
+                  </a:lnTo>
+                  <a:lnTo>
+                    <a:pt x="1160249" y="648050"/>
+                  </a:lnTo>
+                  <a:lnTo>
+                    <a:pt x="1237883" y="684203"/>
+                  </a:lnTo>
+                  <a:lnTo>
+                    <a:pt x="1315517" y="719562"/>
+                  </a:lnTo>
+                  <a:lnTo>
+                    <a:pt x="1393151" y="754144"/>
+                  </a:lnTo>
+                  <a:lnTo>
+                    <a:pt x="1470785" y="787965"/>
+                  </a:lnTo>
+                  <a:lnTo>
+                    <a:pt x="1548419" y="821043"/>
+                  </a:lnTo>
+                  <a:lnTo>
+                    <a:pt x="1626053" y="853394"/>
+                  </a:lnTo>
+                  <a:lnTo>
+                    <a:pt x="1703687" y="885034"/>
+                  </a:lnTo>
+                  <a:lnTo>
+                    <a:pt x="1781321" y="915978"/>
+                  </a:lnTo>
+                  <a:lnTo>
+                    <a:pt x="1858955" y="946242"/>
+                  </a:lnTo>
+                  <a:lnTo>
+                    <a:pt x="1936589" y="975841"/>
+                  </a:lnTo>
+                  <a:lnTo>
+                    <a:pt x="2014223" y="1004790"/>
+                  </a:lnTo>
+                  <a:lnTo>
+                    <a:pt x="2091857" y="1033102"/>
+                  </a:lnTo>
+                  <a:lnTo>
+                    <a:pt x="2169491" y="1060792"/>
+                  </a:lnTo>
+                  <a:lnTo>
+                    <a:pt x="2247125" y="1087873"/>
+                  </a:lnTo>
+                  <a:lnTo>
+                    <a:pt x="2324759" y="1114359"/>
+                  </a:lnTo>
+                  <a:lnTo>
+                    <a:pt x="2402393" y="1140263"/>
+                  </a:lnTo>
+                  <a:lnTo>
+                    <a:pt x="2480027" y="1165597"/>
+                  </a:lnTo>
+                  <a:lnTo>
+                    <a:pt x="2557661" y="1190374"/>
+                  </a:lnTo>
+                  <a:lnTo>
+                    <a:pt x="2635295" y="1214607"/>
+                  </a:lnTo>
+                  <a:lnTo>
+                    <a:pt x="2712930" y="1238307"/>
+                  </a:lnTo>
+                  <a:lnTo>
+                    <a:pt x="2790564" y="1261487"/>
+                  </a:lnTo>
+                  <a:lnTo>
+                    <a:pt x="2868198" y="1284157"/>
+                  </a:lnTo>
+                  <a:lnTo>
+                    <a:pt x="2945832" y="1306328"/>
+                  </a:lnTo>
+                  <a:lnTo>
+                    <a:pt x="3023466" y="1328012"/>
+                  </a:lnTo>
+                  <a:lnTo>
+                    <a:pt x="3101100" y="1349220"/>
+                  </a:lnTo>
+                  <a:lnTo>
+                    <a:pt x="3178734" y="1369961"/>
+                  </a:lnTo>
+                  <a:lnTo>
+                    <a:pt x="3256368" y="1390246"/>
+                  </a:lnTo>
+                  <a:lnTo>
+                    <a:pt x="3334002" y="1410086"/>
+                  </a:lnTo>
+                  <a:lnTo>
+                    <a:pt x="3411636" y="1429490"/>
+                  </a:lnTo>
+                  <a:lnTo>
+                    <a:pt x="3489270" y="1448467"/>
+                  </a:lnTo>
+                  <a:lnTo>
+                    <a:pt x="3566904" y="1467026"/>
+                  </a:lnTo>
+                  <a:lnTo>
+                    <a:pt x="3644538" y="1485178"/>
+                  </a:lnTo>
+                  <a:lnTo>
+                    <a:pt x="3722172" y="1502931"/>
+                  </a:lnTo>
+                  <a:lnTo>
+                    <a:pt x="3799806" y="1520294"/>
+                  </a:lnTo>
+                  <a:lnTo>
+                    <a:pt x="3877440" y="1537275"/>
+                  </a:lnTo>
+                  <a:lnTo>
+                    <a:pt x="3955074" y="1553883"/>
+                  </a:lnTo>
+                  <a:lnTo>
+                    <a:pt x="4032708" y="1570126"/>
+                  </a:lnTo>
+                  <a:lnTo>
+                    <a:pt x="4110342" y="1586011"/>
+                  </a:lnTo>
+                  <a:lnTo>
+                    <a:pt x="4187976" y="1601548"/>
+                  </a:lnTo>
+                  <a:lnTo>
+                    <a:pt x="4265610" y="1616743"/>
+                  </a:lnTo>
+                  <a:lnTo>
+                    <a:pt x="4343244" y="1631604"/>
+                  </a:lnTo>
+                  <a:lnTo>
+                    <a:pt x="4420879" y="1646138"/>
+                  </a:lnTo>
+                  <a:lnTo>
+                    <a:pt x="4498513" y="1660353"/>
+                  </a:lnTo>
+                  <a:lnTo>
+                    <a:pt x="4576147" y="1674256"/>
+                  </a:lnTo>
+                  <a:lnTo>
+                    <a:pt x="4653781" y="1687853"/>
+                  </a:lnTo>
+                  <a:lnTo>
+                    <a:pt x="4731415" y="1701151"/>
+                  </a:lnTo>
+                  <a:lnTo>
+                    <a:pt x="4809049" y="1714157"/>
+                  </a:lnTo>
+                  <a:lnTo>
+                    <a:pt x="4886683" y="1726876"/>
+                  </a:lnTo>
+                  <a:lnTo>
+                    <a:pt x="4964317" y="1739317"/>
+                  </a:lnTo>
+                  <a:lnTo>
+                    <a:pt x="5041951" y="1751484"/>
+                  </a:lnTo>
+                  <a:lnTo>
+                    <a:pt x="5119585" y="1763383"/>
+                  </a:lnTo>
+                  <a:lnTo>
+                    <a:pt x="5197219" y="1775021"/>
+                  </a:lnTo>
+                  <a:lnTo>
+                    <a:pt x="5274853" y="1786403"/>
+                  </a:lnTo>
+                  <a:lnTo>
+                    <a:pt x="5352487" y="1797535"/>
+                  </a:lnTo>
+                  <a:lnTo>
+                    <a:pt x="5430121" y="1808422"/>
+                  </a:lnTo>
+                  <a:lnTo>
+                    <a:pt x="5507755" y="1819070"/>
+                  </a:lnTo>
+                  <a:lnTo>
+                    <a:pt x="5585389" y="1829484"/>
+                  </a:lnTo>
+                  <a:lnTo>
+                    <a:pt x="5663023" y="1839669"/>
+                  </a:lnTo>
+                  <a:lnTo>
+                    <a:pt x="5740657" y="1849630"/>
+                  </a:lnTo>
+                  <a:lnTo>
+                    <a:pt x="5818291" y="1859372"/>
+                  </a:lnTo>
+                  <a:lnTo>
+                    <a:pt x="5895925" y="1868900"/>
+                  </a:lnTo>
+                  <a:lnTo>
+                    <a:pt x="5973559" y="1878218"/>
+                  </a:lnTo>
+                  <a:lnTo>
+                    <a:pt x="6051193" y="1887332"/>
+                  </a:lnTo>
+                  <a:lnTo>
+                    <a:pt x="6128827" y="1896245"/>
+                  </a:lnTo>
+                  <a:lnTo>
+                    <a:pt x="6206462" y="1904963"/>
+                  </a:lnTo>
+                  <a:lnTo>
+                    <a:pt x="6284096" y="1913489"/>
+                  </a:lnTo>
+                  <a:lnTo>
+                    <a:pt x="6361730" y="1921827"/>
+                  </a:lnTo>
+                  <a:lnTo>
+                    <a:pt x="6439364" y="1929982"/>
+                  </a:lnTo>
+                  <a:lnTo>
+                    <a:pt x="6516998" y="1937958"/>
+                  </a:lnTo>
+                  <a:lnTo>
+                    <a:pt x="6594632" y="1945759"/>
+                  </a:lnTo>
+                  <a:lnTo>
+                    <a:pt x="6672266" y="1953388"/>
+                  </a:lnTo>
+                  <a:lnTo>
+                    <a:pt x="6749900" y="1960849"/>
+                  </a:lnTo>
+                  <a:lnTo>
+                    <a:pt x="6827534" y="1968147"/>
+                  </a:lnTo>
+                  <a:lnTo>
+                    <a:pt x="6905168" y="1975284"/>
+                  </a:lnTo>
+                  <a:lnTo>
+                    <a:pt x="6982802" y="1982264"/>
+                  </a:lnTo>
+                  <a:lnTo>
+                    <a:pt x="7060436" y="1989091"/>
+                  </a:lnTo>
+                  <a:lnTo>
+                    <a:pt x="7138070" y="1995767"/>
+                  </a:lnTo>
+                  <a:lnTo>
+                    <a:pt x="7215704" y="2002297"/>
+                  </a:lnTo>
+                  <a:lnTo>
+                    <a:pt x="7293338" y="2008684"/>
+                  </a:lnTo>
+                  <a:lnTo>
+                    <a:pt x="7370972" y="2014930"/>
                   </a:lnTo>
                 </a:path>
               </a:pathLst>

--- a/docs/plots/carbo/jx_carbo_linsubhr_ratio_anemia2.pptx
+++ b/docs/plots/carbo/jx_carbo_linsubhr_ratio_anemia2.pptx
@@ -3003,557 +3003,554 @@
           <p:spPr>
             <a:xfrm>
               <a:off x="817517" y="1896563"/>
-              <a:ext cx="7370972" cy="3560662"/>
+              <a:ext cx="7370972" cy="3564993"/>
             </a:xfrm>
             <a:custGeom>
               <a:avLst/>
               <a:pathLst>
-                <a:path w="7370972" h="3560662">
+                <a:path w="7370972" h="3564993">
                   <a:moveTo>
-                    <a:pt x="840831" y="0"/>
+                    <a:pt x="894586" y="0"/>
                   </a:moveTo>
                   <a:lnTo>
-                    <a:pt x="849712" y="18600"/>
-                  </a:lnTo>
-                  <a:lnTo>
-                    <a:pt x="927346" y="174224"/>
-                  </a:lnTo>
-                  <a:lnTo>
-                    <a:pt x="1004981" y="323184"/>
-                  </a:lnTo>
-                  <a:lnTo>
-                    <a:pt x="1082615" y="465765"/>
-                  </a:lnTo>
-                  <a:lnTo>
-                    <a:pt x="1160249" y="602240"/>
-                  </a:lnTo>
-                  <a:lnTo>
-                    <a:pt x="1237883" y="732871"/>
-                  </a:lnTo>
-                  <a:lnTo>
-                    <a:pt x="1315517" y="857907"/>
-                  </a:lnTo>
-                  <a:lnTo>
-                    <a:pt x="1393151" y="977589"/>
-                  </a:lnTo>
-                  <a:lnTo>
-                    <a:pt x="1470785" y="1092145"/>
-                  </a:lnTo>
-                  <a:lnTo>
-                    <a:pt x="1548419" y="1201796"/>
-                  </a:lnTo>
-                  <a:lnTo>
-                    <a:pt x="1626053" y="1306751"/>
-                  </a:lnTo>
-                  <a:lnTo>
-                    <a:pt x="1703687" y="1407212"/>
-                  </a:lnTo>
-                  <a:lnTo>
-                    <a:pt x="1781321" y="1503370"/>
-                  </a:lnTo>
-                  <a:lnTo>
-                    <a:pt x="1858955" y="1595411"/>
-                  </a:lnTo>
-                  <a:lnTo>
-                    <a:pt x="1936589" y="1683510"/>
-                  </a:lnTo>
-                  <a:lnTo>
-                    <a:pt x="2014223" y="1767836"/>
-                  </a:lnTo>
-                  <a:lnTo>
-                    <a:pt x="2091857" y="1848551"/>
-                  </a:lnTo>
-                  <a:lnTo>
-                    <a:pt x="2169491" y="1925810"/>
-                  </a:lnTo>
-                  <a:lnTo>
-                    <a:pt x="2247125" y="1999760"/>
-                  </a:lnTo>
-                  <a:lnTo>
-                    <a:pt x="2324759" y="2070543"/>
-                  </a:lnTo>
-                  <a:lnTo>
-                    <a:pt x="2402393" y="2138295"/>
-                  </a:lnTo>
-                  <a:lnTo>
-                    <a:pt x="2480027" y="2203145"/>
-                  </a:lnTo>
-                  <a:lnTo>
-                    <a:pt x="2557661" y="2265218"/>
-                  </a:lnTo>
-                  <a:lnTo>
-                    <a:pt x="2635295" y="2324634"/>
-                  </a:lnTo>
-                  <a:lnTo>
-                    <a:pt x="2712930" y="2381504"/>
-                  </a:lnTo>
-                  <a:lnTo>
-                    <a:pt x="2790564" y="2435940"/>
-                  </a:lnTo>
-                  <a:lnTo>
-                    <a:pt x="2868198" y="2488044"/>
-                  </a:lnTo>
-                  <a:lnTo>
-                    <a:pt x="2945832" y="2537917"/>
-                  </a:lnTo>
-                  <a:lnTo>
-                    <a:pt x="3023466" y="2585654"/>
-                  </a:lnTo>
-                  <a:lnTo>
-                    <a:pt x="3101100" y="2631346"/>
-                  </a:lnTo>
-                  <a:lnTo>
-                    <a:pt x="3178734" y="2675083"/>
-                  </a:lnTo>
-                  <a:lnTo>
-                    <a:pt x="3256368" y="2716946"/>
-                  </a:lnTo>
-                  <a:lnTo>
-                    <a:pt x="3334002" y="2757016"/>
-                  </a:lnTo>
-                  <a:lnTo>
-                    <a:pt x="3411636" y="2783161"/>
-                  </a:lnTo>
-                  <a:lnTo>
-                    <a:pt x="3489270" y="2783755"/>
-                  </a:lnTo>
-                  <a:lnTo>
-                    <a:pt x="3566904" y="2784349"/>
-                  </a:lnTo>
-                  <a:lnTo>
-                    <a:pt x="3644538" y="2784942"/>
-                  </a:lnTo>
-                  <a:lnTo>
-                    <a:pt x="3722172" y="2785534"/>
-                  </a:lnTo>
-                  <a:lnTo>
-                    <a:pt x="3799806" y="2786127"/>
-                  </a:lnTo>
-                  <a:lnTo>
-                    <a:pt x="3877440" y="2786719"/>
-                  </a:lnTo>
-                  <a:lnTo>
-                    <a:pt x="3955074" y="2787310"/>
-                  </a:lnTo>
-                  <a:lnTo>
-                    <a:pt x="4032708" y="2787901"/>
-                  </a:lnTo>
-                  <a:lnTo>
-                    <a:pt x="4110342" y="2788492"/>
-                  </a:lnTo>
-                  <a:lnTo>
-                    <a:pt x="4187976" y="2789082"/>
-                  </a:lnTo>
-                  <a:lnTo>
-                    <a:pt x="4265610" y="2789672"/>
-                  </a:lnTo>
-                  <a:lnTo>
-                    <a:pt x="4343244" y="2790262"/>
-                  </a:lnTo>
-                  <a:lnTo>
-                    <a:pt x="4420879" y="2790851"/>
-                  </a:lnTo>
-                  <a:lnTo>
-                    <a:pt x="4498513" y="2791439"/>
-                  </a:lnTo>
-                  <a:lnTo>
-                    <a:pt x="4576147" y="2792028"/>
-                  </a:lnTo>
-                  <a:lnTo>
-                    <a:pt x="4653781" y="2792615"/>
-                  </a:lnTo>
-                  <a:lnTo>
-                    <a:pt x="4731415" y="2793203"/>
-                  </a:lnTo>
-                  <a:lnTo>
-                    <a:pt x="4809049" y="2793790"/>
-                  </a:lnTo>
-                  <a:lnTo>
-                    <a:pt x="4886683" y="2794377"/>
-                  </a:lnTo>
-                  <a:lnTo>
-                    <a:pt x="4964317" y="2794963"/>
-                  </a:lnTo>
-                  <a:lnTo>
-                    <a:pt x="5041951" y="2795549"/>
-                  </a:lnTo>
-                  <a:lnTo>
-                    <a:pt x="5119585" y="2796134"/>
-                  </a:lnTo>
-                  <a:lnTo>
-                    <a:pt x="5197219" y="2796719"/>
-                  </a:lnTo>
-                  <a:lnTo>
-                    <a:pt x="5274853" y="2797304"/>
-                  </a:lnTo>
-                  <a:lnTo>
-                    <a:pt x="5352487" y="2797888"/>
-                  </a:lnTo>
-                  <a:lnTo>
-                    <a:pt x="5430121" y="2798472"/>
-                  </a:lnTo>
-                  <a:lnTo>
-                    <a:pt x="5507755" y="2799056"/>
-                  </a:lnTo>
-                  <a:lnTo>
-                    <a:pt x="5585389" y="2799639"/>
-                  </a:lnTo>
-                  <a:lnTo>
-                    <a:pt x="5663023" y="2800221"/>
-                  </a:lnTo>
-                  <a:lnTo>
-                    <a:pt x="5740657" y="2800804"/>
-                  </a:lnTo>
-                  <a:lnTo>
-                    <a:pt x="5818291" y="2801385"/>
-                  </a:lnTo>
-                  <a:lnTo>
-                    <a:pt x="5895925" y="2801967"/>
-                  </a:lnTo>
-                  <a:lnTo>
-                    <a:pt x="5973559" y="2802548"/>
-                  </a:lnTo>
-                  <a:lnTo>
-                    <a:pt x="6051193" y="2803129"/>
-                  </a:lnTo>
-                  <a:lnTo>
-                    <a:pt x="6128827" y="2803709"/>
-                  </a:lnTo>
-                  <a:lnTo>
-                    <a:pt x="6206462" y="2804289"/>
-                  </a:lnTo>
-                  <a:lnTo>
-                    <a:pt x="6284096" y="2804868"/>
-                  </a:lnTo>
-                  <a:lnTo>
-                    <a:pt x="6361730" y="2805447"/>
-                  </a:lnTo>
-                  <a:lnTo>
-                    <a:pt x="6439364" y="2806026"/>
-                  </a:lnTo>
-                  <a:lnTo>
-                    <a:pt x="6516998" y="2806604"/>
-                  </a:lnTo>
-                  <a:lnTo>
-                    <a:pt x="6594632" y="2807182"/>
-                  </a:lnTo>
-                  <a:lnTo>
-                    <a:pt x="6672266" y="2807760"/>
-                  </a:lnTo>
-                  <a:lnTo>
-                    <a:pt x="6749900" y="2808337"/>
-                  </a:lnTo>
-                  <a:lnTo>
-                    <a:pt x="6827534" y="2808914"/>
-                  </a:lnTo>
-                  <a:lnTo>
-                    <a:pt x="6905168" y="2809490"/>
-                  </a:lnTo>
-                  <a:lnTo>
-                    <a:pt x="6982802" y="2810066"/>
-                  </a:lnTo>
-                  <a:lnTo>
-                    <a:pt x="7060436" y="2810642"/>
-                  </a:lnTo>
-                  <a:lnTo>
-                    <a:pt x="7138070" y="2811217"/>
-                  </a:lnTo>
-                  <a:lnTo>
-                    <a:pt x="7215704" y="2811791"/>
-                  </a:lnTo>
-                  <a:lnTo>
-                    <a:pt x="7293338" y="2812366"/>
-                  </a:lnTo>
-                  <a:lnTo>
-                    <a:pt x="7370972" y="2812940"/>
-                  </a:lnTo>
-                  <a:lnTo>
-                    <a:pt x="7370972" y="3560662"/>
-                  </a:lnTo>
-                  <a:lnTo>
-                    <a:pt x="7293338" y="3556547"/>
-                  </a:lnTo>
-                  <a:lnTo>
-                    <a:pt x="7215704" y="3552247"/>
-                  </a:lnTo>
-                  <a:lnTo>
-                    <a:pt x="7138070" y="3547755"/>
-                  </a:lnTo>
-                  <a:lnTo>
-                    <a:pt x="7060436" y="3543063"/>
-                  </a:lnTo>
-                  <a:lnTo>
-                    <a:pt x="6982802" y="3538160"/>
-                  </a:lnTo>
-                  <a:lnTo>
-                    <a:pt x="6905168" y="3533038"/>
-                  </a:lnTo>
-                  <a:lnTo>
-                    <a:pt x="6827534" y="3527687"/>
-                  </a:lnTo>
-                  <a:lnTo>
-                    <a:pt x="6749900" y="3522097"/>
-                  </a:lnTo>
-                  <a:lnTo>
-                    <a:pt x="6672266" y="3516256"/>
-                  </a:lnTo>
-                  <a:lnTo>
-                    <a:pt x="6594632" y="3510154"/>
-                  </a:lnTo>
-                  <a:lnTo>
-                    <a:pt x="6516998" y="3503779"/>
-                  </a:lnTo>
-                  <a:lnTo>
-                    <a:pt x="6439364" y="3497119"/>
-                  </a:lnTo>
-                  <a:lnTo>
-                    <a:pt x="6361730" y="3490161"/>
-                  </a:lnTo>
-                  <a:lnTo>
-                    <a:pt x="6284096" y="3482891"/>
-                  </a:lnTo>
-                  <a:lnTo>
-                    <a:pt x="6206462" y="3475296"/>
-                  </a:lnTo>
-                  <a:lnTo>
-                    <a:pt x="6128827" y="3467362"/>
-                  </a:lnTo>
-                  <a:lnTo>
-                    <a:pt x="6051193" y="3459072"/>
-                  </a:lnTo>
-                  <a:lnTo>
-                    <a:pt x="5973559" y="3450412"/>
-                  </a:lnTo>
-                  <a:lnTo>
-                    <a:pt x="5895925" y="3441364"/>
-                  </a:lnTo>
-                  <a:lnTo>
-                    <a:pt x="5818291" y="3431912"/>
-                  </a:lnTo>
-                  <a:lnTo>
-                    <a:pt x="5740657" y="3422036"/>
-                  </a:lnTo>
-                  <a:lnTo>
-                    <a:pt x="5663023" y="3411719"/>
-                  </a:lnTo>
-                  <a:lnTo>
-                    <a:pt x="5585389" y="3400940"/>
-                  </a:lnTo>
-                  <a:lnTo>
-                    <a:pt x="5507755" y="3389679"/>
-                  </a:lnTo>
-                  <a:lnTo>
-                    <a:pt x="5430121" y="3377914"/>
-                  </a:lnTo>
-                  <a:lnTo>
-                    <a:pt x="5352487" y="3365622"/>
-                  </a:lnTo>
-                  <a:lnTo>
-                    <a:pt x="5274853" y="3352781"/>
-                  </a:lnTo>
-                  <a:lnTo>
-                    <a:pt x="5197219" y="3339365"/>
-                  </a:lnTo>
-                  <a:lnTo>
-                    <a:pt x="5119585" y="3325349"/>
-                  </a:lnTo>
-                  <a:lnTo>
-                    <a:pt x="5041951" y="3310706"/>
-                  </a:lnTo>
-                  <a:lnTo>
-                    <a:pt x="4964317" y="3295408"/>
-                  </a:lnTo>
-                  <a:lnTo>
-                    <a:pt x="4886683" y="3279425"/>
-                  </a:lnTo>
-                  <a:lnTo>
-                    <a:pt x="4809049" y="3262727"/>
-                  </a:lnTo>
-                  <a:lnTo>
-                    <a:pt x="4731415" y="3245282"/>
-                  </a:lnTo>
-                  <a:lnTo>
-                    <a:pt x="4653781" y="3227057"/>
-                  </a:lnTo>
-                  <a:lnTo>
-                    <a:pt x="4576147" y="3208016"/>
-                  </a:lnTo>
-                  <a:lnTo>
-                    <a:pt x="4498513" y="3188124"/>
-                  </a:lnTo>
-                  <a:lnTo>
-                    <a:pt x="4420879" y="3167341"/>
-                  </a:lnTo>
-                  <a:lnTo>
-                    <a:pt x="4343244" y="3145629"/>
-                  </a:lnTo>
-                  <a:lnTo>
-                    <a:pt x="4265610" y="3122945"/>
-                  </a:lnTo>
-                  <a:lnTo>
-                    <a:pt x="4187976" y="3099246"/>
-                  </a:lnTo>
-                  <a:lnTo>
-                    <a:pt x="4110342" y="3074487"/>
-                  </a:lnTo>
-                  <a:lnTo>
-                    <a:pt x="4032708" y="3048620"/>
-                  </a:lnTo>
-                  <a:lnTo>
-                    <a:pt x="3955074" y="3021596"/>
-                  </a:lnTo>
-                  <a:lnTo>
-                    <a:pt x="3877440" y="2993363"/>
-                  </a:lnTo>
-                  <a:lnTo>
-                    <a:pt x="3799806" y="2963867"/>
-                  </a:lnTo>
-                  <a:lnTo>
-                    <a:pt x="3722172" y="2933051"/>
-                  </a:lnTo>
-                  <a:lnTo>
-                    <a:pt x="3644538" y="2900857"/>
-                  </a:lnTo>
-                  <a:lnTo>
-                    <a:pt x="3566904" y="2867222"/>
-                  </a:lnTo>
-                  <a:lnTo>
-                    <a:pt x="3489270" y="2832082"/>
-                  </a:lnTo>
-                  <a:lnTo>
-                    <a:pt x="3411636" y="2795370"/>
-                  </a:lnTo>
-                  <a:lnTo>
-                    <a:pt x="3334002" y="2782567"/>
-                  </a:lnTo>
-                  <a:lnTo>
-                    <a:pt x="3256368" y="2781972"/>
-                  </a:lnTo>
-                  <a:lnTo>
-                    <a:pt x="3178734" y="2781377"/>
-                  </a:lnTo>
-                  <a:lnTo>
-                    <a:pt x="3101100" y="2780781"/>
-                  </a:lnTo>
-                  <a:lnTo>
-                    <a:pt x="3023466" y="2780186"/>
-                  </a:lnTo>
-                  <a:lnTo>
-                    <a:pt x="2945832" y="2779589"/>
-                  </a:lnTo>
-                  <a:lnTo>
-                    <a:pt x="2868198" y="2778992"/>
-                  </a:lnTo>
-                  <a:lnTo>
-                    <a:pt x="2790564" y="2778395"/>
-                  </a:lnTo>
-                  <a:lnTo>
-                    <a:pt x="2712930" y="2777798"/>
-                  </a:lnTo>
-                  <a:lnTo>
-                    <a:pt x="2635295" y="2777200"/>
-                  </a:lnTo>
-                  <a:lnTo>
-                    <a:pt x="2557661" y="2776601"/>
-                  </a:lnTo>
-                  <a:lnTo>
-                    <a:pt x="2480027" y="2776002"/>
-                  </a:lnTo>
-                  <a:lnTo>
-                    <a:pt x="2402393" y="2775403"/>
-                  </a:lnTo>
-                  <a:lnTo>
-                    <a:pt x="2324759" y="2774804"/>
-                  </a:lnTo>
-                  <a:lnTo>
-                    <a:pt x="2247125" y="2774203"/>
-                  </a:lnTo>
-                  <a:lnTo>
-                    <a:pt x="2169491" y="2773603"/>
-                  </a:lnTo>
-                  <a:lnTo>
-                    <a:pt x="2091857" y="2773002"/>
-                  </a:lnTo>
-                  <a:lnTo>
-                    <a:pt x="2014223" y="2772401"/>
-                  </a:lnTo>
-                  <a:lnTo>
-                    <a:pt x="1936589" y="2771799"/>
-                  </a:lnTo>
-                  <a:lnTo>
-                    <a:pt x="1858955" y="2771197"/>
-                  </a:lnTo>
-                  <a:lnTo>
-                    <a:pt x="1781321" y="2770595"/>
-                  </a:lnTo>
-                  <a:lnTo>
-                    <a:pt x="1703687" y="2769992"/>
-                  </a:lnTo>
-                  <a:lnTo>
-                    <a:pt x="1626053" y="2769388"/>
-                  </a:lnTo>
-                  <a:lnTo>
-                    <a:pt x="1548419" y="2768785"/>
-                  </a:lnTo>
-                  <a:lnTo>
-                    <a:pt x="1470785" y="2768180"/>
-                  </a:lnTo>
-                  <a:lnTo>
-                    <a:pt x="1393151" y="2767576"/>
-                  </a:lnTo>
-                  <a:lnTo>
-                    <a:pt x="1315517" y="2766971"/>
-                  </a:lnTo>
-                  <a:lnTo>
-                    <a:pt x="1237883" y="2766366"/>
-                  </a:lnTo>
-                  <a:lnTo>
-                    <a:pt x="1160249" y="2765760"/>
-                  </a:lnTo>
-                  <a:lnTo>
-                    <a:pt x="1082615" y="2765153"/>
-                  </a:lnTo>
-                  <a:lnTo>
-                    <a:pt x="1004981" y="2764547"/>
-                  </a:lnTo>
-                  <a:lnTo>
-                    <a:pt x="927346" y="2763940"/>
-                  </a:lnTo>
-                  <a:lnTo>
-                    <a:pt x="849712" y="2763332"/>
-                  </a:lnTo>
-                  <a:lnTo>
-                    <a:pt x="772078" y="2762724"/>
-                  </a:lnTo>
-                  <a:lnTo>
-                    <a:pt x="694444" y="2762116"/>
-                  </a:lnTo>
-                  <a:lnTo>
-                    <a:pt x="616810" y="2761507"/>
-                  </a:lnTo>
-                  <a:lnTo>
-                    <a:pt x="539176" y="2760898"/>
-                  </a:lnTo>
-                  <a:lnTo>
-                    <a:pt x="461542" y="2760289"/>
-                  </a:lnTo>
-                  <a:lnTo>
-                    <a:pt x="383908" y="2759679"/>
-                  </a:lnTo>
-                  <a:lnTo>
-                    <a:pt x="306274" y="2759068"/>
-                  </a:lnTo>
-                  <a:lnTo>
-                    <a:pt x="228640" y="2758458"/>
-                  </a:lnTo>
-                  <a:lnTo>
-                    <a:pt x="151006" y="2757846"/>
-                  </a:lnTo>
-                  <a:lnTo>
-                    <a:pt x="73372" y="2757235"/>
-                  </a:lnTo>
-                  <a:lnTo>
-                    <a:pt x="0" y="2756656"/>
+                    <a:pt x="927346" y="69141"/>
+                  </a:lnTo>
+                  <a:lnTo>
+                    <a:pt x="1004981" y="225822"/>
+                  </a:lnTo>
+                  <a:lnTo>
+                    <a:pt x="1082615" y="375654"/>
+                  </a:lnTo>
+                  <a:lnTo>
+                    <a:pt x="1160249" y="518934"/>
+                  </a:lnTo>
+                  <a:lnTo>
+                    <a:pt x="1237883" y="655949"/>
+                  </a:lnTo>
+                  <a:lnTo>
+                    <a:pt x="1315517" y="786974"/>
+                  </a:lnTo>
+                  <a:lnTo>
+                    <a:pt x="1393151" y="912270"/>
+                  </a:lnTo>
+                  <a:lnTo>
+                    <a:pt x="1470785" y="1032087"/>
+                  </a:lnTo>
+                  <a:lnTo>
+                    <a:pt x="1548419" y="1146666"/>
+                  </a:lnTo>
+                  <a:lnTo>
+                    <a:pt x="1626053" y="1256235"/>
+                  </a:lnTo>
+                  <a:lnTo>
+                    <a:pt x="1703687" y="1361014"/>
+                  </a:lnTo>
+                  <a:lnTo>
+                    <a:pt x="1781321" y="1461211"/>
+                  </a:lnTo>
+                  <a:lnTo>
+                    <a:pt x="1858955" y="1557027"/>
+                  </a:lnTo>
+                  <a:lnTo>
+                    <a:pt x="1936589" y="1648654"/>
+                  </a:lnTo>
+                  <a:lnTo>
+                    <a:pt x="2014223" y="1736274"/>
+                  </a:lnTo>
+                  <a:lnTo>
+                    <a:pt x="2091857" y="1820064"/>
+                  </a:lnTo>
+                  <a:lnTo>
+                    <a:pt x="2169491" y="1900190"/>
+                  </a:lnTo>
+                  <a:lnTo>
+                    <a:pt x="2247125" y="1976813"/>
+                  </a:lnTo>
+                  <a:lnTo>
+                    <a:pt x="2324759" y="2050085"/>
+                  </a:lnTo>
+                  <a:lnTo>
+                    <a:pt x="2402393" y="2120154"/>
+                  </a:lnTo>
+                  <a:lnTo>
+                    <a:pt x="2480027" y="2187159"/>
+                  </a:lnTo>
+                  <a:lnTo>
+                    <a:pt x="2557661" y="2251235"/>
+                  </a:lnTo>
+                  <a:lnTo>
+                    <a:pt x="2635295" y="2312509"/>
+                  </a:lnTo>
+                  <a:lnTo>
+                    <a:pt x="2712930" y="2371103"/>
+                  </a:lnTo>
+                  <a:lnTo>
+                    <a:pt x="2790564" y="2427136"/>
+                  </a:lnTo>
+                  <a:lnTo>
+                    <a:pt x="2868198" y="2480719"/>
+                  </a:lnTo>
+                  <a:lnTo>
+                    <a:pt x="2945832" y="2531959"/>
+                  </a:lnTo>
+                  <a:lnTo>
+                    <a:pt x="3023466" y="2580959"/>
+                  </a:lnTo>
+                  <a:lnTo>
+                    <a:pt x="3101100" y="2627816"/>
+                  </a:lnTo>
+                  <a:lnTo>
+                    <a:pt x="3178734" y="2672625"/>
+                  </a:lnTo>
+                  <a:lnTo>
+                    <a:pt x="3256368" y="2715474"/>
+                  </a:lnTo>
+                  <a:lnTo>
+                    <a:pt x="3334002" y="2756450"/>
+                  </a:lnTo>
+                  <a:lnTo>
+                    <a:pt x="3411636" y="2783407"/>
+                  </a:lnTo>
+                  <a:lnTo>
+                    <a:pt x="3489270" y="2784750"/>
+                  </a:lnTo>
+                  <a:lnTo>
+                    <a:pt x="3566904" y="2786090"/>
+                  </a:lnTo>
+                  <a:lnTo>
+                    <a:pt x="3644538" y="2787428"/>
+                  </a:lnTo>
+                  <a:lnTo>
+                    <a:pt x="3722172" y="2788764"/>
+                  </a:lnTo>
+                  <a:lnTo>
+                    <a:pt x="3799806" y="2790098"/>
+                  </a:lnTo>
+                  <a:lnTo>
+                    <a:pt x="3877440" y="2791430"/>
+                  </a:lnTo>
+                  <a:lnTo>
+                    <a:pt x="3955074" y="2792760"/>
+                  </a:lnTo>
+                  <a:lnTo>
+                    <a:pt x="4032708" y="2794088"/>
+                  </a:lnTo>
+                  <a:lnTo>
+                    <a:pt x="4110342" y="2795413"/>
+                  </a:lnTo>
+                  <a:lnTo>
+                    <a:pt x="4187976" y="2796737"/>
+                  </a:lnTo>
+                  <a:lnTo>
+                    <a:pt x="4265610" y="2798059"/>
+                  </a:lnTo>
+                  <a:lnTo>
+                    <a:pt x="4343244" y="2799379"/>
+                  </a:lnTo>
+                  <a:lnTo>
+                    <a:pt x="4420879" y="2800696"/>
+                  </a:lnTo>
+                  <a:lnTo>
+                    <a:pt x="4498513" y="2802012"/>
+                  </a:lnTo>
+                  <a:lnTo>
+                    <a:pt x="4576147" y="2803325"/>
+                  </a:lnTo>
+                  <a:lnTo>
+                    <a:pt x="4653781" y="2804637"/>
+                  </a:lnTo>
+                  <a:lnTo>
+                    <a:pt x="4731415" y="2805946"/>
+                  </a:lnTo>
+                  <a:lnTo>
+                    <a:pt x="4809049" y="2807254"/>
+                  </a:lnTo>
+                  <a:lnTo>
+                    <a:pt x="4886683" y="2808559"/>
+                  </a:lnTo>
+                  <a:lnTo>
+                    <a:pt x="4964317" y="2809863"/>
+                  </a:lnTo>
+                  <a:lnTo>
+                    <a:pt x="5041951" y="2811164"/>
+                  </a:lnTo>
+                  <a:lnTo>
+                    <a:pt x="5119585" y="2812464"/>
+                  </a:lnTo>
+                  <a:lnTo>
+                    <a:pt x="5197219" y="2813761"/>
+                  </a:lnTo>
+                  <a:lnTo>
+                    <a:pt x="5274853" y="2815056"/>
+                  </a:lnTo>
+                  <a:lnTo>
+                    <a:pt x="5352487" y="2816350"/>
+                  </a:lnTo>
+                  <a:lnTo>
+                    <a:pt x="5430121" y="2817641"/>
+                  </a:lnTo>
+                  <a:lnTo>
+                    <a:pt x="5507755" y="2818931"/>
+                  </a:lnTo>
+                  <a:lnTo>
+                    <a:pt x="5585389" y="2820218"/>
+                  </a:lnTo>
+                  <a:lnTo>
+                    <a:pt x="5663023" y="2821503"/>
+                  </a:lnTo>
+                  <a:lnTo>
+                    <a:pt x="5740657" y="2822787"/>
+                  </a:lnTo>
+                  <a:lnTo>
+                    <a:pt x="5818291" y="2824068"/>
+                  </a:lnTo>
+                  <a:lnTo>
+                    <a:pt x="5895925" y="2825348"/>
+                  </a:lnTo>
+                  <a:lnTo>
+                    <a:pt x="5973559" y="2826625"/>
+                  </a:lnTo>
+                  <a:lnTo>
+                    <a:pt x="6051193" y="2827901"/>
+                  </a:lnTo>
+                  <a:lnTo>
+                    <a:pt x="6128827" y="2829175"/>
+                  </a:lnTo>
+                  <a:lnTo>
+                    <a:pt x="6206462" y="2830446"/>
+                  </a:lnTo>
+                  <a:lnTo>
+                    <a:pt x="6284096" y="2831716"/>
+                  </a:lnTo>
+                  <a:lnTo>
+                    <a:pt x="6361730" y="2832983"/>
+                  </a:lnTo>
+                  <a:lnTo>
+                    <a:pt x="6439364" y="2834249"/>
+                  </a:lnTo>
+                  <a:lnTo>
+                    <a:pt x="6516998" y="2835513"/>
+                  </a:lnTo>
+                  <a:lnTo>
+                    <a:pt x="6594632" y="2836775"/>
+                  </a:lnTo>
+                  <a:lnTo>
+                    <a:pt x="6672266" y="2838035"/>
+                  </a:lnTo>
+                  <a:lnTo>
+                    <a:pt x="6749900" y="2839293"/>
+                  </a:lnTo>
+                  <a:lnTo>
+                    <a:pt x="6827534" y="2840549"/>
+                  </a:lnTo>
+                  <a:lnTo>
+                    <a:pt x="6905168" y="2841803"/>
+                  </a:lnTo>
+                  <a:lnTo>
+                    <a:pt x="6982802" y="2843055"/>
+                  </a:lnTo>
+                  <a:lnTo>
+                    <a:pt x="7060436" y="2844305"/>
+                  </a:lnTo>
+                  <a:lnTo>
+                    <a:pt x="7138070" y="2845553"/>
+                  </a:lnTo>
+                  <a:lnTo>
+                    <a:pt x="7215704" y="2846799"/>
+                  </a:lnTo>
+                  <a:lnTo>
+                    <a:pt x="7293338" y="2848044"/>
+                  </a:lnTo>
+                  <a:lnTo>
+                    <a:pt x="7370972" y="2849286"/>
+                  </a:lnTo>
+                  <a:lnTo>
+                    <a:pt x="7370972" y="3564993"/>
+                  </a:lnTo>
+                  <a:lnTo>
+                    <a:pt x="7293338" y="3560986"/>
+                  </a:lnTo>
+                  <a:lnTo>
+                    <a:pt x="7215704" y="3556795"/>
+                  </a:lnTo>
+                  <a:lnTo>
+                    <a:pt x="7138070" y="3552412"/>
+                  </a:lnTo>
+                  <a:lnTo>
+                    <a:pt x="7060436" y="3547830"/>
+                  </a:lnTo>
+                  <a:lnTo>
+                    <a:pt x="6982802" y="3543037"/>
+                  </a:lnTo>
+                  <a:lnTo>
+                    <a:pt x="6905168" y="3538026"/>
+                  </a:lnTo>
+                  <a:lnTo>
+                    <a:pt x="6827534" y="3532785"/>
+                  </a:lnTo>
+                  <a:lnTo>
+                    <a:pt x="6749900" y="3527305"/>
+                  </a:lnTo>
+                  <a:lnTo>
+                    <a:pt x="6672266" y="3521574"/>
+                  </a:lnTo>
+                  <a:lnTo>
+                    <a:pt x="6594632" y="3515582"/>
+                  </a:lnTo>
+                  <a:lnTo>
+                    <a:pt x="6516998" y="3509315"/>
+                  </a:lnTo>
+                  <a:lnTo>
+                    <a:pt x="6439364" y="3502762"/>
+                  </a:lnTo>
+                  <a:lnTo>
+                    <a:pt x="6361730" y="3495909"/>
+                  </a:lnTo>
+                  <a:lnTo>
+                    <a:pt x="6284096" y="3488743"/>
+                  </a:lnTo>
+                  <a:lnTo>
+                    <a:pt x="6206462" y="3481249"/>
+                  </a:lnTo>
+                  <a:lnTo>
+                    <a:pt x="6128827" y="3473412"/>
+                  </a:lnTo>
+                  <a:lnTo>
+                    <a:pt x="6051193" y="3465217"/>
+                  </a:lnTo>
+                  <a:lnTo>
+                    <a:pt x="5973559" y="3456648"/>
+                  </a:lnTo>
+                  <a:lnTo>
+                    <a:pt x="5895925" y="3447686"/>
+                  </a:lnTo>
+                  <a:lnTo>
+                    <a:pt x="5818291" y="3438315"/>
+                  </a:lnTo>
+                  <a:lnTo>
+                    <a:pt x="5740657" y="3428516"/>
+                  </a:lnTo>
+                  <a:lnTo>
+                    <a:pt x="5663023" y="3418268"/>
+                  </a:lnTo>
+                  <a:lnTo>
+                    <a:pt x="5585389" y="3407552"/>
+                  </a:lnTo>
+                  <a:lnTo>
+                    <a:pt x="5507755" y="3396346"/>
+                  </a:lnTo>
+                  <a:lnTo>
+                    <a:pt x="5430121" y="3384627"/>
+                  </a:lnTo>
+                  <a:lnTo>
+                    <a:pt x="5352487" y="3372373"/>
+                  </a:lnTo>
+                  <a:lnTo>
+                    <a:pt x="5274853" y="3359559"/>
+                  </a:lnTo>
+                  <a:lnTo>
+                    <a:pt x="5197219" y="3346158"/>
+                  </a:lnTo>
+                  <a:lnTo>
+                    <a:pt x="5119585" y="3332145"/>
+                  </a:lnTo>
+                  <a:lnTo>
+                    <a:pt x="5041951" y="3317491"/>
+                  </a:lnTo>
+                  <a:lnTo>
+                    <a:pt x="4964317" y="3302167"/>
+                  </a:lnTo>
+                  <a:lnTo>
+                    <a:pt x="4886683" y="3286143"/>
+                  </a:lnTo>
+                  <a:lnTo>
+                    <a:pt x="4809049" y="3269385"/>
+                  </a:lnTo>
+                  <a:lnTo>
+                    <a:pt x="4731415" y="3251862"/>
+                  </a:lnTo>
+                  <a:lnTo>
+                    <a:pt x="4653781" y="3233537"/>
+                  </a:lnTo>
+                  <a:lnTo>
+                    <a:pt x="4576147" y="3214375"/>
+                  </a:lnTo>
+                  <a:lnTo>
+                    <a:pt x="4498513" y="3194336"/>
+                  </a:lnTo>
+                  <a:lnTo>
+                    <a:pt x="4420879" y="3173381"/>
+                  </a:lnTo>
+                  <a:lnTo>
+                    <a:pt x="4343244" y="3151468"/>
+                  </a:lnTo>
+                  <a:lnTo>
+                    <a:pt x="4265610" y="3128554"/>
+                  </a:lnTo>
+                  <a:lnTo>
+                    <a:pt x="4187976" y="3104591"/>
+                  </a:lnTo>
+                  <a:lnTo>
+                    <a:pt x="4110342" y="3079533"/>
+                  </a:lnTo>
+                  <a:lnTo>
+                    <a:pt x="4032708" y="3053329"/>
+                  </a:lnTo>
+                  <a:lnTo>
+                    <a:pt x="3955074" y="3025927"/>
+                  </a:lnTo>
+                  <a:lnTo>
+                    <a:pt x="3877440" y="2997272"/>
+                  </a:lnTo>
+                  <a:lnTo>
+                    <a:pt x="3799806" y="2967307"/>
+                  </a:lnTo>
+                  <a:lnTo>
+                    <a:pt x="3722172" y="2935972"/>
+                  </a:lnTo>
+                  <a:lnTo>
+                    <a:pt x="3644538" y="2903204"/>
+                  </a:lnTo>
+                  <a:lnTo>
+                    <a:pt x="3566904" y="2868938"/>
+                  </a:lnTo>
+                  <a:lnTo>
+                    <a:pt x="3489270" y="2833106"/>
+                  </a:lnTo>
+                  <a:lnTo>
+                    <a:pt x="3411636" y="2795635"/>
+                  </a:lnTo>
+                  <a:lnTo>
+                    <a:pt x="3334002" y="2782063"/>
+                  </a:lnTo>
+                  <a:lnTo>
+                    <a:pt x="3256368" y="2780716"/>
+                  </a:lnTo>
+                  <a:lnTo>
+                    <a:pt x="3178734" y="2779368"/>
+                  </a:lnTo>
+                  <a:lnTo>
+                    <a:pt x="3101100" y="2778017"/>
+                  </a:lnTo>
+                  <a:lnTo>
+                    <a:pt x="3023466" y="2776665"/>
+                  </a:lnTo>
+                  <a:lnTo>
+                    <a:pt x="2945832" y="2775310"/>
+                  </a:lnTo>
+                  <a:lnTo>
+                    <a:pt x="2868198" y="2773953"/>
+                  </a:lnTo>
+                  <a:lnTo>
+                    <a:pt x="2790564" y="2772594"/>
+                  </a:lnTo>
+                  <a:lnTo>
+                    <a:pt x="2712930" y="2771233"/>
+                  </a:lnTo>
+                  <a:lnTo>
+                    <a:pt x="2635295" y="2769870"/>
+                  </a:lnTo>
+                  <a:lnTo>
+                    <a:pt x="2557661" y="2768504"/>
+                  </a:lnTo>
+                  <a:lnTo>
+                    <a:pt x="2480027" y="2767137"/>
+                  </a:lnTo>
+                  <a:lnTo>
+                    <a:pt x="2402393" y="2765767"/>
+                  </a:lnTo>
+                  <a:lnTo>
+                    <a:pt x="2324759" y="2764396"/>
+                  </a:lnTo>
+                  <a:lnTo>
+                    <a:pt x="2247125" y="2763022"/>
+                  </a:lnTo>
+                  <a:lnTo>
+                    <a:pt x="2169491" y="2761646"/>
+                  </a:lnTo>
+                  <a:lnTo>
+                    <a:pt x="2091857" y="2760268"/>
+                  </a:lnTo>
+                  <a:lnTo>
+                    <a:pt x="2014223" y="2758888"/>
+                  </a:lnTo>
+                  <a:lnTo>
+                    <a:pt x="1936589" y="2757506"/>
+                  </a:lnTo>
+                  <a:lnTo>
+                    <a:pt x="1858955" y="2756121"/>
+                  </a:lnTo>
+                  <a:lnTo>
+                    <a:pt x="1781321" y="2754735"/>
+                  </a:lnTo>
+                  <a:lnTo>
+                    <a:pt x="1703687" y="2753346"/>
+                  </a:lnTo>
+                  <a:lnTo>
+                    <a:pt x="1626053" y="2751955"/>
+                  </a:lnTo>
+                  <a:lnTo>
+                    <a:pt x="1548419" y="2750562"/>
+                  </a:lnTo>
+                  <a:lnTo>
+                    <a:pt x="1470785" y="2749167"/>
+                  </a:lnTo>
+                  <a:lnTo>
+                    <a:pt x="1393151" y="2747770"/>
+                  </a:lnTo>
+                  <a:lnTo>
+                    <a:pt x="1315517" y="2746370"/>
+                  </a:lnTo>
+                  <a:lnTo>
+                    <a:pt x="1237883" y="2744969"/>
+                  </a:lnTo>
+                  <a:lnTo>
+                    <a:pt x="1160249" y="2743565"/>
+                  </a:lnTo>
+                  <a:lnTo>
+                    <a:pt x="1082615" y="2742159"/>
+                  </a:lnTo>
+                  <a:lnTo>
+                    <a:pt x="1004981" y="2740751"/>
+                  </a:lnTo>
+                  <a:lnTo>
+                    <a:pt x="927346" y="2739340"/>
+                  </a:lnTo>
+                  <a:lnTo>
+                    <a:pt x="849712" y="2737928"/>
+                  </a:lnTo>
+                  <a:lnTo>
+                    <a:pt x="772078" y="2736513"/>
+                  </a:lnTo>
+                  <a:lnTo>
+                    <a:pt x="694444" y="2735096"/>
+                  </a:lnTo>
+                  <a:lnTo>
+                    <a:pt x="616810" y="2733677"/>
+                  </a:lnTo>
+                  <a:lnTo>
+                    <a:pt x="539176" y="2732256"/>
+                  </a:lnTo>
+                  <a:lnTo>
+                    <a:pt x="461542" y="2730832"/>
+                  </a:lnTo>
+                  <a:lnTo>
+                    <a:pt x="383908" y="2729407"/>
+                  </a:lnTo>
+                  <a:lnTo>
+                    <a:pt x="306274" y="2727979"/>
+                  </a:lnTo>
+                  <a:lnTo>
+                    <a:pt x="228640" y="2726549"/>
+                  </a:lnTo>
+                  <a:lnTo>
+                    <a:pt x="151006" y="2725116"/>
+                  </a:lnTo>
+                  <a:lnTo>
+                    <a:pt x="73372" y="2723682"/>
+                  </a:lnTo>
+                  <a:lnTo>
+                    <a:pt x="0" y="2722324"/>
                   </a:lnTo>
                   <a:close/>
                 </a:path>
@@ -3579,270 +3576,267 @@
           </p:nvSpPr>
           <p:spPr>
             <a:xfrm>
-              <a:off x="1658349" y="1896563"/>
-              <a:ext cx="6530141" cy="2812940"/>
+              <a:off x="1712104" y="1896563"/>
+              <a:ext cx="6476386" cy="2849286"/>
             </a:xfrm>
             <a:custGeom>
               <a:avLst/>
               <a:pathLst>
-                <a:path w="6530141" h="2812940">
+                <a:path w="6476386" h="2849286">
                   <a:moveTo>
                     <a:pt x="0" y="0"/>
                   </a:moveTo>
                   <a:lnTo>
-                    <a:pt x="8881" y="18600"/>
-                  </a:lnTo>
-                  <a:lnTo>
-                    <a:pt x="86515" y="174224"/>
-                  </a:lnTo>
-                  <a:lnTo>
-                    <a:pt x="164149" y="323184"/>
-                  </a:lnTo>
-                  <a:lnTo>
-                    <a:pt x="241783" y="465765"/>
-                  </a:lnTo>
-                  <a:lnTo>
-                    <a:pt x="319417" y="602240"/>
-                  </a:lnTo>
-                  <a:lnTo>
-                    <a:pt x="397051" y="732871"/>
-                  </a:lnTo>
-                  <a:lnTo>
-                    <a:pt x="474685" y="857907"/>
-                  </a:lnTo>
-                  <a:lnTo>
-                    <a:pt x="552319" y="977589"/>
-                  </a:lnTo>
-                  <a:lnTo>
-                    <a:pt x="629953" y="1092145"/>
-                  </a:lnTo>
-                  <a:lnTo>
-                    <a:pt x="707588" y="1201796"/>
-                  </a:lnTo>
-                  <a:lnTo>
-                    <a:pt x="785222" y="1306751"/>
-                  </a:lnTo>
-                  <a:lnTo>
-                    <a:pt x="862856" y="1407212"/>
-                  </a:lnTo>
-                  <a:lnTo>
-                    <a:pt x="940490" y="1503370"/>
-                  </a:lnTo>
-                  <a:lnTo>
-                    <a:pt x="1018124" y="1595411"/>
-                  </a:lnTo>
-                  <a:lnTo>
-                    <a:pt x="1095758" y="1683510"/>
-                  </a:lnTo>
-                  <a:lnTo>
-                    <a:pt x="1173392" y="1767836"/>
-                  </a:lnTo>
-                  <a:lnTo>
-                    <a:pt x="1251026" y="1848551"/>
-                  </a:lnTo>
-                  <a:lnTo>
-                    <a:pt x="1328660" y="1925810"/>
-                  </a:lnTo>
-                  <a:lnTo>
-                    <a:pt x="1406294" y="1999760"/>
-                  </a:lnTo>
-                  <a:lnTo>
-                    <a:pt x="1483928" y="2070543"/>
-                  </a:lnTo>
-                  <a:lnTo>
-                    <a:pt x="1561562" y="2138295"/>
-                  </a:lnTo>
-                  <a:lnTo>
-                    <a:pt x="1639196" y="2203145"/>
-                  </a:lnTo>
-                  <a:lnTo>
-                    <a:pt x="1716830" y="2265218"/>
-                  </a:lnTo>
-                  <a:lnTo>
-                    <a:pt x="1794464" y="2324634"/>
-                  </a:lnTo>
-                  <a:lnTo>
-                    <a:pt x="1872098" y="2381504"/>
-                  </a:lnTo>
-                  <a:lnTo>
-                    <a:pt x="1949732" y="2435940"/>
-                  </a:lnTo>
-                  <a:lnTo>
-                    <a:pt x="2027366" y="2488044"/>
-                  </a:lnTo>
-                  <a:lnTo>
-                    <a:pt x="2105000" y="2537917"/>
-                  </a:lnTo>
-                  <a:lnTo>
-                    <a:pt x="2182634" y="2585654"/>
-                  </a:lnTo>
-                  <a:lnTo>
-                    <a:pt x="2260268" y="2631346"/>
-                  </a:lnTo>
-                  <a:lnTo>
-                    <a:pt x="2337902" y="2675083"/>
-                  </a:lnTo>
-                  <a:lnTo>
-                    <a:pt x="2415536" y="2716946"/>
-                  </a:lnTo>
-                  <a:lnTo>
-                    <a:pt x="2493171" y="2757016"/>
-                  </a:lnTo>
-                  <a:lnTo>
-                    <a:pt x="2570805" y="2783161"/>
-                  </a:lnTo>
-                  <a:lnTo>
-                    <a:pt x="2648439" y="2783755"/>
-                  </a:lnTo>
-                  <a:lnTo>
-                    <a:pt x="2726073" y="2784349"/>
-                  </a:lnTo>
-                  <a:lnTo>
-                    <a:pt x="2803707" y="2784942"/>
-                  </a:lnTo>
-                  <a:lnTo>
-                    <a:pt x="2881341" y="2785534"/>
-                  </a:lnTo>
-                  <a:lnTo>
-                    <a:pt x="2958975" y="2786127"/>
-                  </a:lnTo>
-                  <a:lnTo>
-                    <a:pt x="3036609" y="2786719"/>
-                  </a:lnTo>
-                  <a:lnTo>
-                    <a:pt x="3114243" y="2787310"/>
-                  </a:lnTo>
-                  <a:lnTo>
-                    <a:pt x="3191877" y="2787901"/>
-                  </a:lnTo>
-                  <a:lnTo>
-                    <a:pt x="3269511" y="2788492"/>
-                  </a:lnTo>
-                  <a:lnTo>
-                    <a:pt x="3347145" y="2789082"/>
-                  </a:lnTo>
-                  <a:lnTo>
-                    <a:pt x="3424779" y="2789672"/>
-                  </a:lnTo>
-                  <a:lnTo>
-                    <a:pt x="3502413" y="2790262"/>
-                  </a:lnTo>
-                  <a:lnTo>
-                    <a:pt x="3580047" y="2790851"/>
-                  </a:lnTo>
-                  <a:lnTo>
-                    <a:pt x="3657681" y="2791439"/>
-                  </a:lnTo>
-                  <a:lnTo>
-                    <a:pt x="3735315" y="2792028"/>
-                  </a:lnTo>
-                  <a:lnTo>
-                    <a:pt x="3812949" y="2792615"/>
-                  </a:lnTo>
-                  <a:lnTo>
-                    <a:pt x="3890583" y="2793203"/>
-                  </a:lnTo>
-                  <a:lnTo>
-                    <a:pt x="3968217" y="2793790"/>
-                  </a:lnTo>
-                  <a:lnTo>
-                    <a:pt x="4045851" y="2794377"/>
-                  </a:lnTo>
-                  <a:lnTo>
-                    <a:pt x="4123485" y="2794963"/>
-                  </a:lnTo>
-                  <a:lnTo>
-                    <a:pt x="4201120" y="2795549"/>
-                  </a:lnTo>
-                  <a:lnTo>
-                    <a:pt x="4278754" y="2796134"/>
-                  </a:lnTo>
-                  <a:lnTo>
-                    <a:pt x="4356388" y="2796719"/>
-                  </a:lnTo>
-                  <a:lnTo>
-                    <a:pt x="4434022" y="2797304"/>
-                  </a:lnTo>
-                  <a:lnTo>
-                    <a:pt x="4511656" y="2797888"/>
-                  </a:lnTo>
-                  <a:lnTo>
-                    <a:pt x="4589290" y="2798472"/>
-                  </a:lnTo>
-                  <a:lnTo>
-                    <a:pt x="4666924" y="2799056"/>
-                  </a:lnTo>
-                  <a:lnTo>
-                    <a:pt x="4744558" y="2799639"/>
-                  </a:lnTo>
-                  <a:lnTo>
-                    <a:pt x="4822192" y="2800221"/>
-                  </a:lnTo>
-                  <a:lnTo>
-                    <a:pt x="4899826" y="2800804"/>
-                  </a:lnTo>
-                  <a:lnTo>
-                    <a:pt x="4977460" y="2801385"/>
-                  </a:lnTo>
-                  <a:lnTo>
-                    <a:pt x="5055094" y="2801967"/>
-                  </a:lnTo>
-                  <a:lnTo>
-                    <a:pt x="5132728" y="2802548"/>
-                  </a:lnTo>
-                  <a:lnTo>
-                    <a:pt x="5210362" y="2803129"/>
-                  </a:lnTo>
-                  <a:lnTo>
-                    <a:pt x="5287996" y="2803709"/>
-                  </a:lnTo>
-                  <a:lnTo>
-                    <a:pt x="5365630" y="2804289"/>
-                  </a:lnTo>
-                  <a:lnTo>
-                    <a:pt x="5443264" y="2804868"/>
-                  </a:lnTo>
-                  <a:lnTo>
-                    <a:pt x="5520898" y="2805447"/>
-                  </a:lnTo>
-                  <a:lnTo>
-                    <a:pt x="5598532" y="2806026"/>
-                  </a:lnTo>
-                  <a:lnTo>
-                    <a:pt x="5676166" y="2806604"/>
-                  </a:lnTo>
-                  <a:lnTo>
-                    <a:pt x="5753800" y="2807182"/>
-                  </a:lnTo>
-                  <a:lnTo>
-                    <a:pt x="5831434" y="2807760"/>
-                  </a:lnTo>
-                  <a:lnTo>
-                    <a:pt x="5909069" y="2808337"/>
-                  </a:lnTo>
-                  <a:lnTo>
-                    <a:pt x="5986703" y="2808914"/>
-                  </a:lnTo>
-                  <a:lnTo>
-                    <a:pt x="6064337" y="2809490"/>
-                  </a:lnTo>
-                  <a:lnTo>
-                    <a:pt x="6141971" y="2810066"/>
-                  </a:lnTo>
-                  <a:lnTo>
-                    <a:pt x="6219605" y="2810642"/>
-                  </a:lnTo>
-                  <a:lnTo>
-                    <a:pt x="6297239" y="2811217"/>
-                  </a:lnTo>
-                  <a:lnTo>
-                    <a:pt x="6374873" y="2811791"/>
-                  </a:lnTo>
-                  <a:lnTo>
-                    <a:pt x="6452507" y="2812366"/>
-                  </a:lnTo>
-                  <a:lnTo>
-                    <a:pt x="6530141" y="2812940"/>
+                    <a:pt x="32760" y="69141"/>
+                  </a:lnTo>
+                  <a:lnTo>
+                    <a:pt x="110394" y="225822"/>
+                  </a:lnTo>
+                  <a:lnTo>
+                    <a:pt x="188028" y="375654"/>
+                  </a:lnTo>
+                  <a:lnTo>
+                    <a:pt x="265662" y="518934"/>
+                  </a:lnTo>
+                  <a:lnTo>
+                    <a:pt x="343296" y="655949"/>
+                  </a:lnTo>
+                  <a:lnTo>
+                    <a:pt x="420930" y="786974"/>
+                  </a:lnTo>
+                  <a:lnTo>
+                    <a:pt x="498564" y="912270"/>
+                  </a:lnTo>
+                  <a:lnTo>
+                    <a:pt x="576199" y="1032087"/>
+                  </a:lnTo>
+                  <a:lnTo>
+                    <a:pt x="653833" y="1146666"/>
+                  </a:lnTo>
+                  <a:lnTo>
+                    <a:pt x="731467" y="1256235"/>
+                  </a:lnTo>
+                  <a:lnTo>
+                    <a:pt x="809101" y="1361014"/>
+                  </a:lnTo>
+                  <a:lnTo>
+                    <a:pt x="886735" y="1461211"/>
+                  </a:lnTo>
+                  <a:lnTo>
+                    <a:pt x="964369" y="1557027"/>
+                  </a:lnTo>
+                  <a:lnTo>
+                    <a:pt x="1042003" y="1648654"/>
+                  </a:lnTo>
+                  <a:lnTo>
+                    <a:pt x="1119637" y="1736274"/>
+                  </a:lnTo>
+                  <a:lnTo>
+                    <a:pt x="1197271" y="1820064"/>
+                  </a:lnTo>
+                  <a:lnTo>
+                    <a:pt x="1274905" y="1900190"/>
+                  </a:lnTo>
+                  <a:lnTo>
+                    <a:pt x="1352539" y="1976813"/>
+                  </a:lnTo>
+                  <a:lnTo>
+                    <a:pt x="1430173" y="2050085"/>
+                  </a:lnTo>
+                  <a:lnTo>
+                    <a:pt x="1507807" y="2120154"/>
+                  </a:lnTo>
+                  <a:lnTo>
+                    <a:pt x="1585441" y="2187159"/>
+                  </a:lnTo>
+                  <a:lnTo>
+                    <a:pt x="1663075" y="2251235"/>
+                  </a:lnTo>
+                  <a:lnTo>
+                    <a:pt x="1740709" y="2312509"/>
+                  </a:lnTo>
+                  <a:lnTo>
+                    <a:pt x="1818343" y="2371103"/>
+                  </a:lnTo>
+                  <a:lnTo>
+                    <a:pt x="1895977" y="2427136"/>
+                  </a:lnTo>
+                  <a:lnTo>
+                    <a:pt x="1973611" y="2480719"/>
+                  </a:lnTo>
+                  <a:lnTo>
+                    <a:pt x="2051245" y="2531959"/>
+                  </a:lnTo>
+                  <a:lnTo>
+                    <a:pt x="2128879" y="2580959"/>
+                  </a:lnTo>
+                  <a:lnTo>
+                    <a:pt x="2206513" y="2627816"/>
+                  </a:lnTo>
+                  <a:lnTo>
+                    <a:pt x="2284148" y="2672625"/>
+                  </a:lnTo>
+                  <a:lnTo>
+                    <a:pt x="2361782" y="2715474"/>
+                  </a:lnTo>
+                  <a:lnTo>
+                    <a:pt x="2439416" y="2756450"/>
+                  </a:lnTo>
+                  <a:lnTo>
+                    <a:pt x="2517050" y="2783407"/>
+                  </a:lnTo>
+                  <a:lnTo>
+                    <a:pt x="2594684" y="2784750"/>
+                  </a:lnTo>
+                  <a:lnTo>
+                    <a:pt x="2672318" y="2786090"/>
+                  </a:lnTo>
+                  <a:lnTo>
+                    <a:pt x="2749952" y="2787428"/>
+                  </a:lnTo>
+                  <a:lnTo>
+                    <a:pt x="2827586" y="2788764"/>
+                  </a:lnTo>
+                  <a:lnTo>
+                    <a:pt x="2905220" y="2790098"/>
+                  </a:lnTo>
+                  <a:lnTo>
+                    <a:pt x="2982854" y="2791430"/>
+                  </a:lnTo>
+                  <a:lnTo>
+                    <a:pt x="3060488" y="2792760"/>
+                  </a:lnTo>
+                  <a:lnTo>
+                    <a:pt x="3138122" y="2794088"/>
+                  </a:lnTo>
+                  <a:lnTo>
+                    <a:pt x="3215756" y="2795413"/>
+                  </a:lnTo>
+                  <a:lnTo>
+                    <a:pt x="3293390" y="2796737"/>
+                  </a:lnTo>
+                  <a:lnTo>
+                    <a:pt x="3371024" y="2798059"/>
+                  </a:lnTo>
+                  <a:lnTo>
+                    <a:pt x="3448658" y="2799379"/>
+                  </a:lnTo>
+                  <a:lnTo>
+                    <a:pt x="3526292" y="2800696"/>
+                  </a:lnTo>
+                  <a:lnTo>
+                    <a:pt x="3603926" y="2802012"/>
+                  </a:lnTo>
+                  <a:lnTo>
+                    <a:pt x="3681560" y="2803325"/>
+                  </a:lnTo>
+                  <a:lnTo>
+                    <a:pt x="3759194" y="2804637"/>
+                  </a:lnTo>
+                  <a:lnTo>
+                    <a:pt x="3836828" y="2805946"/>
+                  </a:lnTo>
+                  <a:lnTo>
+                    <a:pt x="3914462" y="2807254"/>
+                  </a:lnTo>
+                  <a:lnTo>
+                    <a:pt x="3992097" y="2808559"/>
+                  </a:lnTo>
+                  <a:lnTo>
+                    <a:pt x="4069731" y="2809863"/>
+                  </a:lnTo>
+                  <a:lnTo>
+                    <a:pt x="4147365" y="2811164"/>
+                  </a:lnTo>
+                  <a:lnTo>
+                    <a:pt x="4224999" y="2812464"/>
+                  </a:lnTo>
+                  <a:lnTo>
+                    <a:pt x="4302633" y="2813761"/>
+                  </a:lnTo>
+                  <a:lnTo>
+                    <a:pt x="4380267" y="2815056"/>
+                  </a:lnTo>
+                  <a:lnTo>
+                    <a:pt x="4457901" y="2816350"/>
+                  </a:lnTo>
+                  <a:lnTo>
+                    <a:pt x="4535535" y="2817641"/>
+                  </a:lnTo>
+                  <a:lnTo>
+                    <a:pt x="4613169" y="2818931"/>
+                  </a:lnTo>
+                  <a:lnTo>
+                    <a:pt x="4690803" y="2820218"/>
+                  </a:lnTo>
+                  <a:lnTo>
+                    <a:pt x="4768437" y="2821503"/>
+                  </a:lnTo>
+                  <a:lnTo>
+                    <a:pt x="4846071" y="2822787"/>
+                  </a:lnTo>
+                  <a:lnTo>
+                    <a:pt x="4923705" y="2824068"/>
+                  </a:lnTo>
+                  <a:lnTo>
+                    <a:pt x="5001339" y="2825348"/>
+                  </a:lnTo>
+                  <a:lnTo>
+                    <a:pt x="5078973" y="2826625"/>
+                  </a:lnTo>
+                  <a:lnTo>
+                    <a:pt x="5156607" y="2827901"/>
+                  </a:lnTo>
+                  <a:lnTo>
+                    <a:pt x="5234241" y="2829175"/>
+                  </a:lnTo>
+                  <a:lnTo>
+                    <a:pt x="5311875" y="2830446"/>
+                  </a:lnTo>
+                  <a:lnTo>
+                    <a:pt x="5389509" y="2831716"/>
+                  </a:lnTo>
+                  <a:lnTo>
+                    <a:pt x="5467143" y="2832983"/>
+                  </a:lnTo>
+                  <a:lnTo>
+                    <a:pt x="5544777" y="2834249"/>
+                  </a:lnTo>
+                  <a:lnTo>
+                    <a:pt x="5622411" y="2835513"/>
+                  </a:lnTo>
+                  <a:lnTo>
+                    <a:pt x="5700046" y="2836775"/>
+                  </a:lnTo>
+                  <a:lnTo>
+                    <a:pt x="5777680" y="2838035"/>
+                  </a:lnTo>
+                  <a:lnTo>
+                    <a:pt x="5855314" y="2839293"/>
+                  </a:lnTo>
+                  <a:lnTo>
+                    <a:pt x="5932948" y="2840549"/>
+                  </a:lnTo>
+                  <a:lnTo>
+                    <a:pt x="6010582" y="2841803"/>
+                  </a:lnTo>
+                  <a:lnTo>
+                    <a:pt x="6088216" y="2843055"/>
+                  </a:lnTo>
+                  <a:lnTo>
+                    <a:pt x="6165850" y="2844305"/>
+                  </a:lnTo>
+                  <a:lnTo>
+                    <a:pt x="6243484" y="2845553"/>
+                  </a:lnTo>
+                  <a:lnTo>
+                    <a:pt x="6321118" y="2846799"/>
+                  </a:lnTo>
+                  <a:lnTo>
+                    <a:pt x="6398752" y="2848044"/>
+                  </a:lnTo>
+                  <a:lnTo>
+                    <a:pt x="6476386" y="2849286"/>
                   </a:lnTo>
                 </a:path>
               </a:pathLst>
@@ -3862,297 +3856,297 @@
           </p:nvSpPr>
           <p:spPr>
             <a:xfrm>
-              <a:off x="817517" y="4653220"/>
-              <a:ext cx="7370972" cy="804005"/>
+              <a:off x="817517" y="4618888"/>
+              <a:ext cx="7370972" cy="842669"/>
             </a:xfrm>
             <a:custGeom>
               <a:avLst/>
               <a:pathLst>
-                <a:path w="7370972" h="804005">
+                <a:path w="7370972" h="842669">
                   <a:moveTo>
-                    <a:pt x="7370972" y="804005"/>
+                    <a:pt x="7370972" y="842669"/>
                   </a:moveTo>
                   <a:lnTo>
-                    <a:pt x="7293338" y="799890"/>
-                  </a:lnTo>
-                  <a:lnTo>
-                    <a:pt x="7215704" y="795590"/>
-                  </a:lnTo>
-                  <a:lnTo>
-                    <a:pt x="7138070" y="791099"/>
-                  </a:lnTo>
-                  <a:lnTo>
-                    <a:pt x="7060436" y="786406"/>
-                  </a:lnTo>
-                  <a:lnTo>
-                    <a:pt x="6982802" y="781503"/>
-                  </a:lnTo>
-                  <a:lnTo>
-                    <a:pt x="6905168" y="776381"/>
-                  </a:lnTo>
-                  <a:lnTo>
-                    <a:pt x="6827534" y="771030"/>
-                  </a:lnTo>
-                  <a:lnTo>
-                    <a:pt x="6749900" y="765440"/>
-                  </a:lnTo>
-                  <a:lnTo>
-                    <a:pt x="6672266" y="759599"/>
-                  </a:lnTo>
-                  <a:lnTo>
-                    <a:pt x="6594632" y="753497"/>
-                  </a:lnTo>
-                  <a:lnTo>
-                    <a:pt x="6516998" y="747122"/>
-                  </a:lnTo>
-                  <a:lnTo>
-                    <a:pt x="6439364" y="740462"/>
-                  </a:lnTo>
-                  <a:lnTo>
-                    <a:pt x="6361730" y="733504"/>
-                  </a:lnTo>
-                  <a:lnTo>
-                    <a:pt x="6284096" y="726234"/>
-                  </a:lnTo>
-                  <a:lnTo>
-                    <a:pt x="6206462" y="718640"/>
-                  </a:lnTo>
-                  <a:lnTo>
-                    <a:pt x="6128827" y="710705"/>
-                  </a:lnTo>
-                  <a:lnTo>
-                    <a:pt x="6051193" y="702416"/>
-                  </a:lnTo>
-                  <a:lnTo>
-                    <a:pt x="5973559" y="693755"/>
-                  </a:lnTo>
-                  <a:lnTo>
-                    <a:pt x="5895925" y="684707"/>
-                  </a:lnTo>
-                  <a:lnTo>
-                    <a:pt x="5818291" y="675255"/>
-                  </a:lnTo>
-                  <a:lnTo>
-                    <a:pt x="5740657" y="665379"/>
-                  </a:lnTo>
-                  <a:lnTo>
-                    <a:pt x="5663023" y="655062"/>
-                  </a:lnTo>
-                  <a:lnTo>
-                    <a:pt x="5585389" y="644283"/>
-                  </a:lnTo>
-                  <a:lnTo>
-                    <a:pt x="5507755" y="633022"/>
-                  </a:lnTo>
-                  <a:lnTo>
-                    <a:pt x="5430121" y="621257"/>
-                  </a:lnTo>
-                  <a:lnTo>
-                    <a:pt x="5352487" y="608965"/>
-                  </a:lnTo>
-                  <a:lnTo>
-                    <a:pt x="5274853" y="596124"/>
-                  </a:lnTo>
-                  <a:lnTo>
-                    <a:pt x="5197219" y="582708"/>
-                  </a:lnTo>
-                  <a:lnTo>
-                    <a:pt x="5119585" y="568692"/>
-                  </a:lnTo>
-                  <a:lnTo>
-                    <a:pt x="5041951" y="554049"/>
-                  </a:lnTo>
-                  <a:lnTo>
-                    <a:pt x="4964317" y="538751"/>
-                  </a:lnTo>
-                  <a:lnTo>
-                    <a:pt x="4886683" y="522768"/>
-                  </a:lnTo>
-                  <a:lnTo>
-                    <a:pt x="4809049" y="506070"/>
-                  </a:lnTo>
-                  <a:lnTo>
-                    <a:pt x="4731415" y="488625"/>
-                  </a:lnTo>
-                  <a:lnTo>
-                    <a:pt x="4653781" y="470400"/>
-                  </a:lnTo>
-                  <a:lnTo>
-                    <a:pt x="4576147" y="451359"/>
-                  </a:lnTo>
-                  <a:lnTo>
-                    <a:pt x="4498513" y="431467"/>
-                  </a:lnTo>
-                  <a:lnTo>
-                    <a:pt x="4420879" y="410684"/>
-                  </a:lnTo>
-                  <a:lnTo>
-                    <a:pt x="4343244" y="388972"/>
-                  </a:lnTo>
-                  <a:lnTo>
-                    <a:pt x="4265610" y="366288"/>
-                  </a:lnTo>
-                  <a:lnTo>
-                    <a:pt x="4187976" y="342589"/>
-                  </a:lnTo>
-                  <a:lnTo>
-                    <a:pt x="4110342" y="317830"/>
-                  </a:lnTo>
-                  <a:lnTo>
-                    <a:pt x="4032708" y="291964"/>
-                  </a:lnTo>
-                  <a:lnTo>
-                    <a:pt x="3955074" y="264940"/>
-                  </a:lnTo>
-                  <a:lnTo>
-                    <a:pt x="3877440" y="236707"/>
-                  </a:lnTo>
-                  <a:lnTo>
-                    <a:pt x="3799806" y="207210"/>
-                  </a:lnTo>
-                  <a:lnTo>
-                    <a:pt x="3722172" y="176395"/>
-                  </a:lnTo>
-                  <a:lnTo>
-                    <a:pt x="3644538" y="144200"/>
-                  </a:lnTo>
-                  <a:lnTo>
-                    <a:pt x="3566904" y="110565"/>
-                  </a:lnTo>
-                  <a:lnTo>
-                    <a:pt x="3489270" y="75425"/>
-                  </a:lnTo>
-                  <a:lnTo>
-                    <a:pt x="3411636" y="38714"/>
-                  </a:lnTo>
-                  <a:lnTo>
-                    <a:pt x="3334002" y="25910"/>
-                  </a:lnTo>
-                  <a:lnTo>
-                    <a:pt x="3256368" y="25315"/>
-                  </a:lnTo>
-                  <a:lnTo>
-                    <a:pt x="3178734" y="24720"/>
-                  </a:lnTo>
-                  <a:lnTo>
-                    <a:pt x="3101100" y="24125"/>
-                  </a:lnTo>
-                  <a:lnTo>
-                    <a:pt x="3023466" y="23529"/>
-                  </a:lnTo>
-                  <a:lnTo>
-                    <a:pt x="2945832" y="22932"/>
-                  </a:lnTo>
-                  <a:lnTo>
-                    <a:pt x="2868198" y="22336"/>
-                  </a:lnTo>
-                  <a:lnTo>
-                    <a:pt x="2790564" y="21738"/>
-                  </a:lnTo>
-                  <a:lnTo>
-                    <a:pt x="2712930" y="21141"/>
-                  </a:lnTo>
-                  <a:lnTo>
-                    <a:pt x="2635295" y="20543"/>
-                  </a:lnTo>
-                  <a:lnTo>
-                    <a:pt x="2557661" y="19944"/>
-                  </a:lnTo>
-                  <a:lnTo>
-                    <a:pt x="2480027" y="19346"/>
-                  </a:lnTo>
-                  <a:lnTo>
-                    <a:pt x="2402393" y="18746"/>
-                  </a:lnTo>
-                  <a:lnTo>
-                    <a:pt x="2324759" y="18147"/>
-                  </a:lnTo>
-                  <a:lnTo>
-                    <a:pt x="2247125" y="17547"/>
-                  </a:lnTo>
-                  <a:lnTo>
-                    <a:pt x="2169491" y="16946"/>
-                  </a:lnTo>
-                  <a:lnTo>
-                    <a:pt x="2091857" y="16345"/>
-                  </a:lnTo>
-                  <a:lnTo>
-                    <a:pt x="2014223" y="15744"/>
-                  </a:lnTo>
-                  <a:lnTo>
-                    <a:pt x="1936589" y="15142"/>
-                  </a:lnTo>
-                  <a:lnTo>
-                    <a:pt x="1858955" y="14540"/>
-                  </a:lnTo>
-                  <a:lnTo>
-                    <a:pt x="1781321" y="13938"/>
-                  </a:lnTo>
-                  <a:lnTo>
-                    <a:pt x="1703687" y="13335"/>
-                  </a:lnTo>
-                  <a:lnTo>
-                    <a:pt x="1626053" y="12732"/>
-                  </a:lnTo>
-                  <a:lnTo>
-                    <a:pt x="1548419" y="12128"/>
-                  </a:lnTo>
-                  <a:lnTo>
-                    <a:pt x="1470785" y="11524"/>
-                  </a:lnTo>
-                  <a:lnTo>
-                    <a:pt x="1393151" y="10919"/>
-                  </a:lnTo>
-                  <a:lnTo>
-                    <a:pt x="1315517" y="10314"/>
-                  </a:lnTo>
-                  <a:lnTo>
-                    <a:pt x="1237883" y="9709"/>
-                  </a:lnTo>
-                  <a:lnTo>
-                    <a:pt x="1160249" y="9103"/>
-                  </a:lnTo>
-                  <a:lnTo>
-                    <a:pt x="1082615" y="8497"/>
-                  </a:lnTo>
-                  <a:lnTo>
-                    <a:pt x="1004981" y="7890"/>
-                  </a:lnTo>
-                  <a:lnTo>
-                    <a:pt x="927346" y="7283"/>
-                  </a:lnTo>
-                  <a:lnTo>
-                    <a:pt x="849712" y="6676"/>
-                  </a:lnTo>
-                  <a:lnTo>
-                    <a:pt x="772078" y="6068"/>
-                  </a:lnTo>
-                  <a:lnTo>
-                    <a:pt x="694444" y="5459"/>
-                  </a:lnTo>
-                  <a:lnTo>
-                    <a:pt x="616810" y="4851"/>
-                  </a:lnTo>
-                  <a:lnTo>
-                    <a:pt x="539176" y="4241"/>
-                  </a:lnTo>
-                  <a:lnTo>
-                    <a:pt x="461542" y="3632"/>
-                  </a:lnTo>
-                  <a:lnTo>
-                    <a:pt x="383908" y="3022"/>
-                  </a:lnTo>
-                  <a:lnTo>
-                    <a:pt x="306274" y="2412"/>
-                  </a:lnTo>
-                  <a:lnTo>
-                    <a:pt x="228640" y="1801"/>
-                  </a:lnTo>
-                  <a:lnTo>
-                    <a:pt x="151006" y="1190"/>
-                  </a:lnTo>
-                  <a:lnTo>
-                    <a:pt x="73372" y="578"/>
+                    <a:pt x="7293338" y="838661"/>
+                  </a:lnTo>
+                  <a:lnTo>
+                    <a:pt x="7215704" y="834470"/>
+                  </a:lnTo>
+                  <a:lnTo>
+                    <a:pt x="7138070" y="830088"/>
+                  </a:lnTo>
+                  <a:lnTo>
+                    <a:pt x="7060436" y="825505"/>
+                  </a:lnTo>
+                  <a:lnTo>
+                    <a:pt x="6982802" y="820713"/>
+                  </a:lnTo>
+                  <a:lnTo>
+                    <a:pt x="6905168" y="815701"/>
+                  </a:lnTo>
+                  <a:lnTo>
+                    <a:pt x="6827534" y="810461"/>
+                  </a:lnTo>
+                  <a:lnTo>
+                    <a:pt x="6749900" y="804981"/>
+                  </a:lnTo>
+                  <a:lnTo>
+                    <a:pt x="6672266" y="799250"/>
+                  </a:lnTo>
+                  <a:lnTo>
+                    <a:pt x="6594632" y="793257"/>
+                  </a:lnTo>
+                  <a:lnTo>
+                    <a:pt x="6516998" y="786990"/>
+                  </a:lnTo>
+                  <a:lnTo>
+                    <a:pt x="6439364" y="780437"/>
+                  </a:lnTo>
+                  <a:lnTo>
+                    <a:pt x="6361730" y="773584"/>
+                  </a:lnTo>
+                  <a:lnTo>
+                    <a:pt x="6284096" y="766418"/>
+                  </a:lnTo>
+                  <a:lnTo>
+                    <a:pt x="6206462" y="758924"/>
+                  </a:lnTo>
+                  <a:lnTo>
+                    <a:pt x="6128827" y="751087"/>
+                  </a:lnTo>
+                  <a:lnTo>
+                    <a:pt x="6051193" y="742893"/>
+                  </a:lnTo>
+                  <a:lnTo>
+                    <a:pt x="5973559" y="734323"/>
+                  </a:lnTo>
+                  <a:lnTo>
+                    <a:pt x="5895925" y="725362"/>
+                  </a:lnTo>
+                  <a:lnTo>
+                    <a:pt x="5818291" y="715991"/>
+                  </a:lnTo>
+                  <a:lnTo>
+                    <a:pt x="5740657" y="706191"/>
+                  </a:lnTo>
+                  <a:lnTo>
+                    <a:pt x="5663023" y="695944"/>
+                  </a:lnTo>
+                  <a:lnTo>
+                    <a:pt x="5585389" y="685227"/>
+                  </a:lnTo>
+                  <a:lnTo>
+                    <a:pt x="5507755" y="674021"/>
+                  </a:lnTo>
+                  <a:lnTo>
+                    <a:pt x="5430121" y="662303"/>
+                  </a:lnTo>
+                  <a:lnTo>
+                    <a:pt x="5352487" y="650048"/>
+                  </a:lnTo>
+                  <a:lnTo>
+                    <a:pt x="5274853" y="637234"/>
+                  </a:lnTo>
+                  <a:lnTo>
+                    <a:pt x="5197219" y="623833"/>
+                  </a:lnTo>
+                  <a:lnTo>
+                    <a:pt x="5119585" y="609820"/>
+                  </a:lnTo>
+                  <a:lnTo>
+                    <a:pt x="5041951" y="595166"/>
+                  </a:lnTo>
+                  <a:lnTo>
+                    <a:pt x="4964317" y="579842"/>
+                  </a:lnTo>
+                  <a:lnTo>
+                    <a:pt x="4886683" y="563818"/>
+                  </a:lnTo>
+                  <a:lnTo>
+                    <a:pt x="4809049" y="547061"/>
+                  </a:lnTo>
+                  <a:lnTo>
+                    <a:pt x="4731415" y="529537"/>
+                  </a:lnTo>
+                  <a:lnTo>
+                    <a:pt x="4653781" y="511213"/>
+                  </a:lnTo>
+                  <a:lnTo>
+                    <a:pt x="4576147" y="492050"/>
+                  </a:lnTo>
+                  <a:lnTo>
+                    <a:pt x="4498513" y="472012"/>
+                  </a:lnTo>
+                  <a:lnTo>
+                    <a:pt x="4420879" y="451057"/>
+                  </a:lnTo>
+                  <a:lnTo>
+                    <a:pt x="4343244" y="429144"/>
+                  </a:lnTo>
+                  <a:lnTo>
+                    <a:pt x="4265610" y="406229"/>
+                  </a:lnTo>
+                  <a:lnTo>
+                    <a:pt x="4187976" y="382267"/>
+                  </a:lnTo>
+                  <a:lnTo>
+                    <a:pt x="4110342" y="357208"/>
+                  </a:lnTo>
+                  <a:lnTo>
+                    <a:pt x="4032708" y="331005"/>
+                  </a:lnTo>
+                  <a:lnTo>
+                    <a:pt x="3955074" y="303603"/>
+                  </a:lnTo>
+                  <a:lnTo>
+                    <a:pt x="3877440" y="274948"/>
+                  </a:lnTo>
+                  <a:lnTo>
+                    <a:pt x="3799806" y="244983"/>
+                  </a:lnTo>
+                  <a:lnTo>
+                    <a:pt x="3722172" y="213648"/>
+                  </a:lnTo>
+                  <a:lnTo>
+                    <a:pt x="3644538" y="180880"/>
+                  </a:lnTo>
+                  <a:lnTo>
+                    <a:pt x="3566904" y="146614"/>
+                  </a:lnTo>
+                  <a:lnTo>
+                    <a:pt x="3489270" y="110781"/>
+                  </a:lnTo>
+                  <a:lnTo>
+                    <a:pt x="3411636" y="73310"/>
+                  </a:lnTo>
+                  <a:lnTo>
+                    <a:pt x="3334002" y="59738"/>
+                  </a:lnTo>
+                  <a:lnTo>
+                    <a:pt x="3256368" y="58392"/>
+                  </a:lnTo>
+                  <a:lnTo>
+                    <a:pt x="3178734" y="57043"/>
+                  </a:lnTo>
+                  <a:lnTo>
+                    <a:pt x="3101100" y="55693"/>
+                  </a:lnTo>
+                  <a:lnTo>
+                    <a:pt x="3023466" y="54340"/>
+                  </a:lnTo>
+                  <a:lnTo>
+                    <a:pt x="2945832" y="52985"/>
+                  </a:lnTo>
+                  <a:lnTo>
+                    <a:pt x="2868198" y="51628"/>
+                  </a:lnTo>
+                  <a:lnTo>
+                    <a:pt x="2790564" y="50269"/>
+                  </a:lnTo>
+                  <a:lnTo>
+                    <a:pt x="2712930" y="48908"/>
+                  </a:lnTo>
+                  <a:lnTo>
+                    <a:pt x="2635295" y="47545"/>
+                  </a:lnTo>
+                  <a:lnTo>
+                    <a:pt x="2557661" y="46180"/>
+                  </a:lnTo>
+                  <a:lnTo>
+                    <a:pt x="2480027" y="44812"/>
+                  </a:lnTo>
+                  <a:lnTo>
+                    <a:pt x="2402393" y="43443"/>
+                  </a:lnTo>
+                  <a:lnTo>
+                    <a:pt x="2324759" y="42071"/>
+                  </a:lnTo>
+                  <a:lnTo>
+                    <a:pt x="2247125" y="40697"/>
+                  </a:lnTo>
+                  <a:lnTo>
+                    <a:pt x="2169491" y="39322"/>
+                  </a:lnTo>
+                  <a:lnTo>
+                    <a:pt x="2091857" y="37944"/>
+                  </a:lnTo>
+                  <a:lnTo>
+                    <a:pt x="2014223" y="36563"/>
+                  </a:lnTo>
+                  <a:lnTo>
+                    <a:pt x="1936589" y="35181"/>
+                  </a:lnTo>
+                  <a:lnTo>
+                    <a:pt x="1858955" y="33797"/>
+                  </a:lnTo>
+                  <a:lnTo>
+                    <a:pt x="1781321" y="32410"/>
+                  </a:lnTo>
+                  <a:lnTo>
+                    <a:pt x="1703687" y="31021"/>
+                  </a:lnTo>
+                  <a:lnTo>
+                    <a:pt x="1626053" y="29631"/>
+                  </a:lnTo>
+                  <a:lnTo>
+                    <a:pt x="1548419" y="28238"/>
+                  </a:lnTo>
+                  <a:lnTo>
+                    <a:pt x="1470785" y="26842"/>
+                  </a:lnTo>
+                  <a:lnTo>
+                    <a:pt x="1393151" y="25445"/>
+                  </a:lnTo>
+                  <a:lnTo>
+                    <a:pt x="1315517" y="24046"/>
+                  </a:lnTo>
+                  <a:lnTo>
+                    <a:pt x="1237883" y="22644"/>
+                  </a:lnTo>
+                  <a:lnTo>
+                    <a:pt x="1160249" y="21240"/>
+                  </a:lnTo>
+                  <a:lnTo>
+                    <a:pt x="1082615" y="19834"/>
+                  </a:lnTo>
+                  <a:lnTo>
+                    <a:pt x="1004981" y="18426"/>
+                  </a:lnTo>
+                  <a:lnTo>
+                    <a:pt x="927346" y="17016"/>
+                  </a:lnTo>
+                  <a:lnTo>
+                    <a:pt x="849712" y="15603"/>
+                  </a:lnTo>
+                  <a:lnTo>
+                    <a:pt x="772078" y="14189"/>
+                  </a:lnTo>
+                  <a:lnTo>
+                    <a:pt x="694444" y="12772"/>
+                  </a:lnTo>
+                  <a:lnTo>
+                    <a:pt x="616810" y="11353"/>
+                  </a:lnTo>
+                  <a:lnTo>
+                    <a:pt x="539176" y="9931"/>
+                  </a:lnTo>
+                  <a:lnTo>
+                    <a:pt x="461542" y="8508"/>
+                  </a:lnTo>
+                  <a:lnTo>
+                    <a:pt x="383908" y="7082"/>
+                  </a:lnTo>
+                  <a:lnTo>
+                    <a:pt x="306274" y="5654"/>
+                  </a:lnTo>
+                  <a:lnTo>
+                    <a:pt x="228640" y="4224"/>
+                  </a:lnTo>
+                  <a:lnTo>
+                    <a:pt x="151006" y="2792"/>
+                  </a:lnTo>
+                  <a:lnTo>
+                    <a:pt x="73372" y="1357"/>
                   </a:lnTo>
                   <a:lnTo>
                     <a:pt x="0" y="0"/>
@@ -4175,300 +4169,300 @@
           </p:nvSpPr>
           <p:spPr>
             <a:xfrm>
-              <a:off x="817517" y="3256361"/>
-              <a:ext cx="7370972" cy="2014930"/>
+              <a:off x="817517" y="3164467"/>
+              <a:ext cx="7370972" cy="2119382"/>
             </a:xfrm>
             <a:custGeom>
               <a:avLst/>
               <a:pathLst>
-                <a:path w="7370972" h="2014930">
+                <a:path w="7370972" h="2119382">
                   <a:moveTo>
                     <a:pt x="0" y="0"/>
                   </a:moveTo>
                   <a:lnTo>
-                    <a:pt x="73372" y="47688"/>
-                  </a:lnTo>
-                  <a:lnTo>
-                    <a:pt x="151006" y="97038"/>
-                  </a:lnTo>
-                  <a:lnTo>
-                    <a:pt x="228640" y="145303"/>
-                  </a:lnTo>
-                  <a:lnTo>
-                    <a:pt x="306274" y="192507"/>
-                  </a:lnTo>
-                  <a:lnTo>
-                    <a:pt x="383908" y="238674"/>
-                  </a:lnTo>
-                  <a:lnTo>
-                    <a:pt x="461542" y="283825"/>
-                  </a:lnTo>
-                  <a:lnTo>
-                    <a:pt x="539176" y="327985"/>
-                  </a:lnTo>
-                  <a:lnTo>
-                    <a:pt x="616810" y="371173"/>
-                  </a:lnTo>
-                  <a:lnTo>
-                    <a:pt x="694444" y="413413"/>
-                  </a:lnTo>
-                  <a:lnTo>
-                    <a:pt x="772078" y="454723"/>
-                  </a:lnTo>
-                  <a:lnTo>
-                    <a:pt x="849712" y="495126"/>
-                  </a:lnTo>
-                  <a:lnTo>
-                    <a:pt x="927346" y="534641"/>
-                  </a:lnTo>
-                  <a:lnTo>
-                    <a:pt x="1004981" y="573287"/>
-                  </a:lnTo>
-                  <a:lnTo>
-                    <a:pt x="1082615" y="611084"/>
-                  </a:lnTo>
-                  <a:lnTo>
-                    <a:pt x="1160249" y="648050"/>
-                  </a:lnTo>
-                  <a:lnTo>
-                    <a:pt x="1237883" y="684203"/>
-                  </a:lnTo>
-                  <a:lnTo>
-                    <a:pt x="1315517" y="719562"/>
-                  </a:lnTo>
-                  <a:lnTo>
-                    <a:pt x="1393151" y="754144"/>
-                  </a:lnTo>
-                  <a:lnTo>
-                    <a:pt x="1470785" y="787965"/>
-                  </a:lnTo>
-                  <a:lnTo>
-                    <a:pt x="1548419" y="821043"/>
-                  </a:lnTo>
-                  <a:lnTo>
-                    <a:pt x="1626053" y="853394"/>
-                  </a:lnTo>
-                  <a:lnTo>
-                    <a:pt x="1703687" y="885034"/>
-                  </a:lnTo>
-                  <a:lnTo>
-                    <a:pt x="1781321" y="915978"/>
-                  </a:lnTo>
-                  <a:lnTo>
-                    <a:pt x="1858955" y="946242"/>
-                  </a:lnTo>
-                  <a:lnTo>
-                    <a:pt x="1936589" y="975841"/>
-                  </a:lnTo>
-                  <a:lnTo>
-                    <a:pt x="2014223" y="1004790"/>
-                  </a:lnTo>
-                  <a:lnTo>
-                    <a:pt x="2091857" y="1033102"/>
-                  </a:lnTo>
-                  <a:lnTo>
-                    <a:pt x="2169491" y="1060792"/>
-                  </a:lnTo>
-                  <a:lnTo>
-                    <a:pt x="2247125" y="1087873"/>
-                  </a:lnTo>
-                  <a:lnTo>
-                    <a:pt x="2324759" y="1114359"/>
-                  </a:lnTo>
-                  <a:lnTo>
-                    <a:pt x="2402393" y="1140263"/>
-                  </a:lnTo>
-                  <a:lnTo>
-                    <a:pt x="2480027" y="1165597"/>
-                  </a:lnTo>
-                  <a:lnTo>
-                    <a:pt x="2557661" y="1190374"/>
-                  </a:lnTo>
-                  <a:lnTo>
-                    <a:pt x="2635295" y="1214607"/>
-                  </a:lnTo>
-                  <a:lnTo>
-                    <a:pt x="2712930" y="1238307"/>
-                  </a:lnTo>
-                  <a:lnTo>
-                    <a:pt x="2790564" y="1261487"/>
-                  </a:lnTo>
-                  <a:lnTo>
-                    <a:pt x="2868198" y="1284157"/>
-                  </a:lnTo>
-                  <a:lnTo>
-                    <a:pt x="2945832" y="1306328"/>
-                  </a:lnTo>
-                  <a:lnTo>
-                    <a:pt x="3023466" y="1328012"/>
-                  </a:lnTo>
-                  <a:lnTo>
-                    <a:pt x="3101100" y="1349220"/>
-                  </a:lnTo>
-                  <a:lnTo>
-                    <a:pt x="3178734" y="1369961"/>
-                  </a:lnTo>
-                  <a:lnTo>
-                    <a:pt x="3256368" y="1390246"/>
-                  </a:lnTo>
-                  <a:lnTo>
-                    <a:pt x="3334002" y="1410086"/>
-                  </a:lnTo>
-                  <a:lnTo>
-                    <a:pt x="3411636" y="1429490"/>
-                  </a:lnTo>
-                  <a:lnTo>
-                    <a:pt x="3489270" y="1448467"/>
-                  </a:lnTo>
-                  <a:lnTo>
-                    <a:pt x="3566904" y="1467026"/>
-                  </a:lnTo>
-                  <a:lnTo>
-                    <a:pt x="3644538" y="1485178"/>
-                  </a:lnTo>
-                  <a:lnTo>
-                    <a:pt x="3722172" y="1502931"/>
-                  </a:lnTo>
-                  <a:lnTo>
-                    <a:pt x="3799806" y="1520294"/>
-                  </a:lnTo>
-                  <a:lnTo>
-                    <a:pt x="3877440" y="1537275"/>
-                  </a:lnTo>
-                  <a:lnTo>
-                    <a:pt x="3955074" y="1553883"/>
-                  </a:lnTo>
-                  <a:lnTo>
-                    <a:pt x="4032708" y="1570126"/>
-                  </a:lnTo>
-                  <a:lnTo>
-                    <a:pt x="4110342" y="1586011"/>
-                  </a:lnTo>
-                  <a:lnTo>
-                    <a:pt x="4187976" y="1601548"/>
-                  </a:lnTo>
-                  <a:lnTo>
-                    <a:pt x="4265610" y="1616743"/>
-                  </a:lnTo>
-                  <a:lnTo>
-                    <a:pt x="4343244" y="1631604"/>
-                  </a:lnTo>
-                  <a:lnTo>
-                    <a:pt x="4420879" y="1646138"/>
-                  </a:lnTo>
-                  <a:lnTo>
-                    <a:pt x="4498513" y="1660353"/>
-                  </a:lnTo>
-                  <a:lnTo>
-                    <a:pt x="4576147" y="1674256"/>
-                  </a:lnTo>
-                  <a:lnTo>
-                    <a:pt x="4653781" y="1687853"/>
-                  </a:lnTo>
-                  <a:lnTo>
-                    <a:pt x="4731415" y="1701151"/>
-                  </a:lnTo>
-                  <a:lnTo>
-                    <a:pt x="4809049" y="1714157"/>
-                  </a:lnTo>
-                  <a:lnTo>
-                    <a:pt x="4886683" y="1726876"/>
-                  </a:lnTo>
-                  <a:lnTo>
-                    <a:pt x="4964317" y="1739317"/>
-                  </a:lnTo>
-                  <a:lnTo>
-                    <a:pt x="5041951" y="1751484"/>
-                  </a:lnTo>
-                  <a:lnTo>
-                    <a:pt x="5119585" y="1763383"/>
-                  </a:lnTo>
-                  <a:lnTo>
-                    <a:pt x="5197219" y="1775021"/>
-                  </a:lnTo>
-                  <a:lnTo>
-                    <a:pt x="5274853" y="1786403"/>
-                  </a:lnTo>
-                  <a:lnTo>
-                    <a:pt x="5352487" y="1797535"/>
-                  </a:lnTo>
-                  <a:lnTo>
-                    <a:pt x="5430121" y="1808422"/>
-                  </a:lnTo>
-                  <a:lnTo>
-                    <a:pt x="5507755" y="1819070"/>
-                  </a:lnTo>
-                  <a:lnTo>
-                    <a:pt x="5585389" y="1829484"/>
-                  </a:lnTo>
-                  <a:lnTo>
-                    <a:pt x="5663023" y="1839669"/>
-                  </a:lnTo>
-                  <a:lnTo>
-                    <a:pt x="5740657" y="1849630"/>
-                  </a:lnTo>
-                  <a:lnTo>
-                    <a:pt x="5818291" y="1859372"/>
-                  </a:lnTo>
-                  <a:lnTo>
-                    <a:pt x="5895925" y="1868900"/>
-                  </a:lnTo>
-                  <a:lnTo>
-                    <a:pt x="5973559" y="1878218"/>
-                  </a:lnTo>
-                  <a:lnTo>
-                    <a:pt x="6051193" y="1887332"/>
-                  </a:lnTo>
-                  <a:lnTo>
-                    <a:pt x="6128827" y="1896245"/>
-                  </a:lnTo>
-                  <a:lnTo>
-                    <a:pt x="6206462" y="1904963"/>
-                  </a:lnTo>
-                  <a:lnTo>
-                    <a:pt x="6284096" y="1913489"/>
-                  </a:lnTo>
-                  <a:lnTo>
-                    <a:pt x="6361730" y="1921827"/>
-                  </a:lnTo>
-                  <a:lnTo>
-                    <a:pt x="6439364" y="1929982"/>
-                  </a:lnTo>
-                  <a:lnTo>
-                    <a:pt x="6516998" y="1937958"/>
-                  </a:lnTo>
-                  <a:lnTo>
-                    <a:pt x="6594632" y="1945759"/>
-                  </a:lnTo>
-                  <a:lnTo>
-                    <a:pt x="6672266" y="1953388"/>
-                  </a:lnTo>
-                  <a:lnTo>
-                    <a:pt x="6749900" y="1960849"/>
-                  </a:lnTo>
-                  <a:lnTo>
-                    <a:pt x="6827534" y="1968147"/>
-                  </a:lnTo>
-                  <a:lnTo>
-                    <a:pt x="6905168" y="1975284"/>
-                  </a:lnTo>
-                  <a:lnTo>
-                    <a:pt x="6982802" y="1982264"/>
-                  </a:lnTo>
-                  <a:lnTo>
-                    <a:pt x="7060436" y="1989091"/>
-                  </a:lnTo>
-                  <a:lnTo>
-                    <a:pt x="7138070" y="1995767"/>
-                  </a:lnTo>
-                  <a:lnTo>
-                    <a:pt x="7215704" y="2002297"/>
-                  </a:lnTo>
-                  <a:lnTo>
-                    <a:pt x="7293338" y="2008684"/>
-                  </a:lnTo>
-                  <a:lnTo>
-                    <a:pt x="7370972" y="2014930"/>
+                    <a:pt x="73372" y="51590"/>
+                  </a:lnTo>
+                  <a:lnTo>
+                    <a:pt x="151006" y="104928"/>
+                  </a:lnTo>
+                  <a:lnTo>
+                    <a:pt x="228640" y="157047"/>
+                  </a:lnTo>
+                  <a:lnTo>
+                    <a:pt x="306274" y="207975"/>
+                  </a:lnTo>
+                  <a:lnTo>
+                    <a:pt x="383908" y="257739"/>
+                  </a:lnTo>
+                  <a:lnTo>
+                    <a:pt x="461542" y="306364"/>
+                  </a:lnTo>
+                  <a:lnTo>
+                    <a:pt x="539176" y="353879"/>
+                  </a:lnTo>
+                  <a:lnTo>
+                    <a:pt x="616810" y="400306"/>
+                  </a:lnTo>
+                  <a:lnTo>
+                    <a:pt x="694444" y="445673"/>
+                  </a:lnTo>
+                  <a:lnTo>
+                    <a:pt x="772078" y="490002"/>
+                  </a:lnTo>
+                  <a:lnTo>
+                    <a:pt x="849712" y="533318"/>
+                  </a:lnTo>
+                  <a:lnTo>
+                    <a:pt x="927346" y="575644"/>
+                  </a:lnTo>
+                  <a:lnTo>
+                    <a:pt x="1004981" y="617002"/>
+                  </a:lnTo>
+                  <a:lnTo>
+                    <a:pt x="1082615" y="657415"/>
+                  </a:lnTo>
+                  <a:lnTo>
+                    <a:pt x="1160249" y="696903"/>
+                  </a:lnTo>
+                  <a:lnTo>
+                    <a:pt x="1237883" y="735489"/>
+                  </a:lnTo>
+                  <a:lnTo>
+                    <a:pt x="1315517" y="773193"/>
+                  </a:lnTo>
+                  <a:lnTo>
+                    <a:pt x="1393151" y="810035"/>
+                  </a:lnTo>
+                  <a:lnTo>
+                    <a:pt x="1470785" y="846035"/>
+                  </a:lnTo>
+                  <a:lnTo>
+                    <a:pt x="1548419" y="881211"/>
+                  </a:lnTo>
+                  <a:lnTo>
+                    <a:pt x="1626053" y="915584"/>
+                  </a:lnTo>
+                  <a:lnTo>
+                    <a:pt x="1703687" y="949170"/>
+                  </a:lnTo>
+                  <a:lnTo>
+                    <a:pt x="1781321" y="981989"/>
+                  </a:lnTo>
+                  <a:lnTo>
+                    <a:pt x="1858955" y="1014058"/>
+                  </a:lnTo>
+                  <a:lnTo>
+                    <a:pt x="1936589" y="1045393"/>
+                  </a:lnTo>
+                  <a:lnTo>
+                    <a:pt x="2014223" y="1076012"/>
+                  </a:lnTo>
+                  <a:lnTo>
+                    <a:pt x="2091857" y="1105931"/>
+                  </a:lnTo>
+                  <a:lnTo>
+                    <a:pt x="2169491" y="1135166"/>
+                  </a:lnTo>
+                  <a:lnTo>
+                    <a:pt x="2247125" y="1163733"/>
+                  </a:lnTo>
+                  <a:lnTo>
+                    <a:pt x="2324759" y="1191647"/>
+                  </a:lnTo>
+                  <a:lnTo>
+                    <a:pt x="2402393" y="1218922"/>
+                  </a:lnTo>
+                  <a:lnTo>
+                    <a:pt x="2480027" y="1245574"/>
+                  </a:lnTo>
+                  <a:lnTo>
+                    <a:pt x="2557661" y="1271617"/>
+                  </a:lnTo>
+                  <a:lnTo>
+                    <a:pt x="2635295" y="1297064"/>
+                  </a:lnTo>
+                  <a:lnTo>
+                    <a:pt x="2712930" y="1321930"/>
+                  </a:lnTo>
+                  <a:lnTo>
+                    <a:pt x="2790564" y="1346227"/>
+                  </a:lnTo>
+                  <a:lnTo>
+                    <a:pt x="2868198" y="1369969"/>
+                  </a:lnTo>
+                  <a:lnTo>
+                    <a:pt x="2945832" y="1393167"/>
+                  </a:lnTo>
+                  <a:lnTo>
+                    <a:pt x="3023466" y="1415836"/>
+                  </a:lnTo>
+                  <a:lnTo>
+                    <a:pt x="3101100" y="1437986"/>
+                  </a:lnTo>
+                  <a:lnTo>
+                    <a:pt x="3178734" y="1459630"/>
+                  </a:lnTo>
+                  <a:lnTo>
+                    <a:pt x="3256368" y="1480779"/>
+                  </a:lnTo>
+                  <a:lnTo>
+                    <a:pt x="3334002" y="1501445"/>
+                  </a:lnTo>
+                  <a:lnTo>
+                    <a:pt x="3411636" y="1521638"/>
+                  </a:lnTo>
+                  <a:lnTo>
+                    <a:pt x="3489270" y="1541370"/>
+                  </a:lnTo>
+                  <a:lnTo>
+                    <a:pt x="3566904" y="1560650"/>
+                  </a:lnTo>
+                  <a:lnTo>
+                    <a:pt x="3644538" y="1579490"/>
+                  </a:lnTo>
+                  <a:lnTo>
+                    <a:pt x="3722172" y="1597899"/>
+                  </a:lnTo>
+                  <a:lnTo>
+                    <a:pt x="3799806" y="1615887"/>
+                  </a:lnTo>
+                  <a:lnTo>
+                    <a:pt x="3877440" y="1633464"/>
+                  </a:lnTo>
+                  <a:lnTo>
+                    <a:pt x="3955074" y="1650639"/>
+                  </a:lnTo>
+                  <a:lnTo>
+                    <a:pt x="4032708" y="1667421"/>
+                  </a:lnTo>
+                  <a:lnTo>
+                    <a:pt x="4110342" y="1683820"/>
+                  </a:lnTo>
+                  <a:lnTo>
+                    <a:pt x="4187976" y="1699844"/>
+                  </a:lnTo>
+                  <a:lnTo>
+                    <a:pt x="4265610" y="1715501"/>
+                  </a:lnTo>
+                  <a:lnTo>
+                    <a:pt x="4343244" y="1730801"/>
+                  </a:lnTo>
+                  <a:lnTo>
+                    <a:pt x="4420879" y="1745751"/>
+                  </a:lnTo>
+                  <a:lnTo>
+                    <a:pt x="4498513" y="1760359"/>
+                  </a:lnTo>
+                  <a:lnTo>
+                    <a:pt x="4576147" y="1774633"/>
+                  </a:lnTo>
+                  <a:lnTo>
+                    <a:pt x="4653781" y="1788581"/>
+                  </a:lnTo>
+                  <a:lnTo>
+                    <a:pt x="4731415" y="1802209"/>
+                  </a:lnTo>
+                  <a:lnTo>
+                    <a:pt x="4809049" y="1815527"/>
+                  </a:lnTo>
+                  <a:lnTo>
+                    <a:pt x="4886683" y="1828540"/>
+                  </a:lnTo>
+                  <a:lnTo>
+                    <a:pt x="4964317" y="1841255"/>
+                  </a:lnTo>
+                  <a:lnTo>
+                    <a:pt x="5041951" y="1853680"/>
+                  </a:lnTo>
+                  <a:lnTo>
+                    <a:pt x="5119585" y="1865820"/>
+                  </a:lnTo>
+                  <a:lnTo>
+                    <a:pt x="5197219" y="1877683"/>
+                  </a:lnTo>
+                  <a:lnTo>
+                    <a:pt x="5274853" y="1889275"/>
+                  </a:lnTo>
+                  <a:lnTo>
+                    <a:pt x="5352487" y="1900602"/>
+                  </a:lnTo>
+                  <a:lnTo>
+                    <a:pt x="5430121" y="1911670"/>
+                  </a:lnTo>
+                  <a:lnTo>
+                    <a:pt x="5507755" y="1922485"/>
+                  </a:lnTo>
+                  <a:lnTo>
+                    <a:pt x="5585389" y="1933053"/>
+                  </a:lnTo>
+                  <a:lnTo>
+                    <a:pt x="5663023" y="1943379"/>
+                  </a:lnTo>
+                  <a:lnTo>
+                    <a:pt x="5740657" y="1953469"/>
+                  </a:lnTo>
+                  <a:lnTo>
+                    <a:pt x="5818291" y="1963328"/>
+                  </a:lnTo>
+                  <a:lnTo>
+                    <a:pt x="5895925" y="1972962"/>
+                  </a:lnTo>
+                  <a:lnTo>
+                    <a:pt x="5973559" y="1982376"/>
+                  </a:lnTo>
+                  <a:lnTo>
+                    <a:pt x="6051193" y="1991574"/>
+                  </a:lnTo>
+                  <a:lnTo>
+                    <a:pt x="6128827" y="2000563"/>
+                  </a:lnTo>
+                  <a:lnTo>
+                    <a:pt x="6206462" y="2009345"/>
+                  </a:lnTo>
+                  <a:lnTo>
+                    <a:pt x="6284096" y="2017927"/>
+                  </a:lnTo>
+                  <a:lnTo>
+                    <a:pt x="6361730" y="2026313"/>
+                  </a:lnTo>
+                  <a:lnTo>
+                    <a:pt x="6439364" y="2034507"/>
+                  </a:lnTo>
+                  <a:lnTo>
+                    <a:pt x="6516998" y="2042514"/>
+                  </a:lnTo>
+                  <a:lnTo>
+                    <a:pt x="6594632" y="2050337"/>
+                  </a:lnTo>
+                  <a:lnTo>
+                    <a:pt x="6672266" y="2057982"/>
+                  </a:lnTo>
+                  <a:lnTo>
+                    <a:pt x="6749900" y="2065452"/>
+                  </a:lnTo>
+                  <a:lnTo>
+                    <a:pt x="6827534" y="2072752"/>
+                  </a:lnTo>
+                  <a:lnTo>
+                    <a:pt x="6905168" y="2079884"/>
+                  </a:lnTo>
+                  <a:lnTo>
+                    <a:pt x="6982802" y="2086853"/>
+                  </a:lnTo>
+                  <a:lnTo>
+                    <a:pt x="7060436" y="2093663"/>
+                  </a:lnTo>
+                  <a:lnTo>
+                    <a:pt x="7138070" y="2100318"/>
+                  </a:lnTo>
+                  <a:lnTo>
+                    <a:pt x="7215704" y="2106820"/>
+                  </a:lnTo>
+                  <a:lnTo>
+                    <a:pt x="7293338" y="2113174"/>
+                  </a:lnTo>
+                  <a:lnTo>
+                    <a:pt x="7370972" y="2119382"/>
                   </a:lnTo>
                 </a:path>
               </a:pathLst>

--- a/docs/plots/carbo/jx_carbo_linsubhr_ratio_anemia2.pptx
+++ b/docs/plots/carbo/jx_carbo_linsubhr_ratio_anemia2.pptx
@@ -3003,554 +3003,557 @@
           <p:spPr>
             <a:xfrm>
               <a:off x="817517" y="1896563"/>
-              <a:ext cx="7370972" cy="3564993"/>
+              <a:ext cx="7370972" cy="3560662"/>
             </a:xfrm>
             <a:custGeom>
               <a:avLst/>
               <a:pathLst>
-                <a:path w="7370972" h="3564993">
+                <a:path w="7370972" h="3560662">
                   <a:moveTo>
-                    <a:pt x="894586" y="0"/>
+                    <a:pt x="840831" y="0"/>
                   </a:moveTo>
                   <a:lnTo>
-                    <a:pt x="927346" y="69141"/>
-                  </a:lnTo>
-                  <a:lnTo>
-                    <a:pt x="1004981" y="225822"/>
-                  </a:lnTo>
-                  <a:lnTo>
-                    <a:pt x="1082615" y="375654"/>
-                  </a:lnTo>
-                  <a:lnTo>
-                    <a:pt x="1160249" y="518934"/>
-                  </a:lnTo>
-                  <a:lnTo>
-                    <a:pt x="1237883" y="655949"/>
-                  </a:lnTo>
-                  <a:lnTo>
-                    <a:pt x="1315517" y="786974"/>
-                  </a:lnTo>
-                  <a:lnTo>
-                    <a:pt x="1393151" y="912270"/>
-                  </a:lnTo>
-                  <a:lnTo>
-                    <a:pt x="1470785" y="1032087"/>
-                  </a:lnTo>
-                  <a:lnTo>
-                    <a:pt x="1548419" y="1146666"/>
-                  </a:lnTo>
-                  <a:lnTo>
-                    <a:pt x="1626053" y="1256235"/>
-                  </a:lnTo>
-                  <a:lnTo>
-                    <a:pt x="1703687" y="1361014"/>
-                  </a:lnTo>
-                  <a:lnTo>
-                    <a:pt x="1781321" y="1461211"/>
-                  </a:lnTo>
-                  <a:lnTo>
-                    <a:pt x="1858955" y="1557027"/>
-                  </a:lnTo>
-                  <a:lnTo>
-                    <a:pt x="1936589" y="1648654"/>
-                  </a:lnTo>
-                  <a:lnTo>
-                    <a:pt x="2014223" y="1736274"/>
-                  </a:lnTo>
-                  <a:lnTo>
-                    <a:pt x="2091857" y="1820064"/>
-                  </a:lnTo>
-                  <a:lnTo>
-                    <a:pt x="2169491" y="1900190"/>
-                  </a:lnTo>
-                  <a:lnTo>
-                    <a:pt x="2247125" y="1976813"/>
-                  </a:lnTo>
-                  <a:lnTo>
-                    <a:pt x="2324759" y="2050085"/>
-                  </a:lnTo>
-                  <a:lnTo>
-                    <a:pt x="2402393" y="2120154"/>
-                  </a:lnTo>
-                  <a:lnTo>
-                    <a:pt x="2480027" y="2187159"/>
-                  </a:lnTo>
-                  <a:lnTo>
-                    <a:pt x="2557661" y="2251235"/>
-                  </a:lnTo>
-                  <a:lnTo>
-                    <a:pt x="2635295" y="2312509"/>
-                  </a:lnTo>
-                  <a:lnTo>
-                    <a:pt x="2712930" y="2371103"/>
-                  </a:lnTo>
-                  <a:lnTo>
-                    <a:pt x="2790564" y="2427136"/>
-                  </a:lnTo>
-                  <a:lnTo>
-                    <a:pt x="2868198" y="2480719"/>
-                  </a:lnTo>
-                  <a:lnTo>
-                    <a:pt x="2945832" y="2531959"/>
-                  </a:lnTo>
-                  <a:lnTo>
-                    <a:pt x="3023466" y="2580959"/>
-                  </a:lnTo>
-                  <a:lnTo>
-                    <a:pt x="3101100" y="2627816"/>
-                  </a:lnTo>
-                  <a:lnTo>
-                    <a:pt x="3178734" y="2672625"/>
-                  </a:lnTo>
-                  <a:lnTo>
-                    <a:pt x="3256368" y="2715474"/>
-                  </a:lnTo>
-                  <a:lnTo>
-                    <a:pt x="3334002" y="2756450"/>
-                  </a:lnTo>
-                  <a:lnTo>
-                    <a:pt x="3411636" y="2783407"/>
-                  </a:lnTo>
-                  <a:lnTo>
-                    <a:pt x="3489270" y="2784750"/>
-                  </a:lnTo>
-                  <a:lnTo>
-                    <a:pt x="3566904" y="2786090"/>
-                  </a:lnTo>
-                  <a:lnTo>
-                    <a:pt x="3644538" y="2787428"/>
-                  </a:lnTo>
-                  <a:lnTo>
-                    <a:pt x="3722172" y="2788764"/>
-                  </a:lnTo>
-                  <a:lnTo>
-                    <a:pt x="3799806" y="2790098"/>
-                  </a:lnTo>
-                  <a:lnTo>
-                    <a:pt x="3877440" y="2791430"/>
-                  </a:lnTo>
-                  <a:lnTo>
-                    <a:pt x="3955074" y="2792760"/>
-                  </a:lnTo>
-                  <a:lnTo>
-                    <a:pt x="4032708" y="2794088"/>
-                  </a:lnTo>
-                  <a:lnTo>
-                    <a:pt x="4110342" y="2795413"/>
-                  </a:lnTo>
-                  <a:lnTo>
-                    <a:pt x="4187976" y="2796737"/>
-                  </a:lnTo>
-                  <a:lnTo>
-                    <a:pt x="4265610" y="2798059"/>
-                  </a:lnTo>
-                  <a:lnTo>
-                    <a:pt x="4343244" y="2799379"/>
-                  </a:lnTo>
-                  <a:lnTo>
-                    <a:pt x="4420879" y="2800696"/>
-                  </a:lnTo>
-                  <a:lnTo>
-                    <a:pt x="4498513" y="2802012"/>
-                  </a:lnTo>
-                  <a:lnTo>
-                    <a:pt x="4576147" y="2803325"/>
-                  </a:lnTo>
-                  <a:lnTo>
-                    <a:pt x="4653781" y="2804637"/>
-                  </a:lnTo>
-                  <a:lnTo>
-                    <a:pt x="4731415" y="2805946"/>
-                  </a:lnTo>
-                  <a:lnTo>
-                    <a:pt x="4809049" y="2807254"/>
-                  </a:lnTo>
-                  <a:lnTo>
-                    <a:pt x="4886683" y="2808559"/>
-                  </a:lnTo>
-                  <a:lnTo>
-                    <a:pt x="4964317" y="2809863"/>
-                  </a:lnTo>
-                  <a:lnTo>
-                    <a:pt x="5041951" y="2811164"/>
-                  </a:lnTo>
-                  <a:lnTo>
-                    <a:pt x="5119585" y="2812464"/>
-                  </a:lnTo>
-                  <a:lnTo>
-                    <a:pt x="5197219" y="2813761"/>
-                  </a:lnTo>
-                  <a:lnTo>
-                    <a:pt x="5274853" y="2815056"/>
-                  </a:lnTo>
-                  <a:lnTo>
-                    <a:pt x="5352487" y="2816350"/>
-                  </a:lnTo>
-                  <a:lnTo>
-                    <a:pt x="5430121" y="2817641"/>
-                  </a:lnTo>
-                  <a:lnTo>
-                    <a:pt x="5507755" y="2818931"/>
-                  </a:lnTo>
-                  <a:lnTo>
-                    <a:pt x="5585389" y="2820218"/>
-                  </a:lnTo>
-                  <a:lnTo>
-                    <a:pt x="5663023" y="2821503"/>
-                  </a:lnTo>
-                  <a:lnTo>
-                    <a:pt x="5740657" y="2822787"/>
-                  </a:lnTo>
-                  <a:lnTo>
-                    <a:pt x="5818291" y="2824068"/>
-                  </a:lnTo>
-                  <a:lnTo>
-                    <a:pt x="5895925" y="2825348"/>
-                  </a:lnTo>
-                  <a:lnTo>
-                    <a:pt x="5973559" y="2826625"/>
-                  </a:lnTo>
-                  <a:lnTo>
-                    <a:pt x="6051193" y="2827901"/>
-                  </a:lnTo>
-                  <a:lnTo>
-                    <a:pt x="6128827" y="2829175"/>
-                  </a:lnTo>
-                  <a:lnTo>
-                    <a:pt x="6206462" y="2830446"/>
-                  </a:lnTo>
-                  <a:lnTo>
-                    <a:pt x="6284096" y="2831716"/>
-                  </a:lnTo>
-                  <a:lnTo>
-                    <a:pt x="6361730" y="2832983"/>
-                  </a:lnTo>
-                  <a:lnTo>
-                    <a:pt x="6439364" y="2834249"/>
-                  </a:lnTo>
-                  <a:lnTo>
-                    <a:pt x="6516998" y="2835513"/>
-                  </a:lnTo>
-                  <a:lnTo>
-                    <a:pt x="6594632" y="2836775"/>
-                  </a:lnTo>
-                  <a:lnTo>
-                    <a:pt x="6672266" y="2838035"/>
-                  </a:lnTo>
-                  <a:lnTo>
-                    <a:pt x="6749900" y="2839293"/>
-                  </a:lnTo>
-                  <a:lnTo>
-                    <a:pt x="6827534" y="2840549"/>
-                  </a:lnTo>
-                  <a:lnTo>
-                    <a:pt x="6905168" y="2841803"/>
-                  </a:lnTo>
-                  <a:lnTo>
-                    <a:pt x="6982802" y="2843055"/>
-                  </a:lnTo>
-                  <a:lnTo>
-                    <a:pt x="7060436" y="2844305"/>
-                  </a:lnTo>
-                  <a:lnTo>
-                    <a:pt x="7138070" y="2845553"/>
-                  </a:lnTo>
-                  <a:lnTo>
-                    <a:pt x="7215704" y="2846799"/>
-                  </a:lnTo>
-                  <a:lnTo>
-                    <a:pt x="7293338" y="2848044"/>
-                  </a:lnTo>
-                  <a:lnTo>
-                    <a:pt x="7370972" y="2849286"/>
-                  </a:lnTo>
-                  <a:lnTo>
-                    <a:pt x="7370972" y="3564993"/>
-                  </a:lnTo>
-                  <a:lnTo>
-                    <a:pt x="7293338" y="3560986"/>
-                  </a:lnTo>
-                  <a:lnTo>
-                    <a:pt x="7215704" y="3556795"/>
-                  </a:lnTo>
-                  <a:lnTo>
-                    <a:pt x="7138070" y="3552412"/>
-                  </a:lnTo>
-                  <a:lnTo>
-                    <a:pt x="7060436" y="3547830"/>
-                  </a:lnTo>
-                  <a:lnTo>
-                    <a:pt x="6982802" y="3543037"/>
-                  </a:lnTo>
-                  <a:lnTo>
-                    <a:pt x="6905168" y="3538026"/>
-                  </a:lnTo>
-                  <a:lnTo>
-                    <a:pt x="6827534" y="3532785"/>
-                  </a:lnTo>
-                  <a:lnTo>
-                    <a:pt x="6749900" y="3527305"/>
-                  </a:lnTo>
-                  <a:lnTo>
-                    <a:pt x="6672266" y="3521574"/>
-                  </a:lnTo>
-                  <a:lnTo>
-                    <a:pt x="6594632" y="3515582"/>
-                  </a:lnTo>
-                  <a:lnTo>
-                    <a:pt x="6516998" y="3509315"/>
-                  </a:lnTo>
-                  <a:lnTo>
-                    <a:pt x="6439364" y="3502762"/>
-                  </a:lnTo>
-                  <a:lnTo>
-                    <a:pt x="6361730" y="3495909"/>
-                  </a:lnTo>
-                  <a:lnTo>
-                    <a:pt x="6284096" y="3488743"/>
-                  </a:lnTo>
-                  <a:lnTo>
-                    <a:pt x="6206462" y="3481249"/>
-                  </a:lnTo>
-                  <a:lnTo>
-                    <a:pt x="6128827" y="3473412"/>
-                  </a:lnTo>
-                  <a:lnTo>
-                    <a:pt x="6051193" y="3465217"/>
-                  </a:lnTo>
-                  <a:lnTo>
-                    <a:pt x="5973559" y="3456648"/>
-                  </a:lnTo>
-                  <a:lnTo>
-                    <a:pt x="5895925" y="3447686"/>
-                  </a:lnTo>
-                  <a:lnTo>
-                    <a:pt x="5818291" y="3438315"/>
-                  </a:lnTo>
-                  <a:lnTo>
-                    <a:pt x="5740657" y="3428516"/>
-                  </a:lnTo>
-                  <a:lnTo>
-                    <a:pt x="5663023" y="3418268"/>
-                  </a:lnTo>
-                  <a:lnTo>
-                    <a:pt x="5585389" y="3407552"/>
-                  </a:lnTo>
-                  <a:lnTo>
-                    <a:pt x="5507755" y="3396346"/>
-                  </a:lnTo>
-                  <a:lnTo>
-                    <a:pt x="5430121" y="3384627"/>
-                  </a:lnTo>
-                  <a:lnTo>
-                    <a:pt x="5352487" y="3372373"/>
-                  </a:lnTo>
-                  <a:lnTo>
-                    <a:pt x="5274853" y="3359559"/>
-                  </a:lnTo>
-                  <a:lnTo>
-                    <a:pt x="5197219" y="3346158"/>
-                  </a:lnTo>
-                  <a:lnTo>
-                    <a:pt x="5119585" y="3332145"/>
-                  </a:lnTo>
-                  <a:lnTo>
-                    <a:pt x="5041951" y="3317491"/>
-                  </a:lnTo>
-                  <a:lnTo>
-                    <a:pt x="4964317" y="3302167"/>
-                  </a:lnTo>
-                  <a:lnTo>
-                    <a:pt x="4886683" y="3286143"/>
-                  </a:lnTo>
-                  <a:lnTo>
-                    <a:pt x="4809049" y="3269385"/>
-                  </a:lnTo>
-                  <a:lnTo>
-                    <a:pt x="4731415" y="3251862"/>
-                  </a:lnTo>
-                  <a:lnTo>
-                    <a:pt x="4653781" y="3233537"/>
-                  </a:lnTo>
-                  <a:lnTo>
-                    <a:pt x="4576147" y="3214375"/>
-                  </a:lnTo>
-                  <a:lnTo>
-                    <a:pt x="4498513" y="3194336"/>
-                  </a:lnTo>
-                  <a:lnTo>
-                    <a:pt x="4420879" y="3173381"/>
-                  </a:lnTo>
-                  <a:lnTo>
-                    <a:pt x="4343244" y="3151468"/>
-                  </a:lnTo>
-                  <a:lnTo>
-                    <a:pt x="4265610" y="3128554"/>
-                  </a:lnTo>
-                  <a:lnTo>
-                    <a:pt x="4187976" y="3104591"/>
-                  </a:lnTo>
-                  <a:lnTo>
-                    <a:pt x="4110342" y="3079533"/>
-                  </a:lnTo>
-                  <a:lnTo>
-                    <a:pt x="4032708" y="3053329"/>
-                  </a:lnTo>
-                  <a:lnTo>
-                    <a:pt x="3955074" y="3025927"/>
-                  </a:lnTo>
-                  <a:lnTo>
-                    <a:pt x="3877440" y="2997272"/>
-                  </a:lnTo>
-                  <a:lnTo>
-                    <a:pt x="3799806" y="2967307"/>
-                  </a:lnTo>
-                  <a:lnTo>
-                    <a:pt x="3722172" y="2935972"/>
-                  </a:lnTo>
-                  <a:lnTo>
-                    <a:pt x="3644538" y="2903204"/>
-                  </a:lnTo>
-                  <a:lnTo>
-                    <a:pt x="3566904" y="2868938"/>
-                  </a:lnTo>
-                  <a:lnTo>
-                    <a:pt x="3489270" y="2833106"/>
-                  </a:lnTo>
-                  <a:lnTo>
-                    <a:pt x="3411636" y="2795635"/>
-                  </a:lnTo>
-                  <a:lnTo>
-                    <a:pt x="3334002" y="2782063"/>
-                  </a:lnTo>
-                  <a:lnTo>
-                    <a:pt x="3256368" y="2780716"/>
-                  </a:lnTo>
-                  <a:lnTo>
-                    <a:pt x="3178734" y="2779368"/>
-                  </a:lnTo>
-                  <a:lnTo>
-                    <a:pt x="3101100" y="2778017"/>
-                  </a:lnTo>
-                  <a:lnTo>
-                    <a:pt x="3023466" y="2776665"/>
-                  </a:lnTo>
-                  <a:lnTo>
-                    <a:pt x="2945832" y="2775310"/>
-                  </a:lnTo>
-                  <a:lnTo>
-                    <a:pt x="2868198" y="2773953"/>
-                  </a:lnTo>
-                  <a:lnTo>
-                    <a:pt x="2790564" y="2772594"/>
-                  </a:lnTo>
-                  <a:lnTo>
-                    <a:pt x="2712930" y="2771233"/>
-                  </a:lnTo>
-                  <a:lnTo>
-                    <a:pt x="2635295" y="2769870"/>
-                  </a:lnTo>
-                  <a:lnTo>
-                    <a:pt x="2557661" y="2768504"/>
-                  </a:lnTo>
-                  <a:lnTo>
-                    <a:pt x="2480027" y="2767137"/>
-                  </a:lnTo>
-                  <a:lnTo>
-                    <a:pt x="2402393" y="2765767"/>
-                  </a:lnTo>
-                  <a:lnTo>
-                    <a:pt x="2324759" y="2764396"/>
-                  </a:lnTo>
-                  <a:lnTo>
-                    <a:pt x="2247125" y="2763022"/>
-                  </a:lnTo>
-                  <a:lnTo>
-                    <a:pt x="2169491" y="2761646"/>
-                  </a:lnTo>
-                  <a:lnTo>
-                    <a:pt x="2091857" y="2760268"/>
-                  </a:lnTo>
-                  <a:lnTo>
-                    <a:pt x="2014223" y="2758888"/>
-                  </a:lnTo>
-                  <a:lnTo>
-                    <a:pt x="1936589" y="2757506"/>
-                  </a:lnTo>
-                  <a:lnTo>
-                    <a:pt x="1858955" y="2756121"/>
-                  </a:lnTo>
-                  <a:lnTo>
-                    <a:pt x="1781321" y="2754735"/>
-                  </a:lnTo>
-                  <a:lnTo>
-                    <a:pt x="1703687" y="2753346"/>
-                  </a:lnTo>
-                  <a:lnTo>
-                    <a:pt x="1626053" y="2751955"/>
-                  </a:lnTo>
-                  <a:lnTo>
-                    <a:pt x="1548419" y="2750562"/>
-                  </a:lnTo>
-                  <a:lnTo>
-                    <a:pt x="1470785" y="2749167"/>
-                  </a:lnTo>
-                  <a:lnTo>
-                    <a:pt x="1393151" y="2747770"/>
-                  </a:lnTo>
-                  <a:lnTo>
-                    <a:pt x="1315517" y="2746370"/>
-                  </a:lnTo>
-                  <a:lnTo>
-                    <a:pt x="1237883" y="2744969"/>
-                  </a:lnTo>
-                  <a:lnTo>
-                    <a:pt x="1160249" y="2743565"/>
-                  </a:lnTo>
-                  <a:lnTo>
-                    <a:pt x="1082615" y="2742159"/>
-                  </a:lnTo>
-                  <a:lnTo>
-                    <a:pt x="1004981" y="2740751"/>
-                  </a:lnTo>
-                  <a:lnTo>
-                    <a:pt x="927346" y="2739340"/>
-                  </a:lnTo>
-                  <a:lnTo>
-                    <a:pt x="849712" y="2737928"/>
-                  </a:lnTo>
-                  <a:lnTo>
-                    <a:pt x="772078" y="2736513"/>
-                  </a:lnTo>
-                  <a:lnTo>
-                    <a:pt x="694444" y="2735096"/>
-                  </a:lnTo>
-                  <a:lnTo>
-                    <a:pt x="616810" y="2733677"/>
-                  </a:lnTo>
-                  <a:lnTo>
-                    <a:pt x="539176" y="2732256"/>
-                  </a:lnTo>
-                  <a:lnTo>
-                    <a:pt x="461542" y="2730832"/>
-                  </a:lnTo>
-                  <a:lnTo>
-                    <a:pt x="383908" y="2729407"/>
-                  </a:lnTo>
-                  <a:lnTo>
-                    <a:pt x="306274" y="2727979"/>
-                  </a:lnTo>
-                  <a:lnTo>
-                    <a:pt x="228640" y="2726549"/>
-                  </a:lnTo>
-                  <a:lnTo>
-                    <a:pt x="151006" y="2725116"/>
-                  </a:lnTo>
-                  <a:lnTo>
-                    <a:pt x="73372" y="2723682"/>
-                  </a:lnTo>
-                  <a:lnTo>
-                    <a:pt x="0" y="2722324"/>
+                    <a:pt x="849712" y="18600"/>
+                  </a:lnTo>
+                  <a:lnTo>
+                    <a:pt x="927346" y="174224"/>
+                  </a:lnTo>
+                  <a:lnTo>
+                    <a:pt x="1004981" y="323184"/>
+                  </a:lnTo>
+                  <a:lnTo>
+                    <a:pt x="1082615" y="465765"/>
+                  </a:lnTo>
+                  <a:lnTo>
+                    <a:pt x="1160249" y="602240"/>
+                  </a:lnTo>
+                  <a:lnTo>
+                    <a:pt x="1237883" y="732871"/>
+                  </a:lnTo>
+                  <a:lnTo>
+                    <a:pt x="1315517" y="857907"/>
+                  </a:lnTo>
+                  <a:lnTo>
+                    <a:pt x="1393151" y="977589"/>
+                  </a:lnTo>
+                  <a:lnTo>
+                    <a:pt x="1470785" y="1092145"/>
+                  </a:lnTo>
+                  <a:lnTo>
+                    <a:pt x="1548419" y="1201796"/>
+                  </a:lnTo>
+                  <a:lnTo>
+                    <a:pt x="1626053" y="1306751"/>
+                  </a:lnTo>
+                  <a:lnTo>
+                    <a:pt x="1703687" y="1407212"/>
+                  </a:lnTo>
+                  <a:lnTo>
+                    <a:pt x="1781321" y="1503370"/>
+                  </a:lnTo>
+                  <a:lnTo>
+                    <a:pt x="1858955" y="1595411"/>
+                  </a:lnTo>
+                  <a:lnTo>
+                    <a:pt x="1936589" y="1683510"/>
+                  </a:lnTo>
+                  <a:lnTo>
+                    <a:pt x="2014223" y="1767836"/>
+                  </a:lnTo>
+                  <a:lnTo>
+                    <a:pt x="2091857" y="1848551"/>
+                  </a:lnTo>
+                  <a:lnTo>
+                    <a:pt x="2169491" y="1925810"/>
+                  </a:lnTo>
+                  <a:lnTo>
+                    <a:pt x="2247125" y="1999760"/>
+                  </a:lnTo>
+                  <a:lnTo>
+                    <a:pt x="2324759" y="2070543"/>
+                  </a:lnTo>
+                  <a:lnTo>
+                    <a:pt x="2402393" y="2138295"/>
+                  </a:lnTo>
+                  <a:lnTo>
+                    <a:pt x="2480027" y="2203145"/>
+                  </a:lnTo>
+                  <a:lnTo>
+                    <a:pt x="2557661" y="2265218"/>
+                  </a:lnTo>
+                  <a:lnTo>
+                    <a:pt x="2635295" y="2324634"/>
+                  </a:lnTo>
+                  <a:lnTo>
+                    <a:pt x="2712930" y="2381504"/>
+                  </a:lnTo>
+                  <a:lnTo>
+                    <a:pt x="2790564" y="2435940"/>
+                  </a:lnTo>
+                  <a:lnTo>
+                    <a:pt x="2868198" y="2488044"/>
+                  </a:lnTo>
+                  <a:lnTo>
+                    <a:pt x="2945832" y="2537917"/>
+                  </a:lnTo>
+                  <a:lnTo>
+                    <a:pt x="3023466" y="2585654"/>
+                  </a:lnTo>
+                  <a:lnTo>
+                    <a:pt x="3101100" y="2631346"/>
+                  </a:lnTo>
+                  <a:lnTo>
+                    <a:pt x="3178734" y="2675083"/>
+                  </a:lnTo>
+                  <a:lnTo>
+                    <a:pt x="3256368" y="2716946"/>
+                  </a:lnTo>
+                  <a:lnTo>
+                    <a:pt x="3334002" y="2757016"/>
+                  </a:lnTo>
+                  <a:lnTo>
+                    <a:pt x="3411636" y="2783161"/>
+                  </a:lnTo>
+                  <a:lnTo>
+                    <a:pt x="3489270" y="2783755"/>
+                  </a:lnTo>
+                  <a:lnTo>
+                    <a:pt x="3566904" y="2784349"/>
+                  </a:lnTo>
+                  <a:lnTo>
+                    <a:pt x="3644538" y="2784942"/>
+                  </a:lnTo>
+                  <a:lnTo>
+                    <a:pt x="3722172" y="2785534"/>
+                  </a:lnTo>
+                  <a:lnTo>
+                    <a:pt x="3799806" y="2786127"/>
+                  </a:lnTo>
+                  <a:lnTo>
+                    <a:pt x="3877440" y="2786719"/>
+                  </a:lnTo>
+                  <a:lnTo>
+                    <a:pt x="3955074" y="2787310"/>
+                  </a:lnTo>
+                  <a:lnTo>
+                    <a:pt x="4032708" y="2787901"/>
+                  </a:lnTo>
+                  <a:lnTo>
+                    <a:pt x="4110342" y="2788492"/>
+                  </a:lnTo>
+                  <a:lnTo>
+                    <a:pt x="4187976" y="2789082"/>
+                  </a:lnTo>
+                  <a:lnTo>
+                    <a:pt x="4265610" y="2789672"/>
+                  </a:lnTo>
+                  <a:lnTo>
+                    <a:pt x="4343244" y="2790262"/>
+                  </a:lnTo>
+                  <a:lnTo>
+                    <a:pt x="4420879" y="2790851"/>
+                  </a:lnTo>
+                  <a:lnTo>
+                    <a:pt x="4498513" y="2791439"/>
+                  </a:lnTo>
+                  <a:lnTo>
+                    <a:pt x="4576147" y="2792028"/>
+                  </a:lnTo>
+                  <a:lnTo>
+                    <a:pt x="4653781" y="2792615"/>
+                  </a:lnTo>
+                  <a:lnTo>
+                    <a:pt x="4731415" y="2793203"/>
+                  </a:lnTo>
+                  <a:lnTo>
+                    <a:pt x="4809049" y="2793790"/>
+                  </a:lnTo>
+                  <a:lnTo>
+                    <a:pt x="4886683" y="2794377"/>
+                  </a:lnTo>
+                  <a:lnTo>
+                    <a:pt x="4964317" y="2794963"/>
+                  </a:lnTo>
+                  <a:lnTo>
+                    <a:pt x="5041951" y="2795549"/>
+                  </a:lnTo>
+                  <a:lnTo>
+                    <a:pt x="5119585" y="2796134"/>
+                  </a:lnTo>
+                  <a:lnTo>
+                    <a:pt x="5197219" y="2796719"/>
+                  </a:lnTo>
+                  <a:lnTo>
+                    <a:pt x="5274853" y="2797304"/>
+                  </a:lnTo>
+                  <a:lnTo>
+                    <a:pt x="5352487" y="2797888"/>
+                  </a:lnTo>
+                  <a:lnTo>
+                    <a:pt x="5430121" y="2798472"/>
+                  </a:lnTo>
+                  <a:lnTo>
+                    <a:pt x="5507755" y="2799056"/>
+                  </a:lnTo>
+                  <a:lnTo>
+                    <a:pt x="5585389" y="2799639"/>
+                  </a:lnTo>
+                  <a:lnTo>
+                    <a:pt x="5663023" y="2800221"/>
+                  </a:lnTo>
+                  <a:lnTo>
+                    <a:pt x="5740657" y="2800804"/>
+                  </a:lnTo>
+                  <a:lnTo>
+                    <a:pt x="5818291" y="2801385"/>
+                  </a:lnTo>
+                  <a:lnTo>
+                    <a:pt x="5895925" y="2801967"/>
+                  </a:lnTo>
+                  <a:lnTo>
+                    <a:pt x="5973559" y="2802548"/>
+                  </a:lnTo>
+                  <a:lnTo>
+                    <a:pt x="6051193" y="2803129"/>
+                  </a:lnTo>
+                  <a:lnTo>
+                    <a:pt x="6128827" y="2803709"/>
+                  </a:lnTo>
+                  <a:lnTo>
+                    <a:pt x="6206462" y="2804289"/>
+                  </a:lnTo>
+                  <a:lnTo>
+                    <a:pt x="6284096" y="2804868"/>
+                  </a:lnTo>
+                  <a:lnTo>
+                    <a:pt x="6361730" y="2805447"/>
+                  </a:lnTo>
+                  <a:lnTo>
+                    <a:pt x="6439364" y="2806026"/>
+                  </a:lnTo>
+                  <a:lnTo>
+                    <a:pt x="6516998" y="2806604"/>
+                  </a:lnTo>
+                  <a:lnTo>
+                    <a:pt x="6594632" y="2807182"/>
+                  </a:lnTo>
+                  <a:lnTo>
+                    <a:pt x="6672266" y="2807760"/>
+                  </a:lnTo>
+                  <a:lnTo>
+                    <a:pt x="6749900" y="2808337"/>
+                  </a:lnTo>
+                  <a:lnTo>
+                    <a:pt x="6827534" y="2808914"/>
+                  </a:lnTo>
+                  <a:lnTo>
+                    <a:pt x="6905168" y="2809490"/>
+                  </a:lnTo>
+                  <a:lnTo>
+                    <a:pt x="6982802" y="2810066"/>
+                  </a:lnTo>
+                  <a:lnTo>
+                    <a:pt x="7060436" y="2810642"/>
+                  </a:lnTo>
+                  <a:lnTo>
+                    <a:pt x="7138070" y="2811217"/>
+                  </a:lnTo>
+                  <a:lnTo>
+                    <a:pt x="7215704" y="2811791"/>
+                  </a:lnTo>
+                  <a:lnTo>
+                    <a:pt x="7293338" y="2812366"/>
+                  </a:lnTo>
+                  <a:lnTo>
+                    <a:pt x="7370972" y="2812940"/>
+                  </a:lnTo>
+                  <a:lnTo>
+                    <a:pt x="7370972" y="3560662"/>
+                  </a:lnTo>
+                  <a:lnTo>
+                    <a:pt x="7293338" y="3556547"/>
+                  </a:lnTo>
+                  <a:lnTo>
+                    <a:pt x="7215704" y="3552247"/>
+                  </a:lnTo>
+                  <a:lnTo>
+                    <a:pt x="7138070" y="3547755"/>
+                  </a:lnTo>
+                  <a:lnTo>
+                    <a:pt x="7060436" y="3543063"/>
+                  </a:lnTo>
+                  <a:lnTo>
+                    <a:pt x="6982802" y="3538160"/>
+                  </a:lnTo>
+                  <a:lnTo>
+                    <a:pt x="6905168" y="3533038"/>
+                  </a:lnTo>
+                  <a:lnTo>
+                    <a:pt x="6827534" y="3527687"/>
+                  </a:lnTo>
+                  <a:lnTo>
+                    <a:pt x="6749900" y="3522097"/>
+                  </a:lnTo>
+                  <a:lnTo>
+                    <a:pt x="6672266" y="3516256"/>
+                  </a:lnTo>
+                  <a:lnTo>
+                    <a:pt x="6594632" y="3510154"/>
+                  </a:lnTo>
+                  <a:lnTo>
+                    <a:pt x="6516998" y="3503779"/>
+                  </a:lnTo>
+                  <a:lnTo>
+                    <a:pt x="6439364" y="3497119"/>
+                  </a:lnTo>
+                  <a:lnTo>
+                    <a:pt x="6361730" y="3490161"/>
+                  </a:lnTo>
+                  <a:lnTo>
+                    <a:pt x="6284096" y="3482891"/>
+                  </a:lnTo>
+                  <a:lnTo>
+                    <a:pt x="6206462" y="3475296"/>
+                  </a:lnTo>
+                  <a:lnTo>
+                    <a:pt x="6128827" y="3467362"/>
+                  </a:lnTo>
+                  <a:lnTo>
+                    <a:pt x="6051193" y="3459072"/>
+                  </a:lnTo>
+                  <a:lnTo>
+                    <a:pt x="5973559" y="3450412"/>
+                  </a:lnTo>
+                  <a:lnTo>
+                    <a:pt x="5895925" y="3441364"/>
+                  </a:lnTo>
+                  <a:lnTo>
+                    <a:pt x="5818291" y="3431912"/>
+                  </a:lnTo>
+                  <a:lnTo>
+                    <a:pt x="5740657" y="3422036"/>
+                  </a:lnTo>
+                  <a:lnTo>
+                    <a:pt x="5663023" y="3411719"/>
+                  </a:lnTo>
+                  <a:lnTo>
+                    <a:pt x="5585389" y="3400940"/>
+                  </a:lnTo>
+                  <a:lnTo>
+                    <a:pt x="5507755" y="3389679"/>
+                  </a:lnTo>
+                  <a:lnTo>
+                    <a:pt x="5430121" y="3377914"/>
+                  </a:lnTo>
+                  <a:lnTo>
+                    <a:pt x="5352487" y="3365622"/>
+                  </a:lnTo>
+                  <a:lnTo>
+                    <a:pt x="5274853" y="3352781"/>
+                  </a:lnTo>
+                  <a:lnTo>
+                    <a:pt x="5197219" y="3339365"/>
+                  </a:lnTo>
+                  <a:lnTo>
+                    <a:pt x="5119585" y="3325349"/>
+                  </a:lnTo>
+                  <a:lnTo>
+                    <a:pt x="5041951" y="3310706"/>
+                  </a:lnTo>
+                  <a:lnTo>
+                    <a:pt x="4964317" y="3295408"/>
+                  </a:lnTo>
+                  <a:lnTo>
+                    <a:pt x="4886683" y="3279425"/>
+                  </a:lnTo>
+                  <a:lnTo>
+                    <a:pt x="4809049" y="3262727"/>
+                  </a:lnTo>
+                  <a:lnTo>
+                    <a:pt x="4731415" y="3245282"/>
+                  </a:lnTo>
+                  <a:lnTo>
+                    <a:pt x="4653781" y="3227057"/>
+                  </a:lnTo>
+                  <a:lnTo>
+                    <a:pt x="4576147" y="3208016"/>
+                  </a:lnTo>
+                  <a:lnTo>
+                    <a:pt x="4498513" y="3188124"/>
+                  </a:lnTo>
+                  <a:lnTo>
+                    <a:pt x="4420879" y="3167341"/>
+                  </a:lnTo>
+                  <a:lnTo>
+                    <a:pt x="4343244" y="3145629"/>
+                  </a:lnTo>
+                  <a:lnTo>
+                    <a:pt x="4265610" y="3122945"/>
+                  </a:lnTo>
+                  <a:lnTo>
+                    <a:pt x="4187976" y="3099246"/>
+                  </a:lnTo>
+                  <a:lnTo>
+                    <a:pt x="4110342" y="3074487"/>
+                  </a:lnTo>
+                  <a:lnTo>
+                    <a:pt x="4032708" y="3048620"/>
+                  </a:lnTo>
+                  <a:lnTo>
+                    <a:pt x="3955074" y="3021596"/>
+                  </a:lnTo>
+                  <a:lnTo>
+                    <a:pt x="3877440" y="2993363"/>
+                  </a:lnTo>
+                  <a:lnTo>
+                    <a:pt x="3799806" y="2963867"/>
+                  </a:lnTo>
+                  <a:lnTo>
+                    <a:pt x="3722172" y="2933051"/>
+                  </a:lnTo>
+                  <a:lnTo>
+                    <a:pt x="3644538" y="2900857"/>
+                  </a:lnTo>
+                  <a:lnTo>
+                    <a:pt x="3566904" y="2867222"/>
+                  </a:lnTo>
+                  <a:lnTo>
+                    <a:pt x="3489270" y="2832082"/>
+                  </a:lnTo>
+                  <a:lnTo>
+                    <a:pt x="3411636" y="2795370"/>
+                  </a:lnTo>
+                  <a:lnTo>
+                    <a:pt x="3334002" y="2782567"/>
+                  </a:lnTo>
+                  <a:lnTo>
+                    <a:pt x="3256368" y="2781972"/>
+                  </a:lnTo>
+                  <a:lnTo>
+                    <a:pt x="3178734" y="2781377"/>
+                  </a:lnTo>
+                  <a:lnTo>
+                    <a:pt x="3101100" y="2780781"/>
+                  </a:lnTo>
+                  <a:lnTo>
+                    <a:pt x="3023466" y="2780186"/>
+                  </a:lnTo>
+                  <a:lnTo>
+                    <a:pt x="2945832" y="2779589"/>
+                  </a:lnTo>
+                  <a:lnTo>
+                    <a:pt x="2868198" y="2778992"/>
+                  </a:lnTo>
+                  <a:lnTo>
+                    <a:pt x="2790564" y="2778395"/>
+                  </a:lnTo>
+                  <a:lnTo>
+                    <a:pt x="2712930" y="2777798"/>
+                  </a:lnTo>
+                  <a:lnTo>
+                    <a:pt x="2635295" y="2777200"/>
+                  </a:lnTo>
+                  <a:lnTo>
+                    <a:pt x="2557661" y="2776601"/>
+                  </a:lnTo>
+                  <a:lnTo>
+                    <a:pt x="2480027" y="2776002"/>
+                  </a:lnTo>
+                  <a:lnTo>
+                    <a:pt x="2402393" y="2775403"/>
+                  </a:lnTo>
+                  <a:lnTo>
+                    <a:pt x="2324759" y="2774804"/>
+                  </a:lnTo>
+                  <a:lnTo>
+                    <a:pt x="2247125" y="2774203"/>
+                  </a:lnTo>
+                  <a:lnTo>
+                    <a:pt x="2169491" y="2773603"/>
+                  </a:lnTo>
+                  <a:lnTo>
+                    <a:pt x="2091857" y="2773002"/>
+                  </a:lnTo>
+                  <a:lnTo>
+                    <a:pt x="2014223" y="2772401"/>
+                  </a:lnTo>
+                  <a:lnTo>
+                    <a:pt x="1936589" y="2771799"/>
+                  </a:lnTo>
+                  <a:lnTo>
+                    <a:pt x="1858955" y="2771197"/>
+                  </a:lnTo>
+                  <a:lnTo>
+                    <a:pt x="1781321" y="2770595"/>
+                  </a:lnTo>
+                  <a:lnTo>
+                    <a:pt x="1703687" y="2769992"/>
+                  </a:lnTo>
+                  <a:lnTo>
+                    <a:pt x="1626053" y="2769388"/>
+                  </a:lnTo>
+                  <a:lnTo>
+                    <a:pt x="1548419" y="2768785"/>
+                  </a:lnTo>
+                  <a:lnTo>
+                    <a:pt x="1470785" y="2768180"/>
+                  </a:lnTo>
+                  <a:lnTo>
+                    <a:pt x="1393151" y="2767576"/>
+                  </a:lnTo>
+                  <a:lnTo>
+                    <a:pt x="1315517" y="2766971"/>
+                  </a:lnTo>
+                  <a:lnTo>
+                    <a:pt x="1237883" y="2766366"/>
+                  </a:lnTo>
+                  <a:lnTo>
+                    <a:pt x="1160249" y="2765760"/>
+                  </a:lnTo>
+                  <a:lnTo>
+                    <a:pt x="1082615" y="2765153"/>
+                  </a:lnTo>
+                  <a:lnTo>
+                    <a:pt x="1004981" y="2764547"/>
+                  </a:lnTo>
+                  <a:lnTo>
+                    <a:pt x="927346" y="2763940"/>
+                  </a:lnTo>
+                  <a:lnTo>
+                    <a:pt x="849712" y="2763332"/>
+                  </a:lnTo>
+                  <a:lnTo>
+                    <a:pt x="772078" y="2762724"/>
+                  </a:lnTo>
+                  <a:lnTo>
+                    <a:pt x="694444" y="2762116"/>
+                  </a:lnTo>
+                  <a:lnTo>
+                    <a:pt x="616810" y="2761507"/>
+                  </a:lnTo>
+                  <a:lnTo>
+                    <a:pt x="539176" y="2760898"/>
+                  </a:lnTo>
+                  <a:lnTo>
+                    <a:pt x="461542" y="2760289"/>
+                  </a:lnTo>
+                  <a:lnTo>
+                    <a:pt x="383908" y="2759679"/>
+                  </a:lnTo>
+                  <a:lnTo>
+                    <a:pt x="306274" y="2759068"/>
+                  </a:lnTo>
+                  <a:lnTo>
+                    <a:pt x="228640" y="2758458"/>
+                  </a:lnTo>
+                  <a:lnTo>
+                    <a:pt x="151006" y="2757846"/>
+                  </a:lnTo>
+                  <a:lnTo>
+                    <a:pt x="73372" y="2757235"/>
+                  </a:lnTo>
+                  <a:lnTo>
+                    <a:pt x="0" y="2756656"/>
                   </a:lnTo>
                   <a:close/>
                 </a:path>
@@ -3576,267 +3579,270 @@
           </p:nvSpPr>
           <p:spPr>
             <a:xfrm>
-              <a:off x="1712104" y="1896563"/>
-              <a:ext cx="6476386" cy="2849286"/>
+              <a:off x="1658349" y="1896563"/>
+              <a:ext cx="6530141" cy="2812940"/>
             </a:xfrm>
             <a:custGeom>
               <a:avLst/>
               <a:pathLst>
-                <a:path w="6476386" h="2849286">
+                <a:path w="6530141" h="2812940">
                   <a:moveTo>
                     <a:pt x="0" y="0"/>
                   </a:moveTo>
                   <a:lnTo>
-                    <a:pt x="32760" y="69141"/>
-                  </a:lnTo>
-                  <a:lnTo>
-                    <a:pt x="110394" y="225822"/>
-                  </a:lnTo>
-                  <a:lnTo>
-                    <a:pt x="188028" y="375654"/>
-                  </a:lnTo>
-                  <a:lnTo>
-                    <a:pt x="265662" y="518934"/>
-                  </a:lnTo>
-                  <a:lnTo>
-                    <a:pt x="343296" y="655949"/>
-                  </a:lnTo>
-                  <a:lnTo>
-                    <a:pt x="420930" y="786974"/>
-                  </a:lnTo>
-                  <a:lnTo>
-                    <a:pt x="498564" y="912270"/>
-                  </a:lnTo>
-                  <a:lnTo>
-                    <a:pt x="576199" y="1032087"/>
-                  </a:lnTo>
-                  <a:lnTo>
-                    <a:pt x="653833" y="1146666"/>
-                  </a:lnTo>
-                  <a:lnTo>
-                    <a:pt x="731467" y="1256235"/>
-                  </a:lnTo>
-                  <a:lnTo>
-                    <a:pt x="809101" y="1361014"/>
-                  </a:lnTo>
-                  <a:lnTo>
-                    <a:pt x="886735" y="1461211"/>
-                  </a:lnTo>
-                  <a:lnTo>
-                    <a:pt x="964369" y="1557027"/>
-                  </a:lnTo>
-                  <a:lnTo>
-                    <a:pt x="1042003" y="1648654"/>
-                  </a:lnTo>
-                  <a:lnTo>
-                    <a:pt x="1119637" y="1736274"/>
-                  </a:lnTo>
-                  <a:lnTo>
-                    <a:pt x="1197271" y="1820064"/>
-                  </a:lnTo>
-                  <a:lnTo>
-                    <a:pt x="1274905" y="1900190"/>
-                  </a:lnTo>
-                  <a:lnTo>
-                    <a:pt x="1352539" y="1976813"/>
-                  </a:lnTo>
-                  <a:lnTo>
-                    <a:pt x="1430173" y="2050085"/>
-                  </a:lnTo>
-                  <a:lnTo>
-                    <a:pt x="1507807" y="2120154"/>
-                  </a:lnTo>
-                  <a:lnTo>
-                    <a:pt x="1585441" y="2187159"/>
-                  </a:lnTo>
-                  <a:lnTo>
-                    <a:pt x="1663075" y="2251235"/>
-                  </a:lnTo>
-                  <a:lnTo>
-                    <a:pt x="1740709" y="2312509"/>
-                  </a:lnTo>
-                  <a:lnTo>
-                    <a:pt x="1818343" y="2371103"/>
-                  </a:lnTo>
-                  <a:lnTo>
-                    <a:pt x="1895977" y="2427136"/>
-                  </a:lnTo>
-                  <a:lnTo>
-                    <a:pt x="1973611" y="2480719"/>
-                  </a:lnTo>
-                  <a:lnTo>
-                    <a:pt x="2051245" y="2531959"/>
-                  </a:lnTo>
-                  <a:lnTo>
-                    <a:pt x="2128879" y="2580959"/>
-                  </a:lnTo>
-                  <a:lnTo>
-                    <a:pt x="2206513" y="2627816"/>
-                  </a:lnTo>
-                  <a:lnTo>
-                    <a:pt x="2284148" y="2672625"/>
-                  </a:lnTo>
-                  <a:lnTo>
-                    <a:pt x="2361782" y="2715474"/>
-                  </a:lnTo>
-                  <a:lnTo>
-                    <a:pt x="2439416" y="2756450"/>
-                  </a:lnTo>
-                  <a:lnTo>
-                    <a:pt x="2517050" y="2783407"/>
-                  </a:lnTo>
-                  <a:lnTo>
-                    <a:pt x="2594684" y="2784750"/>
-                  </a:lnTo>
-                  <a:lnTo>
-                    <a:pt x="2672318" y="2786090"/>
-                  </a:lnTo>
-                  <a:lnTo>
-                    <a:pt x="2749952" y="2787428"/>
-                  </a:lnTo>
-                  <a:lnTo>
-                    <a:pt x="2827586" y="2788764"/>
-                  </a:lnTo>
-                  <a:lnTo>
-                    <a:pt x="2905220" y="2790098"/>
-                  </a:lnTo>
-                  <a:lnTo>
-                    <a:pt x="2982854" y="2791430"/>
-                  </a:lnTo>
-                  <a:lnTo>
-                    <a:pt x="3060488" y="2792760"/>
-                  </a:lnTo>
-                  <a:lnTo>
-                    <a:pt x="3138122" y="2794088"/>
-                  </a:lnTo>
-                  <a:lnTo>
-                    <a:pt x="3215756" y="2795413"/>
-                  </a:lnTo>
-                  <a:lnTo>
-                    <a:pt x="3293390" y="2796737"/>
-                  </a:lnTo>
-                  <a:lnTo>
-                    <a:pt x="3371024" y="2798059"/>
-                  </a:lnTo>
-                  <a:lnTo>
-                    <a:pt x="3448658" y="2799379"/>
-                  </a:lnTo>
-                  <a:lnTo>
-                    <a:pt x="3526292" y="2800696"/>
-                  </a:lnTo>
-                  <a:lnTo>
-                    <a:pt x="3603926" y="2802012"/>
-                  </a:lnTo>
-                  <a:lnTo>
-                    <a:pt x="3681560" y="2803325"/>
-                  </a:lnTo>
-                  <a:lnTo>
-                    <a:pt x="3759194" y="2804637"/>
-                  </a:lnTo>
-                  <a:lnTo>
-                    <a:pt x="3836828" y="2805946"/>
-                  </a:lnTo>
-                  <a:lnTo>
-                    <a:pt x="3914462" y="2807254"/>
-                  </a:lnTo>
-                  <a:lnTo>
-                    <a:pt x="3992097" y="2808559"/>
-                  </a:lnTo>
-                  <a:lnTo>
-                    <a:pt x="4069731" y="2809863"/>
-                  </a:lnTo>
-                  <a:lnTo>
-                    <a:pt x="4147365" y="2811164"/>
-                  </a:lnTo>
-                  <a:lnTo>
-                    <a:pt x="4224999" y="2812464"/>
-                  </a:lnTo>
-                  <a:lnTo>
-                    <a:pt x="4302633" y="2813761"/>
-                  </a:lnTo>
-                  <a:lnTo>
-                    <a:pt x="4380267" y="2815056"/>
-                  </a:lnTo>
-                  <a:lnTo>
-                    <a:pt x="4457901" y="2816350"/>
-                  </a:lnTo>
-                  <a:lnTo>
-                    <a:pt x="4535535" y="2817641"/>
-                  </a:lnTo>
-                  <a:lnTo>
-                    <a:pt x="4613169" y="2818931"/>
-                  </a:lnTo>
-                  <a:lnTo>
-                    <a:pt x="4690803" y="2820218"/>
-                  </a:lnTo>
-                  <a:lnTo>
-                    <a:pt x="4768437" y="2821503"/>
-                  </a:lnTo>
-                  <a:lnTo>
-                    <a:pt x="4846071" y="2822787"/>
-                  </a:lnTo>
-                  <a:lnTo>
-                    <a:pt x="4923705" y="2824068"/>
-                  </a:lnTo>
-                  <a:lnTo>
-                    <a:pt x="5001339" y="2825348"/>
-                  </a:lnTo>
-                  <a:lnTo>
-                    <a:pt x="5078973" y="2826625"/>
-                  </a:lnTo>
-                  <a:lnTo>
-                    <a:pt x="5156607" y="2827901"/>
-                  </a:lnTo>
-                  <a:lnTo>
-                    <a:pt x="5234241" y="2829175"/>
-                  </a:lnTo>
-                  <a:lnTo>
-                    <a:pt x="5311875" y="2830446"/>
-                  </a:lnTo>
-                  <a:lnTo>
-                    <a:pt x="5389509" y="2831716"/>
-                  </a:lnTo>
-                  <a:lnTo>
-                    <a:pt x="5467143" y="2832983"/>
-                  </a:lnTo>
-                  <a:lnTo>
-                    <a:pt x="5544777" y="2834249"/>
-                  </a:lnTo>
-                  <a:lnTo>
-                    <a:pt x="5622411" y="2835513"/>
-                  </a:lnTo>
-                  <a:lnTo>
-                    <a:pt x="5700046" y="2836775"/>
-                  </a:lnTo>
-                  <a:lnTo>
-                    <a:pt x="5777680" y="2838035"/>
-                  </a:lnTo>
-                  <a:lnTo>
-                    <a:pt x="5855314" y="2839293"/>
-                  </a:lnTo>
-                  <a:lnTo>
-                    <a:pt x="5932948" y="2840549"/>
-                  </a:lnTo>
-                  <a:lnTo>
-                    <a:pt x="6010582" y="2841803"/>
-                  </a:lnTo>
-                  <a:lnTo>
-                    <a:pt x="6088216" y="2843055"/>
-                  </a:lnTo>
-                  <a:lnTo>
-                    <a:pt x="6165850" y="2844305"/>
-                  </a:lnTo>
-                  <a:lnTo>
-                    <a:pt x="6243484" y="2845553"/>
-                  </a:lnTo>
-                  <a:lnTo>
-                    <a:pt x="6321118" y="2846799"/>
-                  </a:lnTo>
-                  <a:lnTo>
-                    <a:pt x="6398752" y="2848044"/>
-                  </a:lnTo>
-                  <a:lnTo>
-                    <a:pt x="6476386" y="2849286"/>
+                    <a:pt x="8881" y="18600"/>
+                  </a:lnTo>
+                  <a:lnTo>
+                    <a:pt x="86515" y="174224"/>
+                  </a:lnTo>
+                  <a:lnTo>
+                    <a:pt x="164149" y="323184"/>
+                  </a:lnTo>
+                  <a:lnTo>
+                    <a:pt x="241783" y="465765"/>
+                  </a:lnTo>
+                  <a:lnTo>
+                    <a:pt x="319417" y="602240"/>
+                  </a:lnTo>
+                  <a:lnTo>
+                    <a:pt x="397051" y="732871"/>
+                  </a:lnTo>
+                  <a:lnTo>
+                    <a:pt x="474685" y="857907"/>
+                  </a:lnTo>
+                  <a:lnTo>
+                    <a:pt x="552319" y="977589"/>
+                  </a:lnTo>
+                  <a:lnTo>
+                    <a:pt x="629953" y="1092145"/>
+                  </a:lnTo>
+                  <a:lnTo>
+                    <a:pt x="707588" y="1201796"/>
+                  </a:lnTo>
+                  <a:lnTo>
+                    <a:pt x="785222" y="1306751"/>
+                  </a:lnTo>
+                  <a:lnTo>
+                    <a:pt x="862856" y="1407212"/>
+                  </a:lnTo>
+                  <a:lnTo>
+                    <a:pt x="940490" y="1503370"/>
+                  </a:lnTo>
+                  <a:lnTo>
+                    <a:pt x="1018124" y="1595411"/>
+                  </a:lnTo>
+                  <a:lnTo>
+                    <a:pt x="1095758" y="1683510"/>
+                  </a:lnTo>
+                  <a:lnTo>
+                    <a:pt x="1173392" y="1767836"/>
+                  </a:lnTo>
+                  <a:lnTo>
+                    <a:pt x="1251026" y="1848551"/>
+                  </a:lnTo>
+                  <a:lnTo>
+                    <a:pt x="1328660" y="1925810"/>
+                  </a:lnTo>
+                  <a:lnTo>
+                    <a:pt x="1406294" y="1999760"/>
+                  </a:lnTo>
+                  <a:lnTo>
+                    <a:pt x="1483928" y="2070543"/>
+                  </a:lnTo>
+                  <a:lnTo>
+                    <a:pt x="1561562" y="2138295"/>
+                  </a:lnTo>
+                  <a:lnTo>
+                    <a:pt x="1639196" y="2203145"/>
+                  </a:lnTo>
+                  <a:lnTo>
+                    <a:pt x="1716830" y="2265218"/>
+                  </a:lnTo>
+                  <a:lnTo>
+                    <a:pt x="1794464" y="2324634"/>
+                  </a:lnTo>
+                  <a:lnTo>
+                    <a:pt x="1872098" y="2381504"/>
+                  </a:lnTo>
+                  <a:lnTo>
+                    <a:pt x="1949732" y="2435940"/>
+                  </a:lnTo>
+                  <a:lnTo>
+                    <a:pt x="2027366" y="2488044"/>
+                  </a:lnTo>
+                  <a:lnTo>
+                    <a:pt x="2105000" y="2537917"/>
+                  </a:lnTo>
+                  <a:lnTo>
+                    <a:pt x="2182634" y="2585654"/>
+                  </a:lnTo>
+                  <a:lnTo>
+                    <a:pt x="2260268" y="2631346"/>
+                  </a:lnTo>
+                  <a:lnTo>
+                    <a:pt x="2337902" y="2675083"/>
+                  </a:lnTo>
+                  <a:lnTo>
+                    <a:pt x="2415536" y="2716946"/>
+                  </a:lnTo>
+                  <a:lnTo>
+                    <a:pt x="2493171" y="2757016"/>
+                  </a:lnTo>
+                  <a:lnTo>
+                    <a:pt x="2570805" y="2783161"/>
+                  </a:lnTo>
+                  <a:lnTo>
+                    <a:pt x="2648439" y="2783755"/>
+                  </a:lnTo>
+                  <a:lnTo>
+                    <a:pt x="2726073" y="2784349"/>
+                  </a:lnTo>
+                  <a:lnTo>
+                    <a:pt x="2803707" y="2784942"/>
+                  </a:lnTo>
+                  <a:lnTo>
+                    <a:pt x="2881341" y="2785534"/>
+                  </a:lnTo>
+                  <a:lnTo>
+                    <a:pt x="2958975" y="2786127"/>
+                  </a:lnTo>
+                  <a:lnTo>
+                    <a:pt x="3036609" y="2786719"/>
+                  </a:lnTo>
+                  <a:lnTo>
+                    <a:pt x="3114243" y="2787310"/>
+                  </a:lnTo>
+                  <a:lnTo>
+                    <a:pt x="3191877" y="2787901"/>
+                  </a:lnTo>
+                  <a:lnTo>
+                    <a:pt x="3269511" y="2788492"/>
+                  </a:lnTo>
+                  <a:lnTo>
+                    <a:pt x="3347145" y="2789082"/>
+                  </a:lnTo>
+                  <a:lnTo>
+                    <a:pt x="3424779" y="2789672"/>
+                  </a:lnTo>
+                  <a:lnTo>
+                    <a:pt x="3502413" y="2790262"/>
+                  </a:lnTo>
+                  <a:lnTo>
+                    <a:pt x="3580047" y="2790851"/>
+                  </a:lnTo>
+                  <a:lnTo>
+                    <a:pt x="3657681" y="2791439"/>
+                  </a:lnTo>
+                  <a:lnTo>
+                    <a:pt x="3735315" y="2792028"/>
+                  </a:lnTo>
+                  <a:lnTo>
+                    <a:pt x="3812949" y="2792615"/>
+                  </a:lnTo>
+                  <a:lnTo>
+                    <a:pt x="3890583" y="2793203"/>
+                  </a:lnTo>
+                  <a:lnTo>
+                    <a:pt x="3968217" y="2793790"/>
+                  </a:lnTo>
+                  <a:lnTo>
+                    <a:pt x="4045851" y="2794377"/>
+                  </a:lnTo>
+                  <a:lnTo>
+                    <a:pt x="4123485" y="2794963"/>
+                  </a:lnTo>
+                  <a:lnTo>
+                    <a:pt x="4201120" y="2795549"/>
+                  </a:lnTo>
+                  <a:lnTo>
+                    <a:pt x="4278754" y="2796134"/>
+                  </a:lnTo>
+                  <a:lnTo>
+                    <a:pt x="4356388" y="2796719"/>
+                  </a:lnTo>
+                  <a:lnTo>
+                    <a:pt x="4434022" y="2797304"/>
+                  </a:lnTo>
+                  <a:lnTo>
+                    <a:pt x="4511656" y="2797888"/>
+                  </a:lnTo>
+                  <a:lnTo>
+                    <a:pt x="4589290" y="2798472"/>
+                  </a:lnTo>
+                  <a:lnTo>
+                    <a:pt x="4666924" y="2799056"/>
+                  </a:lnTo>
+                  <a:lnTo>
+                    <a:pt x="4744558" y="2799639"/>
+                  </a:lnTo>
+                  <a:lnTo>
+                    <a:pt x="4822192" y="2800221"/>
+                  </a:lnTo>
+                  <a:lnTo>
+                    <a:pt x="4899826" y="2800804"/>
+                  </a:lnTo>
+                  <a:lnTo>
+                    <a:pt x="4977460" y="2801385"/>
+                  </a:lnTo>
+                  <a:lnTo>
+                    <a:pt x="5055094" y="2801967"/>
+                  </a:lnTo>
+                  <a:lnTo>
+                    <a:pt x="5132728" y="2802548"/>
+                  </a:lnTo>
+                  <a:lnTo>
+                    <a:pt x="5210362" y="2803129"/>
+                  </a:lnTo>
+                  <a:lnTo>
+                    <a:pt x="5287996" y="2803709"/>
+                  </a:lnTo>
+                  <a:lnTo>
+                    <a:pt x="5365630" y="2804289"/>
+                  </a:lnTo>
+                  <a:lnTo>
+                    <a:pt x="5443264" y="2804868"/>
+                  </a:lnTo>
+                  <a:lnTo>
+                    <a:pt x="5520898" y="2805447"/>
+                  </a:lnTo>
+                  <a:lnTo>
+                    <a:pt x="5598532" y="2806026"/>
+                  </a:lnTo>
+                  <a:lnTo>
+                    <a:pt x="5676166" y="2806604"/>
+                  </a:lnTo>
+                  <a:lnTo>
+                    <a:pt x="5753800" y="2807182"/>
+                  </a:lnTo>
+                  <a:lnTo>
+                    <a:pt x="5831434" y="2807760"/>
+                  </a:lnTo>
+                  <a:lnTo>
+                    <a:pt x="5909069" y="2808337"/>
+                  </a:lnTo>
+                  <a:lnTo>
+                    <a:pt x="5986703" y="2808914"/>
+                  </a:lnTo>
+                  <a:lnTo>
+                    <a:pt x="6064337" y="2809490"/>
+                  </a:lnTo>
+                  <a:lnTo>
+                    <a:pt x="6141971" y="2810066"/>
+                  </a:lnTo>
+                  <a:lnTo>
+                    <a:pt x="6219605" y="2810642"/>
+                  </a:lnTo>
+                  <a:lnTo>
+                    <a:pt x="6297239" y="2811217"/>
+                  </a:lnTo>
+                  <a:lnTo>
+                    <a:pt x="6374873" y="2811791"/>
+                  </a:lnTo>
+                  <a:lnTo>
+                    <a:pt x="6452507" y="2812366"/>
+                  </a:lnTo>
+                  <a:lnTo>
+                    <a:pt x="6530141" y="2812940"/>
                   </a:lnTo>
                 </a:path>
               </a:pathLst>
@@ -3856,297 +3862,297 @@
           </p:nvSpPr>
           <p:spPr>
             <a:xfrm>
-              <a:off x="817517" y="4618888"/>
-              <a:ext cx="7370972" cy="842669"/>
+              <a:off x="817517" y="4653220"/>
+              <a:ext cx="7370972" cy="804005"/>
             </a:xfrm>
             <a:custGeom>
               <a:avLst/>
               <a:pathLst>
-                <a:path w="7370972" h="842669">
+                <a:path w="7370972" h="804005">
                   <a:moveTo>
-                    <a:pt x="7370972" y="842669"/>
+                    <a:pt x="7370972" y="804005"/>
                   </a:moveTo>
                   <a:lnTo>
-                    <a:pt x="7293338" y="838661"/>
-                  </a:lnTo>
-                  <a:lnTo>
-                    <a:pt x="7215704" y="834470"/>
-                  </a:lnTo>
-                  <a:lnTo>
-                    <a:pt x="7138070" y="830088"/>
-                  </a:lnTo>
-                  <a:lnTo>
-                    <a:pt x="7060436" y="825505"/>
-                  </a:lnTo>
-                  <a:lnTo>
-                    <a:pt x="6982802" y="820713"/>
-                  </a:lnTo>
-                  <a:lnTo>
-                    <a:pt x="6905168" y="815701"/>
-                  </a:lnTo>
-                  <a:lnTo>
-                    <a:pt x="6827534" y="810461"/>
-                  </a:lnTo>
-                  <a:lnTo>
-                    <a:pt x="6749900" y="804981"/>
-                  </a:lnTo>
-                  <a:lnTo>
-                    <a:pt x="6672266" y="799250"/>
-                  </a:lnTo>
-                  <a:lnTo>
-                    <a:pt x="6594632" y="793257"/>
-                  </a:lnTo>
-                  <a:lnTo>
-                    <a:pt x="6516998" y="786990"/>
-                  </a:lnTo>
-                  <a:lnTo>
-                    <a:pt x="6439364" y="780437"/>
-                  </a:lnTo>
-                  <a:lnTo>
-                    <a:pt x="6361730" y="773584"/>
-                  </a:lnTo>
-                  <a:lnTo>
-                    <a:pt x="6284096" y="766418"/>
-                  </a:lnTo>
-                  <a:lnTo>
-                    <a:pt x="6206462" y="758924"/>
-                  </a:lnTo>
-                  <a:lnTo>
-                    <a:pt x="6128827" y="751087"/>
-                  </a:lnTo>
-                  <a:lnTo>
-                    <a:pt x="6051193" y="742893"/>
-                  </a:lnTo>
-                  <a:lnTo>
-                    <a:pt x="5973559" y="734323"/>
-                  </a:lnTo>
-                  <a:lnTo>
-                    <a:pt x="5895925" y="725362"/>
-                  </a:lnTo>
-                  <a:lnTo>
-                    <a:pt x="5818291" y="715991"/>
-                  </a:lnTo>
-                  <a:lnTo>
-                    <a:pt x="5740657" y="706191"/>
-                  </a:lnTo>
-                  <a:lnTo>
-                    <a:pt x="5663023" y="695944"/>
-                  </a:lnTo>
-                  <a:lnTo>
-                    <a:pt x="5585389" y="685227"/>
-                  </a:lnTo>
-                  <a:lnTo>
-                    <a:pt x="5507755" y="674021"/>
-                  </a:lnTo>
-                  <a:lnTo>
-                    <a:pt x="5430121" y="662303"/>
-                  </a:lnTo>
-                  <a:lnTo>
-                    <a:pt x="5352487" y="650048"/>
-                  </a:lnTo>
-                  <a:lnTo>
-                    <a:pt x="5274853" y="637234"/>
-                  </a:lnTo>
-                  <a:lnTo>
-                    <a:pt x="5197219" y="623833"/>
-                  </a:lnTo>
-                  <a:lnTo>
-                    <a:pt x="5119585" y="609820"/>
-                  </a:lnTo>
-                  <a:lnTo>
-                    <a:pt x="5041951" y="595166"/>
-                  </a:lnTo>
-                  <a:lnTo>
-                    <a:pt x="4964317" y="579842"/>
-                  </a:lnTo>
-                  <a:lnTo>
-                    <a:pt x="4886683" y="563818"/>
-                  </a:lnTo>
-                  <a:lnTo>
-                    <a:pt x="4809049" y="547061"/>
-                  </a:lnTo>
-                  <a:lnTo>
-                    <a:pt x="4731415" y="529537"/>
-                  </a:lnTo>
-                  <a:lnTo>
-                    <a:pt x="4653781" y="511213"/>
-                  </a:lnTo>
-                  <a:lnTo>
-                    <a:pt x="4576147" y="492050"/>
-                  </a:lnTo>
-                  <a:lnTo>
-                    <a:pt x="4498513" y="472012"/>
-                  </a:lnTo>
-                  <a:lnTo>
-                    <a:pt x="4420879" y="451057"/>
-                  </a:lnTo>
-                  <a:lnTo>
-                    <a:pt x="4343244" y="429144"/>
-                  </a:lnTo>
-                  <a:lnTo>
-                    <a:pt x="4265610" y="406229"/>
-                  </a:lnTo>
-                  <a:lnTo>
-                    <a:pt x="4187976" y="382267"/>
-                  </a:lnTo>
-                  <a:lnTo>
-                    <a:pt x="4110342" y="357208"/>
-                  </a:lnTo>
-                  <a:lnTo>
-                    <a:pt x="4032708" y="331005"/>
-                  </a:lnTo>
-                  <a:lnTo>
-                    <a:pt x="3955074" y="303603"/>
-                  </a:lnTo>
-                  <a:lnTo>
-                    <a:pt x="3877440" y="274948"/>
-                  </a:lnTo>
-                  <a:lnTo>
-                    <a:pt x="3799806" y="244983"/>
-                  </a:lnTo>
-                  <a:lnTo>
-                    <a:pt x="3722172" y="213648"/>
-                  </a:lnTo>
-                  <a:lnTo>
-                    <a:pt x="3644538" y="180880"/>
-                  </a:lnTo>
-                  <a:lnTo>
-                    <a:pt x="3566904" y="146614"/>
-                  </a:lnTo>
-                  <a:lnTo>
-                    <a:pt x="3489270" y="110781"/>
-                  </a:lnTo>
-                  <a:lnTo>
-                    <a:pt x="3411636" y="73310"/>
-                  </a:lnTo>
-                  <a:lnTo>
-                    <a:pt x="3334002" y="59738"/>
-                  </a:lnTo>
-                  <a:lnTo>
-                    <a:pt x="3256368" y="58392"/>
-                  </a:lnTo>
-                  <a:lnTo>
-                    <a:pt x="3178734" y="57043"/>
-                  </a:lnTo>
-                  <a:lnTo>
-                    <a:pt x="3101100" y="55693"/>
-                  </a:lnTo>
-                  <a:lnTo>
-                    <a:pt x="3023466" y="54340"/>
-                  </a:lnTo>
-                  <a:lnTo>
-                    <a:pt x="2945832" y="52985"/>
-                  </a:lnTo>
-                  <a:lnTo>
-                    <a:pt x="2868198" y="51628"/>
-                  </a:lnTo>
-                  <a:lnTo>
-                    <a:pt x="2790564" y="50269"/>
-                  </a:lnTo>
-                  <a:lnTo>
-                    <a:pt x="2712930" y="48908"/>
-                  </a:lnTo>
-                  <a:lnTo>
-                    <a:pt x="2635295" y="47545"/>
-                  </a:lnTo>
-                  <a:lnTo>
-                    <a:pt x="2557661" y="46180"/>
-                  </a:lnTo>
-                  <a:lnTo>
-                    <a:pt x="2480027" y="44812"/>
-                  </a:lnTo>
-                  <a:lnTo>
-                    <a:pt x="2402393" y="43443"/>
-                  </a:lnTo>
-                  <a:lnTo>
-                    <a:pt x="2324759" y="42071"/>
-                  </a:lnTo>
-                  <a:lnTo>
-                    <a:pt x="2247125" y="40697"/>
-                  </a:lnTo>
-                  <a:lnTo>
-                    <a:pt x="2169491" y="39322"/>
-                  </a:lnTo>
-                  <a:lnTo>
-                    <a:pt x="2091857" y="37944"/>
-                  </a:lnTo>
-                  <a:lnTo>
-                    <a:pt x="2014223" y="36563"/>
-                  </a:lnTo>
-                  <a:lnTo>
-                    <a:pt x="1936589" y="35181"/>
-                  </a:lnTo>
-                  <a:lnTo>
-                    <a:pt x="1858955" y="33797"/>
-                  </a:lnTo>
-                  <a:lnTo>
-                    <a:pt x="1781321" y="32410"/>
-                  </a:lnTo>
-                  <a:lnTo>
-                    <a:pt x="1703687" y="31021"/>
-                  </a:lnTo>
-                  <a:lnTo>
-                    <a:pt x="1626053" y="29631"/>
-                  </a:lnTo>
-                  <a:lnTo>
-                    <a:pt x="1548419" y="28238"/>
-                  </a:lnTo>
-                  <a:lnTo>
-                    <a:pt x="1470785" y="26842"/>
-                  </a:lnTo>
-                  <a:lnTo>
-                    <a:pt x="1393151" y="25445"/>
-                  </a:lnTo>
-                  <a:lnTo>
-                    <a:pt x="1315517" y="24046"/>
-                  </a:lnTo>
-                  <a:lnTo>
-                    <a:pt x="1237883" y="22644"/>
-                  </a:lnTo>
-                  <a:lnTo>
-                    <a:pt x="1160249" y="21240"/>
-                  </a:lnTo>
-                  <a:lnTo>
-                    <a:pt x="1082615" y="19834"/>
-                  </a:lnTo>
-                  <a:lnTo>
-                    <a:pt x="1004981" y="18426"/>
-                  </a:lnTo>
-                  <a:lnTo>
-                    <a:pt x="927346" y="17016"/>
-                  </a:lnTo>
-                  <a:lnTo>
-                    <a:pt x="849712" y="15603"/>
-                  </a:lnTo>
-                  <a:lnTo>
-                    <a:pt x="772078" y="14189"/>
-                  </a:lnTo>
-                  <a:lnTo>
-                    <a:pt x="694444" y="12772"/>
-                  </a:lnTo>
-                  <a:lnTo>
-                    <a:pt x="616810" y="11353"/>
-                  </a:lnTo>
-                  <a:lnTo>
-                    <a:pt x="539176" y="9931"/>
-                  </a:lnTo>
-                  <a:lnTo>
-                    <a:pt x="461542" y="8508"/>
-                  </a:lnTo>
-                  <a:lnTo>
-                    <a:pt x="383908" y="7082"/>
-                  </a:lnTo>
-                  <a:lnTo>
-                    <a:pt x="306274" y="5654"/>
-                  </a:lnTo>
-                  <a:lnTo>
-                    <a:pt x="228640" y="4224"/>
-                  </a:lnTo>
-                  <a:lnTo>
-                    <a:pt x="151006" y="2792"/>
-                  </a:lnTo>
-                  <a:lnTo>
-                    <a:pt x="73372" y="1357"/>
+                    <a:pt x="7293338" y="799890"/>
+                  </a:lnTo>
+                  <a:lnTo>
+                    <a:pt x="7215704" y="795590"/>
+                  </a:lnTo>
+                  <a:lnTo>
+                    <a:pt x="7138070" y="791099"/>
+                  </a:lnTo>
+                  <a:lnTo>
+                    <a:pt x="7060436" y="786406"/>
+                  </a:lnTo>
+                  <a:lnTo>
+                    <a:pt x="6982802" y="781503"/>
+                  </a:lnTo>
+                  <a:lnTo>
+                    <a:pt x="6905168" y="776381"/>
+                  </a:lnTo>
+                  <a:lnTo>
+                    <a:pt x="6827534" y="771030"/>
+                  </a:lnTo>
+                  <a:lnTo>
+                    <a:pt x="6749900" y="765440"/>
+                  </a:lnTo>
+                  <a:lnTo>
+                    <a:pt x="6672266" y="759599"/>
+                  </a:lnTo>
+                  <a:lnTo>
+                    <a:pt x="6594632" y="753497"/>
+                  </a:lnTo>
+                  <a:lnTo>
+                    <a:pt x="6516998" y="747122"/>
+                  </a:lnTo>
+                  <a:lnTo>
+                    <a:pt x="6439364" y="740462"/>
+                  </a:lnTo>
+                  <a:lnTo>
+                    <a:pt x="6361730" y="733504"/>
+                  </a:lnTo>
+                  <a:lnTo>
+                    <a:pt x="6284096" y="726234"/>
+                  </a:lnTo>
+                  <a:lnTo>
+                    <a:pt x="6206462" y="718640"/>
+                  </a:lnTo>
+                  <a:lnTo>
+                    <a:pt x="6128827" y="710705"/>
+                  </a:lnTo>
+                  <a:lnTo>
+                    <a:pt x="6051193" y="702416"/>
+                  </a:lnTo>
+                  <a:lnTo>
+                    <a:pt x="5973559" y="693755"/>
+                  </a:lnTo>
+                  <a:lnTo>
+                    <a:pt x="5895925" y="684707"/>
+                  </a:lnTo>
+                  <a:lnTo>
+                    <a:pt x="5818291" y="675255"/>
+                  </a:lnTo>
+                  <a:lnTo>
+                    <a:pt x="5740657" y="665379"/>
+                  </a:lnTo>
+                  <a:lnTo>
+                    <a:pt x="5663023" y="655062"/>
+                  </a:lnTo>
+                  <a:lnTo>
+                    <a:pt x="5585389" y="644283"/>
+                  </a:lnTo>
+                  <a:lnTo>
+                    <a:pt x="5507755" y="633022"/>
+                  </a:lnTo>
+                  <a:lnTo>
+                    <a:pt x="5430121" y="621257"/>
+                  </a:lnTo>
+                  <a:lnTo>
+                    <a:pt x="5352487" y="608965"/>
+                  </a:lnTo>
+                  <a:lnTo>
+                    <a:pt x="5274853" y="596124"/>
+                  </a:lnTo>
+                  <a:lnTo>
+                    <a:pt x="5197219" y="582708"/>
+                  </a:lnTo>
+                  <a:lnTo>
+                    <a:pt x="5119585" y="568692"/>
+                  </a:lnTo>
+                  <a:lnTo>
+                    <a:pt x="5041951" y="554049"/>
+                  </a:lnTo>
+                  <a:lnTo>
+                    <a:pt x="4964317" y="538751"/>
+                  </a:lnTo>
+                  <a:lnTo>
+                    <a:pt x="4886683" y="522768"/>
+                  </a:lnTo>
+                  <a:lnTo>
+                    <a:pt x="4809049" y="506070"/>
+                  </a:lnTo>
+                  <a:lnTo>
+                    <a:pt x="4731415" y="488625"/>
+                  </a:lnTo>
+                  <a:lnTo>
+                    <a:pt x="4653781" y="470400"/>
+                  </a:lnTo>
+                  <a:lnTo>
+                    <a:pt x="4576147" y="451359"/>
+                  </a:lnTo>
+                  <a:lnTo>
+                    <a:pt x="4498513" y="431467"/>
+                  </a:lnTo>
+                  <a:lnTo>
+                    <a:pt x="4420879" y="410684"/>
+                  </a:lnTo>
+                  <a:lnTo>
+                    <a:pt x="4343244" y="388972"/>
+                  </a:lnTo>
+                  <a:lnTo>
+                    <a:pt x="4265610" y="366288"/>
+                  </a:lnTo>
+                  <a:lnTo>
+                    <a:pt x="4187976" y="342589"/>
+                  </a:lnTo>
+                  <a:lnTo>
+                    <a:pt x="4110342" y="317830"/>
+                  </a:lnTo>
+                  <a:lnTo>
+                    <a:pt x="4032708" y="291964"/>
+                  </a:lnTo>
+                  <a:lnTo>
+                    <a:pt x="3955074" y="264940"/>
+                  </a:lnTo>
+                  <a:lnTo>
+                    <a:pt x="3877440" y="236707"/>
+                  </a:lnTo>
+                  <a:lnTo>
+                    <a:pt x="3799806" y="207210"/>
+                  </a:lnTo>
+                  <a:lnTo>
+                    <a:pt x="3722172" y="176395"/>
+                  </a:lnTo>
+                  <a:lnTo>
+                    <a:pt x="3644538" y="144200"/>
+                  </a:lnTo>
+                  <a:lnTo>
+                    <a:pt x="3566904" y="110565"/>
+                  </a:lnTo>
+                  <a:lnTo>
+                    <a:pt x="3489270" y="75425"/>
+                  </a:lnTo>
+                  <a:lnTo>
+                    <a:pt x="3411636" y="38714"/>
+                  </a:lnTo>
+                  <a:lnTo>
+                    <a:pt x="3334002" y="25910"/>
+                  </a:lnTo>
+                  <a:lnTo>
+                    <a:pt x="3256368" y="25315"/>
+                  </a:lnTo>
+                  <a:lnTo>
+                    <a:pt x="3178734" y="24720"/>
+                  </a:lnTo>
+                  <a:lnTo>
+                    <a:pt x="3101100" y="24125"/>
+                  </a:lnTo>
+                  <a:lnTo>
+                    <a:pt x="3023466" y="23529"/>
+                  </a:lnTo>
+                  <a:lnTo>
+                    <a:pt x="2945832" y="22932"/>
+                  </a:lnTo>
+                  <a:lnTo>
+                    <a:pt x="2868198" y="22336"/>
+                  </a:lnTo>
+                  <a:lnTo>
+                    <a:pt x="2790564" y="21738"/>
+                  </a:lnTo>
+                  <a:lnTo>
+                    <a:pt x="2712930" y="21141"/>
+                  </a:lnTo>
+                  <a:lnTo>
+                    <a:pt x="2635295" y="20543"/>
+                  </a:lnTo>
+                  <a:lnTo>
+                    <a:pt x="2557661" y="19944"/>
+                  </a:lnTo>
+                  <a:lnTo>
+                    <a:pt x="2480027" y="19346"/>
+                  </a:lnTo>
+                  <a:lnTo>
+                    <a:pt x="2402393" y="18746"/>
+                  </a:lnTo>
+                  <a:lnTo>
+                    <a:pt x="2324759" y="18147"/>
+                  </a:lnTo>
+                  <a:lnTo>
+                    <a:pt x="2247125" y="17547"/>
+                  </a:lnTo>
+                  <a:lnTo>
+                    <a:pt x="2169491" y="16946"/>
+                  </a:lnTo>
+                  <a:lnTo>
+                    <a:pt x="2091857" y="16345"/>
+                  </a:lnTo>
+                  <a:lnTo>
+                    <a:pt x="2014223" y="15744"/>
+                  </a:lnTo>
+                  <a:lnTo>
+                    <a:pt x="1936589" y="15142"/>
+                  </a:lnTo>
+                  <a:lnTo>
+                    <a:pt x="1858955" y="14540"/>
+                  </a:lnTo>
+                  <a:lnTo>
+                    <a:pt x="1781321" y="13938"/>
+                  </a:lnTo>
+                  <a:lnTo>
+                    <a:pt x="1703687" y="13335"/>
+                  </a:lnTo>
+                  <a:lnTo>
+                    <a:pt x="1626053" y="12732"/>
+                  </a:lnTo>
+                  <a:lnTo>
+                    <a:pt x="1548419" y="12128"/>
+                  </a:lnTo>
+                  <a:lnTo>
+                    <a:pt x="1470785" y="11524"/>
+                  </a:lnTo>
+                  <a:lnTo>
+                    <a:pt x="1393151" y="10919"/>
+                  </a:lnTo>
+                  <a:lnTo>
+                    <a:pt x="1315517" y="10314"/>
+                  </a:lnTo>
+                  <a:lnTo>
+                    <a:pt x="1237883" y="9709"/>
+                  </a:lnTo>
+                  <a:lnTo>
+                    <a:pt x="1160249" y="9103"/>
+                  </a:lnTo>
+                  <a:lnTo>
+                    <a:pt x="1082615" y="8497"/>
+                  </a:lnTo>
+                  <a:lnTo>
+                    <a:pt x="1004981" y="7890"/>
+                  </a:lnTo>
+                  <a:lnTo>
+                    <a:pt x="927346" y="7283"/>
+                  </a:lnTo>
+                  <a:lnTo>
+                    <a:pt x="849712" y="6676"/>
+                  </a:lnTo>
+                  <a:lnTo>
+                    <a:pt x="772078" y="6068"/>
+                  </a:lnTo>
+                  <a:lnTo>
+                    <a:pt x="694444" y="5459"/>
+                  </a:lnTo>
+                  <a:lnTo>
+                    <a:pt x="616810" y="4851"/>
+                  </a:lnTo>
+                  <a:lnTo>
+                    <a:pt x="539176" y="4241"/>
+                  </a:lnTo>
+                  <a:lnTo>
+                    <a:pt x="461542" y="3632"/>
+                  </a:lnTo>
+                  <a:lnTo>
+                    <a:pt x="383908" y="3022"/>
+                  </a:lnTo>
+                  <a:lnTo>
+                    <a:pt x="306274" y="2412"/>
+                  </a:lnTo>
+                  <a:lnTo>
+                    <a:pt x="228640" y="1801"/>
+                  </a:lnTo>
+                  <a:lnTo>
+                    <a:pt x="151006" y="1190"/>
+                  </a:lnTo>
+                  <a:lnTo>
+                    <a:pt x="73372" y="578"/>
                   </a:lnTo>
                   <a:lnTo>
                     <a:pt x="0" y="0"/>
@@ -4169,300 +4175,300 @@
           </p:nvSpPr>
           <p:spPr>
             <a:xfrm>
-              <a:off x="817517" y="3164467"/>
-              <a:ext cx="7370972" cy="2119382"/>
+              <a:off x="817517" y="3256361"/>
+              <a:ext cx="7370972" cy="2014930"/>
             </a:xfrm>
             <a:custGeom>
               <a:avLst/>
               <a:pathLst>
-                <a:path w="7370972" h="2119382">
+                <a:path w="7370972" h="2014930">
                   <a:moveTo>
                     <a:pt x="0" y="0"/>
                   </a:moveTo>
                   <a:lnTo>
-                    <a:pt x="73372" y="51590"/>
-                  </a:lnTo>
-                  <a:lnTo>
-                    <a:pt x="151006" y="104928"/>
-                  </a:lnTo>
-                  <a:lnTo>
-                    <a:pt x="228640" y="157047"/>
-                  </a:lnTo>
-                  <a:lnTo>
-                    <a:pt x="306274" y="207975"/>
-                  </a:lnTo>
-                  <a:lnTo>
-                    <a:pt x="383908" y="257739"/>
-                  </a:lnTo>
-                  <a:lnTo>
-                    <a:pt x="461542" y="306364"/>
-                  </a:lnTo>
-                  <a:lnTo>
-                    <a:pt x="539176" y="353879"/>
-                  </a:lnTo>
-                  <a:lnTo>
-                    <a:pt x="616810" y="400306"/>
-                  </a:lnTo>
-                  <a:lnTo>
-                    <a:pt x="694444" y="445673"/>
-                  </a:lnTo>
-                  <a:lnTo>
-                    <a:pt x="772078" y="490002"/>
-                  </a:lnTo>
-                  <a:lnTo>
-                    <a:pt x="849712" y="533318"/>
-                  </a:lnTo>
-                  <a:lnTo>
-                    <a:pt x="927346" y="575644"/>
-                  </a:lnTo>
-                  <a:lnTo>
-                    <a:pt x="1004981" y="617002"/>
-                  </a:lnTo>
-                  <a:lnTo>
-                    <a:pt x="1082615" y="657415"/>
-                  </a:lnTo>
-                  <a:lnTo>
-                    <a:pt x="1160249" y="696903"/>
-                  </a:lnTo>
-                  <a:lnTo>
-                    <a:pt x="1237883" y="735489"/>
-                  </a:lnTo>
-                  <a:lnTo>
-                    <a:pt x="1315517" y="773193"/>
-                  </a:lnTo>
-                  <a:lnTo>
-                    <a:pt x="1393151" y="810035"/>
-                  </a:lnTo>
-                  <a:lnTo>
-                    <a:pt x="1470785" y="846035"/>
-                  </a:lnTo>
-                  <a:lnTo>
-                    <a:pt x="1548419" y="881211"/>
-                  </a:lnTo>
-                  <a:lnTo>
-                    <a:pt x="1626053" y="915584"/>
-                  </a:lnTo>
-                  <a:lnTo>
-                    <a:pt x="1703687" y="949170"/>
-                  </a:lnTo>
-                  <a:lnTo>
-                    <a:pt x="1781321" y="981989"/>
-                  </a:lnTo>
-                  <a:lnTo>
-                    <a:pt x="1858955" y="1014058"/>
-                  </a:lnTo>
-                  <a:lnTo>
-                    <a:pt x="1936589" y="1045393"/>
-                  </a:lnTo>
-                  <a:lnTo>
-                    <a:pt x="2014223" y="1076012"/>
-                  </a:lnTo>
-                  <a:lnTo>
-                    <a:pt x="2091857" y="1105931"/>
-                  </a:lnTo>
-                  <a:lnTo>
-                    <a:pt x="2169491" y="1135166"/>
-                  </a:lnTo>
-                  <a:lnTo>
-                    <a:pt x="2247125" y="1163733"/>
-                  </a:lnTo>
-                  <a:lnTo>
-                    <a:pt x="2324759" y="1191647"/>
-                  </a:lnTo>
-                  <a:lnTo>
-                    <a:pt x="2402393" y="1218922"/>
-                  </a:lnTo>
-                  <a:lnTo>
-                    <a:pt x="2480027" y="1245574"/>
-                  </a:lnTo>
-                  <a:lnTo>
-                    <a:pt x="2557661" y="1271617"/>
-                  </a:lnTo>
-                  <a:lnTo>
-                    <a:pt x="2635295" y="1297064"/>
-                  </a:lnTo>
-                  <a:lnTo>
-                    <a:pt x="2712930" y="1321930"/>
-                  </a:lnTo>
-                  <a:lnTo>
-                    <a:pt x="2790564" y="1346227"/>
-                  </a:lnTo>
-                  <a:lnTo>
-                    <a:pt x="2868198" y="1369969"/>
-                  </a:lnTo>
-                  <a:lnTo>
-                    <a:pt x="2945832" y="1393167"/>
-                  </a:lnTo>
-                  <a:lnTo>
-                    <a:pt x="3023466" y="1415836"/>
-                  </a:lnTo>
-                  <a:lnTo>
-                    <a:pt x="3101100" y="1437986"/>
-                  </a:lnTo>
-                  <a:lnTo>
-                    <a:pt x="3178734" y="1459630"/>
-                  </a:lnTo>
-                  <a:lnTo>
-                    <a:pt x="3256368" y="1480779"/>
-                  </a:lnTo>
-                  <a:lnTo>
-                    <a:pt x="3334002" y="1501445"/>
-                  </a:lnTo>
-                  <a:lnTo>
-                    <a:pt x="3411636" y="1521638"/>
-                  </a:lnTo>
-                  <a:lnTo>
-                    <a:pt x="3489270" y="1541370"/>
-                  </a:lnTo>
-                  <a:lnTo>
-                    <a:pt x="3566904" y="1560650"/>
-                  </a:lnTo>
-                  <a:lnTo>
-                    <a:pt x="3644538" y="1579490"/>
-                  </a:lnTo>
-                  <a:lnTo>
-                    <a:pt x="3722172" y="1597899"/>
-                  </a:lnTo>
-                  <a:lnTo>
-                    <a:pt x="3799806" y="1615887"/>
-                  </a:lnTo>
-                  <a:lnTo>
-                    <a:pt x="3877440" y="1633464"/>
-                  </a:lnTo>
-                  <a:lnTo>
-                    <a:pt x="3955074" y="1650639"/>
-                  </a:lnTo>
-                  <a:lnTo>
-                    <a:pt x="4032708" y="1667421"/>
-                  </a:lnTo>
-                  <a:lnTo>
-                    <a:pt x="4110342" y="1683820"/>
-                  </a:lnTo>
-                  <a:lnTo>
-                    <a:pt x="4187976" y="1699844"/>
-                  </a:lnTo>
-                  <a:lnTo>
-                    <a:pt x="4265610" y="1715501"/>
-                  </a:lnTo>
-                  <a:lnTo>
-                    <a:pt x="4343244" y="1730801"/>
-                  </a:lnTo>
-                  <a:lnTo>
-                    <a:pt x="4420879" y="1745751"/>
-                  </a:lnTo>
-                  <a:lnTo>
-                    <a:pt x="4498513" y="1760359"/>
-                  </a:lnTo>
-                  <a:lnTo>
-                    <a:pt x="4576147" y="1774633"/>
-                  </a:lnTo>
-                  <a:lnTo>
-                    <a:pt x="4653781" y="1788581"/>
-                  </a:lnTo>
-                  <a:lnTo>
-                    <a:pt x="4731415" y="1802209"/>
-                  </a:lnTo>
-                  <a:lnTo>
-                    <a:pt x="4809049" y="1815527"/>
-                  </a:lnTo>
-                  <a:lnTo>
-                    <a:pt x="4886683" y="1828540"/>
-                  </a:lnTo>
-                  <a:lnTo>
-                    <a:pt x="4964317" y="1841255"/>
-                  </a:lnTo>
-                  <a:lnTo>
-                    <a:pt x="5041951" y="1853680"/>
-                  </a:lnTo>
-                  <a:lnTo>
-                    <a:pt x="5119585" y="1865820"/>
-                  </a:lnTo>
-                  <a:lnTo>
-                    <a:pt x="5197219" y="1877683"/>
-                  </a:lnTo>
-                  <a:lnTo>
-                    <a:pt x="5274853" y="1889275"/>
-                  </a:lnTo>
-                  <a:lnTo>
-                    <a:pt x="5352487" y="1900602"/>
-                  </a:lnTo>
-                  <a:lnTo>
-                    <a:pt x="5430121" y="1911670"/>
-                  </a:lnTo>
-                  <a:lnTo>
-                    <a:pt x="5507755" y="1922485"/>
-                  </a:lnTo>
-                  <a:lnTo>
-                    <a:pt x="5585389" y="1933053"/>
-                  </a:lnTo>
-                  <a:lnTo>
-                    <a:pt x="5663023" y="1943379"/>
-                  </a:lnTo>
-                  <a:lnTo>
-                    <a:pt x="5740657" y="1953469"/>
-                  </a:lnTo>
-                  <a:lnTo>
-                    <a:pt x="5818291" y="1963328"/>
-                  </a:lnTo>
-                  <a:lnTo>
-                    <a:pt x="5895925" y="1972962"/>
-                  </a:lnTo>
-                  <a:lnTo>
-                    <a:pt x="5973559" y="1982376"/>
-                  </a:lnTo>
-                  <a:lnTo>
-                    <a:pt x="6051193" y="1991574"/>
-                  </a:lnTo>
-                  <a:lnTo>
-                    <a:pt x="6128827" y="2000563"/>
-                  </a:lnTo>
-                  <a:lnTo>
-                    <a:pt x="6206462" y="2009345"/>
-                  </a:lnTo>
-                  <a:lnTo>
-                    <a:pt x="6284096" y="2017927"/>
-                  </a:lnTo>
-                  <a:lnTo>
-                    <a:pt x="6361730" y="2026313"/>
-                  </a:lnTo>
-                  <a:lnTo>
-                    <a:pt x="6439364" y="2034507"/>
-                  </a:lnTo>
-                  <a:lnTo>
-                    <a:pt x="6516998" y="2042514"/>
-                  </a:lnTo>
-                  <a:lnTo>
-                    <a:pt x="6594632" y="2050337"/>
-                  </a:lnTo>
-                  <a:lnTo>
-                    <a:pt x="6672266" y="2057982"/>
-                  </a:lnTo>
-                  <a:lnTo>
-                    <a:pt x="6749900" y="2065452"/>
-                  </a:lnTo>
-                  <a:lnTo>
-                    <a:pt x="6827534" y="2072752"/>
-                  </a:lnTo>
-                  <a:lnTo>
-                    <a:pt x="6905168" y="2079884"/>
-                  </a:lnTo>
-                  <a:lnTo>
-                    <a:pt x="6982802" y="2086853"/>
-                  </a:lnTo>
-                  <a:lnTo>
-                    <a:pt x="7060436" y="2093663"/>
-                  </a:lnTo>
-                  <a:lnTo>
-                    <a:pt x="7138070" y="2100318"/>
-                  </a:lnTo>
-                  <a:lnTo>
-                    <a:pt x="7215704" y="2106820"/>
-                  </a:lnTo>
-                  <a:lnTo>
-                    <a:pt x="7293338" y="2113174"/>
-                  </a:lnTo>
-                  <a:lnTo>
-                    <a:pt x="7370972" y="2119382"/>
+                    <a:pt x="73372" y="47688"/>
+                  </a:lnTo>
+                  <a:lnTo>
+                    <a:pt x="151006" y="97038"/>
+                  </a:lnTo>
+                  <a:lnTo>
+                    <a:pt x="228640" y="145303"/>
+                  </a:lnTo>
+                  <a:lnTo>
+                    <a:pt x="306274" y="192507"/>
+                  </a:lnTo>
+                  <a:lnTo>
+                    <a:pt x="383908" y="238674"/>
+                  </a:lnTo>
+                  <a:lnTo>
+                    <a:pt x="461542" y="283825"/>
+                  </a:lnTo>
+                  <a:lnTo>
+                    <a:pt x="539176" y="327985"/>
+                  </a:lnTo>
+                  <a:lnTo>
+                    <a:pt x="616810" y="371173"/>
+                  </a:lnTo>
+                  <a:lnTo>
+                    <a:pt x="694444" y="413413"/>
+                  </a:lnTo>
+                  <a:lnTo>
+                    <a:pt x="772078" y="454723"/>
+                  </a:lnTo>
+                  <a:lnTo>
+                    <a:pt x="849712" y="495126"/>
+                  </a:lnTo>
+                  <a:lnTo>
+                    <a:pt x="927346" y="534641"/>
+                  </a:lnTo>
+                  <a:lnTo>
+                    <a:pt x="1004981" y="573287"/>
+                  </a:lnTo>
+                  <a:lnTo>
+                    <a:pt x="1082615" y="611084"/>
+                  </a:lnTo>
+                  <a:lnTo>
+                    <a:pt x="1160249" y="648050"/>
+                  </a:lnTo>
+                  <a:lnTo>
+                    <a:pt x="1237883" y="684203"/>
+                  </a:lnTo>
+                  <a:lnTo>
+                    <a:pt x="1315517" y="719562"/>
+                  </a:lnTo>
+                  <a:lnTo>
+                    <a:pt x="1393151" y="754144"/>
+                  </a:lnTo>
+                  <a:lnTo>
+                    <a:pt x="1470785" y="787965"/>
+                  </a:lnTo>
+                  <a:lnTo>
+                    <a:pt x="1548419" y="821043"/>
+                  </a:lnTo>
+                  <a:lnTo>
+                    <a:pt x="1626053" y="853394"/>
+                  </a:lnTo>
+                  <a:lnTo>
+                    <a:pt x="1703687" y="885034"/>
+                  </a:lnTo>
+                  <a:lnTo>
+                    <a:pt x="1781321" y="915978"/>
+                  </a:lnTo>
+                  <a:lnTo>
+                    <a:pt x="1858955" y="946242"/>
+                  </a:lnTo>
+                  <a:lnTo>
+                    <a:pt x="1936589" y="975841"/>
+                  </a:lnTo>
+                  <a:lnTo>
+                    <a:pt x="2014223" y="1004790"/>
+                  </a:lnTo>
+                  <a:lnTo>
+                    <a:pt x="2091857" y="1033102"/>
+                  </a:lnTo>
+                  <a:lnTo>
+                    <a:pt x="2169491" y="1060792"/>
+                  </a:lnTo>
+                  <a:lnTo>
+                    <a:pt x="2247125" y="1087873"/>
+                  </a:lnTo>
+                  <a:lnTo>
+                    <a:pt x="2324759" y="1114359"/>
+                  </a:lnTo>
+                  <a:lnTo>
+                    <a:pt x="2402393" y="1140263"/>
+                  </a:lnTo>
+                  <a:lnTo>
+                    <a:pt x="2480027" y="1165597"/>
+                  </a:lnTo>
+                  <a:lnTo>
+                    <a:pt x="2557661" y="1190374"/>
+                  </a:lnTo>
+                  <a:lnTo>
+                    <a:pt x="2635295" y="1214607"/>
+                  </a:lnTo>
+                  <a:lnTo>
+                    <a:pt x="2712930" y="1238307"/>
+                  </a:lnTo>
+                  <a:lnTo>
+                    <a:pt x="2790564" y="1261487"/>
+                  </a:lnTo>
+                  <a:lnTo>
+                    <a:pt x="2868198" y="1284157"/>
+                  </a:lnTo>
+                  <a:lnTo>
+                    <a:pt x="2945832" y="1306328"/>
+                  </a:lnTo>
+                  <a:lnTo>
+                    <a:pt x="3023466" y="1328012"/>
+                  </a:lnTo>
+                  <a:lnTo>
+                    <a:pt x="3101100" y="1349220"/>
+                  </a:lnTo>
+                  <a:lnTo>
+                    <a:pt x="3178734" y="1369961"/>
+                  </a:lnTo>
+                  <a:lnTo>
+                    <a:pt x="3256368" y="1390246"/>
+                  </a:lnTo>
+                  <a:lnTo>
+                    <a:pt x="3334002" y="1410086"/>
+                  </a:lnTo>
+                  <a:lnTo>
+                    <a:pt x="3411636" y="1429490"/>
+                  </a:lnTo>
+                  <a:lnTo>
+                    <a:pt x="3489270" y="1448467"/>
+                  </a:lnTo>
+                  <a:lnTo>
+                    <a:pt x="3566904" y="1467026"/>
+                  </a:lnTo>
+                  <a:lnTo>
+                    <a:pt x="3644538" y="1485178"/>
+                  </a:lnTo>
+                  <a:lnTo>
+                    <a:pt x="3722172" y="1502931"/>
+                  </a:lnTo>
+                  <a:lnTo>
+                    <a:pt x="3799806" y="1520294"/>
+                  </a:lnTo>
+                  <a:lnTo>
+                    <a:pt x="3877440" y="1537275"/>
+                  </a:lnTo>
+                  <a:lnTo>
+                    <a:pt x="3955074" y="1553883"/>
+                  </a:lnTo>
+                  <a:lnTo>
+                    <a:pt x="4032708" y="1570126"/>
+                  </a:lnTo>
+                  <a:lnTo>
+                    <a:pt x="4110342" y="1586011"/>
+                  </a:lnTo>
+                  <a:lnTo>
+                    <a:pt x="4187976" y="1601548"/>
+                  </a:lnTo>
+                  <a:lnTo>
+                    <a:pt x="4265610" y="1616743"/>
+                  </a:lnTo>
+                  <a:lnTo>
+                    <a:pt x="4343244" y="1631604"/>
+                  </a:lnTo>
+                  <a:lnTo>
+                    <a:pt x="4420879" y="1646138"/>
+                  </a:lnTo>
+                  <a:lnTo>
+                    <a:pt x="4498513" y="1660353"/>
+                  </a:lnTo>
+                  <a:lnTo>
+                    <a:pt x="4576147" y="1674256"/>
+                  </a:lnTo>
+                  <a:lnTo>
+                    <a:pt x="4653781" y="1687853"/>
+                  </a:lnTo>
+                  <a:lnTo>
+                    <a:pt x="4731415" y="1701151"/>
+                  </a:lnTo>
+                  <a:lnTo>
+                    <a:pt x="4809049" y="1714157"/>
+                  </a:lnTo>
+                  <a:lnTo>
+                    <a:pt x="4886683" y="1726876"/>
+                  </a:lnTo>
+                  <a:lnTo>
+                    <a:pt x="4964317" y="1739317"/>
+                  </a:lnTo>
+                  <a:lnTo>
+                    <a:pt x="5041951" y="1751484"/>
+                  </a:lnTo>
+                  <a:lnTo>
+                    <a:pt x="5119585" y="1763383"/>
+                  </a:lnTo>
+                  <a:lnTo>
+                    <a:pt x="5197219" y="1775021"/>
+                  </a:lnTo>
+                  <a:lnTo>
+                    <a:pt x="5274853" y="1786403"/>
+                  </a:lnTo>
+                  <a:lnTo>
+                    <a:pt x="5352487" y="1797535"/>
+                  </a:lnTo>
+                  <a:lnTo>
+                    <a:pt x="5430121" y="1808422"/>
+                  </a:lnTo>
+                  <a:lnTo>
+                    <a:pt x="5507755" y="1819070"/>
+                  </a:lnTo>
+                  <a:lnTo>
+                    <a:pt x="5585389" y="1829484"/>
+                  </a:lnTo>
+                  <a:lnTo>
+                    <a:pt x="5663023" y="1839669"/>
+                  </a:lnTo>
+                  <a:lnTo>
+                    <a:pt x="5740657" y="1849630"/>
+                  </a:lnTo>
+                  <a:lnTo>
+                    <a:pt x="5818291" y="1859372"/>
+                  </a:lnTo>
+                  <a:lnTo>
+                    <a:pt x="5895925" y="1868900"/>
+                  </a:lnTo>
+                  <a:lnTo>
+                    <a:pt x="5973559" y="1878218"/>
+                  </a:lnTo>
+                  <a:lnTo>
+                    <a:pt x="6051193" y="1887332"/>
+                  </a:lnTo>
+                  <a:lnTo>
+                    <a:pt x="6128827" y="1896245"/>
+                  </a:lnTo>
+                  <a:lnTo>
+                    <a:pt x="6206462" y="1904963"/>
+                  </a:lnTo>
+                  <a:lnTo>
+                    <a:pt x="6284096" y="1913489"/>
+                  </a:lnTo>
+                  <a:lnTo>
+                    <a:pt x="6361730" y="1921827"/>
+                  </a:lnTo>
+                  <a:lnTo>
+                    <a:pt x="6439364" y="1929982"/>
+                  </a:lnTo>
+                  <a:lnTo>
+                    <a:pt x="6516998" y="1937958"/>
+                  </a:lnTo>
+                  <a:lnTo>
+                    <a:pt x="6594632" y="1945759"/>
+                  </a:lnTo>
+                  <a:lnTo>
+                    <a:pt x="6672266" y="1953388"/>
+                  </a:lnTo>
+                  <a:lnTo>
+                    <a:pt x="6749900" y="1960849"/>
+                  </a:lnTo>
+                  <a:lnTo>
+                    <a:pt x="6827534" y="1968147"/>
+                  </a:lnTo>
+                  <a:lnTo>
+                    <a:pt x="6905168" y="1975284"/>
+                  </a:lnTo>
+                  <a:lnTo>
+                    <a:pt x="6982802" y="1982264"/>
+                  </a:lnTo>
+                  <a:lnTo>
+                    <a:pt x="7060436" y="1989091"/>
+                  </a:lnTo>
+                  <a:lnTo>
+                    <a:pt x="7138070" y="1995767"/>
+                  </a:lnTo>
+                  <a:lnTo>
+                    <a:pt x="7215704" y="2002297"/>
+                  </a:lnTo>
+                  <a:lnTo>
+                    <a:pt x="7293338" y="2008684"/>
+                  </a:lnTo>
+                  <a:lnTo>
+                    <a:pt x="7370972" y="2014930"/>
                   </a:lnTo>
                 </a:path>
               </a:pathLst>

--- a/docs/plots/carbo/jx_carbo_linsubhr_ratio_anemia2.pptx
+++ b/docs/plots/carbo/jx_carbo_linsubhr_ratio_anemia2.pptx
@@ -3617,7 +3617,7 @@
                     <a:pt x="629953" y="1092145"/>
                   </a:lnTo>
                   <a:lnTo>
-                    <a:pt x="707588" y="1201796"/>
+                    <a:pt x="707587" y="1201796"/>
                   </a:lnTo>
                   <a:lnTo>
                     <a:pt x="785222" y="1306751"/>
@@ -3686,7 +3686,7 @@
                     <a:pt x="2415536" y="2716946"/>
                   </a:lnTo>
                   <a:lnTo>
-                    <a:pt x="2493171" y="2757016"/>
+                    <a:pt x="2493170" y="2757016"/>
                   </a:lnTo>
                   <a:lnTo>
                     <a:pt x="2570805" y="2783161"/>
@@ -3752,7 +3752,7 @@
                     <a:pt x="4123485" y="2794963"/>
                   </a:lnTo>
                   <a:lnTo>
-                    <a:pt x="4201120" y="2795549"/>
+                    <a:pt x="4201119" y="2795549"/>
                   </a:lnTo>
                   <a:lnTo>
                     <a:pt x="4278754" y="2796134"/>
@@ -3818,7 +3818,7 @@
                     <a:pt x="5831434" y="2807760"/>
                   </a:lnTo>
                   <a:lnTo>
-                    <a:pt x="5909069" y="2808337"/>
+                    <a:pt x="5909068" y="2808337"/>
                   </a:lnTo>
                   <a:lnTo>
                     <a:pt x="5986703" y="2808914"/>
@@ -4255,10 +4255,10 @@
                     <a:pt x="1781321" y="915978"/>
                   </a:lnTo>
                   <a:lnTo>
-                    <a:pt x="1858955" y="946242"/>
-                  </a:lnTo>
-                  <a:lnTo>
-                    <a:pt x="1936589" y="975841"/>
+                    <a:pt x="1858955" y="946243"/>
+                  </a:lnTo>
+                  <a:lnTo>
+                    <a:pt x="1936589" y="975842"/>
                   </a:lnTo>
                   <a:lnTo>
                     <a:pt x="2014223" y="1004790"/>

--- a/docs/plots/carbo/jx_carbo_linsubhr_ratio_anemia2.pptx
+++ b/docs/plots/carbo/jx_carbo_linsubhr_ratio_anemia2.pptx
@@ -2271,7 +2271,7 @@
           </p:nvSpPr>
           <p:spPr>
             <a:xfrm>
-              <a:off x="817517" y="5114368"/>
+              <a:off x="817517" y="5142518"/>
               <a:ext cx="7799693" cy="0"/>
             </a:xfrm>
             <a:custGeom>
@@ -2314,7 +2314,7 @@
           </p:nvSpPr>
           <p:spPr>
             <a:xfrm>
-              <a:off x="817517" y="4244691"/>
+              <a:off x="817517" y="4313054"/>
               <a:ext cx="7799693" cy="0"/>
             </a:xfrm>
             <a:custGeom>
@@ -2357,7 +2357,7 @@
           </p:nvSpPr>
           <p:spPr>
             <a:xfrm>
-              <a:off x="817517" y="3375014"/>
+              <a:off x="817517" y="3483591"/>
               <a:ext cx="7799693" cy="0"/>
             </a:xfrm>
             <a:custGeom>
@@ -2400,7 +2400,7 @@
           </p:nvSpPr>
           <p:spPr>
             <a:xfrm>
-              <a:off x="817517" y="2505337"/>
+              <a:off x="817517" y="2654127"/>
               <a:ext cx="7799693" cy="0"/>
             </a:xfrm>
             <a:custGeom>
@@ -2443,15 +2443,15 @@
           </p:nvSpPr>
           <p:spPr>
             <a:xfrm>
-              <a:off x="1615213" y="1896563"/>
-              <a:ext cx="0" cy="3826579"/>
+              <a:off x="1615213" y="2073503"/>
+              <a:ext cx="0" cy="3649639"/>
             </a:xfrm>
             <a:custGeom>
               <a:avLst/>
               <a:pathLst>
-                <a:path w="0" h="3826579">
+                <a:path w="0" h="3649639">
                   <a:moveTo>
-                    <a:pt x="0" y="3826579"/>
+                    <a:pt x="0" y="3649639"/>
                   </a:moveTo>
                   <a:lnTo>
                     <a:pt x="0" y="0"/>
@@ -2486,15 +2486,15 @@
           </p:nvSpPr>
           <p:spPr>
             <a:xfrm>
-              <a:off x="3387871" y="1896563"/>
-              <a:ext cx="0" cy="3826579"/>
+              <a:off x="3387871" y="2073503"/>
+              <a:ext cx="0" cy="3649639"/>
             </a:xfrm>
             <a:custGeom>
               <a:avLst/>
               <a:pathLst>
-                <a:path w="0" h="3826579">
+                <a:path w="0" h="3649639">
                   <a:moveTo>
-                    <a:pt x="0" y="3826579"/>
+                    <a:pt x="0" y="3649639"/>
                   </a:moveTo>
                   <a:lnTo>
                     <a:pt x="0" y="0"/>
@@ -2529,15 +2529,15 @@
           </p:nvSpPr>
           <p:spPr>
             <a:xfrm>
-              <a:off x="5160528" y="1896563"/>
-              <a:ext cx="0" cy="3826579"/>
+              <a:off x="5160528" y="2073503"/>
+              <a:ext cx="0" cy="3649639"/>
             </a:xfrm>
             <a:custGeom>
               <a:avLst/>
               <a:pathLst>
-                <a:path w="0" h="3826579">
+                <a:path w="0" h="3649639">
                   <a:moveTo>
-                    <a:pt x="0" y="3826579"/>
+                    <a:pt x="0" y="3649639"/>
                   </a:moveTo>
                   <a:lnTo>
                     <a:pt x="0" y="0"/>
@@ -2572,15 +2572,15 @@
           </p:nvSpPr>
           <p:spPr>
             <a:xfrm>
-              <a:off x="6933186" y="1896563"/>
-              <a:ext cx="0" cy="3826579"/>
+              <a:off x="6933186" y="2073503"/>
+              <a:ext cx="0" cy="3649639"/>
             </a:xfrm>
             <a:custGeom>
               <a:avLst/>
               <a:pathLst>
-                <a:path w="0" h="3826579">
+                <a:path w="0" h="3649639">
                   <a:moveTo>
-                    <a:pt x="0" y="3826579"/>
+                    <a:pt x="0" y="3649639"/>
                   </a:moveTo>
                   <a:lnTo>
                     <a:pt x="0" y="0"/>
@@ -2615,7 +2615,7 @@
           </p:nvSpPr>
           <p:spPr>
             <a:xfrm>
-              <a:off x="817517" y="5549207"/>
+              <a:off x="817517" y="5557249"/>
               <a:ext cx="7799693" cy="0"/>
             </a:xfrm>
             <a:custGeom>
@@ -2658,7 +2658,7 @@
           </p:nvSpPr>
           <p:spPr>
             <a:xfrm>
-              <a:off x="817517" y="4679530"/>
+              <a:off x="817517" y="4727786"/>
               <a:ext cx="7799693" cy="0"/>
             </a:xfrm>
             <a:custGeom>
@@ -2701,7 +2701,7 @@
           </p:nvSpPr>
           <p:spPr>
             <a:xfrm>
-              <a:off x="817517" y="3809853"/>
+              <a:off x="817517" y="3898322"/>
               <a:ext cx="7799693" cy="0"/>
             </a:xfrm>
             <a:custGeom>
@@ -2744,7 +2744,7 @@
           </p:nvSpPr>
           <p:spPr>
             <a:xfrm>
-              <a:off x="817517" y="2940175"/>
+              <a:off x="817517" y="3068859"/>
               <a:ext cx="7799693" cy="0"/>
             </a:xfrm>
             <a:custGeom>
@@ -2787,7 +2787,7 @@
           </p:nvSpPr>
           <p:spPr>
             <a:xfrm>
-              <a:off x="817517" y="2070498"/>
+              <a:off x="817517" y="2239395"/>
               <a:ext cx="7799693" cy="0"/>
             </a:xfrm>
             <a:custGeom>
@@ -2830,15 +2830,15 @@
           </p:nvSpPr>
           <p:spPr>
             <a:xfrm>
-              <a:off x="2501542" y="1896563"/>
-              <a:ext cx="0" cy="3826579"/>
+              <a:off x="2501542" y="2073503"/>
+              <a:ext cx="0" cy="3649639"/>
             </a:xfrm>
             <a:custGeom>
               <a:avLst/>
               <a:pathLst>
-                <a:path w="0" h="3826579">
+                <a:path w="0" h="3649639">
                   <a:moveTo>
-                    <a:pt x="0" y="3826579"/>
+                    <a:pt x="0" y="3649639"/>
                   </a:moveTo>
                   <a:lnTo>
                     <a:pt x="0" y="0"/>
@@ -2873,15 +2873,15 @@
           </p:nvSpPr>
           <p:spPr>
             <a:xfrm>
-              <a:off x="4274200" y="1896563"/>
-              <a:ext cx="0" cy="3826579"/>
+              <a:off x="4274200" y="2073503"/>
+              <a:ext cx="0" cy="3649639"/>
             </a:xfrm>
             <a:custGeom>
               <a:avLst/>
               <a:pathLst>
-                <a:path w="0" h="3826579">
+                <a:path w="0" h="3649639">
                   <a:moveTo>
-                    <a:pt x="0" y="3826579"/>
+                    <a:pt x="0" y="3649639"/>
                   </a:moveTo>
                   <a:lnTo>
                     <a:pt x="0" y="0"/>
@@ -2916,15 +2916,15 @@
           </p:nvSpPr>
           <p:spPr>
             <a:xfrm>
-              <a:off x="6046857" y="1896563"/>
-              <a:ext cx="0" cy="3826579"/>
+              <a:off x="6046857" y="2073503"/>
+              <a:ext cx="0" cy="3649639"/>
             </a:xfrm>
             <a:custGeom>
               <a:avLst/>
               <a:pathLst>
-                <a:path w="0" h="3826579">
+                <a:path w="0" h="3649639">
                   <a:moveTo>
-                    <a:pt x="0" y="3826579"/>
+                    <a:pt x="0" y="3649639"/>
                   </a:moveTo>
                   <a:lnTo>
                     <a:pt x="0" y="0"/>
@@ -2959,15 +2959,15 @@
           </p:nvSpPr>
           <p:spPr>
             <a:xfrm>
-              <a:off x="7819515" y="1896563"/>
-              <a:ext cx="0" cy="3826579"/>
+              <a:off x="7819515" y="2073503"/>
+              <a:ext cx="0" cy="3649639"/>
             </a:xfrm>
             <a:custGeom>
               <a:avLst/>
               <a:pathLst>
-                <a:path w="0" h="3826579">
+                <a:path w="0" h="3649639">
                   <a:moveTo>
-                    <a:pt x="0" y="3826579"/>
+                    <a:pt x="0" y="3649639"/>
                   </a:moveTo>
                   <a:lnTo>
                     <a:pt x="0" y="0"/>
@@ -3002,558 +3002,558 @@
           </p:nvSpPr>
           <p:spPr>
             <a:xfrm>
-              <a:off x="817517" y="1896563"/>
-              <a:ext cx="7370972" cy="3560662"/>
+              <a:off x="817517" y="2073503"/>
+              <a:ext cx="7370972" cy="3396018"/>
             </a:xfrm>
             <a:custGeom>
               <a:avLst/>
               <a:pathLst>
-                <a:path w="7370972" h="3560662">
+                <a:path w="7370972" h="3396018">
                   <a:moveTo>
                     <a:pt x="840831" y="0"/>
                   </a:moveTo>
                   <a:lnTo>
-                    <a:pt x="849712" y="18600"/>
-                  </a:lnTo>
-                  <a:lnTo>
-                    <a:pt x="927346" y="174224"/>
-                  </a:lnTo>
-                  <a:lnTo>
-                    <a:pt x="1004981" y="323184"/>
-                  </a:lnTo>
-                  <a:lnTo>
-                    <a:pt x="1082615" y="465765"/>
-                  </a:lnTo>
-                  <a:lnTo>
-                    <a:pt x="1160249" y="602240"/>
-                  </a:lnTo>
-                  <a:lnTo>
-                    <a:pt x="1237883" y="732871"/>
-                  </a:lnTo>
-                  <a:lnTo>
-                    <a:pt x="1315517" y="857907"/>
-                  </a:lnTo>
-                  <a:lnTo>
-                    <a:pt x="1393151" y="977589"/>
-                  </a:lnTo>
-                  <a:lnTo>
-                    <a:pt x="1470785" y="1092145"/>
-                  </a:lnTo>
-                  <a:lnTo>
-                    <a:pt x="1548419" y="1201796"/>
-                  </a:lnTo>
-                  <a:lnTo>
-                    <a:pt x="1626053" y="1306751"/>
-                  </a:lnTo>
-                  <a:lnTo>
-                    <a:pt x="1703687" y="1407212"/>
-                  </a:lnTo>
-                  <a:lnTo>
-                    <a:pt x="1781321" y="1503370"/>
-                  </a:lnTo>
-                  <a:lnTo>
-                    <a:pt x="1858955" y="1595411"/>
-                  </a:lnTo>
-                  <a:lnTo>
-                    <a:pt x="1936589" y="1683510"/>
-                  </a:lnTo>
-                  <a:lnTo>
-                    <a:pt x="2014223" y="1767836"/>
-                  </a:lnTo>
-                  <a:lnTo>
-                    <a:pt x="2091857" y="1848551"/>
-                  </a:lnTo>
-                  <a:lnTo>
-                    <a:pt x="2169491" y="1925810"/>
-                  </a:lnTo>
-                  <a:lnTo>
-                    <a:pt x="2247125" y="1999760"/>
-                  </a:lnTo>
-                  <a:lnTo>
-                    <a:pt x="2324759" y="2070543"/>
-                  </a:lnTo>
-                  <a:lnTo>
-                    <a:pt x="2402393" y="2138295"/>
-                  </a:lnTo>
-                  <a:lnTo>
-                    <a:pt x="2480027" y="2203145"/>
-                  </a:lnTo>
-                  <a:lnTo>
-                    <a:pt x="2557661" y="2265218"/>
-                  </a:lnTo>
-                  <a:lnTo>
-                    <a:pt x="2635295" y="2324634"/>
-                  </a:lnTo>
-                  <a:lnTo>
-                    <a:pt x="2712930" y="2381504"/>
-                  </a:lnTo>
-                  <a:lnTo>
-                    <a:pt x="2790564" y="2435940"/>
-                  </a:lnTo>
-                  <a:lnTo>
-                    <a:pt x="2868198" y="2488044"/>
-                  </a:lnTo>
-                  <a:lnTo>
-                    <a:pt x="2945832" y="2537917"/>
-                  </a:lnTo>
-                  <a:lnTo>
-                    <a:pt x="3023466" y="2585654"/>
-                  </a:lnTo>
-                  <a:lnTo>
-                    <a:pt x="3101100" y="2631346"/>
-                  </a:lnTo>
-                  <a:lnTo>
-                    <a:pt x="3178734" y="2675083"/>
-                  </a:lnTo>
-                  <a:lnTo>
-                    <a:pt x="3256368" y="2716946"/>
-                  </a:lnTo>
-                  <a:lnTo>
-                    <a:pt x="3334002" y="2757016"/>
-                  </a:lnTo>
-                  <a:lnTo>
-                    <a:pt x="3411636" y="2783161"/>
-                  </a:lnTo>
-                  <a:lnTo>
-                    <a:pt x="3489270" y="2783755"/>
-                  </a:lnTo>
-                  <a:lnTo>
-                    <a:pt x="3566904" y="2784349"/>
-                  </a:lnTo>
-                  <a:lnTo>
-                    <a:pt x="3644538" y="2784942"/>
-                  </a:lnTo>
-                  <a:lnTo>
-                    <a:pt x="3722172" y="2785534"/>
-                  </a:lnTo>
-                  <a:lnTo>
-                    <a:pt x="3799806" y="2786127"/>
-                  </a:lnTo>
-                  <a:lnTo>
-                    <a:pt x="3877440" y="2786719"/>
-                  </a:lnTo>
-                  <a:lnTo>
-                    <a:pt x="3955074" y="2787310"/>
-                  </a:lnTo>
-                  <a:lnTo>
-                    <a:pt x="4032708" y="2787901"/>
-                  </a:lnTo>
-                  <a:lnTo>
-                    <a:pt x="4110342" y="2788492"/>
-                  </a:lnTo>
-                  <a:lnTo>
-                    <a:pt x="4187976" y="2789082"/>
-                  </a:lnTo>
-                  <a:lnTo>
-                    <a:pt x="4265610" y="2789672"/>
-                  </a:lnTo>
-                  <a:lnTo>
-                    <a:pt x="4343244" y="2790262"/>
-                  </a:lnTo>
-                  <a:lnTo>
-                    <a:pt x="4420879" y="2790851"/>
-                  </a:lnTo>
-                  <a:lnTo>
-                    <a:pt x="4498513" y="2791439"/>
-                  </a:lnTo>
-                  <a:lnTo>
-                    <a:pt x="4576147" y="2792028"/>
-                  </a:lnTo>
-                  <a:lnTo>
-                    <a:pt x="4653781" y="2792615"/>
-                  </a:lnTo>
-                  <a:lnTo>
-                    <a:pt x="4731415" y="2793203"/>
-                  </a:lnTo>
-                  <a:lnTo>
-                    <a:pt x="4809049" y="2793790"/>
-                  </a:lnTo>
-                  <a:lnTo>
-                    <a:pt x="4886683" y="2794377"/>
-                  </a:lnTo>
-                  <a:lnTo>
-                    <a:pt x="4964317" y="2794963"/>
-                  </a:lnTo>
-                  <a:lnTo>
-                    <a:pt x="5041951" y="2795549"/>
-                  </a:lnTo>
-                  <a:lnTo>
-                    <a:pt x="5119585" y="2796134"/>
-                  </a:lnTo>
-                  <a:lnTo>
-                    <a:pt x="5197219" y="2796719"/>
-                  </a:lnTo>
-                  <a:lnTo>
-                    <a:pt x="5274853" y="2797304"/>
-                  </a:lnTo>
-                  <a:lnTo>
-                    <a:pt x="5352487" y="2797888"/>
-                  </a:lnTo>
-                  <a:lnTo>
-                    <a:pt x="5430121" y="2798472"/>
-                  </a:lnTo>
-                  <a:lnTo>
-                    <a:pt x="5507755" y="2799056"/>
-                  </a:lnTo>
-                  <a:lnTo>
-                    <a:pt x="5585389" y="2799639"/>
-                  </a:lnTo>
-                  <a:lnTo>
-                    <a:pt x="5663023" y="2800221"/>
-                  </a:lnTo>
-                  <a:lnTo>
-                    <a:pt x="5740657" y="2800804"/>
-                  </a:lnTo>
-                  <a:lnTo>
-                    <a:pt x="5818291" y="2801385"/>
-                  </a:lnTo>
-                  <a:lnTo>
-                    <a:pt x="5895925" y="2801967"/>
-                  </a:lnTo>
-                  <a:lnTo>
-                    <a:pt x="5973559" y="2802548"/>
-                  </a:lnTo>
-                  <a:lnTo>
-                    <a:pt x="6051193" y="2803129"/>
-                  </a:lnTo>
-                  <a:lnTo>
-                    <a:pt x="6128827" y="2803709"/>
-                  </a:lnTo>
-                  <a:lnTo>
-                    <a:pt x="6206462" y="2804289"/>
-                  </a:lnTo>
-                  <a:lnTo>
-                    <a:pt x="6284096" y="2804868"/>
-                  </a:lnTo>
-                  <a:lnTo>
-                    <a:pt x="6361730" y="2805447"/>
-                  </a:lnTo>
-                  <a:lnTo>
-                    <a:pt x="6439364" y="2806026"/>
-                  </a:lnTo>
-                  <a:lnTo>
-                    <a:pt x="6516998" y="2806604"/>
-                  </a:lnTo>
-                  <a:lnTo>
-                    <a:pt x="6594632" y="2807182"/>
-                  </a:lnTo>
-                  <a:lnTo>
-                    <a:pt x="6672266" y="2807760"/>
-                  </a:lnTo>
-                  <a:lnTo>
-                    <a:pt x="6749900" y="2808337"/>
-                  </a:lnTo>
-                  <a:lnTo>
-                    <a:pt x="6827534" y="2808914"/>
-                  </a:lnTo>
-                  <a:lnTo>
-                    <a:pt x="6905168" y="2809490"/>
-                  </a:lnTo>
-                  <a:lnTo>
-                    <a:pt x="6982802" y="2810066"/>
-                  </a:lnTo>
-                  <a:lnTo>
-                    <a:pt x="7060436" y="2810642"/>
-                  </a:lnTo>
-                  <a:lnTo>
-                    <a:pt x="7138070" y="2811217"/>
-                  </a:lnTo>
-                  <a:lnTo>
-                    <a:pt x="7215704" y="2811791"/>
-                  </a:lnTo>
-                  <a:lnTo>
-                    <a:pt x="7293338" y="2812366"/>
-                  </a:lnTo>
-                  <a:lnTo>
-                    <a:pt x="7370972" y="2812940"/>
-                  </a:lnTo>
-                  <a:lnTo>
-                    <a:pt x="7370972" y="3560662"/>
-                  </a:lnTo>
-                  <a:lnTo>
-                    <a:pt x="7293338" y="3556547"/>
-                  </a:lnTo>
-                  <a:lnTo>
-                    <a:pt x="7215704" y="3552247"/>
-                  </a:lnTo>
-                  <a:lnTo>
-                    <a:pt x="7138070" y="3547755"/>
-                  </a:lnTo>
-                  <a:lnTo>
-                    <a:pt x="7060436" y="3543063"/>
-                  </a:lnTo>
-                  <a:lnTo>
-                    <a:pt x="6982802" y="3538160"/>
-                  </a:lnTo>
-                  <a:lnTo>
-                    <a:pt x="6905168" y="3533038"/>
-                  </a:lnTo>
-                  <a:lnTo>
-                    <a:pt x="6827534" y="3527687"/>
-                  </a:lnTo>
-                  <a:lnTo>
-                    <a:pt x="6749900" y="3522097"/>
-                  </a:lnTo>
-                  <a:lnTo>
-                    <a:pt x="6672266" y="3516256"/>
-                  </a:lnTo>
-                  <a:lnTo>
-                    <a:pt x="6594632" y="3510154"/>
-                  </a:lnTo>
-                  <a:lnTo>
-                    <a:pt x="6516998" y="3503779"/>
-                  </a:lnTo>
-                  <a:lnTo>
-                    <a:pt x="6439364" y="3497119"/>
-                  </a:lnTo>
-                  <a:lnTo>
-                    <a:pt x="6361730" y="3490161"/>
-                  </a:lnTo>
-                  <a:lnTo>
-                    <a:pt x="6284096" y="3482891"/>
-                  </a:lnTo>
-                  <a:lnTo>
-                    <a:pt x="6206462" y="3475296"/>
-                  </a:lnTo>
-                  <a:lnTo>
-                    <a:pt x="6128827" y="3467362"/>
-                  </a:lnTo>
-                  <a:lnTo>
-                    <a:pt x="6051193" y="3459072"/>
-                  </a:lnTo>
-                  <a:lnTo>
-                    <a:pt x="5973559" y="3450412"/>
-                  </a:lnTo>
-                  <a:lnTo>
-                    <a:pt x="5895925" y="3441364"/>
-                  </a:lnTo>
-                  <a:lnTo>
-                    <a:pt x="5818291" y="3431912"/>
-                  </a:lnTo>
-                  <a:lnTo>
-                    <a:pt x="5740657" y="3422036"/>
-                  </a:lnTo>
-                  <a:lnTo>
-                    <a:pt x="5663023" y="3411719"/>
-                  </a:lnTo>
-                  <a:lnTo>
-                    <a:pt x="5585389" y="3400940"/>
-                  </a:lnTo>
-                  <a:lnTo>
-                    <a:pt x="5507755" y="3389679"/>
-                  </a:lnTo>
-                  <a:lnTo>
-                    <a:pt x="5430121" y="3377914"/>
-                  </a:lnTo>
-                  <a:lnTo>
-                    <a:pt x="5352487" y="3365622"/>
-                  </a:lnTo>
-                  <a:lnTo>
-                    <a:pt x="5274853" y="3352781"/>
-                  </a:lnTo>
-                  <a:lnTo>
-                    <a:pt x="5197219" y="3339365"/>
-                  </a:lnTo>
-                  <a:lnTo>
-                    <a:pt x="5119585" y="3325349"/>
-                  </a:lnTo>
-                  <a:lnTo>
-                    <a:pt x="5041951" y="3310706"/>
-                  </a:lnTo>
-                  <a:lnTo>
-                    <a:pt x="4964317" y="3295408"/>
-                  </a:lnTo>
-                  <a:lnTo>
-                    <a:pt x="4886683" y="3279425"/>
-                  </a:lnTo>
-                  <a:lnTo>
-                    <a:pt x="4809049" y="3262727"/>
-                  </a:lnTo>
-                  <a:lnTo>
-                    <a:pt x="4731415" y="3245282"/>
-                  </a:lnTo>
-                  <a:lnTo>
-                    <a:pt x="4653781" y="3227057"/>
-                  </a:lnTo>
-                  <a:lnTo>
-                    <a:pt x="4576147" y="3208016"/>
-                  </a:lnTo>
-                  <a:lnTo>
-                    <a:pt x="4498513" y="3188124"/>
-                  </a:lnTo>
-                  <a:lnTo>
-                    <a:pt x="4420879" y="3167341"/>
-                  </a:lnTo>
-                  <a:lnTo>
-                    <a:pt x="4343244" y="3145629"/>
-                  </a:lnTo>
-                  <a:lnTo>
-                    <a:pt x="4265610" y="3122945"/>
-                  </a:lnTo>
-                  <a:lnTo>
-                    <a:pt x="4187976" y="3099246"/>
-                  </a:lnTo>
-                  <a:lnTo>
-                    <a:pt x="4110342" y="3074487"/>
-                  </a:lnTo>
-                  <a:lnTo>
-                    <a:pt x="4032708" y="3048620"/>
-                  </a:lnTo>
-                  <a:lnTo>
-                    <a:pt x="3955074" y="3021596"/>
-                  </a:lnTo>
-                  <a:lnTo>
-                    <a:pt x="3877440" y="2993363"/>
-                  </a:lnTo>
-                  <a:lnTo>
-                    <a:pt x="3799806" y="2963867"/>
-                  </a:lnTo>
-                  <a:lnTo>
-                    <a:pt x="3722172" y="2933051"/>
-                  </a:lnTo>
-                  <a:lnTo>
-                    <a:pt x="3644538" y="2900857"/>
-                  </a:lnTo>
-                  <a:lnTo>
-                    <a:pt x="3566904" y="2867222"/>
-                  </a:lnTo>
-                  <a:lnTo>
-                    <a:pt x="3489270" y="2832082"/>
-                  </a:lnTo>
-                  <a:lnTo>
-                    <a:pt x="3411636" y="2795370"/>
-                  </a:lnTo>
-                  <a:lnTo>
-                    <a:pt x="3334002" y="2782567"/>
-                  </a:lnTo>
-                  <a:lnTo>
-                    <a:pt x="3256368" y="2781972"/>
-                  </a:lnTo>
-                  <a:lnTo>
-                    <a:pt x="3178734" y="2781377"/>
-                  </a:lnTo>
-                  <a:lnTo>
-                    <a:pt x="3101100" y="2780781"/>
-                  </a:lnTo>
-                  <a:lnTo>
-                    <a:pt x="3023466" y="2780186"/>
-                  </a:lnTo>
-                  <a:lnTo>
-                    <a:pt x="2945832" y="2779589"/>
-                  </a:lnTo>
-                  <a:lnTo>
-                    <a:pt x="2868198" y="2778992"/>
-                  </a:lnTo>
-                  <a:lnTo>
-                    <a:pt x="2790564" y="2778395"/>
-                  </a:lnTo>
-                  <a:lnTo>
-                    <a:pt x="2712930" y="2777798"/>
-                  </a:lnTo>
-                  <a:lnTo>
-                    <a:pt x="2635295" y="2777200"/>
-                  </a:lnTo>
-                  <a:lnTo>
-                    <a:pt x="2557661" y="2776601"/>
-                  </a:lnTo>
-                  <a:lnTo>
-                    <a:pt x="2480027" y="2776002"/>
-                  </a:lnTo>
-                  <a:lnTo>
-                    <a:pt x="2402393" y="2775403"/>
-                  </a:lnTo>
-                  <a:lnTo>
-                    <a:pt x="2324759" y="2774804"/>
-                  </a:lnTo>
-                  <a:lnTo>
-                    <a:pt x="2247125" y="2774203"/>
-                  </a:lnTo>
-                  <a:lnTo>
-                    <a:pt x="2169491" y="2773603"/>
-                  </a:lnTo>
-                  <a:lnTo>
-                    <a:pt x="2091857" y="2773002"/>
-                  </a:lnTo>
-                  <a:lnTo>
-                    <a:pt x="2014223" y="2772401"/>
-                  </a:lnTo>
-                  <a:lnTo>
-                    <a:pt x="1936589" y="2771799"/>
-                  </a:lnTo>
-                  <a:lnTo>
-                    <a:pt x="1858955" y="2771197"/>
-                  </a:lnTo>
-                  <a:lnTo>
-                    <a:pt x="1781321" y="2770595"/>
-                  </a:lnTo>
-                  <a:lnTo>
-                    <a:pt x="1703687" y="2769992"/>
-                  </a:lnTo>
-                  <a:lnTo>
-                    <a:pt x="1626053" y="2769388"/>
-                  </a:lnTo>
-                  <a:lnTo>
-                    <a:pt x="1548419" y="2768785"/>
-                  </a:lnTo>
-                  <a:lnTo>
-                    <a:pt x="1470785" y="2768180"/>
-                  </a:lnTo>
-                  <a:lnTo>
-                    <a:pt x="1393151" y="2767576"/>
-                  </a:lnTo>
-                  <a:lnTo>
-                    <a:pt x="1315517" y="2766971"/>
-                  </a:lnTo>
-                  <a:lnTo>
-                    <a:pt x="1237883" y="2766366"/>
-                  </a:lnTo>
-                  <a:lnTo>
-                    <a:pt x="1160249" y="2765760"/>
-                  </a:lnTo>
-                  <a:lnTo>
-                    <a:pt x="1082615" y="2765153"/>
-                  </a:lnTo>
-                  <a:lnTo>
-                    <a:pt x="1004981" y="2764547"/>
-                  </a:lnTo>
-                  <a:lnTo>
-                    <a:pt x="927346" y="2763940"/>
-                  </a:lnTo>
-                  <a:lnTo>
-                    <a:pt x="849712" y="2763332"/>
-                  </a:lnTo>
-                  <a:lnTo>
-                    <a:pt x="772078" y="2762724"/>
-                  </a:lnTo>
-                  <a:lnTo>
-                    <a:pt x="694444" y="2762116"/>
-                  </a:lnTo>
-                  <a:lnTo>
-                    <a:pt x="616810" y="2761507"/>
-                  </a:lnTo>
-                  <a:lnTo>
-                    <a:pt x="539176" y="2760898"/>
-                  </a:lnTo>
-                  <a:lnTo>
-                    <a:pt x="461542" y="2760289"/>
-                  </a:lnTo>
-                  <a:lnTo>
-                    <a:pt x="383908" y="2759679"/>
-                  </a:lnTo>
-                  <a:lnTo>
-                    <a:pt x="306274" y="2759068"/>
-                  </a:lnTo>
-                  <a:lnTo>
-                    <a:pt x="228640" y="2758458"/>
-                  </a:lnTo>
-                  <a:lnTo>
-                    <a:pt x="151006" y="2757846"/>
-                  </a:lnTo>
-                  <a:lnTo>
-                    <a:pt x="73372" y="2757235"/>
-                  </a:lnTo>
-                  <a:lnTo>
-                    <a:pt x="0" y="2756656"/>
+                    <a:pt x="849712" y="17740"/>
+                  </a:lnTo>
+                  <a:lnTo>
+                    <a:pt x="927346" y="166168"/>
+                  </a:lnTo>
+                  <a:lnTo>
+                    <a:pt x="1004981" y="308240"/>
+                  </a:lnTo>
+                  <a:lnTo>
+                    <a:pt x="1082615" y="444228"/>
+                  </a:lnTo>
+                  <a:lnTo>
+                    <a:pt x="1160249" y="574393"/>
+                  </a:lnTo>
+                  <a:lnTo>
+                    <a:pt x="1237883" y="698983"/>
+                  </a:lnTo>
+                  <a:lnTo>
+                    <a:pt x="1315517" y="818238"/>
+                  </a:lnTo>
+                  <a:lnTo>
+                    <a:pt x="1393151" y="932385"/>
+                  </a:lnTo>
+                  <a:lnTo>
+                    <a:pt x="1470785" y="1041645"/>
+                  </a:lnTo>
+                  <a:lnTo>
+                    <a:pt x="1548419" y="1146226"/>
+                  </a:lnTo>
+                  <a:lnTo>
+                    <a:pt x="1626053" y="1246328"/>
+                  </a:lnTo>
+                  <a:lnTo>
+                    <a:pt x="1703687" y="1342143"/>
+                  </a:lnTo>
+                  <a:lnTo>
+                    <a:pt x="1781321" y="1433855"/>
+                  </a:lnTo>
+                  <a:lnTo>
+                    <a:pt x="1858955" y="1521640"/>
+                  </a:lnTo>
+                  <a:lnTo>
+                    <a:pt x="1936589" y="1605665"/>
+                  </a:lnTo>
+                  <a:lnTo>
+                    <a:pt x="2014223" y="1686092"/>
+                  </a:lnTo>
+                  <a:lnTo>
+                    <a:pt x="2091857" y="1763075"/>
+                  </a:lnTo>
+                  <a:lnTo>
+                    <a:pt x="2169491" y="1836761"/>
+                  </a:lnTo>
+                  <a:lnTo>
+                    <a:pt x="2247125" y="1907291"/>
+                  </a:lnTo>
+                  <a:lnTo>
+                    <a:pt x="2324759" y="1974802"/>
+                  </a:lnTo>
+                  <a:lnTo>
+                    <a:pt x="2402393" y="2039421"/>
+                  </a:lnTo>
+                  <a:lnTo>
+                    <a:pt x="2480027" y="2101272"/>
+                  </a:lnTo>
+                  <a:lnTo>
+                    <a:pt x="2557661" y="2160476"/>
+                  </a:lnTo>
+                  <a:lnTo>
+                    <a:pt x="2635295" y="2217143"/>
+                  </a:lnTo>
+                  <a:lnTo>
+                    <a:pt x="2712930" y="2271384"/>
+                  </a:lnTo>
+                  <a:lnTo>
+                    <a:pt x="2790564" y="2323303"/>
+                  </a:lnTo>
+                  <a:lnTo>
+                    <a:pt x="2868198" y="2372998"/>
+                  </a:lnTo>
+                  <a:lnTo>
+                    <a:pt x="2945832" y="2420564"/>
+                  </a:lnTo>
+                  <a:lnTo>
+                    <a:pt x="3023466" y="2466094"/>
+                  </a:lnTo>
+                  <a:lnTo>
+                    <a:pt x="3101100" y="2509674"/>
+                  </a:lnTo>
+                  <a:lnTo>
+                    <a:pt x="3178734" y="2551388"/>
+                  </a:lnTo>
+                  <a:lnTo>
+                    <a:pt x="3256368" y="2591315"/>
+                  </a:lnTo>
+                  <a:lnTo>
+                    <a:pt x="3334002" y="2629533"/>
+                  </a:lnTo>
+                  <a:lnTo>
+                    <a:pt x="3411636" y="2654469"/>
+                  </a:lnTo>
+                  <a:lnTo>
+                    <a:pt x="3489270" y="2655035"/>
+                  </a:lnTo>
+                  <a:lnTo>
+                    <a:pt x="3566904" y="2655601"/>
+                  </a:lnTo>
+                  <a:lnTo>
+                    <a:pt x="3644538" y="2656167"/>
+                  </a:lnTo>
+                  <a:lnTo>
+                    <a:pt x="3722172" y="2656732"/>
+                  </a:lnTo>
+                  <a:lnTo>
+                    <a:pt x="3799806" y="2657297"/>
+                  </a:lnTo>
+                  <a:lnTo>
+                    <a:pt x="3877440" y="2657862"/>
+                  </a:lnTo>
+                  <a:lnTo>
+                    <a:pt x="3955074" y="2658426"/>
+                  </a:lnTo>
+                  <a:lnTo>
+                    <a:pt x="4032708" y="2658990"/>
+                  </a:lnTo>
+                  <a:lnTo>
+                    <a:pt x="4110342" y="2659553"/>
+                  </a:lnTo>
+                  <a:lnTo>
+                    <a:pt x="4187976" y="2660116"/>
+                  </a:lnTo>
+                  <a:lnTo>
+                    <a:pt x="4265610" y="2660679"/>
+                  </a:lnTo>
+                  <a:lnTo>
+                    <a:pt x="4343244" y="2661241"/>
+                  </a:lnTo>
+                  <a:lnTo>
+                    <a:pt x="4420879" y="2661803"/>
+                  </a:lnTo>
+                  <a:lnTo>
+                    <a:pt x="4498513" y="2662364"/>
+                  </a:lnTo>
+                  <a:lnTo>
+                    <a:pt x="4576147" y="2662925"/>
+                  </a:lnTo>
+                  <a:lnTo>
+                    <a:pt x="4653781" y="2663486"/>
+                  </a:lnTo>
+                  <a:lnTo>
+                    <a:pt x="4731415" y="2664046"/>
+                  </a:lnTo>
+                  <a:lnTo>
+                    <a:pt x="4809049" y="2664606"/>
+                  </a:lnTo>
+                  <a:lnTo>
+                    <a:pt x="4886683" y="2665166"/>
+                  </a:lnTo>
+                  <a:lnTo>
+                    <a:pt x="4964317" y="2665725"/>
+                  </a:lnTo>
+                  <a:lnTo>
+                    <a:pt x="5041951" y="2666284"/>
+                  </a:lnTo>
+                  <a:lnTo>
+                    <a:pt x="5119585" y="2666842"/>
+                  </a:lnTo>
+                  <a:lnTo>
+                    <a:pt x="5197219" y="2667400"/>
+                  </a:lnTo>
+                  <a:lnTo>
+                    <a:pt x="5274853" y="2667958"/>
+                  </a:lnTo>
+                  <a:lnTo>
+                    <a:pt x="5352487" y="2668515"/>
+                  </a:lnTo>
+                  <a:lnTo>
+                    <a:pt x="5430121" y="2669072"/>
+                  </a:lnTo>
+                  <a:lnTo>
+                    <a:pt x="5507755" y="2669628"/>
+                  </a:lnTo>
+                  <a:lnTo>
+                    <a:pt x="5585389" y="2670184"/>
+                  </a:lnTo>
+                  <a:lnTo>
+                    <a:pt x="5663023" y="2670740"/>
+                  </a:lnTo>
+                  <a:lnTo>
+                    <a:pt x="5740657" y="2671295"/>
+                  </a:lnTo>
+                  <a:lnTo>
+                    <a:pt x="5818291" y="2671850"/>
+                  </a:lnTo>
+                  <a:lnTo>
+                    <a:pt x="5895925" y="2672405"/>
+                  </a:lnTo>
+                  <a:lnTo>
+                    <a:pt x="5973559" y="2672959"/>
+                  </a:lnTo>
+                  <a:lnTo>
+                    <a:pt x="6051193" y="2673513"/>
+                  </a:lnTo>
+                  <a:lnTo>
+                    <a:pt x="6128827" y="2674067"/>
+                  </a:lnTo>
+                  <a:lnTo>
+                    <a:pt x="6206462" y="2674620"/>
+                  </a:lnTo>
+                  <a:lnTo>
+                    <a:pt x="6284096" y="2675172"/>
+                  </a:lnTo>
+                  <a:lnTo>
+                    <a:pt x="6361730" y="2675725"/>
+                  </a:lnTo>
+                  <a:lnTo>
+                    <a:pt x="6439364" y="2676277"/>
+                  </a:lnTo>
+                  <a:lnTo>
+                    <a:pt x="6516998" y="2676828"/>
+                  </a:lnTo>
+                  <a:lnTo>
+                    <a:pt x="6594632" y="2677379"/>
+                  </a:lnTo>
+                  <a:lnTo>
+                    <a:pt x="6672266" y="2677930"/>
+                  </a:lnTo>
+                  <a:lnTo>
+                    <a:pt x="6749900" y="2678481"/>
+                  </a:lnTo>
+                  <a:lnTo>
+                    <a:pt x="6827534" y="2679031"/>
+                  </a:lnTo>
+                  <a:lnTo>
+                    <a:pt x="6905168" y="2679580"/>
+                  </a:lnTo>
+                  <a:lnTo>
+                    <a:pt x="6982802" y="2680130"/>
+                  </a:lnTo>
+                  <a:lnTo>
+                    <a:pt x="7060436" y="2680679"/>
+                  </a:lnTo>
+                  <a:lnTo>
+                    <a:pt x="7138070" y="2681227"/>
+                  </a:lnTo>
+                  <a:lnTo>
+                    <a:pt x="7215704" y="2681775"/>
+                  </a:lnTo>
+                  <a:lnTo>
+                    <a:pt x="7293338" y="2682323"/>
+                  </a:lnTo>
+                  <a:lnTo>
+                    <a:pt x="7370972" y="2682871"/>
+                  </a:lnTo>
+                  <a:lnTo>
+                    <a:pt x="7370972" y="3396018"/>
+                  </a:lnTo>
+                  <a:lnTo>
+                    <a:pt x="7293338" y="3392093"/>
+                  </a:lnTo>
+                  <a:lnTo>
+                    <a:pt x="7215704" y="3387993"/>
+                  </a:lnTo>
+                  <a:lnTo>
+                    <a:pt x="7138070" y="3383709"/>
+                  </a:lnTo>
+                  <a:lnTo>
+                    <a:pt x="7060436" y="3379233"/>
+                  </a:lnTo>
+                  <a:lnTo>
+                    <a:pt x="6982802" y="3374557"/>
+                  </a:lnTo>
+                  <a:lnTo>
+                    <a:pt x="6905168" y="3369672"/>
+                  </a:lnTo>
+                  <a:lnTo>
+                    <a:pt x="6827534" y="3364568"/>
+                  </a:lnTo>
+                  <a:lnTo>
+                    <a:pt x="6749900" y="3359236"/>
+                  </a:lnTo>
+                  <a:lnTo>
+                    <a:pt x="6672266" y="3353666"/>
+                  </a:lnTo>
+                  <a:lnTo>
+                    <a:pt x="6594632" y="3347846"/>
+                  </a:lnTo>
+                  <a:lnTo>
+                    <a:pt x="6516998" y="3341765"/>
+                  </a:lnTo>
+                  <a:lnTo>
+                    <a:pt x="6439364" y="3335413"/>
+                  </a:lnTo>
+                  <a:lnTo>
+                    <a:pt x="6361730" y="3328777"/>
+                  </a:lnTo>
+                  <a:lnTo>
+                    <a:pt x="6284096" y="3321844"/>
+                  </a:lnTo>
+                  <a:lnTo>
+                    <a:pt x="6206462" y="3314600"/>
+                  </a:lnTo>
+                  <a:lnTo>
+                    <a:pt x="6128827" y="3307032"/>
+                  </a:lnTo>
+                  <a:lnTo>
+                    <a:pt x="6051193" y="3299126"/>
+                  </a:lnTo>
+                  <a:lnTo>
+                    <a:pt x="5973559" y="3290866"/>
+                  </a:lnTo>
+                  <a:lnTo>
+                    <a:pt x="5895925" y="3282237"/>
+                  </a:lnTo>
+                  <a:lnTo>
+                    <a:pt x="5818291" y="3273221"/>
+                  </a:lnTo>
+                  <a:lnTo>
+                    <a:pt x="5740657" y="3263802"/>
+                  </a:lnTo>
+                  <a:lnTo>
+                    <a:pt x="5663023" y="3253962"/>
+                  </a:lnTo>
+                  <a:lnTo>
+                    <a:pt x="5585389" y="3243682"/>
+                  </a:lnTo>
+                  <a:lnTo>
+                    <a:pt x="5507755" y="3232941"/>
+                  </a:lnTo>
+                  <a:lnTo>
+                    <a:pt x="5430121" y="3221720"/>
+                  </a:lnTo>
+                  <a:lnTo>
+                    <a:pt x="5352487" y="3209997"/>
+                  </a:lnTo>
+                  <a:lnTo>
+                    <a:pt x="5274853" y="3197749"/>
+                  </a:lnTo>
+                  <a:lnTo>
+                    <a:pt x="5197219" y="3184954"/>
+                  </a:lnTo>
+                  <a:lnTo>
+                    <a:pt x="5119585" y="3171586"/>
+                  </a:lnTo>
+                  <a:lnTo>
+                    <a:pt x="5041951" y="3157620"/>
+                  </a:lnTo>
+                  <a:lnTo>
+                    <a:pt x="4964317" y="3143029"/>
+                  </a:lnTo>
+                  <a:lnTo>
+                    <a:pt x="4886683" y="3127785"/>
+                  </a:lnTo>
+                  <a:lnTo>
+                    <a:pt x="4809049" y="3111860"/>
+                  </a:lnTo>
+                  <a:lnTo>
+                    <a:pt x="4731415" y="3095222"/>
+                  </a:lnTo>
+                  <a:lnTo>
+                    <a:pt x="4653781" y="3077839"/>
+                  </a:lnTo>
+                  <a:lnTo>
+                    <a:pt x="4576147" y="3059679"/>
+                  </a:lnTo>
+                  <a:lnTo>
+                    <a:pt x="4498513" y="3040706"/>
+                  </a:lnTo>
+                  <a:lnTo>
+                    <a:pt x="4420879" y="3020884"/>
+                  </a:lnTo>
+                  <a:lnTo>
+                    <a:pt x="4343244" y="3000176"/>
+                  </a:lnTo>
+                  <a:lnTo>
+                    <a:pt x="4265610" y="2978541"/>
+                  </a:lnTo>
+                  <a:lnTo>
+                    <a:pt x="4187976" y="2955938"/>
+                  </a:lnTo>
+                  <a:lnTo>
+                    <a:pt x="4110342" y="2932324"/>
+                  </a:lnTo>
+                  <a:lnTo>
+                    <a:pt x="4032708" y="2907653"/>
+                  </a:lnTo>
+                  <a:lnTo>
+                    <a:pt x="3955074" y="2881879"/>
+                  </a:lnTo>
+                  <a:lnTo>
+                    <a:pt x="3877440" y="2854951"/>
+                  </a:lnTo>
+                  <a:lnTo>
+                    <a:pt x="3799806" y="2826819"/>
+                  </a:lnTo>
+                  <a:lnTo>
+                    <a:pt x="3722172" y="2797428"/>
+                  </a:lnTo>
+                  <a:lnTo>
+                    <a:pt x="3644538" y="2766722"/>
+                  </a:lnTo>
+                  <a:lnTo>
+                    <a:pt x="3566904" y="2734643"/>
+                  </a:lnTo>
+                  <a:lnTo>
+                    <a:pt x="3489270" y="2701128"/>
+                  </a:lnTo>
+                  <a:lnTo>
+                    <a:pt x="3411636" y="2666113"/>
+                  </a:lnTo>
+                  <a:lnTo>
+                    <a:pt x="3334002" y="2653902"/>
+                  </a:lnTo>
+                  <a:lnTo>
+                    <a:pt x="3256368" y="2653335"/>
+                  </a:lnTo>
+                  <a:lnTo>
+                    <a:pt x="3178734" y="2652767"/>
+                  </a:lnTo>
+                  <a:lnTo>
+                    <a:pt x="3101100" y="2652199"/>
+                  </a:lnTo>
+                  <a:lnTo>
+                    <a:pt x="3023466" y="2651631"/>
+                  </a:lnTo>
+                  <a:lnTo>
+                    <a:pt x="2945832" y="2651062"/>
+                  </a:lnTo>
+                  <a:lnTo>
+                    <a:pt x="2868198" y="2650493"/>
+                  </a:lnTo>
+                  <a:lnTo>
+                    <a:pt x="2790564" y="2649923"/>
+                  </a:lnTo>
+                  <a:lnTo>
+                    <a:pt x="2712930" y="2649353"/>
+                  </a:lnTo>
+                  <a:lnTo>
+                    <a:pt x="2635295" y="2648783"/>
+                  </a:lnTo>
+                  <a:lnTo>
+                    <a:pt x="2557661" y="2648212"/>
+                  </a:lnTo>
+                  <a:lnTo>
+                    <a:pt x="2480027" y="2647641"/>
+                  </a:lnTo>
+                  <a:lnTo>
+                    <a:pt x="2402393" y="2647070"/>
+                  </a:lnTo>
+                  <a:lnTo>
+                    <a:pt x="2324759" y="2646498"/>
+                  </a:lnTo>
+                  <a:lnTo>
+                    <a:pt x="2247125" y="2645925"/>
+                  </a:lnTo>
+                  <a:lnTo>
+                    <a:pt x="2169491" y="2645353"/>
+                  </a:lnTo>
+                  <a:lnTo>
+                    <a:pt x="2091857" y="2644780"/>
+                  </a:lnTo>
+                  <a:lnTo>
+                    <a:pt x="2014223" y="2644206"/>
+                  </a:lnTo>
+                  <a:lnTo>
+                    <a:pt x="1936589" y="2643632"/>
+                  </a:lnTo>
+                  <a:lnTo>
+                    <a:pt x="1858955" y="2643058"/>
+                  </a:lnTo>
+                  <a:lnTo>
+                    <a:pt x="1781321" y="2642483"/>
+                  </a:lnTo>
+                  <a:lnTo>
+                    <a:pt x="1703687" y="2641908"/>
+                  </a:lnTo>
+                  <a:lnTo>
+                    <a:pt x="1626053" y="2641333"/>
+                  </a:lnTo>
+                  <a:lnTo>
+                    <a:pt x="1548419" y="2640757"/>
+                  </a:lnTo>
+                  <a:lnTo>
+                    <a:pt x="1470785" y="2640181"/>
+                  </a:lnTo>
+                  <a:lnTo>
+                    <a:pt x="1393151" y="2639604"/>
+                  </a:lnTo>
+                  <a:lnTo>
+                    <a:pt x="1315517" y="2639027"/>
+                  </a:lnTo>
+                  <a:lnTo>
+                    <a:pt x="1237883" y="2638450"/>
+                  </a:lnTo>
+                  <a:lnTo>
+                    <a:pt x="1160249" y="2637872"/>
+                  </a:lnTo>
+                  <a:lnTo>
+                    <a:pt x="1082615" y="2637294"/>
+                  </a:lnTo>
+                  <a:lnTo>
+                    <a:pt x="1004981" y="2636715"/>
+                  </a:lnTo>
+                  <a:lnTo>
+                    <a:pt x="927346" y="2636136"/>
+                  </a:lnTo>
+                  <a:lnTo>
+                    <a:pt x="849712" y="2635557"/>
+                  </a:lnTo>
+                  <a:lnTo>
+                    <a:pt x="772078" y="2634977"/>
+                  </a:lnTo>
+                  <a:lnTo>
+                    <a:pt x="694444" y="2634397"/>
+                  </a:lnTo>
+                  <a:lnTo>
+                    <a:pt x="616810" y="2633816"/>
+                  </a:lnTo>
+                  <a:lnTo>
+                    <a:pt x="539176" y="2633235"/>
+                  </a:lnTo>
+                  <a:lnTo>
+                    <a:pt x="461542" y="2632654"/>
+                  </a:lnTo>
+                  <a:lnTo>
+                    <a:pt x="383908" y="2632072"/>
+                  </a:lnTo>
+                  <a:lnTo>
+                    <a:pt x="306274" y="2631490"/>
+                  </a:lnTo>
+                  <a:lnTo>
+                    <a:pt x="228640" y="2630908"/>
+                  </a:lnTo>
+                  <a:lnTo>
+                    <a:pt x="151006" y="2630325"/>
+                  </a:lnTo>
+                  <a:lnTo>
+                    <a:pt x="73372" y="2629741"/>
+                  </a:lnTo>
+                  <a:lnTo>
+                    <a:pt x="0" y="2629190"/>
                   </a:lnTo>
                   <a:close/>
                 </a:path>
@@ -3579,270 +3579,270 @@
           </p:nvSpPr>
           <p:spPr>
             <a:xfrm>
-              <a:off x="1658349" y="1896563"/>
-              <a:ext cx="6530141" cy="2812940"/>
+              <a:off x="1658349" y="2073503"/>
+              <a:ext cx="6530141" cy="2682871"/>
             </a:xfrm>
             <a:custGeom>
               <a:avLst/>
               <a:pathLst>
-                <a:path w="6530141" h="2812940">
+                <a:path w="6530141" h="2682871">
                   <a:moveTo>
                     <a:pt x="0" y="0"/>
                   </a:moveTo>
                   <a:lnTo>
-                    <a:pt x="8881" y="18600"/>
-                  </a:lnTo>
-                  <a:lnTo>
-                    <a:pt x="86515" y="174224"/>
-                  </a:lnTo>
-                  <a:lnTo>
-                    <a:pt x="164149" y="323184"/>
-                  </a:lnTo>
-                  <a:lnTo>
-                    <a:pt x="241783" y="465765"/>
-                  </a:lnTo>
-                  <a:lnTo>
-                    <a:pt x="319417" y="602240"/>
-                  </a:lnTo>
-                  <a:lnTo>
-                    <a:pt x="397051" y="732871"/>
-                  </a:lnTo>
-                  <a:lnTo>
-                    <a:pt x="474685" y="857907"/>
-                  </a:lnTo>
-                  <a:lnTo>
-                    <a:pt x="552319" y="977589"/>
-                  </a:lnTo>
-                  <a:lnTo>
-                    <a:pt x="629953" y="1092145"/>
-                  </a:lnTo>
-                  <a:lnTo>
-                    <a:pt x="707587" y="1201796"/>
-                  </a:lnTo>
-                  <a:lnTo>
-                    <a:pt x="785222" y="1306751"/>
-                  </a:lnTo>
-                  <a:lnTo>
-                    <a:pt x="862856" y="1407212"/>
-                  </a:lnTo>
-                  <a:lnTo>
-                    <a:pt x="940490" y="1503370"/>
-                  </a:lnTo>
-                  <a:lnTo>
-                    <a:pt x="1018124" y="1595411"/>
-                  </a:lnTo>
-                  <a:lnTo>
-                    <a:pt x="1095758" y="1683510"/>
-                  </a:lnTo>
-                  <a:lnTo>
-                    <a:pt x="1173392" y="1767836"/>
-                  </a:lnTo>
-                  <a:lnTo>
-                    <a:pt x="1251026" y="1848551"/>
-                  </a:lnTo>
-                  <a:lnTo>
-                    <a:pt x="1328660" y="1925810"/>
-                  </a:lnTo>
-                  <a:lnTo>
-                    <a:pt x="1406294" y="1999760"/>
-                  </a:lnTo>
-                  <a:lnTo>
-                    <a:pt x="1483928" y="2070543"/>
-                  </a:lnTo>
-                  <a:lnTo>
-                    <a:pt x="1561562" y="2138295"/>
-                  </a:lnTo>
-                  <a:lnTo>
-                    <a:pt x="1639196" y="2203145"/>
-                  </a:lnTo>
-                  <a:lnTo>
-                    <a:pt x="1716830" y="2265218"/>
-                  </a:lnTo>
-                  <a:lnTo>
-                    <a:pt x="1794464" y="2324634"/>
-                  </a:lnTo>
-                  <a:lnTo>
-                    <a:pt x="1872098" y="2381504"/>
-                  </a:lnTo>
-                  <a:lnTo>
-                    <a:pt x="1949732" y="2435940"/>
-                  </a:lnTo>
-                  <a:lnTo>
-                    <a:pt x="2027366" y="2488044"/>
-                  </a:lnTo>
-                  <a:lnTo>
-                    <a:pt x="2105000" y="2537917"/>
-                  </a:lnTo>
-                  <a:lnTo>
-                    <a:pt x="2182634" y="2585654"/>
-                  </a:lnTo>
-                  <a:lnTo>
-                    <a:pt x="2260268" y="2631346"/>
-                  </a:lnTo>
-                  <a:lnTo>
-                    <a:pt x="2337902" y="2675083"/>
-                  </a:lnTo>
-                  <a:lnTo>
-                    <a:pt x="2415536" y="2716946"/>
-                  </a:lnTo>
-                  <a:lnTo>
-                    <a:pt x="2493170" y="2757016"/>
-                  </a:lnTo>
-                  <a:lnTo>
-                    <a:pt x="2570805" y="2783161"/>
-                  </a:lnTo>
-                  <a:lnTo>
-                    <a:pt x="2648439" y="2783755"/>
-                  </a:lnTo>
-                  <a:lnTo>
-                    <a:pt x="2726073" y="2784349"/>
-                  </a:lnTo>
-                  <a:lnTo>
-                    <a:pt x="2803707" y="2784942"/>
-                  </a:lnTo>
-                  <a:lnTo>
-                    <a:pt x="2881341" y="2785534"/>
-                  </a:lnTo>
-                  <a:lnTo>
-                    <a:pt x="2958975" y="2786127"/>
-                  </a:lnTo>
-                  <a:lnTo>
-                    <a:pt x="3036609" y="2786719"/>
-                  </a:lnTo>
-                  <a:lnTo>
-                    <a:pt x="3114243" y="2787310"/>
-                  </a:lnTo>
-                  <a:lnTo>
-                    <a:pt x="3191877" y="2787901"/>
-                  </a:lnTo>
-                  <a:lnTo>
-                    <a:pt x="3269511" y="2788492"/>
-                  </a:lnTo>
-                  <a:lnTo>
-                    <a:pt x="3347145" y="2789082"/>
-                  </a:lnTo>
-                  <a:lnTo>
-                    <a:pt x="3424779" y="2789672"/>
-                  </a:lnTo>
-                  <a:lnTo>
-                    <a:pt x="3502413" y="2790262"/>
-                  </a:lnTo>
-                  <a:lnTo>
-                    <a:pt x="3580047" y="2790851"/>
-                  </a:lnTo>
-                  <a:lnTo>
-                    <a:pt x="3657681" y="2791439"/>
-                  </a:lnTo>
-                  <a:lnTo>
-                    <a:pt x="3735315" y="2792028"/>
-                  </a:lnTo>
-                  <a:lnTo>
-                    <a:pt x="3812949" y="2792615"/>
-                  </a:lnTo>
-                  <a:lnTo>
-                    <a:pt x="3890583" y="2793203"/>
-                  </a:lnTo>
-                  <a:lnTo>
-                    <a:pt x="3968217" y="2793790"/>
-                  </a:lnTo>
-                  <a:lnTo>
-                    <a:pt x="4045851" y="2794377"/>
-                  </a:lnTo>
-                  <a:lnTo>
-                    <a:pt x="4123485" y="2794963"/>
-                  </a:lnTo>
-                  <a:lnTo>
-                    <a:pt x="4201119" y="2795549"/>
-                  </a:lnTo>
-                  <a:lnTo>
-                    <a:pt x="4278754" y="2796134"/>
-                  </a:lnTo>
-                  <a:lnTo>
-                    <a:pt x="4356388" y="2796719"/>
-                  </a:lnTo>
-                  <a:lnTo>
-                    <a:pt x="4434022" y="2797304"/>
-                  </a:lnTo>
-                  <a:lnTo>
-                    <a:pt x="4511656" y="2797888"/>
-                  </a:lnTo>
-                  <a:lnTo>
-                    <a:pt x="4589290" y="2798472"/>
-                  </a:lnTo>
-                  <a:lnTo>
-                    <a:pt x="4666924" y="2799056"/>
-                  </a:lnTo>
-                  <a:lnTo>
-                    <a:pt x="4744558" y="2799639"/>
-                  </a:lnTo>
-                  <a:lnTo>
-                    <a:pt x="4822192" y="2800221"/>
-                  </a:lnTo>
-                  <a:lnTo>
-                    <a:pt x="4899826" y="2800804"/>
-                  </a:lnTo>
-                  <a:lnTo>
-                    <a:pt x="4977460" y="2801385"/>
-                  </a:lnTo>
-                  <a:lnTo>
-                    <a:pt x="5055094" y="2801967"/>
-                  </a:lnTo>
-                  <a:lnTo>
-                    <a:pt x="5132728" y="2802548"/>
-                  </a:lnTo>
-                  <a:lnTo>
-                    <a:pt x="5210362" y="2803129"/>
-                  </a:lnTo>
-                  <a:lnTo>
-                    <a:pt x="5287996" y="2803709"/>
-                  </a:lnTo>
-                  <a:lnTo>
-                    <a:pt x="5365630" y="2804289"/>
-                  </a:lnTo>
-                  <a:lnTo>
-                    <a:pt x="5443264" y="2804868"/>
-                  </a:lnTo>
-                  <a:lnTo>
-                    <a:pt x="5520898" y="2805447"/>
-                  </a:lnTo>
-                  <a:lnTo>
-                    <a:pt x="5598532" y="2806026"/>
-                  </a:lnTo>
-                  <a:lnTo>
-                    <a:pt x="5676166" y="2806604"/>
-                  </a:lnTo>
-                  <a:lnTo>
-                    <a:pt x="5753800" y="2807182"/>
-                  </a:lnTo>
-                  <a:lnTo>
-                    <a:pt x="5831434" y="2807760"/>
-                  </a:lnTo>
-                  <a:lnTo>
-                    <a:pt x="5909068" y="2808337"/>
-                  </a:lnTo>
-                  <a:lnTo>
-                    <a:pt x="5986703" y="2808914"/>
-                  </a:lnTo>
-                  <a:lnTo>
-                    <a:pt x="6064337" y="2809490"/>
-                  </a:lnTo>
-                  <a:lnTo>
-                    <a:pt x="6141971" y="2810066"/>
-                  </a:lnTo>
-                  <a:lnTo>
-                    <a:pt x="6219605" y="2810642"/>
-                  </a:lnTo>
-                  <a:lnTo>
-                    <a:pt x="6297239" y="2811217"/>
-                  </a:lnTo>
-                  <a:lnTo>
-                    <a:pt x="6374873" y="2811791"/>
-                  </a:lnTo>
-                  <a:lnTo>
-                    <a:pt x="6452507" y="2812366"/>
-                  </a:lnTo>
-                  <a:lnTo>
-                    <a:pt x="6530141" y="2812940"/>
+                    <a:pt x="8881" y="17740"/>
+                  </a:lnTo>
+                  <a:lnTo>
+                    <a:pt x="86515" y="166168"/>
+                  </a:lnTo>
+                  <a:lnTo>
+                    <a:pt x="164149" y="308240"/>
+                  </a:lnTo>
+                  <a:lnTo>
+                    <a:pt x="241783" y="444228"/>
+                  </a:lnTo>
+                  <a:lnTo>
+                    <a:pt x="319417" y="574393"/>
+                  </a:lnTo>
+                  <a:lnTo>
+                    <a:pt x="397051" y="698983"/>
+                  </a:lnTo>
+                  <a:lnTo>
+                    <a:pt x="474685" y="818238"/>
+                  </a:lnTo>
+                  <a:lnTo>
+                    <a:pt x="552319" y="932385"/>
+                  </a:lnTo>
+                  <a:lnTo>
+                    <a:pt x="629953" y="1041645"/>
+                  </a:lnTo>
+                  <a:lnTo>
+                    <a:pt x="707587" y="1146226"/>
+                  </a:lnTo>
+                  <a:lnTo>
+                    <a:pt x="785222" y="1246328"/>
+                  </a:lnTo>
+                  <a:lnTo>
+                    <a:pt x="862856" y="1342143"/>
+                  </a:lnTo>
+                  <a:lnTo>
+                    <a:pt x="940490" y="1433855"/>
+                  </a:lnTo>
+                  <a:lnTo>
+                    <a:pt x="1018124" y="1521640"/>
+                  </a:lnTo>
+                  <a:lnTo>
+                    <a:pt x="1095758" y="1605665"/>
+                  </a:lnTo>
+                  <a:lnTo>
+                    <a:pt x="1173392" y="1686092"/>
+                  </a:lnTo>
+                  <a:lnTo>
+                    <a:pt x="1251026" y="1763075"/>
+                  </a:lnTo>
+                  <a:lnTo>
+                    <a:pt x="1328660" y="1836761"/>
+                  </a:lnTo>
+                  <a:lnTo>
+                    <a:pt x="1406294" y="1907291"/>
+                  </a:lnTo>
+                  <a:lnTo>
+                    <a:pt x="1483928" y="1974802"/>
+                  </a:lnTo>
+                  <a:lnTo>
+                    <a:pt x="1561562" y="2039421"/>
+                  </a:lnTo>
+                  <a:lnTo>
+                    <a:pt x="1639196" y="2101272"/>
+                  </a:lnTo>
+                  <a:lnTo>
+                    <a:pt x="1716830" y="2160476"/>
+                  </a:lnTo>
+                  <a:lnTo>
+                    <a:pt x="1794464" y="2217143"/>
+                  </a:lnTo>
+                  <a:lnTo>
+                    <a:pt x="1872098" y="2271384"/>
+                  </a:lnTo>
+                  <a:lnTo>
+                    <a:pt x="1949732" y="2323303"/>
+                  </a:lnTo>
+                  <a:lnTo>
+                    <a:pt x="2027366" y="2372998"/>
+                  </a:lnTo>
+                  <a:lnTo>
+                    <a:pt x="2105000" y="2420564"/>
+                  </a:lnTo>
+                  <a:lnTo>
+                    <a:pt x="2182634" y="2466094"/>
+                  </a:lnTo>
+                  <a:lnTo>
+                    <a:pt x="2260268" y="2509674"/>
+                  </a:lnTo>
+                  <a:lnTo>
+                    <a:pt x="2337902" y="2551388"/>
+                  </a:lnTo>
+                  <a:lnTo>
+                    <a:pt x="2415536" y="2591315"/>
+                  </a:lnTo>
+                  <a:lnTo>
+                    <a:pt x="2493170" y="2629533"/>
+                  </a:lnTo>
+                  <a:lnTo>
+                    <a:pt x="2570805" y="2654469"/>
+                  </a:lnTo>
+                  <a:lnTo>
+                    <a:pt x="2648439" y="2655035"/>
+                  </a:lnTo>
+                  <a:lnTo>
+                    <a:pt x="2726073" y="2655601"/>
+                  </a:lnTo>
+                  <a:lnTo>
+                    <a:pt x="2803707" y="2656167"/>
+                  </a:lnTo>
+                  <a:lnTo>
+                    <a:pt x="2881341" y="2656732"/>
+                  </a:lnTo>
+                  <a:lnTo>
+                    <a:pt x="2958975" y="2657297"/>
+                  </a:lnTo>
+                  <a:lnTo>
+                    <a:pt x="3036609" y="2657862"/>
+                  </a:lnTo>
+                  <a:lnTo>
+                    <a:pt x="3114243" y="2658426"/>
+                  </a:lnTo>
+                  <a:lnTo>
+                    <a:pt x="3191877" y="2658990"/>
+                  </a:lnTo>
+                  <a:lnTo>
+                    <a:pt x="3269511" y="2659553"/>
+                  </a:lnTo>
+                  <a:lnTo>
+                    <a:pt x="3347145" y="2660116"/>
+                  </a:lnTo>
+                  <a:lnTo>
+                    <a:pt x="3424779" y="2660679"/>
+                  </a:lnTo>
+                  <a:lnTo>
+                    <a:pt x="3502413" y="2661241"/>
+                  </a:lnTo>
+                  <a:lnTo>
+                    <a:pt x="3580047" y="2661803"/>
+                  </a:lnTo>
+                  <a:lnTo>
+                    <a:pt x="3657681" y="2662364"/>
+                  </a:lnTo>
+                  <a:lnTo>
+                    <a:pt x="3735315" y="2662925"/>
+                  </a:lnTo>
+                  <a:lnTo>
+                    <a:pt x="3812949" y="2663486"/>
+                  </a:lnTo>
+                  <a:lnTo>
+                    <a:pt x="3890583" y="2664046"/>
+                  </a:lnTo>
+                  <a:lnTo>
+                    <a:pt x="3968217" y="2664606"/>
+                  </a:lnTo>
+                  <a:lnTo>
+                    <a:pt x="4045851" y="2665166"/>
+                  </a:lnTo>
+                  <a:lnTo>
+                    <a:pt x="4123485" y="2665725"/>
+                  </a:lnTo>
+                  <a:lnTo>
+                    <a:pt x="4201119" y="2666284"/>
+                  </a:lnTo>
+                  <a:lnTo>
+                    <a:pt x="4278754" y="2666842"/>
+                  </a:lnTo>
+                  <a:lnTo>
+                    <a:pt x="4356388" y="2667400"/>
+                  </a:lnTo>
+                  <a:lnTo>
+                    <a:pt x="4434022" y="2667958"/>
+                  </a:lnTo>
+                  <a:lnTo>
+                    <a:pt x="4511656" y="2668515"/>
+                  </a:lnTo>
+                  <a:lnTo>
+                    <a:pt x="4589290" y="2669072"/>
+                  </a:lnTo>
+                  <a:lnTo>
+                    <a:pt x="4666924" y="2669628"/>
+                  </a:lnTo>
+                  <a:lnTo>
+                    <a:pt x="4744558" y="2670184"/>
+                  </a:lnTo>
+                  <a:lnTo>
+                    <a:pt x="4822192" y="2670740"/>
+                  </a:lnTo>
+                  <a:lnTo>
+                    <a:pt x="4899826" y="2671295"/>
+                  </a:lnTo>
+                  <a:lnTo>
+                    <a:pt x="4977460" y="2671850"/>
+                  </a:lnTo>
+                  <a:lnTo>
+                    <a:pt x="5055094" y="2672405"/>
+                  </a:lnTo>
+                  <a:lnTo>
+                    <a:pt x="5132728" y="2672959"/>
+                  </a:lnTo>
+                  <a:lnTo>
+                    <a:pt x="5210362" y="2673513"/>
+                  </a:lnTo>
+                  <a:lnTo>
+                    <a:pt x="5287996" y="2674067"/>
+                  </a:lnTo>
+                  <a:lnTo>
+                    <a:pt x="5365630" y="2674620"/>
+                  </a:lnTo>
+                  <a:lnTo>
+                    <a:pt x="5443264" y="2675172"/>
+                  </a:lnTo>
+                  <a:lnTo>
+                    <a:pt x="5520898" y="2675725"/>
+                  </a:lnTo>
+                  <a:lnTo>
+                    <a:pt x="5598532" y="2676277"/>
+                  </a:lnTo>
+                  <a:lnTo>
+                    <a:pt x="5676166" y="2676828"/>
+                  </a:lnTo>
+                  <a:lnTo>
+                    <a:pt x="5753800" y="2677379"/>
+                  </a:lnTo>
+                  <a:lnTo>
+                    <a:pt x="5831434" y="2677930"/>
+                  </a:lnTo>
+                  <a:lnTo>
+                    <a:pt x="5909068" y="2678481"/>
+                  </a:lnTo>
+                  <a:lnTo>
+                    <a:pt x="5986703" y="2679031"/>
+                  </a:lnTo>
+                  <a:lnTo>
+                    <a:pt x="6064337" y="2679580"/>
+                  </a:lnTo>
+                  <a:lnTo>
+                    <a:pt x="6141971" y="2680130"/>
+                  </a:lnTo>
+                  <a:lnTo>
+                    <a:pt x="6219605" y="2680679"/>
+                  </a:lnTo>
+                  <a:lnTo>
+                    <a:pt x="6297239" y="2681227"/>
+                  </a:lnTo>
+                  <a:lnTo>
+                    <a:pt x="6374873" y="2681775"/>
+                  </a:lnTo>
+                  <a:lnTo>
+                    <a:pt x="6452507" y="2682323"/>
+                  </a:lnTo>
+                  <a:lnTo>
+                    <a:pt x="6530141" y="2682871"/>
                   </a:lnTo>
                 </a:path>
               </a:pathLst>
@@ -3862,297 +3862,297 @@
           </p:nvSpPr>
           <p:spPr>
             <a:xfrm>
-              <a:off x="817517" y="4653220"/>
-              <a:ext cx="7370972" cy="804005"/>
+              <a:off x="817517" y="4702693"/>
+              <a:ext cx="7370972" cy="766828"/>
             </a:xfrm>
             <a:custGeom>
               <a:avLst/>
               <a:pathLst>
-                <a:path w="7370972" h="804005">
+                <a:path w="7370972" h="766828">
                   <a:moveTo>
-                    <a:pt x="7370972" y="804005"/>
+                    <a:pt x="7370972" y="766828"/>
                   </a:moveTo>
                   <a:lnTo>
-                    <a:pt x="7293338" y="799890"/>
-                  </a:lnTo>
-                  <a:lnTo>
-                    <a:pt x="7215704" y="795590"/>
-                  </a:lnTo>
-                  <a:lnTo>
-                    <a:pt x="7138070" y="791099"/>
-                  </a:lnTo>
-                  <a:lnTo>
-                    <a:pt x="7060436" y="786406"/>
-                  </a:lnTo>
-                  <a:lnTo>
-                    <a:pt x="6982802" y="781503"/>
-                  </a:lnTo>
-                  <a:lnTo>
-                    <a:pt x="6905168" y="776381"/>
-                  </a:lnTo>
-                  <a:lnTo>
-                    <a:pt x="6827534" y="771030"/>
-                  </a:lnTo>
-                  <a:lnTo>
-                    <a:pt x="6749900" y="765440"/>
-                  </a:lnTo>
-                  <a:lnTo>
-                    <a:pt x="6672266" y="759599"/>
-                  </a:lnTo>
-                  <a:lnTo>
-                    <a:pt x="6594632" y="753497"/>
-                  </a:lnTo>
-                  <a:lnTo>
-                    <a:pt x="6516998" y="747122"/>
-                  </a:lnTo>
-                  <a:lnTo>
-                    <a:pt x="6439364" y="740462"/>
-                  </a:lnTo>
-                  <a:lnTo>
-                    <a:pt x="6361730" y="733504"/>
-                  </a:lnTo>
-                  <a:lnTo>
-                    <a:pt x="6284096" y="726234"/>
-                  </a:lnTo>
-                  <a:lnTo>
-                    <a:pt x="6206462" y="718640"/>
-                  </a:lnTo>
-                  <a:lnTo>
-                    <a:pt x="6128827" y="710705"/>
-                  </a:lnTo>
-                  <a:lnTo>
-                    <a:pt x="6051193" y="702416"/>
-                  </a:lnTo>
-                  <a:lnTo>
-                    <a:pt x="5973559" y="693755"/>
-                  </a:lnTo>
-                  <a:lnTo>
-                    <a:pt x="5895925" y="684707"/>
-                  </a:lnTo>
-                  <a:lnTo>
-                    <a:pt x="5818291" y="675255"/>
-                  </a:lnTo>
-                  <a:lnTo>
-                    <a:pt x="5740657" y="665379"/>
-                  </a:lnTo>
-                  <a:lnTo>
-                    <a:pt x="5663023" y="655062"/>
-                  </a:lnTo>
-                  <a:lnTo>
-                    <a:pt x="5585389" y="644283"/>
-                  </a:lnTo>
-                  <a:lnTo>
-                    <a:pt x="5507755" y="633022"/>
-                  </a:lnTo>
-                  <a:lnTo>
-                    <a:pt x="5430121" y="621257"/>
-                  </a:lnTo>
-                  <a:lnTo>
-                    <a:pt x="5352487" y="608965"/>
-                  </a:lnTo>
-                  <a:lnTo>
-                    <a:pt x="5274853" y="596124"/>
-                  </a:lnTo>
-                  <a:lnTo>
-                    <a:pt x="5197219" y="582708"/>
-                  </a:lnTo>
-                  <a:lnTo>
-                    <a:pt x="5119585" y="568692"/>
-                  </a:lnTo>
-                  <a:lnTo>
-                    <a:pt x="5041951" y="554049"/>
-                  </a:lnTo>
-                  <a:lnTo>
-                    <a:pt x="4964317" y="538751"/>
-                  </a:lnTo>
-                  <a:lnTo>
-                    <a:pt x="4886683" y="522768"/>
-                  </a:lnTo>
-                  <a:lnTo>
-                    <a:pt x="4809049" y="506070"/>
-                  </a:lnTo>
-                  <a:lnTo>
-                    <a:pt x="4731415" y="488625"/>
-                  </a:lnTo>
-                  <a:lnTo>
-                    <a:pt x="4653781" y="470400"/>
-                  </a:lnTo>
-                  <a:lnTo>
-                    <a:pt x="4576147" y="451359"/>
-                  </a:lnTo>
-                  <a:lnTo>
-                    <a:pt x="4498513" y="431467"/>
-                  </a:lnTo>
-                  <a:lnTo>
-                    <a:pt x="4420879" y="410684"/>
-                  </a:lnTo>
-                  <a:lnTo>
-                    <a:pt x="4343244" y="388972"/>
-                  </a:lnTo>
-                  <a:lnTo>
-                    <a:pt x="4265610" y="366288"/>
-                  </a:lnTo>
-                  <a:lnTo>
-                    <a:pt x="4187976" y="342589"/>
-                  </a:lnTo>
-                  <a:lnTo>
-                    <a:pt x="4110342" y="317830"/>
-                  </a:lnTo>
-                  <a:lnTo>
-                    <a:pt x="4032708" y="291964"/>
-                  </a:lnTo>
-                  <a:lnTo>
-                    <a:pt x="3955074" y="264940"/>
-                  </a:lnTo>
-                  <a:lnTo>
-                    <a:pt x="3877440" y="236707"/>
-                  </a:lnTo>
-                  <a:lnTo>
-                    <a:pt x="3799806" y="207210"/>
-                  </a:lnTo>
-                  <a:lnTo>
-                    <a:pt x="3722172" y="176395"/>
-                  </a:lnTo>
-                  <a:lnTo>
-                    <a:pt x="3644538" y="144200"/>
-                  </a:lnTo>
-                  <a:lnTo>
-                    <a:pt x="3566904" y="110565"/>
-                  </a:lnTo>
-                  <a:lnTo>
-                    <a:pt x="3489270" y="75425"/>
-                  </a:lnTo>
-                  <a:lnTo>
-                    <a:pt x="3411636" y="38714"/>
-                  </a:lnTo>
-                  <a:lnTo>
-                    <a:pt x="3334002" y="25910"/>
-                  </a:lnTo>
-                  <a:lnTo>
-                    <a:pt x="3256368" y="25315"/>
-                  </a:lnTo>
-                  <a:lnTo>
-                    <a:pt x="3178734" y="24720"/>
-                  </a:lnTo>
-                  <a:lnTo>
-                    <a:pt x="3101100" y="24125"/>
-                  </a:lnTo>
-                  <a:lnTo>
-                    <a:pt x="3023466" y="23529"/>
-                  </a:lnTo>
-                  <a:lnTo>
-                    <a:pt x="2945832" y="22932"/>
-                  </a:lnTo>
-                  <a:lnTo>
-                    <a:pt x="2868198" y="22336"/>
-                  </a:lnTo>
-                  <a:lnTo>
-                    <a:pt x="2790564" y="21738"/>
-                  </a:lnTo>
-                  <a:lnTo>
-                    <a:pt x="2712930" y="21141"/>
-                  </a:lnTo>
-                  <a:lnTo>
-                    <a:pt x="2635295" y="20543"/>
-                  </a:lnTo>
-                  <a:lnTo>
-                    <a:pt x="2557661" y="19944"/>
-                  </a:lnTo>
-                  <a:lnTo>
-                    <a:pt x="2480027" y="19346"/>
-                  </a:lnTo>
-                  <a:lnTo>
-                    <a:pt x="2402393" y="18746"/>
-                  </a:lnTo>
-                  <a:lnTo>
-                    <a:pt x="2324759" y="18147"/>
-                  </a:lnTo>
-                  <a:lnTo>
-                    <a:pt x="2247125" y="17547"/>
-                  </a:lnTo>
-                  <a:lnTo>
-                    <a:pt x="2169491" y="16946"/>
-                  </a:lnTo>
-                  <a:lnTo>
-                    <a:pt x="2091857" y="16345"/>
-                  </a:lnTo>
-                  <a:lnTo>
-                    <a:pt x="2014223" y="15744"/>
-                  </a:lnTo>
-                  <a:lnTo>
-                    <a:pt x="1936589" y="15142"/>
-                  </a:lnTo>
-                  <a:lnTo>
-                    <a:pt x="1858955" y="14540"/>
-                  </a:lnTo>
-                  <a:lnTo>
-                    <a:pt x="1781321" y="13938"/>
-                  </a:lnTo>
-                  <a:lnTo>
-                    <a:pt x="1703687" y="13335"/>
-                  </a:lnTo>
-                  <a:lnTo>
-                    <a:pt x="1626053" y="12732"/>
-                  </a:lnTo>
-                  <a:lnTo>
-                    <a:pt x="1548419" y="12128"/>
-                  </a:lnTo>
-                  <a:lnTo>
-                    <a:pt x="1470785" y="11524"/>
-                  </a:lnTo>
-                  <a:lnTo>
-                    <a:pt x="1393151" y="10919"/>
-                  </a:lnTo>
-                  <a:lnTo>
-                    <a:pt x="1315517" y="10314"/>
-                  </a:lnTo>
-                  <a:lnTo>
-                    <a:pt x="1237883" y="9709"/>
-                  </a:lnTo>
-                  <a:lnTo>
-                    <a:pt x="1160249" y="9103"/>
-                  </a:lnTo>
-                  <a:lnTo>
-                    <a:pt x="1082615" y="8497"/>
-                  </a:lnTo>
-                  <a:lnTo>
-                    <a:pt x="1004981" y="7890"/>
-                  </a:lnTo>
-                  <a:lnTo>
-                    <a:pt x="927346" y="7283"/>
-                  </a:lnTo>
-                  <a:lnTo>
-                    <a:pt x="849712" y="6676"/>
-                  </a:lnTo>
-                  <a:lnTo>
-                    <a:pt x="772078" y="6068"/>
-                  </a:lnTo>
-                  <a:lnTo>
-                    <a:pt x="694444" y="5459"/>
-                  </a:lnTo>
-                  <a:lnTo>
-                    <a:pt x="616810" y="4851"/>
-                  </a:lnTo>
-                  <a:lnTo>
-                    <a:pt x="539176" y="4241"/>
-                  </a:lnTo>
-                  <a:lnTo>
-                    <a:pt x="461542" y="3632"/>
-                  </a:lnTo>
-                  <a:lnTo>
-                    <a:pt x="383908" y="3022"/>
-                  </a:lnTo>
-                  <a:lnTo>
-                    <a:pt x="306274" y="2412"/>
-                  </a:lnTo>
-                  <a:lnTo>
-                    <a:pt x="228640" y="1801"/>
-                  </a:lnTo>
-                  <a:lnTo>
-                    <a:pt x="151006" y="1190"/>
-                  </a:lnTo>
-                  <a:lnTo>
-                    <a:pt x="73372" y="578"/>
+                    <a:pt x="7293338" y="762903"/>
+                  </a:lnTo>
+                  <a:lnTo>
+                    <a:pt x="7215704" y="758803"/>
+                  </a:lnTo>
+                  <a:lnTo>
+                    <a:pt x="7138070" y="754519"/>
+                  </a:lnTo>
+                  <a:lnTo>
+                    <a:pt x="7060436" y="750043"/>
+                  </a:lnTo>
+                  <a:lnTo>
+                    <a:pt x="6982802" y="745367"/>
+                  </a:lnTo>
+                  <a:lnTo>
+                    <a:pt x="6905168" y="740482"/>
+                  </a:lnTo>
+                  <a:lnTo>
+                    <a:pt x="6827534" y="735378"/>
+                  </a:lnTo>
+                  <a:lnTo>
+                    <a:pt x="6749900" y="730046"/>
+                  </a:lnTo>
+                  <a:lnTo>
+                    <a:pt x="6672266" y="724475"/>
+                  </a:lnTo>
+                  <a:lnTo>
+                    <a:pt x="6594632" y="718656"/>
+                  </a:lnTo>
+                  <a:lnTo>
+                    <a:pt x="6516998" y="712575"/>
+                  </a:lnTo>
+                  <a:lnTo>
+                    <a:pt x="6439364" y="706223"/>
+                  </a:lnTo>
+                  <a:lnTo>
+                    <a:pt x="6361730" y="699587"/>
+                  </a:lnTo>
+                  <a:lnTo>
+                    <a:pt x="6284096" y="692654"/>
+                  </a:lnTo>
+                  <a:lnTo>
+                    <a:pt x="6206462" y="685410"/>
+                  </a:lnTo>
+                  <a:lnTo>
+                    <a:pt x="6128827" y="677842"/>
+                  </a:lnTo>
+                  <a:lnTo>
+                    <a:pt x="6051193" y="669936"/>
+                  </a:lnTo>
+                  <a:lnTo>
+                    <a:pt x="5973559" y="661676"/>
+                  </a:lnTo>
+                  <a:lnTo>
+                    <a:pt x="5895925" y="653047"/>
+                  </a:lnTo>
+                  <a:lnTo>
+                    <a:pt x="5818291" y="644031"/>
+                  </a:lnTo>
+                  <a:lnTo>
+                    <a:pt x="5740657" y="634612"/>
+                  </a:lnTo>
+                  <a:lnTo>
+                    <a:pt x="5663023" y="624772"/>
+                  </a:lnTo>
+                  <a:lnTo>
+                    <a:pt x="5585389" y="614492"/>
+                  </a:lnTo>
+                  <a:lnTo>
+                    <a:pt x="5507755" y="603751"/>
+                  </a:lnTo>
+                  <a:lnTo>
+                    <a:pt x="5430121" y="592530"/>
+                  </a:lnTo>
+                  <a:lnTo>
+                    <a:pt x="5352487" y="580807"/>
+                  </a:lnTo>
+                  <a:lnTo>
+                    <a:pt x="5274853" y="568559"/>
+                  </a:lnTo>
+                  <a:lnTo>
+                    <a:pt x="5197219" y="555764"/>
+                  </a:lnTo>
+                  <a:lnTo>
+                    <a:pt x="5119585" y="542396"/>
+                  </a:lnTo>
+                  <a:lnTo>
+                    <a:pt x="5041951" y="528430"/>
+                  </a:lnTo>
+                  <a:lnTo>
+                    <a:pt x="4964317" y="513839"/>
+                  </a:lnTo>
+                  <a:lnTo>
+                    <a:pt x="4886683" y="498595"/>
+                  </a:lnTo>
+                  <a:lnTo>
+                    <a:pt x="4809049" y="482670"/>
+                  </a:lnTo>
+                  <a:lnTo>
+                    <a:pt x="4731415" y="466032"/>
+                  </a:lnTo>
+                  <a:lnTo>
+                    <a:pt x="4653781" y="448649"/>
+                  </a:lnTo>
+                  <a:lnTo>
+                    <a:pt x="4576147" y="430489"/>
+                  </a:lnTo>
+                  <a:lnTo>
+                    <a:pt x="4498513" y="411516"/>
+                  </a:lnTo>
+                  <a:lnTo>
+                    <a:pt x="4420879" y="391694"/>
+                  </a:lnTo>
+                  <a:lnTo>
+                    <a:pt x="4343244" y="370986"/>
+                  </a:lnTo>
+                  <a:lnTo>
+                    <a:pt x="4265610" y="349351"/>
+                  </a:lnTo>
+                  <a:lnTo>
+                    <a:pt x="4187976" y="326748"/>
+                  </a:lnTo>
+                  <a:lnTo>
+                    <a:pt x="4110342" y="303134"/>
+                  </a:lnTo>
+                  <a:lnTo>
+                    <a:pt x="4032708" y="278463"/>
+                  </a:lnTo>
+                  <a:lnTo>
+                    <a:pt x="3955074" y="252689"/>
+                  </a:lnTo>
+                  <a:lnTo>
+                    <a:pt x="3877440" y="225761"/>
+                  </a:lnTo>
+                  <a:lnTo>
+                    <a:pt x="3799806" y="197629"/>
+                  </a:lnTo>
+                  <a:lnTo>
+                    <a:pt x="3722172" y="168238"/>
+                  </a:lnTo>
+                  <a:lnTo>
+                    <a:pt x="3644538" y="137532"/>
+                  </a:lnTo>
+                  <a:lnTo>
+                    <a:pt x="3566904" y="105453"/>
+                  </a:lnTo>
+                  <a:lnTo>
+                    <a:pt x="3489270" y="71938"/>
+                  </a:lnTo>
+                  <a:lnTo>
+                    <a:pt x="3411636" y="36923"/>
+                  </a:lnTo>
+                  <a:lnTo>
+                    <a:pt x="3334002" y="24712"/>
+                  </a:lnTo>
+                  <a:lnTo>
+                    <a:pt x="3256368" y="24145"/>
+                  </a:lnTo>
+                  <a:lnTo>
+                    <a:pt x="3178734" y="23577"/>
+                  </a:lnTo>
+                  <a:lnTo>
+                    <a:pt x="3101100" y="23009"/>
+                  </a:lnTo>
+                  <a:lnTo>
+                    <a:pt x="3023466" y="22441"/>
+                  </a:lnTo>
+                  <a:lnTo>
+                    <a:pt x="2945832" y="21872"/>
+                  </a:lnTo>
+                  <a:lnTo>
+                    <a:pt x="2868198" y="21303"/>
+                  </a:lnTo>
+                  <a:lnTo>
+                    <a:pt x="2790564" y="20733"/>
+                  </a:lnTo>
+                  <a:lnTo>
+                    <a:pt x="2712930" y="20163"/>
+                  </a:lnTo>
+                  <a:lnTo>
+                    <a:pt x="2635295" y="19593"/>
+                  </a:lnTo>
+                  <a:lnTo>
+                    <a:pt x="2557661" y="19022"/>
+                  </a:lnTo>
+                  <a:lnTo>
+                    <a:pt x="2480027" y="18451"/>
+                  </a:lnTo>
+                  <a:lnTo>
+                    <a:pt x="2402393" y="17880"/>
+                  </a:lnTo>
+                  <a:lnTo>
+                    <a:pt x="2324759" y="17308"/>
+                  </a:lnTo>
+                  <a:lnTo>
+                    <a:pt x="2247125" y="16735"/>
+                  </a:lnTo>
+                  <a:lnTo>
+                    <a:pt x="2169491" y="16163"/>
+                  </a:lnTo>
+                  <a:lnTo>
+                    <a:pt x="2091857" y="15590"/>
+                  </a:lnTo>
+                  <a:lnTo>
+                    <a:pt x="2014223" y="15016"/>
+                  </a:lnTo>
+                  <a:lnTo>
+                    <a:pt x="1936589" y="14442"/>
+                  </a:lnTo>
+                  <a:lnTo>
+                    <a:pt x="1858955" y="13868"/>
+                  </a:lnTo>
+                  <a:lnTo>
+                    <a:pt x="1781321" y="13293"/>
+                  </a:lnTo>
+                  <a:lnTo>
+                    <a:pt x="1703687" y="12718"/>
+                  </a:lnTo>
+                  <a:lnTo>
+                    <a:pt x="1626053" y="12143"/>
+                  </a:lnTo>
+                  <a:lnTo>
+                    <a:pt x="1548419" y="11567"/>
+                  </a:lnTo>
+                  <a:lnTo>
+                    <a:pt x="1470785" y="10991"/>
+                  </a:lnTo>
+                  <a:lnTo>
+                    <a:pt x="1393151" y="10414"/>
+                  </a:lnTo>
+                  <a:lnTo>
+                    <a:pt x="1315517" y="9837"/>
+                  </a:lnTo>
+                  <a:lnTo>
+                    <a:pt x="1237883" y="9260"/>
+                  </a:lnTo>
+                  <a:lnTo>
+                    <a:pt x="1160249" y="8682"/>
+                  </a:lnTo>
+                  <a:lnTo>
+                    <a:pt x="1082615" y="8104"/>
+                  </a:lnTo>
+                  <a:lnTo>
+                    <a:pt x="1004981" y="7525"/>
+                  </a:lnTo>
+                  <a:lnTo>
+                    <a:pt x="927346" y="6946"/>
+                  </a:lnTo>
+                  <a:lnTo>
+                    <a:pt x="849712" y="6367"/>
+                  </a:lnTo>
+                  <a:lnTo>
+                    <a:pt x="772078" y="5787"/>
+                  </a:lnTo>
+                  <a:lnTo>
+                    <a:pt x="694444" y="5207"/>
+                  </a:lnTo>
+                  <a:lnTo>
+                    <a:pt x="616810" y="4626"/>
+                  </a:lnTo>
+                  <a:lnTo>
+                    <a:pt x="539176" y="4045"/>
+                  </a:lnTo>
+                  <a:lnTo>
+                    <a:pt x="461542" y="3464"/>
+                  </a:lnTo>
+                  <a:lnTo>
+                    <a:pt x="383908" y="2882"/>
+                  </a:lnTo>
+                  <a:lnTo>
+                    <a:pt x="306274" y="2300"/>
+                  </a:lnTo>
+                  <a:lnTo>
+                    <a:pt x="228640" y="1718"/>
+                  </a:lnTo>
+                  <a:lnTo>
+                    <a:pt x="151006" y="1135"/>
+                  </a:lnTo>
+                  <a:lnTo>
+                    <a:pt x="73372" y="551"/>
                   </a:lnTo>
                   <a:lnTo>
                     <a:pt x="0" y="0"/>
@@ -4175,300 +4175,300 @@
           </p:nvSpPr>
           <p:spPr>
             <a:xfrm>
-              <a:off x="817517" y="3256361"/>
-              <a:ext cx="7370972" cy="2014930"/>
+              <a:off x="817517" y="3370424"/>
+              <a:ext cx="7370972" cy="1921760"/>
             </a:xfrm>
             <a:custGeom>
               <a:avLst/>
               <a:pathLst>
-                <a:path w="7370972" h="2014930">
+                <a:path w="7370972" h="1921760">
                   <a:moveTo>
                     <a:pt x="0" y="0"/>
                   </a:moveTo>
                   <a:lnTo>
-                    <a:pt x="73372" y="47688"/>
-                  </a:lnTo>
-                  <a:lnTo>
-                    <a:pt x="151006" y="97038"/>
-                  </a:lnTo>
-                  <a:lnTo>
-                    <a:pt x="228640" y="145303"/>
-                  </a:lnTo>
-                  <a:lnTo>
-                    <a:pt x="306274" y="192507"/>
-                  </a:lnTo>
-                  <a:lnTo>
-                    <a:pt x="383908" y="238674"/>
-                  </a:lnTo>
-                  <a:lnTo>
-                    <a:pt x="461542" y="283825"/>
-                  </a:lnTo>
-                  <a:lnTo>
-                    <a:pt x="539176" y="327985"/>
-                  </a:lnTo>
-                  <a:lnTo>
-                    <a:pt x="616810" y="371173"/>
-                  </a:lnTo>
-                  <a:lnTo>
-                    <a:pt x="694444" y="413413"/>
-                  </a:lnTo>
-                  <a:lnTo>
-                    <a:pt x="772078" y="454723"/>
-                  </a:lnTo>
-                  <a:lnTo>
-                    <a:pt x="849712" y="495126"/>
-                  </a:lnTo>
-                  <a:lnTo>
-                    <a:pt x="927346" y="534641"/>
-                  </a:lnTo>
-                  <a:lnTo>
-                    <a:pt x="1004981" y="573287"/>
-                  </a:lnTo>
-                  <a:lnTo>
-                    <a:pt x="1082615" y="611084"/>
-                  </a:lnTo>
-                  <a:lnTo>
-                    <a:pt x="1160249" y="648050"/>
-                  </a:lnTo>
-                  <a:lnTo>
-                    <a:pt x="1237883" y="684203"/>
-                  </a:lnTo>
-                  <a:lnTo>
-                    <a:pt x="1315517" y="719562"/>
-                  </a:lnTo>
-                  <a:lnTo>
-                    <a:pt x="1393151" y="754144"/>
-                  </a:lnTo>
-                  <a:lnTo>
-                    <a:pt x="1470785" y="787965"/>
-                  </a:lnTo>
-                  <a:lnTo>
-                    <a:pt x="1548419" y="821043"/>
-                  </a:lnTo>
-                  <a:lnTo>
-                    <a:pt x="1626053" y="853394"/>
-                  </a:lnTo>
-                  <a:lnTo>
-                    <a:pt x="1703687" y="885034"/>
-                  </a:lnTo>
-                  <a:lnTo>
-                    <a:pt x="1781321" y="915978"/>
-                  </a:lnTo>
-                  <a:lnTo>
-                    <a:pt x="1858955" y="946243"/>
-                  </a:lnTo>
-                  <a:lnTo>
-                    <a:pt x="1936589" y="975842"/>
-                  </a:lnTo>
-                  <a:lnTo>
-                    <a:pt x="2014223" y="1004790"/>
-                  </a:lnTo>
-                  <a:lnTo>
-                    <a:pt x="2091857" y="1033102"/>
-                  </a:lnTo>
-                  <a:lnTo>
-                    <a:pt x="2169491" y="1060792"/>
-                  </a:lnTo>
-                  <a:lnTo>
-                    <a:pt x="2247125" y="1087873"/>
-                  </a:lnTo>
-                  <a:lnTo>
-                    <a:pt x="2324759" y="1114359"/>
-                  </a:lnTo>
-                  <a:lnTo>
-                    <a:pt x="2402393" y="1140263"/>
-                  </a:lnTo>
-                  <a:lnTo>
-                    <a:pt x="2480027" y="1165597"/>
-                  </a:lnTo>
-                  <a:lnTo>
-                    <a:pt x="2557661" y="1190374"/>
-                  </a:lnTo>
-                  <a:lnTo>
-                    <a:pt x="2635295" y="1214607"/>
-                  </a:lnTo>
-                  <a:lnTo>
-                    <a:pt x="2712930" y="1238307"/>
-                  </a:lnTo>
-                  <a:lnTo>
-                    <a:pt x="2790564" y="1261487"/>
-                  </a:lnTo>
-                  <a:lnTo>
-                    <a:pt x="2868198" y="1284157"/>
-                  </a:lnTo>
-                  <a:lnTo>
-                    <a:pt x="2945832" y="1306328"/>
-                  </a:lnTo>
-                  <a:lnTo>
-                    <a:pt x="3023466" y="1328012"/>
-                  </a:lnTo>
-                  <a:lnTo>
-                    <a:pt x="3101100" y="1349220"/>
-                  </a:lnTo>
-                  <a:lnTo>
-                    <a:pt x="3178734" y="1369961"/>
-                  </a:lnTo>
-                  <a:lnTo>
-                    <a:pt x="3256368" y="1390246"/>
-                  </a:lnTo>
-                  <a:lnTo>
-                    <a:pt x="3334002" y="1410086"/>
-                  </a:lnTo>
-                  <a:lnTo>
-                    <a:pt x="3411636" y="1429490"/>
-                  </a:lnTo>
-                  <a:lnTo>
-                    <a:pt x="3489270" y="1448467"/>
-                  </a:lnTo>
-                  <a:lnTo>
-                    <a:pt x="3566904" y="1467026"/>
-                  </a:lnTo>
-                  <a:lnTo>
-                    <a:pt x="3644538" y="1485178"/>
-                  </a:lnTo>
-                  <a:lnTo>
-                    <a:pt x="3722172" y="1502931"/>
-                  </a:lnTo>
-                  <a:lnTo>
-                    <a:pt x="3799806" y="1520294"/>
-                  </a:lnTo>
-                  <a:lnTo>
-                    <a:pt x="3877440" y="1537275"/>
-                  </a:lnTo>
-                  <a:lnTo>
-                    <a:pt x="3955074" y="1553883"/>
-                  </a:lnTo>
-                  <a:lnTo>
-                    <a:pt x="4032708" y="1570126"/>
-                  </a:lnTo>
-                  <a:lnTo>
-                    <a:pt x="4110342" y="1586011"/>
-                  </a:lnTo>
-                  <a:lnTo>
-                    <a:pt x="4187976" y="1601548"/>
-                  </a:lnTo>
-                  <a:lnTo>
-                    <a:pt x="4265610" y="1616743"/>
-                  </a:lnTo>
-                  <a:lnTo>
-                    <a:pt x="4343244" y="1631604"/>
-                  </a:lnTo>
-                  <a:lnTo>
-                    <a:pt x="4420879" y="1646138"/>
-                  </a:lnTo>
-                  <a:lnTo>
-                    <a:pt x="4498513" y="1660353"/>
-                  </a:lnTo>
-                  <a:lnTo>
-                    <a:pt x="4576147" y="1674256"/>
-                  </a:lnTo>
-                  <a:lnTo>
-                    <a:pt x="4653781" y="1687853"/>
-                  </a:lnTo>
-                  <a:lnTo>
-                    <a:pt x="4731415" y="1701151"/>
-                  </a:lnTo>
-                  <a:lnTo>
-                    <a:pt x="4809049" y="1714157"/>
-                  </a:lnTo>
-                  <a:lnTo>
-                    <a:pt x="4886683" y="1726876"/>
-                  </a:lnTo>
-                  <a:lnTo>
-                    <a:pt x="4964317" y="1739317"/>
-                  </a:lnTo>
-                  <a:lnTo>
-                    <a:pt x="5041951" y="1751484"/>
-                  </a:lnTo>
-                  <a:lnTo>
-                    <a:pt x="5119585" y="1763383"/>
-                  </a:lnTo>
-                  <a:lnTo>
-                    <a:pt x="5197219" y="1775021"/>
-                  </a:lnTo>
-                  <a:lnTo>
-                    <a:pt x="5274853" y="1786403"/>
-                  </a:lnTo>
-                  <a:lnTo>
-                    <a:pt x="5352487" y="1797535"/>
-                  </a:lnTo>
-                  <a:lnTo>
-                    <a:pt x="5430121" y="1808422"/>
-                  </a:lnTo>
-                  <a:lnTo>
-                    <a:pt x="5507755" y="1819070"/>
-                  </a:lnTo>
-                  <a:lnTo>
-                    <a:pt x="5585389" y="1829484"/>
-                  </a:lnTo>
-                  <a:lnTo>
-                    <a:pt x="5663023" y="1839669"/>
-                  </a:lnTo>
-                  <a:lnTo>
-                    <a:pt x="5740657" y="1849630"/>
-                  </a:lnTo>
-                  <a:lnTo>
-                    <a:pt x="5818291" y="1859372"/>
-                  </a:lnTo>
-                  <a:lnTo>
-                    <a:pt x="5895925" y="1868900"/>
-                  </a:lnTo>
-                  <a:lnTo>
-                    <a:pt x="5973559" y="1878218"/>
-                  </a:lnTo>
-                  <a:lnTo>
-                    <a:pt x="6051193" y="1887332"/>
-                  </a:lnTo>
-                  <a:lnTo>
-                    <a:pt x="6128827" y="1896245"/>
-                  </a:lnTo>
-                  <a:lnTo>
-                    <a:pt x="6206462" y="1904963"/>
-                  </a:lnTo>
-                  <a:lnTo>
-                    <a:pt x="6284096" y="1913489"/>
-                  </a:lnTo>
-                  <a:lnTo>
-                    <a:pt x="6361730" y="1921827"/>
-                  </a:lnTo>
-                  <a:lnTo>
-                    <a:pt x="6439364" y="1929982"/>
-                  </a:lnTo>
-                  <a:lnTo>
-                    <a:pt x="6516998" y="1937958"/>
-                  </a:lnTo>
-                  <a:lnTo>
-                    <a:pt x="6594632" y="1945759"/>
-                  </a:lnTo>
-                  <a:lnTo>
-                    <a:pt x="6672266" y="1953388"/>
-                  </a:lnTo>
-                  <a:lnTo>
-                    <a:pt x="6749900" y="1960849"/>
-                  </a:lnTo>
-                  <a:lnTo>
-                    <a:pt x="6827534" y="1968147"/>
-                  </a:lnTo>
-                  <a:lnTo>
-                    <a:pt x="6905168" y="1975284"/>
-                  </a:lnTo>
-                  <a:lnTo>
-                    <a:pt x="6982802" y="1982264"/>
-                  </a:lnTo>
-                  <a:lnTo>
-                    <a:pt x="7060436" y="1989091"/>
-                  </a:lnTo>
-                  <a:lnTo>
-                    <a:pt x="7138070" y="1995767"/>
-                  </a:lnTo>
-                  <a:lnTo>
-                    <a:pt x="7215704" y="2002297"/>
-                  </a:lnTo>
-                  <a:lnTo>
-                    <a:pt x="7293338" y="2008684"/>
-                  </a:lnTo>
-                  <a:lnTo>
-                    <a:pt x="7370972" y="2014930"/>
+                    <a:pt x="73372" y="45483"/>
+                  </a:lnTo>
+                  <a:lnTo>
+                    <a:pt x="151006" y="92551"/>
+                  </a:lnTo>
+                  <a:lnTo>
+                    <a:pt x="228640" y="138584"/>
+                  </a:lnTo>
+                  <a:lnTo>
+                    <a:pt x="306274" y="183606"/>
+                  </a:lnTo>
+                  <a:lnTo>
+                    <a:pt x="383908" y="227637"/>
+                  </a:lnTo>
+                  <a:lnTo>
+                    <a:pt x="461542" y="270701"/>
+                  </a:lnTo>
+                  <a:lnTo>
+                    <a:pt x="539176" y="312819"/>
+                  </a:lnTo>
+                  <a:lnTo>
+                    <a:pt x="616810" y="354010"/>
+                  </a:lnTo>
+                  <a:lnTo>
+                    <a:pt x="694444" y="394296"/>
+                  </a:lnTo>
+                  <a:lnTo>
+                    <a:pt x="772078" y="433697"/>
+                  </a:lnTo>
+                  <a:lnTo>
+                    <a:pt x="849712" y="472232"/>
+                  </a:lnTo>
+                  <a:lnTo>
+                    <a:pt x="927346" y="509919"/>
+                  </a:lnTo>
+                  <a:lnTo>
+                    <a:pt x="1004981" y="546779"/>
+                  </a:lnTo>
+                  <a:lnTo>
+                    <a:pt x="1082615" y="582828"/>
+                  </a:lnTo>
+                  <a:lnTo>
+                    <a:pt x="1160249" y="618084"/>
+                  </a:lnTo>
+                  <a:lnTo>
+                    <a:pt x="1237883" y="652566"/>
+                  </a:lnTo>
+                  <a:lnTo>
+                    <a:pt x="1315517" y="686290"/>
+                  </a:lnTo>
+                  <a:lnTo>
+                    <a:pt x="1393151" y="719272"/>
+                  </a:lnTo>
+                  <a:lnTo>
+                    <a:pt x="1470785" y="751530"/>
+                  </a:lnTo>
+                  <a:lnTo>
+                    <a:pt x="1548419" y="783078"/>
+                  </a:lnTo>
+                  <a:lnTo>
+                    <a:pt x="1626053" y="813933"/>
+                  </a:lnTo>
+                  <a:lnTo>
+                    <a:pt x="1703687" y="844110"/>
+                  </a:lnTo>
+                  <a:lnTo>
+                    <a:pt x="1781321" y="873624"/>
+                  </a:lnTo>
+                  <a:lnTo>
+                    <a:pt x="1858955" y="902489"/>
+                  </a:lnTo>
+                  <a:lnTo>
+                    <a:pt x="1936589" y="930719"/>
+                  </a:lnTo>
+                  <a:lnTo>
+                    <a:pt x="2014223" y="958329"/>
+                  </a:lnTo>
+                  <a:lnTo>
+                    <a:pt x="2091857" y="985332"/>
+                  </a:lnTo>
+                  <a:lnTo>
+                    <a:pt x="2169491" y="1011741"/>
+                  </a:lnTo>
+                  <a:lnTo>
+                    <a:pt x="2247125" y="1037570"/>
+                  </a:lnTo>
+                  <a:lnTo>
+                    <a:pt x="2324759" y="1062831"/>
+                  </a:lnTo>
+                  <a:lnTo>
+                    <a:pt x="2402393" y="1087537"/>
+                  </a:lnTo>
+                  <a:lnTo>
+                    <a:pt x="2480027" y="1111700"/>
+                  </a:lnTo>
+                  <a:lnTo>
+                    <a:pt x="2557661" y="1135332"/>
+                  </a:lnTo>
+                  <a:lnTo>
+                    <a:pt x="2635295" y="1158444"/>
+                  </a:lnTo>
+                  <a:lnTo>
+                    <a:pt x="2712930" y="1181049"/>
+                  </a:lnTo>
+                  <a:lnTo>
+                    <a:pt x="2790564" y="1203156"/>
+                  </a:lnTo>
+                  <a:lnTo>
+                    <a:pt x="2868198" y="1224778"/>
+                  </a:lnTo>
+                  <a:lnTo>
+                    <a:pt x="2945832" y="1245924"/>
+                  </a:lnTo>
+                  <a:lnTo>
+                    <a:pt x="3023466" y="1266605"/>
+                  </a:lnTo>
+                  <a:lnTo>
+                    <a:pt x="3101100" y="1286832"/>
+                  </a:lnTo>
+                  <a:lnTo>
+                    <a:pt x="3178734" y="1306615"/>
+                  </a:lnTo>
+                  <a:lnTo>
+                    <a:pt x="3256368" y="1325962"/>
+                  </a:lnTo>
+                  <a:lnTo>
+                    <a:pt x="3334002" y="1344884"/>
+                  </a:lnTo>
+                  <a:lnTo>
+                    <a:pt x="3411636" y="1363390"/>
+                  </a:lnTo>
+                  <a:lnTo>
+                    <a:pt x="3489270" y="1381490"/>
+                  </a:lnTo>
+                  <a:lnTo>
+                    <a:pt x="3566904" y="1399192"/>
+                  </a:lnTo>
+                  <a:lnTo>
+                    <a:pt x="3644538" y="1416504"/>
+                  </a:lnTo>
+                  <a:lnTo>
+                    <a:pt x="3722172" y="1433436"/>
+                  </a:lnTo>
+                  <a:lnTo>
+                    <a:pt x="3799806" y="1449996"/>
+                  </a:lnTo>
+                  <a:lnTo>
+                    <a:pt x="3877440" y="1466192"/>
+                  </a:lnTo>
+                  <a:lnTo>
+                    <a:pt x="3955074" y="1482032"/>
+                  </a:lnTo>
+                  <a:lnTo>
+                    <a:pt x="4032708" y="1497524"/>
+                  </a:lnTo>
+                  <a:lnTo>
+                    <a:pt x="4110342" y="1512675"/>
+                  </a:lnTo>
+                  <a:lnTo>
+                    <a:pt x="4187976" y="1527493"/>
+                  </a:lnTo>
+                  <a:lnTo>
+                    <a:pt x="4265610" y="1541985"/>
+                  </a:lnTo>
+                  <a:lnTo>
+                    <a:pt x="4343244" y="1556159"/>
+                  </a:lnTo>
+                  <a:lnTo>
+                    <a:pt x="4420879" y="1570022"/>
+                  </a:lnTo>
+                  <a:lnTo>
+                    <a:pt x="4498513" y="1583579"/>
+                  </a:lnTo>
+                  <a:lnTo>
+                    <a:pt x="4576147" y="1596839"/>
+                  </a:lnTo>
+                  <a:lnTo>
+                    <a:pt x="4653781" y="1609807"/>
+                  </a:lnTo>
+                  <a:lnTo>
+                    <a:pt x="4731415" y="1622490"/>
+                  </a:lnTo>
+                  <a:lnTo>
+                    <a:pt x="4809049" y="1634895"/>
+                  </a:lnTo>
+                  <a:lnTo>
+                    <a:pt x="4886683" y="1647026"/>
+                  </a:lnTo>
+                  <a:lnTo>
+                    <a:pt x="4964317" y="1658891"/>
+                  </a:lnTo>
+                  <a:lnTo>
+                    <a:pt x="5041951" y="1670496"/>
+                  </a:lnTo>
+                  <a:lnTo>
+                    <a:pt x="5119585" y="1681845"/>
+                  </a:lnTo>
+                  <a:lnTo>
+                    <a:pt x="5197219" y="1692945"/>
+                  </a:lnTo>
+                  <a:lnTo>
+                    <a:pt x="5274853" y="1703800"/>
+                  </a:lnTo>
+                  <a:lnTo>
+                    <a:pt x="5352487" y="1714417"/>
+                  </a:lnTo>
+                  <a:lnTo>
+                    <a:pt x="5430121" y="1724801"/>
+                  </a:lnTo>
+                  <a:lnTo>
+                    <a:pt x="5507755" y="1734957"/>
+                  </a:lnTo>
+                  <a:lnTo>
+                    <a:pt x="5585389" y="1744889"/>
+                  </a:lnTo>
+                  <a:lnTo>
+                    <a:pt x="5663023" y="1754603"/>
+                  </a:lnTo>
+                  <a:lnTo>
+                    <a:pt x="5740657" y="1764103"/>
+                  </a:lnTo>
+                  <a:lnTo>
+                    <a:pt x="5818291" y="1773395"/>
+                  </a:lnTo>
+                  <a:lnTo>
+                    <a:pt x="5895925" y="1782482"/>
+                  </a:lnTo>
+                  <a:lnTo>
+                    <a:pt x="5973559" y="1791370"/>
+                  </a:lnTo>
+                  <a:lnTo>
+                    <a:pt x="6051193" y="1800062"/>
+                  </a:lnTo>
+                  <a:lnTo>
+                    <a:pt x="6128827" y="1808564"/>
+                  </a:lnTo>
+                  <a:lnTo>
+                    <a:pt x="6206462" y="1816878"/>
+                  </a:lnTo>
+                  <a:lnTo>
+                    <a:pt x="6284096" y="1825010"/>
+                  </a:lnTo>
+                  <a:lnTo>
+                    <a:pt x="6361730" y="1832963"/>
+                  </a:lnTo>
+                  <a:lnTo>
+                    <a:pt x="6439364" y="1840741"/>
+                  </a:lnTo>
+                  <a:lnTo>
+                    <a:pt x="6516998" y="1848348"/>
+                  </a:lnTo>
+                  <a:lnTo>
+                    <a:pt x="6594632" y="1855788"/>
+                  </a:lnTo>
+                  <a:lnTo>
+                    <a:pt x="6672266" y="1863064"/>
+                  </a:lnTo>
+                  <a:lnTo>
+                    <a:pt x="6749900" y="1870180"/>
+                  </a:lnTo>
+                  <a:lnTo>
+                    <a:pt x="6827534" y="1877140"/>
+                  </a:lnTo>
+                  <a:lnTo>
+                    <a:pt x="6905168" y="1883947"/>
+                  </a:lnTo>
+                  <a:lnTo>
+                    <a:pt x="6982802" y="1890605"/>
+                  </a:lnTo>
+                  <a:lnTo>
+                    <a:pt x="7060436" y="1897116"/>
+                  </a:lnTo>
+                  <a:lnTo>
+                    <a:pt x="7138070" y="1903484"/>
+                  </a:lnTo>
+                  <a:lnTo>
+                    <a:pt x="7215704" y="1909712"/>
+                  </a:lnTo>
+                  <a:lnTo>
+                    <a:pt x="7293338" y="1915803"/>
+                  </a:lnTo>
+                  <a:lnTo>
+                    <a:pt x="7370972" y="1921760"/>
                   </a:lnTo>
                 </a:path>
               </a:pathLst>
@@ -4497,7 +4497,7 @@
           </p:nvSpPr>
           <p:spPr>
             <a:xfrm>
-              <a:off x="817517" y="4679530"/>
+              <a:off x="817517" y="4727786"/>
               <a:ext cx="7799693" cy="0"/>
             </a:xfrm>
             <a:custGeom>
@@ -4540,15 +4540,15 @@
           </p:nvSpPr>
           <p:spPr>
             <a:xfrm>
-              <a:off x="4203673" y="1896563"/>
-              <a:ext cx="0" cy="3826579"/>
+              <a:off x="4203673" y="2073503"/>
+              <a:ext cx="0" cy="3649639"/>
             </a:xfrm>
             <a:custGeom>
               <a:avLst/>
               <a:pathLst>
-                <a:path w="0" h="3826579">
+                <a:path w="0" h="3649639">
                   <a:moveTo>
-                    <a:pt x="0" y="3826579"/>
+                    <a:pt x="0" y="3649639"/>
                   </a:moveTo>
                   <a:lnTo>
                     <a:pt x="0" y="0"/>
@@ -4583,7 +4583,7 @@
           </p:nvSpPr>
           <p:spPr>
             <a:xfrm>
-              <a:off x="692708" y="5509156"/>
+              <a:off x="692708" y="5517199"/>
               <a:ext cx="62179" cy="80101"/>
             </a:xfrm>
             <a:prstGeom prst="rect">
@@ -4629,7 +4629,7 @@
           </p:nvSpPr>
           <p:spPr>
             <a:xfrm>
-              <a:off x="692708" y="4639479"/>
+              <a:off x="692708" y="4687735"/>
               <a:ext cx="62179" cy="80101"/>
             </a:xfrm>
             <a:prstGeom prst="rect">
@@ -4675,7 +4675,7 @@
           </p:nvSpPr>
           <p:spPr>
             <a:xfrm>
-              <a:off x="692708" y="3769802"/>
+              <a:off x="692708" y="3858272"/>
               <a:ext cx="62179" cy="80101"/>
             </a:xfrm>
             <a:prstGeom prst="rect">
@@ -4721,7 +4721,7 @@
           </p:nvSpPr>
           <p:spPr>
             <a:xfrm>
-              <a:off x="692708" y="2900125"/>
+              <a:off x="692708" y="3028808"/>
               <a:ext cx="62179" cy="80101"/>
             </a:xfrm>
             <a:prstGeom prst="rect">
@@ -4767,7 +4767,7 @@
           </p:nvSpPr>
           <p:spPr>
             <a:xfrm>
-              <a:off x="692708" y="2030448"/>
+              <a:off x="692708" y="2199345"/>
               <a:ext cx="62179" cy="80101"/>
             </a:xfrm>
             <a:prstGeom prst="rect">
@@ -5043,7 +5043,7 @@
           </p:nvSpPr>
           <p:spPr>
             <a:xfrm rot="-5400000">
-              <a:off x="68446" y="3759743"/>
+              <a:off x="68446" y="3848213"/>
               <a:ext cx="1016904" cy="100218"/>
             </a:xfrm>
             <a:prstGeom prst="rect">
@@ -5084,6 +5084,52 @@
         <p:sp>
           <p:nvSpPr>
             <p:cNvPr id="38" name="tx38"/>
+            <p:cNvSpPr/>
+            <p:nvPr/>
+          </p:nvSpPr>
+          <p:spPr>
+            <a:xfrm>
+              <a:off x="817517" y="1896563"/>
+              <a:ext cx="4166463" cy="82021"/>
+            </a:xfrm>
+            <a:prstGeom prst="rect">
+              <a:avLst/>
+            </a:prstGeom>
+            <a:noFill/>
+          </p:spPr>
+          <p:txBody>
+            <a:bodyPr lIns="0" rIns="0" tIns="0" bIns="0" anchorCtr="1" anchor="ctr" wrap="none"/>
+            <a:lstStyle/>
+            <a:p>
+              <a:pPr algn="l" marL="0" marR="0" indent="0">
+                <a:lnSpc>
+                  <a:spcPts val="900"/>
+                </a:lnSpc>
+                <a:spcBef>
+                  <a:spcPts val="0"/>
+                </a:spcBef>
+                <a:spcAft>
+                  <a:spcPts val="0"/>
+                </a:spcAft>
+              </a:pPr>
+              <a:r>
+                <a:rPr sz="900">
+                  <a:solidFill>
+                    <a:srgbClr val="404040">
+                      <a:alpha val="100000"/>
+                    </a:srgbClr>
+                  </a:solidFill>
+                  <a:latin typeface="Helvetica"/>
+                  <a:cs typeface="Helvetica"/>
+                </a:rPr>
+                <a:t>subHR = 0.78 (95% CI 0.61-0.99), p = 0.043   (per 0.1-unit increase in eGFR ratio)</a:t>
+              </a:r>
+            </a:p>
+          </p:txBody>
+        </p:sp>
+        <p:sp>
+          <p:nvSpPr>
+            <p:cNvPr id="39" name="tx39"/>
             <p:cNvSpPr/>
             <p:nvPr/>
           </p:nvSpPr>

--- a/docs/plots/carbo/jx_carbo_linsubhr_ratio_anemia2.pptx
+++ b/docs/plots/carbo/jx_carbo_linsubhr_ratio_anemia2.pptx
@@ -2271,26 +2271,26 @@
           </p:nvSpPr>
           <p:spPr>
             <a:xfrm>
-              <a:off x="817517" y="5142518"/>
-              <a:ext cx="7799693" cy="0"/>
+              <a:off x="915645" y="5071743"/>
+              <a:ext cx="7682587" cy="0"/>
             </a:xfrm>
             <a:custGeom>
               <a:avLst/>
               <a:pathLst>
-                <a:path w="7799693" h="0">
+                <a:path w="7682587" h="0">
                   <a:moveTo>
                     <a:pt x="0" y="0"/>
                   </a:moveTo>
                   <a:lnTo>
-                    <a:pt x="7799693" y="0"/>
-                  </a:lnTo>
-                  <a:lnTo>
-                    <a:pt x="7799693" y="0"/>
+                    <a:pt x="7682587" y="0"/>
+                  </a:lnTo>
+                  <a:lnTo>
+                    <a:pt x="7682587" y="0"/>
                   </a:lnTo>
                 </a:path>
               </a:pathLst>
             </a:custGeom>
-            <a:ln w="6775" cap="flat">
+            <a:ln w="8623" cap="flat">
               <a:solidFill>
                 <a:srgbClr val="EBEBEB">
                   <a:alpha val="100000"/>
@@ -2314,26 +2314,26 @@
           </p:nvSpPr>
           <p:spPr>
             <a:xfrm>
-              <a:off x="817517" y="4313054"/>
-              <a:ext cx="7799693" cy="0"/>
+              <a:off x="915645" y="4298074"/>
+              <a:ext cx="7682587" cy="0"/>
             </a:xfrm>
             <a:custGeom>
               <a:avLst/>
               <a:pathLst>
-                <a:path w="7799693" h="0">
+                <a:path w="7682587" h="0">
                   <a:moveTo>
                     <a:pt x="0" y="0"/>
                   </a:moveTo>
                   <a:lnTo>
-                    <a:pt x="7799693" y="0"/>
-                  </a:lnTo>
-                  <a:lnTo>
-                    <a:pt x="7799693" y="0"/>
+                    <a:pt x="7682587" y="0"/>
+                  </a:lnTo>
+                  <a:lnTo>
+                    <a:pt x="7682587" y="0"/>
                   </a:lnTo>
                 </a:path>
               </a:pathLst>
             </a:custGeom>
-            <a:ln w="6775" cap="flat">
+            <a:ln w="8623" cap="flat">
               <a:solidFill>
                 <a:srgbClr val="EBEBEB">
                   <a:alpha val="100000"/>
@@ -2357,26 +2357,26 @@
           </p:nvSpPr>
           <p:spPr>
             <a:xfrm>
-              <a:off x="817517" y="3483591"/>
-              <a:ext cx="7799693" cy="0"/>
+              <a:off x="915645" y="3524405"/>
+              <a:ext cx="7682587" cy="0"/>
             </a:xfrm>
             <a:custGeom>
               <a:avLst/>
               <a:pathLst>
-                <a:path w="7799693" h="0">
+                <a:path w="7682587" h="0">
                   <a:moveTo>
                     <a:pt x="0" y="0"/>
                   </a:moveTo>
                   <a:lnTo>
-                    <a:pt x="7799693" y="0"/>
-                  </a:lnTo>
-                  <a:lnTo>
-                    <a:pt x="7799693" y="0"/>
+                    <a:pt x="7682587" y="0"/>
+                  </a:lnTo>
+                  <a:lnTo>
+                    <a:pt x="7682587" y="0"/>
                   </a:lnTo>
                 </a:path>
               </a:pathLst>
             </a:custGeom>
-            <a:ln w="6775" cap="flat">
+            <a:ln w="8623" cap="flat">
               <a:solidFill>
                 <a:srgbClr val="EBEBEB">
                   <a:alpha val="100000"/>
@@ -2400,26 +2400,26 @@
           </p:nvSpPr>
           <p:spPr>
             <a:xfrm>
-              <a:off x="817517" y="2654127"/>
-              <a:ext cx="7799693" cy="0"/>
+              <a:off x="915645" y="2750737"/>
+              <a:ext cx="7682587" cy="0"/>
             </a:xfrm>
             <a:custGeom>
               <a:avLst/>
               <a:pathLst>
-                <a:path w="7799693" h="0">
+                <a:path w="7682587" h="0">
                   <a:moveTo>
                     <a:pt x="0" y="0"/>
                   </a:moveTo>
                   <a:lnTo>
-                    <a:pt x="7799693" y="0"/>
-                  </a:lnTo>
-                  <a:lnTo>
-                    <a:pt x="7799693" y="0"/>
+                    <a:pt x="7682587" y="0"/>
+                  </a:lnTo>
+                  <a:lnTo>
+                    <a:pt x="7682587" y="0"/>
                   </a:lnTo>
                 </a:path>
               </a:pathLst>
             </a:custGeom>
-            <a:ln w="6775" cap="flat">
+            <a:ln w="8623" cap="flat">
               <a:solidFill>
                 <a:srgbClr val="EBEBEB">
                   <a:alpha val="100000"/>
@@ -2443,15 +2443,15 @@
           </p:nvSpPr>
           <p:spPr>
             <a:xfrm>
-              <a:off x="1615213" y="2073503"/>
-              <a:ext cx="0" cy="3649639"/>
+              <a:off x="1701364" y="2209169"/>
+              <a:ext cx="0" cy="3404141"/>
             </a:xfrm>
             <a:custGeom>
               <a:avLst/>
               <a:pathLst>
-                <a:path w="0" h="3649639">
+                <a:path w="0" h="3404141">
                   <a:moveTo>
-                    <a:pt x="0" y="3649639"/>
+                    <a:pt x="0" y="3404141"/>
                   </a:moveTo>
                   <a:lnTo>
                     <a:pt x="0" y="0"/>
@@ -2462,7 +2462,7 @@
                 </a:path>
               </a:pathLst>
             </a:custGeom>
-            <a:ln w="6775" cap="flat">
+            <a:ln w="8623" cap="flat">
               <a:solidFill>
                 <a:srgbClr val="EBEBEB">
                   <a:alpha val="100000"/>
@@ -2486,15 +2486,15 @@
           </p:nvSpPr>
           <p:spPr>
             <a:xfrm>
-              <a:off x="3387871" y="2073503"/>
-              <a:ext cx="0" cy="3649639"/>
+              <a:off x="3447406" y="2209169"/>
+              <a:ext cx="0" cy="3404141"/>
             </a:xfrm>
             <a:custGeom>
               <a:avLst/>
               <a:pathLst>
-                <a:path w="0" h="3649639">
+                <a:path w="0" h="3404141">
                   <a:moveTo>
-                    <a:pt x="0" y="3649639"/>
+                    <a:pt x="0" y="3404141"/>
                   </a:moveTo>
                   <a:lnTo>
                     <a:pt x="0" y="0"/>
@@ -2505,7 +2505,7 @@
                 </a:path>
               </a:pathLst>
             </a:custGeom>
-            <a:ln w="6775" cap="flat">
+            <a:ln w="8623" cap="flat">
               <a:solidFill>
                 <a:srgbClr val="EBEBEB">
                   <a:alpha val="100000"/>
@@ -2529,15 +2529,15 @@
           </p:nvSpPr>
           <p:spPr>
             <a:xfrm>
-              <a:off x="5160528" y="2073503"/>
-              <a:ext cx="0" cy="3649639"/>
+              <a:off x="5193449" y="2209169"/>
+              <a:ext cx="0" cy="3404141"/>
             </a:xfrm>
             <a:custGeom>
               <a:avLst/>
               <a:pathLst>
-                <a:path w="0" h="3649639">
+                <a:path w="0" h="3404141">
                   <a:moveTo>
-                    <a:pt x="0" y="3649639"/>
+                    <a:pt x="0" y="3404141"/>
                   </a:moveTo>
                   <a:lnTo>
                     <a:pt x="0" y="0"/>
@@ -2548,7 +2548,7 @@
                 </a:path>
               </a:pathLst>
             </a:custGeom>
-            <a:ln w="6775" cap="flat">
+            <a:ln w="8623" cap="flat">
               <a:solidFill>
                 <a:srgbClr val="EBEBEB">
                   <a:alpha val="100000"/>
@@ -2572,15 +2572,15 @@
           </p:nvSpPr>
           <p:spPr>
             <a:xfrm>
-              <a:off x="6933186" y="2073503"/>
-              <a:ext cx="0" cy="3649639"/>
+              <a:off x="6939491" y="2209169"/>
+              <a:ext cx="0" cy="3404141"/>
             </a:xfrm>
             <a:custGeom>
               <a:avLst/>
               <a:pathLst>
-                <a:path w="0" h="3649639">
+                <a:path w="0" h="3404141">
                   <a:moveTo>
-                    <a:pt x="0" y="3649639"/>
+                    <a:pt x="0" y="3404141"/>
                   </a:moveTo>
                   <a:lnTo>
                     <a:pt x="0" y="0"/>
@@ -2591,7 +2591,7 @@
                 </a:path>
               </a:pathLst>
             </a:custGeom>
-            <a:ln w="6775" cap="flat">
+            <a:ln w="8623" cap="flat">
               <a:solidFill>
                 <a:srgbClr val="EBEBEB">
                   <a:alpha val="100000"/>
@@ -2615,26 +2615,26 @@
           </p:nvSpPr>
           <p:spPr>
             <a:xfrm>
-              <a:off x="817517" y="5557249"/>
-              <a:ext cx="7799693" cy="0"/>
+              <a:off x="915645" y="5458577"/>
+              <a:ext cx="7682587" cy="0"/>
             </a:xfrm>
             <a:custGeom>
               <a:avLst/>
               <a:pathLst>
-                <a:path w="7799693" h="0">
+                <a:path w="7682587" h="0">
                   <a:moveTo>
                     <a:pt x="0" y="0"/>
                   </a:moveTo>
                   <a:lnTo>
-                    <a:pt x="7799693" y="0"/>
-                  </a:lnTo>
-                  <a:lnTo>
-                    <a:pt x="7799693" y="0"/>
+                    <a:pt x="7682587" y="0"/>
+                  </a:lnTo>
+                  <a:lnTo>
+                    <a:pt x="7682587" y="0"/>
                   </a:lnTo>
                 </a:path>
               </a:pathLst>
             </a:custGeom>
-            <a:ln w="13550" cap="flat">
+            <a:ln w="17246" cap="flat">
               <a:solidFill>
                 <a:srgbClr val="EBEBEB">
                   <a:alpha val="100000"/>
@@ -2658,26 +2658,26 @@
           </p:nvSpPr>
           <p:spPr>
             <a:xfrm>
-              <a:off x="817517" y="4727786"/>
-              <a:ext cx="7799693" cy="0"/>
+              <a:off x="915645" y="4684908"/>
+              <a:ext cx="7682587" cy="0"/>
             </a:xfrm>
             <a:custGeom>
               <a:avLst/>
               <a:pathLst>
-                <a:path w="7799693" h="0">
+                <a:path w="7682587" h="0">
                   <a:moveTo>
                     <a:pt x="0" y="0"/>
                   </a:moveTo>
                   <a:lnTo>
-                    <a:pt x="7799693" y="0"/>
-                  </a:lnTo>
-                  <a:lnTo>
-                    <a:pt x="7799693" y="0"/>
+                    <a:pt x="7682587" y="0"/>
+                  </a:lnTo>
+                  <a:lnTo>
+                    <a:pt x="7682587" y="0"/>
                   </a:lnTo>
                 </a:path>
               </a:pathLst>
             </a:custGeom>
-            <a:ln w="13550" cap="flat">
+            <a:ln w="17246" cap="flat">
               <a:solidFill>
                 <a:srgbClr val="EBEBEB">
                   <a:alpha val="100000"/>
@@ -2701,26 +2701,26 @@
           </p:nvSpPr>
           <p:spPr>
             <a:xfrm>
-              <a:off x="817517" y="3898322"/>
-              <a:ext cx="7799693" cy="0"/>
+              <a:off x="915645" y="3911240"/>
+              <a:ext cx="7682587" cy="0"/>
             </a:xfrm>
             <a:custGeom>
               <a:avLst/>
               <a:pathLst>
-                <a:path w="7799693" h="0">
+                <a:path w="7682587" h="0">
                   <a:moveTo>
                     <a:pt x="0" y="0"/>
                   </a:moveTo>
                   <a:lnTo>
-                    <a:pt x="7799693" y="0"/>
-                  </a:lnTo>
-                  <a:lnTo>
-                    <a:pt x="7799693" y="0"/>
+                    <a:pt x="7682587" y="0"/>
+                  </a:lnTo>
+                  <a:lnTo>
+                    <a:pt x="7682587" y="0"/>
                   </a:lnTo>
                 </a:path>
               </a:pathLst>
             </a:custGeom>
-            <a:ln w="13550" cap="flat">
+            <a:ln w="17246" cap="flat">
               <a:solidFill>
                 <a:srgbClr val="EBEBEB">
                   <a:alpha val="100000"/>
@@ -2744,26 +2744,26 @@
           </p:nvSpPr>
           <p:spPr>
             <a:xfrm>
-              <a:off x="817517" y="3068859"/>
-              <a:ext cx="7799693" cy="0"/>
+              <a:off x="915645" y="3137571"/>
+              <a:ext cx="7682587" cy="0"/>
             </a:xfrm>
             <a:custGeom>
               <a:avLst/>
               <a:pathLst>
-                <a:path w="7799693" h="0">
+                <a:path w="7682587" h="0">
                   <a:moveTo>
                     <a:pt x="0" y="0"/>
                   </a:moveTo>
                   <a:lnTo>
-                    <a:pt x="7799693" y="0"/>
-                  </a:lnTo>
-                  <a:lnTo>
-                    <a:pt x="7799693" y="0"/>
+                    <a:pt x="7682587" y="0"/>
+                  </a:lnTo>
+                  <a:lnTo>
+                    <a:pt x="7682587" y="0"/>
                   </a:lnTo>
                 </a:path>
               </a:pathLst>
             </a:custGeom>
-            <a:ln w="13550" cap="flat">
+            <a:ln w="17246" cap="flat">
               <a:solidFill>
                 <a:srgbClr val="EBEBEB">
                   <a:alpha val="100000"/>
@@ -2787,26 +2787,26 @@
           </p:nvSpPr>
           <p:spPr>
             <a:xfrm>
-              <a:off x="817517" y="2239395"/>
-              <a:ext cx="7799693" cy="0"/>
+              <a:off x="915645" y="2363903"/>
+              <a:ext cx="7682587" cy="0"/>
             </a:xfrm>
             <a:custGeom>
               <a:avLst/>
               <a:pathLst>
-                <a:path w="7799693" h="0">
+                <a:path w="7682587" h="0">
                   <a:moveTo>
                     <a:pt x="0" y="0"/>
                   </a:moveTo>
                   <a:lnTo>
-                    <a:pt x="7799693" y="0"/>
-                  </a:lnTo>
-                  <a:lnTo>
-                    <a:pt x="7799693" y="0"/>
+                    <a:pt x="7682587" y="0"/>
+                  </a:lnTo>
+                  <a:lnTo>
+                    <a:pt x="7682587" y="0"/>
                   </a:lnTo>
                 </a:path>
               </a:pathLst>
             </a:custGeom>
-            <a:ln w="13550" cap="flat">
+            <a:ln w="17246" cap="flat">
               <a:solidFill>
                 <a:srgbClr val="EBEBEB">
                   <a:alpha val="100000"/>
@@ -2830,15 +2830,15 @@
           </p:nvSpPr>
           <p:spPr>
             <a:xfrm>
-              <a:off x="2501542" y="2073503"/>
-              <a:ext cx="0" cy="3649639"/>
+              <a:off x="2574385" y="2209169"/>
+              <a:ext cx="0" cy="3404141"/>
             </a:xfrm>
             <a:custGeom>
               <a:avLst/>
               <a:pathLst>
-                <a:path w="0" h="3649639">
+                <a:path w="0" h="3404141">
                   <a:moveTo>
-                    <a:pt x="0" y="3649639"/>
+                    <a:pt x="0" y="3404141"/>
                   </a:moveTo>
                   <a:lnTo>
                     <a:pt x="0" y="0"/>
@@ -2849,7 +2849,7 @@
                 </a:path>
               </a:pathLst>
             </a:custGeom>
-            <a:ln w="13550" cap="flat">
+            <a:ln w="17246" cap="flat">
               <a:solidFill>
                 <a:srgbClr val="EBEBEB">
                   <a:alpha val="100000"/>
@@ -2873,15 +2873,15 @@
           </p:nvSpPr>
           <p:spPr>
             <a:xfrm>
-              <a:off x="4274200" y="2073503"/>
-              <a:ext cx="0" cy="3649639"/>
+              <a:off x="4320427" y="2209169"/>
+              <a:ext cx="0" cy="3404141"/>
             </a:xfrm>
             <a:custGeom>
               <a:avLst/>
               <a:pathLst>
-                <a:path w="0" h="3649639">
+                <a:path w="0" h="3404141">
                   <a:moveTo>
-                    <a:pt x="0" y="3649639"/>
+                    <a:pt x="0" y="3404141"/>
                   </a:moveTo>
                   <a:lnTo>
                     <a:pt x="0" y="0"/>
@@ -2892,7 +2892,7 @@
                 </a:path>
               </a:pathLst>
             </a:custGeom>
-            <a:ln w="13550" cap="flat">
+            <a:ln w="17246" cap="flat">
               <a:solidFill>
                 <a:srgbClr val="EBEBEB">
                   <a:alpha val="100000"/>
@@ -2916,15 +2916,15 @@
           </p:nvSpPr>
           <p:spPr>
             <a:xfrm>
-              <a:off x="6046857" y="2073503"/>
-              <a:ext cx="0" cy="3649639"/>
+              <a:off x="6066470" y="2209169"/>
+              <a:ext cx="0" cy="3404141"/>
             </a:xfrm>
             <a:custGeom>
               <a:avLst/>
               <a:pathLst>
-                <a:path w="0" h="3649639">
+                <a:path w="0" h="3404141">
                   <a:moveTo>
-                    <a:pt x="0" y="3649639"/>
+                    <a:pt x="0" y="3404141"/>
                   </a:moveTo>
                   <a:lnTo>
                     <a:pt x="0" y="0"/>
@@ -2935,7 +2935,7 @@
                 </a:path>
               </a:pathLst>
             </a:custGeom>
-            <a:ln w="13550" cap="flat">
+            <a:ln w="17246" cap="flat">
               <a:solidFill>
                 <a:srgbClr val="EBEBEB">
                   <a:alpha val="100000"/>
@@ -2959,15 +2959,15 @@
           </p:nvSpPr>
           <p:spPr>
             <a:xfrm>
-              <a:off x="7819515" y="2073503"/>
-              <a:ext cx="0" cy="3649639"/>
+              <a:off x="7812512" y="2209169"/>
+              <a:ext cx="0" cy="3404141"/>
             </a:xfrm>
             <a:custGeom>
               <a:avLst/>
               <a:pathLst>
-                <a:path w="0" h="3649639">
+                <a:path w="0" h="3404141">
                   <a:moveTo>
-                    <a:pt x="0" y="3649639"/>
+                    <a:pt x="0" y="3404141"/>
                   </a:moveTo>
                   <a:lnTo>
                     <a:pt x="0" y="0"/>
@@ -2978,7 +2978,7 @@
                 </a:path>
               </a:pathLst>
             </a:custGeom>
-            <a:ln w="13550" cap="flat">
+            <a:ln w="17246" cap="flat">
               <a:solidFill>
                 <a:srgbClr val="EBEBEB">
                   <a:alpha val="100000"/>
@@ -3002,558 +3002,558 @@
           </p:nvSpPr>
           <p:spPr>
             <a:xfrm>
-              <a:off x="817517" y="2073503"/>
-              <a:ext cx="7370972" cy="3396018"/>
+              <a:off x="915645" y="2209169"/>
+              <a:ext cx="7260303" cy="3167580"/>
             </a:xfrm>
             <a:custGeom>
               <a:avLst/>
               <a:pathLst>
-                <a:path w="7370972" h="3396018">
+                <a:path w="7260303" h="3167580">
                   <a:moveTo>
-                    <a:pt x="840831" y="0"/>
+                    <a:pt x="828206" y="0"/>
                   </a:moveTo>
                   <a:lnTo>
-                    <a:pt x="849712" y="17740"/>
-                  </a:lnTo>
-                  <a:lnTo>
-                    <a:pt x="927346" y="166168"/>
-                  </a:lnTo>
-                  <a:lnTo>
-                    <a:pt x="1004981" y="308240"/>
-                  </a:lnTo>
-                  <a:lnTo>
-                    <a:pt x="1082615" y="444228"/>
-                  </a:lnTo>
-                  <a:lnTo>
-                    <a:pt x="1160249" y="574393"/>
-                  </a:lnTo>
-                  <a:lnTo>
-                    <a:pt x="1237883" y="698983"/>
-                  </a:lnTo>
-                  <a:lnTo>
-                    <a:pt x="1315517" y="818238"/>
-                  </a:lnTo>
-                  <a:lnTo>
-                    <a:pt x="1393151" y="932385"/>
-                  </a:lnTo>
-                  <a:lnTo>
-                    <a:pt x="1470785" y="1041645"/>
-                  </a:lnTo>
-                  <a:lnTo>
-                    <a:pt x="1548419" y="1146226"/>
-                  </a:lnTo>
-                  <a:lnTo>
-                    <a:pt x="1626053" y="1246328"/>
-                  </a:lnTo>
-                  <a:lnTo>
-                    <a:pt x="1703687" y="1342143"/>
-                  </a:lnTo>
-                  <a:lnTo>
-                    <a:pt x="1781321" y="1433855"/>
-                  </a:lnTo>
-                  <a:lnTo>
-                    <a:pt x="1858955" y="1521640"/>
-                  </a:lnTo>
-                  <a:lnTo>
-                    <a:pt x="1936589" y="1605665"/>
-                  </a:lnTo>
-                  <a:lnTo>
-                    <a:pt x="2014223" y="1686092"/>
-                  </a:lnTo>
-                  <a:lnTo>
-                    <a:pt x="2091857" y="1763075"/>
-                  </a:lnTo>
-                  <a:lnTo>
-                    <a:pt x="2169491" y="1836761"/>
-                  </a:lnTo>
-                  <a:lnTo>
-                    <a:pt x="2247125" y="1907291"/>
-                  </a:lnTo>
-                  <a:lnTo>
-                    <a:pt x="2324759" y="1974802"/>
-                  </a:lnTo>
-                  <a:lnTo>
-                    <a:pt x="2402393" y="2039421"/>
-                  </a:lnTo>
-                  <a:lnTo>
-                    <a:pt x="2480027" y="2101272"/>
-                  </a:lnTo>
-                  <a:lnTo>
-                    <a:pt x="2557661" y="2160476"/>
-                  </a:lnTo>
-                  <a:lnTo>
-                    <a:pt x="2635295" y="2217143"/>
-                  </a:lnTo>
-                  <a:lnTo>
-                    <a:pt x="2712930" y="2271384"/>
-                  </a:lnTo>
-                  <a:lnTo>
-                    <a:pt x="2790564" y="2323303"/>
-                  </a:lnTo>
-                  <a:lnTo>
-                    <a:pt x="2868198" y="2372998"/>
-                  </a:lnTo>
-                  <a:lnTo>
-                    <a:pt x="2945832" y="2420564"/>
-                  </a:lnTo>
-                  <a:lnTo>
-                    <a:pt x="3023466" y="2466094"/>
-                  </a:lnTo>
-                  <a:lnTo>
-                    <a:pt x="3101100" y="2509674"/>
-                  </a:lnTo>
-                  <a:lnTo>
-                    <a:pt x="3178734" y="2551388"/>
-                  </a:lnTo>
-                  <a:lnTo>
-                    <a:pt x="3256368" y="2591315"/>
-                  </a:lnTo>
-                  <a:lnTo>
-                    <a:pt x="3334002" y="2629533"/>
-                  </a:lnTo>
-                  <a:lnTo>
-                    <a:pt x="3411636" y="2654469"/>
-                  </a:lnTo>
-                  <a:lnTo>
-                    <a:pt x="3489270" y="2655035"/>
-                  </a:lnTo>
-                  <a:lnTo>
-                    <a:pt x="3566904" y="2655601"/>
-                  </a:lnTo>
-                  <a:lnTo>
-                    <a:pt x="3644538" y="2656167"/>
-                  </a:lnTo>
-                  <a:lnTo>
-                    <a:pt x="3722172" y="2656732"/>
-                  </a:lnTo>
-                  <a:lnTo>
-                    <a:pt x="3799806" y="2657297"/>
-                  </a:lnTo>
-                  <a:lnTo>
-                    <a:pt x="3877440" y="2657862"/>
-                  </a:lnTo>
-                  <a:lnTo>
-                    <a:pt x="3955074" y="2658426"/>
-                  </a:lnTo>
-                  <a:lnTo>
-                    <a:pt x="4032708" y="2658990"/>
-                  </a:lnTo>
-                  <a:lnTo>
-                    <a:pt x="4110342" y="2659553"/>
-                  </a:lnTo>
-                  <a:lnTo>
-                    <a:pt x="4187976" y="2660116"/>
-                  </a:lnTo>
-                  <a:lnTo>
-                    <a:pt x="4265610" y="2660679"/>
-                  </a:lnTo>
-                  <a:lnTo>
-                    <a:pt x="4343244" y="2661241"/>
-                  </a:lnTo>
-                  <a:lnTo>
-                    <a:pt x="4420879" y="2661803"/>
-                  </a:lnTo>
-                  <a:lnTo>
-                    <a:pt x="4498513" y="2662364"/>
-                  </a:lnTo>
-                  <a:lnTo>
-                    <a:pt x="4576147" y="2662925"/>
-                  </a:lnTo>
-                  <a:lnTo>
-                    <a:pt x="4653781" y="2663486"/>
-                  </a:lnTo>
-                  <a:lnTo>
-                    <a:pt x="4731415" y="2664046"/>
-                  </a:lnTo>
-                  <a:lnTo>
-                    <a:pt x="4809049" y="2664606"/>
-                  </a:lnTo>
-                  <a:lnTo>
-                    <a:pt x="4886683" y="2665166"/>
-                  </a:lnTo>
-                  <a:lnTo>
-                    <a:pt x="4964317" y="2665725"/>
-                  </a:lnTo>
-                  <a:lnTo>
-                    <a:pt x="5041951" y="2666284"/>
-                  </a:lnTo>
-                  <a:lnTo>
-                    <a:pt x="5119585" y="2666842"/>
-                  </a:lnTo>
-                  <a:lnTo>
-                    <a:pt x="5197219" y="2667400"/>
-                  </a:lnTo>
-                  <a:lnTo>
-                    <a:pt x="5274853" y="2667958"/>
-                  </a:lnTo>
-                  <a:lnTo>
-                    <a:pt x="5352487" y="2668515"/>
-                  </a:lnTo>
-                  <a:lnTo>
-                    <a:pt x="5430121" y="2669072"/>
-                  </a:lnTo>
-                  <a:lnTo>
-                    <a:pt x="5507755" y="2669628"/>
-                  </a:lnTo>
-                  <a:lnTo>
-                    <a:pt x="5585389" y="2670184"/>
-                  </a:lnTo>
-                  <a:lnTo>
-                    <a:pt x="5663023" y="2670740"/>
-                  </a:lnTo>
-                  <a:lnTo>
-                    <a:pt x="5740657" y="2671295"/>
-                  </a:lnTo>
-                  <a:lnTo>
-                    <a:pt x="5818291" y="2671850"/>
-                  </a:lnTo>
-                  <a:lnTo>
-                    <a:pt x="5895925" y="2672405"/>
-                  </a:lnTo>
-                  <a:lnTo>
-                    <a:pt x="5973559" y="2672959"/>
-                  </a:lnTo>
-                  <a:lnTo>
-                    <a:pt x="6051193" y="2673513"/>
-                  </a:lnTo>
-                  <a:lnTo>
-                    <a:pt x="6128827" y="2674067"/>
-                  </a:lnTo>
-                  <a:lnTo>
-                    <a:pt x="6206462" y="2674620"/>
-                  </a:lnTo>
-                  <a:lnTo>
-                    <a:pt x="6284096" y="2675172"/>
-                  </a:lnTo>
-                  <a:lnTo>
-                    <a:pt x="6361730" y="2675725"/>
-                  </a:lnTo>
-                  <a:lnTo>
-                    <a:pt x="6439364" y="2676277"/>
-                  </a:lnTo>
-                  <a:lnTo>
-                    <a:pt x="6516998" y="2676828"/>
-                  </a:lnTo>
-                  <a:lnTo>
-                    <a:pt x="6594632" y="2677379"/>
-                  </a:lnTo>
-                  <a:lnTo>
-                    <a:pt x="6672266" y="2677930"/>
-                  </a:lnTo>
-                  <a:lnTo>
-                    <a:pt x="6749900" y="2678481"/>
-                  </a:lnTo>
-                  <a:lnTo>
-                    <a:pt x="6827534" y="2679031"/>
-                  </a:lnTo>
-                  <a:lnTo>
-                    <a:pt x="6905168" y="2679580"/>
-                  </a:lnTo>
-                  <a:lnTo>
-                    <a:pt x="6982802" y="2680130"/>
-                  </a:lnTo>
-                  <a:lnTo>
-                    <a:pt x="7060436" y="2680679"/>
-                  </a:lnTo>
-                  <a:lnTo>
-                    <a:pt x="7138070" y="2681227"/>
-                  </a:lnTo>
-                  <a:lnTo>
-                    <a:pt x="7215704" y="2681775"/>
-                  </a:lnTo>
-                  <a:lnTo>
-                    <a:pt x="7293338" y="2682323"/>
-                  </a:lnTo>
-                  <a:lnTo>
-                    <a:pt x="7370972" y="2682871"/>
-                  </a:lnTo>
-                  <a:lnTo>
-                    <a:pt x="7370972" y="3396018"/>
-                  </a:lnTo>
-                  <a:lnTo>
-                    <a:pt x="7293338" y="3392093"/>
-                  </a:lnTo>
-                  <a:lnTo>
-                    <a:pt x="7215704" y="3387993"/>
-                  </a:lnTo>
-                  <a:lnTo>
-                    <a:pt x="7138070" y="3383709"/>
-                  </a:lnTo>
-                  <a:lnTo>
-                    <a:pt x="7060436" y="3379233"/>
-                  </a:lnTo>
-                  <a:lnTo>
-                    <a:pt x="6982802" y="3374557"/>
-                  </a:lnTo>
-                  <a:lnTo>
-                    <a:pt x="6905168" y="3369672"/>
-                  </a:lnTo>
-                  <a:lnTo>
-                    <a:pt x="6827534" y="3364568"/>
-                  </a:lnTo>
-                  <a:lnTo>
-                    <a:pt x="6749900" y="3359236"/>
-                  </a:lnTo>
-                  <a:lnTo>
-                    <a:pt x="6672266" y="3353666"/>
-                  </a:lnTo>
-                  <a:lnTo>
-                    <a:pt x="6594632" y="3347846"/>
-                  </a:lnTo>
-                  <a:lnTo>
-                    <a:pt x="6516998" y="3341765"/>
-                  </a:lnTo>
-                  <a:lnTo>
-                    <a:pt x="6439364" y="3335413"/>
-                  </a:lnTo>
-                  <a:lnTo>
-                    <a:pt x="6361730" y="3328777"/>
-                  </a:lnTo>
-                  <a:lnTo>
-                    <a:pt x="6284096" y="3321844"/>
-                  </a:lnTo>
-                  <a:lnTo>
-                    <a:pt x="6206462" y="3314600"/>
-                  </a:lnTo>
-                  <a:lnTo>
-                    <a:pt x="6128827" y="3307032"/>
-                  </a:lnTo>
-                  <a:lnTo>
-                    <a:pt x="6051193" y="3299126"/>
-                  </a:lnTo>
-                  <a:lnTo>
-                    <a:pt x="5973559" y="3290866"/>
-                  </a:lnTo>
-                  <a:lnTo>
-                    <a:pt x="5895925" y="3282237"/>
-                  </a:lnTo>
-                  <a:lnTo>
-                    <a:pt x="5818291" y="3273221"/>
-                  </a:lnTo>
-                  <a:lnTo>
-                    <a:pt x="5740657" y="3263802"/>
-                  </a:lnTo>
-                  <a:lnTo>
-                    <a:pt x="5663023" y="3253962"/>
-                  </a:lnTo>
-                  <a:lnTo>
-                    <a:pt x="5585389" y="3243682"/>
-                  </a:lnTo>
-                  <a:lnTo>
-                    <a:pt x="5507755" y="3232941"/>
-                  </a:lnTo>
-                  <a:lnTo>
-                    <a:pt x="5430121" y="3221720"/>
-                  </a:lnTo>
-                  <a:lnTo>
-                    <a:pt x="5352487" y="3209997"/>
-                  </a:lnTo>
-                  <a:lnTo>
-                    <a:pt x="5274853" y="3197749"/>
-                  </a:lnTo>
-                  <a:lnTo>
-                    <a:pt x="5197219" y="3184954"/>
-                  </a:lnTo>
-                  <a:lnTo>
-                    <a:pt x="5119585" y="3171586"/>
-                  </a:lnTo>
-                  <a:lnTo>
-                    <a:pt x="5041951" y="3157620"/>
-                  </a:lnTo>
-                  <a:lnTo>
-                    <a:pt x="4964317" y="3143029"/>
-                  </a:lnTo>
-                  <a:lnTo>
-                    <a:pt x="4886683" y="3127785"/>
-                  </a:lnTo>
-                  <a:lnTo>
-                    <a:pt x="4809049" y="3111860"/>
-                  </a:lnTo>
-                  <a:lnTo>
-                    <a:pt x="4731415" y="3095222"/>
-                  </a:lnTo>
-                  <a:lnTo>
-                    <a:pt x="4653781" y="3077839"/>
-                  </a:lnTo>
-                  <a:lnTo>
-                    <a:pt x="4576147" y="3059679"/>
-                  </a:lnTo>
-                  <a:lnTo>
-                    <a:pt x="4498513" y="3040706"/>
-                  </a:lnTo>
-                  <a:lnTo>
-                    <a:pt x="4420879" y="3020884"/>
-                  </a:lnTo>
-                  <a:lnTo>
-                    <a:pt x="4343244" y="3000176"/>
-                  </a:lnTo>
-                  <a:lnTo>
-                    <a:pt x="4265610" y="2978541"/>
-                  </a:lnTo>
-                  <a:lnTo>
-                    <a:pt x="4187976" y="2955938"/>
-                  </a:lnTo>
-                  <a:lnTo>
-                    <a:pt x="4110342" y="2932324"/>
-                  </a:lnTo>
-                  <a:lnTo>
-                    <a:pt x="4032708" y="2907653"/>
-                  </a:lnTo>
-                  <a:lnTo>
-                    <a:pt x="3955074" y="2881879"/>
-                  </a:lnTo>
-                  <a:lnTo>
-                    <a:pt x="3877440" y="2854951"/>
-                  </a:lnTo>
-                  <a:lnTo>
-                    <a:pt x="3799806" y="2826819"/>
-                  </a:lnTo>
-                  <a:lnTo>
-                    <a:pt x="3722172" y="2797428"/>
-                  </a:lnTo>
-                  <a:lnTo>
-                    <a:pt x="3644538" y="2766722"/>
-                  </a:lnTo>
-                  <a:lnTo>
-                    <a:pt x="3566904" y="2734643"/>
-                  </a:lnTo>
-                  <a:lnTo>
-                    <a:pt x="3489270" y="2701128"/>
-                  </a:lnTo>
-                  <a:lnTo>
-                    <a:pt x="3411636" y="2666113"/>
-                  </a:lnTo>
-                  <a:lnTo>
-                    <a:pt x="3334002" y="2653902"/>
-                  </a:lnTo>
-                  <a:lnTo>
-                    <a:pt x="3256368" y="2653335"/>
-                  </a:lnTo>
-                  <a:lnTo>
-                    <a:pt x="3178734" y="2652767"/>
-                  </a:lnTo>
-                  <a:lnTo>
-                    <a:pt x="3101100" y="2652199"/>
-                  </a:lnTo>
-                  <a:lnTo>
-                    <a:pt x="3023466" y="2651631"/>
-                  </a:lnTo>
-                  <a:lnTo>
-                    <a:pt x="2945832" y="2651062"/>
-                  </a:lnTo>
-                  <a:lnTo>
-                    <a:pt x="2868198" y="2650493"/>
-                  </a:lnTo>
-                  <a:lnTo>
-                    <a:pt x="2790564" y="2649923"/>
-                  </a:lnTo>
-                  <a:lnTo>
-                    <a:pt x="2712930" y="2649353"/>
-                  </a:lnTo>
-                  <a:lnTo>
-                    <a:pt x="2635295" y="2648783"/>
-                  </a:lnTo>
-                  <a:lnTo>
-                    <a:pt x="2557661" y="2648212"/>
-                  </a:lnTo>
-                  <a:lnTo>
-                    <a:pt x="2480027" y="2647641"/>
-                  </a:lnTo>
-                  <a:lnTo>
-                    <a:pt x="2402393" y="2647070"/>
-                  </a:lnTo>
-                  <a:lnTo>
-                    <a:pt x="2324759" y="2646498"/>
-                  </a:lnTo>
-                  <a:lnTo>
-                    <a:pt x="2247125" y="2645925"/>
-                  </a:lnTo>
-                  <a:lnTo>
-                    <a:pt x="2169491" y="2645353"/>
-                  </a:lnTo>
-                  <a:lnTo>
-                    <a:pt x="2091857" y="2644780"/>
-                  </a:lnTo>
-                  <a:lnTo>
-                    <a:pt x="2014223" y="2644206"/>
-                  </a:lnTo>
-                  <a:lnTo>
-                    <a:pt x="1936589" y="2643632"/>
-                  </a:lnTo>
-                  <a:lnTo>
-                    <a:pt x="1858955" y="2643058"/>
-                  </a:lnTo>
-                  <a:lnTo>
-                    <a:pt x="1781321" y="2642483"/>
-                  </a:lnTo>
-                  <a:lnTo>
-                    <a:pt x="1703687" y="2641908"/>
-                  </a:lnTo>
-                  <a:lnTo>
-                    <a:pt x="1626053" y="2641333"/>
-                  </a:lnTo>
-                  <a:lnTo>
-                    <a:pt x="1548419" y="2640757"/>
-                  </a:lnTo>
-                  <a:lnTo>
-                    <a:pt x="1470785" y="2640181"/>
-                  </a:lnTo>
-                  <a:lnTo>
-                    <a:pt x="1393151" y="2639604"/>
-                  </a:lnTo>
-                  <a:lnTo>
-                    <a:pt x="1315517" y="2639027"/>
-                  </a:lnTo>
-                  <a:lnTo>
-                    <a:pt x="1237883" y="2638450"/>
-                  </a:lnTo>
-                  <a:lnTo>
-                    <a:pt x="1160249" y="2637872"/>
-                  </a:lnTo>
-                  <a:lnTo>
-                    <a:pt x="1082615" y="2637294"/>
-                  </a:lnTo>
-                  <a:lnTo>
-                    <a:pt x="1004981" y="2636715"/>
-                  </a:lnTo>
-                  <a:lnTo>
-                    <a:pt x="927346" y="2636136"/>
-                  </a:lnTo>
-                  <a:lnTo>
-                    <a:pt x="849712" y="2635557"/>
-                  </a:lnTo>
-                  <a:lnTo>
-                    <a:pt x="772078" y="2634977"/>
-                  </a:lnTo>
-                  <a:lnTo>
-                    <a:pt x="694444" y="2634397"/>
-                  </a:lnTo>
-                  <a:lnTo>
-                    <a:pt x="616810" y="2633816"/>
-                  </a:lnTo>
-                  <a:lnTo>
-                    <a:pt x="539176" y="2633235"/>
-                  </a:lnTo>
-                  <a:lnTo>
-                    <a:pt x="461542" y="2632654"/>
-                  </a:lnTo>
-                  <a:lnTo>
-                    <a:pt x="383908" y="2632072"/>
-                  </a:lnTo>
-                  <a:lnTo>
-                    <a:pt x="306274" y="2631490"/>
-                  </a:lnTo>
-                  <a:lnTo>
-                    <a:pt x="228640" y="2630908"/>
-                  </a:lnTo>
-                  <a:lnTo>
-                    <a:pt x="151006" y="2630325"/>
-                  </a:lnTo>
-                  <a:lnTo>
-                    <a:pt x="73372" y="2629741"/>
-                  </a:lnTo>
-                  <a:lnTo>
-                    <a:pt x="0" y="2629190"/>
+                    <a:pt x="836955" y="16547"/>
+                  </a:lnTo>
+                  <a:lnTo>
+                    <a:pt x="913423" y="154991"/>
+                  </a:lnTo>
+                  <a:lnTo>
+                    <a:pt x="989892" y="287506"/>
+                  </a:lnTo>
+                  <a:lnTo>
+                    <a:pt x="1066360" y="414347"/>
+                  </a:lnTo>
+                  <a:lnTo>
+                    <a:pt x="1142828" y="535755"/>
+                  </a:lnTo>
+                  <a:lnTo>
+                    <a:pt x="1219297" y="651965"/>
+                  </a:lnTo>
+                  <a:lnTo>
+                    <a:pt x="1295765" y="763198"/>
+                  </a:lnTo>
+                  <a:lnTo>
+                    <a:pt x="1372234" y="869667"/>
+                  </a:lnTo>
+                  <a:lnTo>
+                    <a:pt x="1448702" y="971577"/>
+                  </a:lnTo>
+                  <a:lnTo>
+                    <a:pt x="1525171" y="1069123"/>
+                  </a:lnTo>
+                  <a:lnTo>
+                    <a:pt x="1601639" y="1162492"/>
+                  </a:lnTo>
+                  <a:lnTo>
+                    <a:pt x="1678107" y="1251862"/>
+                  </a:lnTo>
+                  <a:lnTo>
+                    <a:pt x="1754576" y="1337405"/>
+                  </a:lnTo>
+                  <a:lnTo>
+                    <a:pt x="1831044" y="1419285"/>
+                  </a:lnTo>
+                  <a:lnTo>
+                    <a:pt x="1907513" y="1497658"/>
+                  </a:lnTo>
+                  <a:lnTo>
+                    <a:pt x="1983981" y="1572675"/>
+                  </a:lnTo>
+                  <a:lnTo>
+                    <a:pt x="2060450" y="1644479"/>
+                  </a:lnTo>
+                  <a:lnTo>
+                    <a:pt x="2136918" y="1713209"/>
+                  </a:lnTo>
+                  <a:lnTo>
+                    <a:pt x="2213386" y="1778995"/>
+                  </a:lnTo>
+                  <a:lnTo>
+                    <a:pt x="2289855" y="1841964"/>
+                  </a:lnTo>
+                  <a:lnTo>
+                    <a:pt x="2366323" y="1902236"/>
+                  </a:lnTo>
+                  <a:lnTo>
+                    <a:pt x="2442792" y="1959928"/>
+                  </a:lnTo>
+                  <a:lnTo>
+                    <a:pt x="2519260" y="2015148"/>
+                  </a:lnTo>
+                  <a:lnTo>
+                    <a:pt x="2595729" y="2068004"/>
+                  </a:lnTo>
+                  <a:lnTo>
+                    <a:pt x="2672197" y="2118597"/>
+                  </a:lnTo>
+                  <a:lnTo>
+                    <a:pt x="2748666" y="2167023"/>
+                  </a:lnTo>
+                  <a:lnTo>
+                    <a:pt x="2825134" y="2213375"/>
+                  </a:lnTo>
+                  <a:lnTo>
+                    <a:pt x="2901602" y="2257742"/>
+                  </a:lnTo>
+                  <a:lnTo>
+                    <a:pt x="2978071" y="2300209"/>
+                  </a:lnTo>
+                  <a:lnTo>
+                    <a:pt x="3054539" y="2340857"/>
+                  </a:lnTo>
+                  <a:lnTo>
+                    <a:pt x="3131008" y="2379765"/>
+                  </a:lnTo>
+                  <a:lnTo>
+                    <a:pt x="3207476" y="2417007"/>
+                  </a:lnTo>
+                  <a:lnTo>
+                    <a:pt x="3283945" y="2452654"/>
+                  </a:lnTo>
+                  <a:lnTo>
+                    <a:pt x="3360413" y="2475912"/>
+                  </a:lnTo>
+                  <a:lnTo>
+                    <a:pt x="3436881" y="2476441"/>
+                  </a:lnTo>
+                  <a:lnTo>
+                    <a:pt x="3513350" y="2476969"/>
+                  </a:lnTo>
+                  <a:lnTo>
+                    <a:pt x="3589818" y="2477496"/>
+                  </a:lnTo>
+                  <a:lnTo>
+                    <a:pt x="3666287" y="2478024"/>
+                  </a:lnTo>
+                  <a:lnTo>
+                    <a:pt x="3742755" y="2478551"/>
+                  </a:lnTo>
+                  <a:lnTo>
+                    <a:pt x="3819224" y="2479077"/>
+                  </a:lnTo>
+                  <a:lnTo>
+                    <a:pt x="3895692" y="2479603"/>
+                  </a:lnTo>
+                  <a:lnTo>
+                    <a:pt x="3972160" y="2480129"/>
+                  </a:lnTo>
+                  <a:lnTo>
+                    <a:pt x="4048629" y="2480655"/>
+                  </a:lnTo>
+                  <a:lnTo>
+                    <a:pt x="4125097" y="2481180"/>
+                  </a:lnTo>
+                  <a:lnTo>
+                    <a:pt x="4201566" y="2481705"/>
+                  </a:lnTo>
+                  <a:lnTo>
+                    <a:pt x="4278034" y="2482229"/>
+                  </a:lnTo>
+                  <a:lnTo>
+                    <a:pt x="4354503" y="2482753"/>
+                  </a:lnTo>
+                  <a:lnTo>
+                    <a:pt x="4430971" y="2483277"/>
+                  </a:lnTo>
+                  <a:lnTo>
+                    <a:pt x="4507439" y="2483800"/>
+                  </a:lnTo>
+                  <a:lnTo>
+                    <a:pt x="4583908" y="2484323"/>
+                  </a:lnTo>
+                  <a:lnTo>
+                    <a:pt x="4660376" y="2484846"/>
+                  </a:lnTo>
+                  <a:lnTo>
+                    <a:pt x="4736845" y="2485368"/>
+                  </a:lnTo>
+                  <a:lnTo>
+                    <a:pt x="4813313" y="2485890"/>
+                  </a:lnTo>
+                  <a:lnTo>
+                    <a:pt x="4889782" y="2486411"/>
+                  </a:lnTo>
+                  <a:lnTo>
+                    <a:pt x="4966250" y="2486933"/>
+                  </a:lnTo>
+                  <a:lnTo>
+                    <a:pt x="5042719" y="2487453"/>
+                  </a:lnTo>
+                  <a:lnTo>
+                    <a:pt x="5119187" y="2487974"/>
+                  </a:lnTo>
+                  <a:lnTo>
+                    <a:pt x="5195655" y="2488494"/>
+                  </a:lnTo>
+                  <a:lnTo>
+                    <a:pt x="5272124" y="2489014"/>
+                  </a:lnTo>
+                  <a:lnTo>
+                    <a:pt x="5348592" y="2489533"/>
+                  </a:lnTo>
+                  <a:lnTo>
+                    <a:pt x="5425061" y="2490052"/>
+                  </a:lnTo>
+                  <a:lnTo>
+                    <a:pt x="5501529" y="2490571"/>
+                  </a:lnTo>
+                  <a:lnTo>
+                    <a:pt x="5577998" y="2491089"/>
+                  </a:lnTo>
+                  <a:lnTo>
+                    <a:pt x="5654466" y="2491607"/>
+                  </a:lnTo>
+                  <a:lnTo>
+                    <a:pt x="5730934" y="2492125"/>
+                  </a:lnTo>
+                  <a:lnTo>
+                    <a:pt x="5807403" y="2492642"/>
+                  </a:lnTo>
+                  <a:lnTo>
+                    <a:pt x="5883871" y="2493159"/>
+                  </a:lnTo>
+                  <a:lnTo>
+                    <a:pt x="5960340" y="2493676"/>
+                  </a:lnTo>
+                  <a:lnTo>
+                    <a:pt x="6036808" y="2494192"/>
+                  </a:lnTo>
+                  <a:lnTo>
+                    <a:pt x="6113277" y="2494708"/>
+                  </a:lnTo>
+                  <a:lnTo>
+                    <a:pt x="6189745" y="2495223"/>
+                  </a:lnTo>
+                  <a:lnTo>
+                    <a:pt x="6266213" y="2495738"/>
+                  </a:lnTo>
+                  <a:lnTo>
+                    <a:pt x="6342682" y="2496253"/>
+                  </a:lnTo>
+                  <a:lnTo>
+                    <a:pt x="6419150" y="2496768"/>
+                  </a:lnTo>
+                  <a:lnTo>
+                    <a:pt x="6495619" y="2497282"/>
+                  </a:lnTo>
+                  <a:lnTo>
+                    <a:pt x="6572087" y="2497796"/>
+                  </a:lnTo>
+                  <a:lnTo>
+                    <a:pt x="6648556" y="2498309"/>
+                  </a:lnTo>
+                  <a:lnTo>
+                    <a:pt x="6725024" y="2498822"/>
+                  </a:lnTo>
+                  <a:lnTo>
+                    <a:pt x="6801492" y="2499335"/>
+                  </a:lnTo>
+                  <a:lnTo>
+                    <a:pt x="6877961" y="2499847"/>
+                  </a:lnTo>
+                  <a:lnTo>
+                    <a:pt x="6954429" y="2500359"/>
+                  </a:lnTo>
+                  <a:lnTo>
+                    <a:pt x="7030898" y="2500871"/>
+                  </a:lnTo>
+                  <a:lnTo>
+                    <a:pt x="7107366" y="2501382"/>
+                  </a:lnTo>
+                  <a:lnTo>
+                    <a:pt x="7183835" y="2501893"/>
+                  </a:lnTo>
+                  <a:lnTo>
+                    <a:pt x="7260303" y="2502404"/>
+                  </a:lnTo>
+                  <a:lnTo>
+                    <a:pt x="7260303" y="3167580"/>
+                  </a:lnTo>
+                  <a:lnTo>
+                    <a:pt x="7183835" y="3163919"/>
+                  </a:lnTo>
+                  <a:lnTo>
+                    <a:pt x="7107366" y="3160095"/>
+                  </a:lnTo>
+                  <a:lnTo>
+                    <a:pt x="7030898" y="3156099"/>
+                  </a:lnTo>
+                  <a:lnTo>
+                    <a:pt x="6954429" y="3151924"/>
+                  </a:lnTo>
+                  <a:lnTo>
+                    <a:pt x="6877961" y="3147563"/>
+                  </a:lnTo>
+                  <a:lnTo>
+                    <a:pt x="6801492" y="3143006"/>
+                  </a:lnTo>
+                  <a:lnTo>
+                    <a:pt x="6725024" y="3138246"/>
+                  </a:lnTo>
+                  <a:lnTo>
+                    <a:pt x="6648556" y="3133273"/>
+                  </a:lnTo>
+                  <a:lnTo>
+                    <a:pt x="6572087" y="3128077"/>
+                  </a:lnTo>
+                  <a:lnTo>
+                    <a:pt x="6495619" y="3122648"/>
+                  </a:lnTo>
+                  <a:lnTo>
+                    <a:pt x="6419150" y="3116977"/>
+                  </a:lnTo>
+                  <a:lnTo>
+                    <a:pt x="6342682" y="3111052"/>
+                  </a:lnTo>
+                  <a:lnTo>
+                    <a:pt x="6266213" y="3104862"/>
+                  </a:lnTo>
+                  <a:lnTo>
+                    <a:pt x="6189745" y="3098395"/>
+                  </a:lnTo>
+                  <a:lnTo>
+                    <a:pt x="6113277" y="3091639"/>
+                  </a:lnTo>
+                  <a:lnTo>
+                    <a:pt x="6036808" y="3084580"/>
+                  </a:lnTo>
+                  <a:lnTo>
+                    <a:pt x="5960340" y="3077206"/>
+                  </a:lnTo>
+                  <a:lnTo>
+                    <a:pt x="5883871" y="3069502"/>
+                  </a:lnTo>
+                  <a:lnTo>
+                    <a:pt x="5807403" y="3061453"/>
+                  </a:lnTo>
+                  <a:lnTo>
+                    <a:pt x="5730934" y="3053044"/>
+                  </a:lnTo>
+                  <a:lnTo>
+                    <a:pt x="5654466" y="3044258"/>
+                  </a:lnTo>
+                  <a:lnTo>
+                    <a:pt x="5577998" y="3035080"/>
+                  </a:lnTo>
+                  <a:lnTo>
+                    <a:pt x="5501529" y="3025491"/>
+                  </a:lnTo>
+                  <a:lnTo>
+                    <a:pt x="5425061" y="3015473"/>
+                  </a:lnTo>
+                  <a:lnTo>
+                    <a:pt x="5348592" y="3005007"/>
+                  </a:lnTo>
+                  <a:lnTo>
+                    <a:pt x="5272124" y="2994072"/>
+                  </a:lnTo>
+                  <a:lnTo>
+                    <a:pt x="5195655" y="2982649"/>
+                  </a:lnTo>
+                  <a:lnTo>
+                    <a:pt x="5119187" y="2970714"/>
+                  </a:lnTo>
+                  <a:lnTo>
+                    <a:pt x="5042719" y="2958245"/>
+                  </a:lnTo>
+                  <a:lnTo>
+                    <a:pt x="4966250" y="2945218"/>
+                  </a:lnTo>
+                  <a:lnTo>
+                    <a:pt x="4889782" y="2931609"/>
+                  </a:lnTo>
+                  <a:lnTo>
+                    <a:pt x="4813313" y="2917391"/>
+                  </a:lnTo>
+                  <a:lnTo>
+                    <a:pt x="4736845" y="2902536"/>
+                  </a:lnTo>
+                  <a:lnTo>
+                    <a:pt x="4660376" y="2887017"/>
+                  </a:lnTo>
+                  <a:lnTo>
+                    <a:pt x="4583908" y="2870804"/>
+                  </a:lnTo>
+                  <a:lnTo>
+                    <a:pt x="4507439" y="2853865"/>
+                  </a:lnTo>
+                  <a:lnTo>
+                    <a:pt x="4430971" y="2836169"/>
+                  </a:lnTo>
+                  <a:lnTo>
+                    <a:pt x="4354503" y="2817680"/>
+                  </a:lnTo>
+                  <a:lnTo>
+                    <a:pt x="4278034" y="2798365"/>
+                  </a:lnTo>
+                  <a:lnTo>
+                    <a:pt x="4201566" y="2778185"/>
+                  </a:lnTo>
+                  <a:lnTo>
+                    <a:pt x="4125097" y="2757103"/>
+                  </a:lnTo>
+                  <a:lnTo>
+                    <a:pt x="4048629" y="2735077"/>
+                  </a:lnTo>
+                  <a:lnTo>
+                    <a:pt x="3972160" y="2712066"/>
+                  </a:lnTo>
+                  <a:lnTo>
+                    <a:pt x="3895692" y="2688025"/>
+                  </a:lnTo>
+                  <a:lnTo>
+                    <a:pt x="3819224" y="2662909"/>
+                  </a:lnTo>
+                  <a:lnTo>
+                    <a:pt x="3742755" y="2636669"/>
+                  </a:lnTo>
+                  <a:lnTo>
+                    <a:pt x="3666287" y="2609255"/>
+                  </a:lnTo>
+                  <a:lnTo>
+                    <a:pt x="3589818" y="2580615"/>
+                  </a:lnTo>
+                  <a:lnTo>
+                    <a:pt x="3513350" y="2550693"/>
+                  </a:lnTo>
+                  <a:lnTo>
+                    <a:pt x="3436881" y="2519433"/>
+                  </a:lnTo>
+                  <a:lnTo>
+                    <a:pt x="3360413" y="2486774"/>
+                  </a:lnTo>
+                  <a:lnTo>
+                    <a:pt x="3283945" y="2475384"/>
+                  </a:lnTo>
+                  <a:lnTo>
+                    <a:pt x="3207476" y="2474855"/>
+                  </a:lnTo>
+                  <a:lnTo>
+                    <a:pt x="3131008" y="2474325"/>
+                  </a:lnTo>
+                  <a:lnTo>
+                    <a:pt x="3054539" y="2473795"/>
+                  </a:lnTo>
+                  <a:lnTo>
+                    <a:pt x="2978071" y="2473265"/>
+                  </a:lnTo>
+                  <a:lnTo>
+                    <a:pt x="2901602" y="2472735"/>
+                  </a:lnTo>
+                  <a:lnTo>
+                    <a:pt x="2825134" y="2472204"/>
+                  </a:lnTo>
+                  <a:lnTo>
+                    <a:pt x="2748666" y="2471673"/>
+                  </a:lnTo>
+                  <a:lnTo>
+                    <a:pt x="2672197" y="2471141"/>
+                  </a:lnTo>
+                  <a:lnTo>
+                    <a:pt x="2595729" y="2470609"/>
+                  </a:lnTo>
+                  <a:lnTo>
+                    <a:pt x="2519260" y="2470077"/>
+                  </a:lnTo>
+                  <a:lnTo>
+                    <a:pt x="2442792" y="2469544"/>
+                  </a:lnTo>
+                  <a:lnTo>
+                    <a:pt x="2366323" y="2469011"/>
+                  </a:lnTo>
+                  <a:lnTo>
+                    <a:pt x="2289855" y="2468477"/>
+                  </a:lnTo>
+                  <a:lnTo>
+                    <a:pt x="2213386" y="2467944"/>
+                  </a:lnTo>
+                  <a:lnTo>
+                    <a:pt x="2136918" y="2467409"/>
+                  </a:lnTo>
+                  <a:lnTo>
+                    <a:pt x="2060450" y="2466875"/>
+                  </a:lnTo>
+                  <a:lnTo>
+                    <a:pt x="1983981" y="2466340"/>
+                  </a:lnTo>
+                  <a:lnTo>
+                    <a:pt x="1907513" y="2465805"/>
+                  </a:lnTo>
+                  <a:lnTo>
+                    <a:pt x="1831044" y="2465269"/>
+                  </a:lnTo>
+                  <a:lnTo>
+                    <a:pt x="1754576" y="2464733"/>
+                  </a:lnTo>
+                  <a:lnTo>
+                    <a:pt x="1678107" y="2464197"/>
+                  </a:lnTo>
+                  <a:lnTo>
+                    <a:pt x="1601639" y="2463660"/>
+                  </a:lnTo>
+                  <a:lnTo>
+                    <a:pt x="1525171" y="2463123"/>
+                  </a:lnTo>
+                  <a:lnTo>
+                    <a:pt x="1448702" y="2462586"/>
+                  </a:lnTo>
+                  <a:lnTo>
+                    <a:pt x="1372234" y="2462048"/>
+                  </a:lnTo>
+                  <a:lnTo>
+                    <a:pt x="1295765" y="2461509"/>
+                  </a:lnTo>
+                  <a:lnTo>
+                    <a:pt x="1219297" y="2460971"/>
+                  </a:lnTo>
+                  <a:lnTo>
+                    <a:pt x="1142828" y="2460432"/>
+                  </a:lnTo>
+                  <a:lnTo>
+                    <a:pt x="1066360" y="2459893"/>
+                  </a:lnTo>
+                  <a:lnTo>
+                    <a:pt x="989892" y="2459353"/>
+                  </a:lnTo>
+                  <a:lnTo>
+                    <a:pt x="913423" y="2458813"/>
+                  </a:lnTo>
+                  <a:lnTo>
+                    <a:pt x="836955" y="2458273"/>
+                  </a:lnTo>
+                  <a:lnTo>
+                    <a:pt x="760486" y="2457732"/>
+                  </a:lnTo>
+                  <a:lnTo>
+                    <a:pt x="684018" y="2457191"/>
+                  </a:lnTo>
+                  <a:lnTo>
+                    <a:pt x="607549" y="2456649"/>
+                  </a:lnTo>
+                  <a:lnTo>
+                    <a:pt x="531081" y="2456107"/>
+                  </a:lnTo>
+                  <a:lnTo>
+                    <a:pt x="454613" y="2455565"/>
+                  </a:lnTo>
+                  <a:lnTo>
+                    <a:pt x="378144" y="2455022"/>
+                  </a:lnTo>
+                  <a:lnTo>
+                    <a:pt x="301676" y="2454479"/>
+                  </a:lnTo>
+                  <a:lnTo>
+                    <a:pt x="225207" y="2453936"/>
+                  </a:lnTo>
+                  <a:lnTo>
+                    <a:pt x="148739" y="2453392"/>
+                  </a:lnTo>
+                  <a:lnTo>
+                    <a:pt x="72270" y="2452848"/>
+                  </a:lnTo>
+                  <a:lnTo>
+                    <a:pt x="0" y="2452334"/>
                   </a:lnTo>
                   <a:close/>
                 </a:path>
@@ -3579,270 +3579,270 @@
           </p:nvSpPr>
           <p:spPr>
             <a:xfrm>
-              <a:off x="1658349" y="2073503"/>
-              <a:ext cx="6530141" cy="2682871"/>
+              <a:off x="1743852" y="2209169"/>
+              <a:ext cx="6432096" cy="2502404"/>
             </a:xfrm>
             <a:custGeom>
               <a:avLst/>
               <a:pathLst>
-                <a:path w="6530141" h="2682871">
+                <a:path w="6432096" h="2502404">
                   <a:moveTo>
                     <a:pt x="0" y="0"/>
                   </a:moveTo>
                   <a:lnTo>
-                    <a:pt x="8881" y="17740"/>
-                  </a:lnTo>
-                  <a:lnTo>
-                    <a:pt x="86515" y="166168"/>
-                  </a:lnTo>
-                  <a:lnTo>
-                    <a:pt x="164149" y="308240"/>
-                  </a:lnTo>
-                  <a:lnTo>
-                    <a:pt x="241783" y="444228"/>
-                  </a:lnTo>
-                  <a:lnTo>
-                    <a:pt x="319417" y="574393"/>
-                  </a:lnTo>
-                  <a:lnTo>
-                    <a:pt x="397051" y="698983"/>
-                  </a:lnTo>
-                  <a:lnTo>
-                    <a:pt x="474685" y="818238"/>
-                  </a:lnTo>
-                  <a:lnTo>
-                    <a:pt x="552319" y="932385"/>
-                  </a:lnTo>
-                  <a:lnTo>
-                    <a:pt x="629953" y="1041645"/>
-                  </a:lnTo>
-                  <a:lnTo>
-                    <a:pt x="707587" y="1146226"/>
-                  </a:lnTo>
-                  <a:lnTo>
-                    <a:pt x="785222" y="1246328"/>
-                  </a:lnTo>
-                  <a:lnTo>
-                    <a:pt x="862856" y="1342143"/>
-                  </a:lnTo>
-                  <a:lnTo>
-                    <a:pt x="940490" y="1433855"/>
-                  </a:lnTo>
-                  <a:lnTo>
-                    <a:pt x="1018124" y="1521640"/>
-                  </a:lnTo>
-                  <a:lnTo>
-                    <a:pt x="1095758" y="1605665"/>
-                  </a:lnTo>
-                  <a:lnTo>
-                    <a:pt x="1173392" y="1686092"/>
-                  </a:lnTo>
-                  <a:lnTo>
-                    <a:pt x="1251026" y="1763075"/>
-                  </a:lnTo>
-                  <a:lnTo>
-                    <a:pt x="1328660" y="1836761"/>
-                  </a:lnTo>
-                  <a:lnTo>
-                    <a:pt x="1406294" y="1907291"/>
-                  </a:lnTo>
-                  <a:lnTo>
-                    <a:pt x="1483928" y="1974802"/>
-                  </a:lnTo>
-                  <a:lnTo>
-                    <a:pt x="1561562" y="2039421"/>
-                  </a:lnTo>
-                  <a:lnTo>
-                    <a:pt x="1639196" y="2101272"/>
-                  </a:lnTo>
-                  <a:lnTo>
-                    <a:pt x="1716830" y="2160476"/>
-                  </a:lnTo>
-                  <a:lnTo>
-                    <a:pt x="1794464" y="2217143"/>
-                  </a:lnTo>
-                  <a:lnTo>
-                    <a:pt x="1872098" y="2271384"/>
-                  </a:lnTo>
-                  <a:lnTo>
-                    <a:pt x="1949732" y="2323303"/>
-                  </a:lnTo>
-                  <a:lnTo>
-                    <a:pt x="2027366" y="2372998"/>
-                  </a:lnTo>
-                  <a:lnTo>
-                    <a:pt x="2105000" y="2420564"/>
-                  </a:lnTo>
-                  <a:lnTo>
-                    <a:pt x="2182634" y="2466094"/>
-                  </a:lnTo>
-                  <a:lnTo>
-                    <a:pt x="2260268" y="2509674"/>
-                  </a:lnTo>
-                  <a:lnTo>
-                    <a:pt x="2337902" y="2551388"/>
-                  </a:lnTo>
-                  <a:lnTo>
-                    <a:pt x="2415536" y="2591315"/>
-                  </a:lnTo>
-                  <a:lnTo>
-                    <a:pt x="2493170" y="2629533"/>
-                  </a:lnTo>
-                  <a:lnTo>
-                    <a:pt x="2570805" y="2654469"/>
-                  </a:lnTo>
-                  <a:lnTo>
-                    <a:pt x="2648439" y="2655035"/>
-                  </a:lnTo>
-                  <a:lnTo>
-                    <a:pt x="2726073" y="2655601"/>
-                  </a:lnTo>
-                  <a:lnTo>
-                    <a:pt x="2803707" y="2656167"/>
-                  </a:lnTo>
-                  <a:lnTo>
-                    <a:pt x="2881341" y="2656732"/>
-                  </a:lnTo>
-                  <a:lnTo>
-                    <a:pt x="2958975" y="2657297"/>
-                  </a:lnTo>
-                  <a:lnTo>
-                    <a:pt x="3036609" y="2657862"/>
-                  </a:lnTo>
-                  <a:lnTo>
-                    <a:pt x="3114243" y="2658426"/>
-                  </a:lnTo>
-                  <a:lnTo>
-                    <a:pt x="3191877" y="2658990"/>
-                  </a:lnTo>
-                  <a:lnTo>
-                    <a:pt x="3269511" y="2659553"/>
-                  </a:lnTo>
-                  <a:lnTo>
-                    <a:pt x="3347145" y="2660116"/>
-                  </a:lnTo>
-                  <a:lnTo>
-                    <a:pt x="3424779" y="2660679"/>
-                  </a:lnTo>
-                  <a:lnTo>
-                    <a:pt x="3502413" y="2661241"/>
-                  </a:lnTo>
-                  <a:lnTo>
-                    <a:pt x="3580047" y="2661803"/>
-                  </a:lnTo>
-                  <a:lnTo>
-                    <a:pt x="3657681" y="2662364"/>
-                  </a:lnTo>
-                  <a:lnTo>
-                    <a:pt x="3735315" y="2662925"/>
-                  </a:lnTo>
-                  <a:lnTo>
-                    <a:pt x="3812949" y="2663486"/>
-                  </a:lnTo>
-                  <a:lnTo>
-                    <a:pt x="3890583" y="2664046"/>
-                  </a:lnTo>
-                  <a:lnTo>
-                    <a:pt x="3968217" y="2664606"/>
-                  </a:lnTo>
-                  <a:lnTo>
-                    <a:pt x="4045851" y="2665166"/>
-                  </a:lnTo>
-                  <a:lnTo>
-                    <a:pt x="4123485" y="2665725"/>
-                  </a:lnTo>
-                  <a:lnTo>
-                    <a:pt x="4201119" y="2666284"/>
-                  </a:lnTo>
-                  <a:lnTo>
-                    <a:pt x="4278754" y="2666842"/>
-                  </a:lnTo>
-                  <a:lnTo>
-                    <a:pt x="4356388" y="2667400"/>
-                  </a:lnTo>
-                  <a:lnTo>
-                    <a:pt x="4434022" y="2667958"/>
-                  </a:lnTo>
-                  <a:lnTo>
-                    <a:pt x="4511656" y="2668515"/>
-                  </a:lnTo>
-                  <a:lnTo>
-                    <a:pt x="4589290" y="2669072"/>
-                  </a:lnTo>
-                  <a:lnTo>
-                    <a:pt x="4666924" y="2669628"/>
-                  </a:lnTo>
-                  <a:lnTo>
-                    <a:pt x="4744558" y="2670184"/>
-                  </a:lnTo>
-                  <a:lnTo>
-                    <a:pt x="4822192" y="2670740"/>
-                  </a:lnTo>
-                  <a:lnTo>
-                    <a:pt x="4899826" y="2671295"/>
-                  </a:lnTo>
-                  <a:lnTo>
-                    <a:pt x="4977460" y="2671850"/>
-                  </a:lnTo>
-                  <a:lnTo>
-                    <a:pt x="5055094" y="2672405"/>
-                  </a:lnTo>
-                  <a:lnTo>
-                    <a:pt x="5132728" y="2672959"/>
-                  </a:lnTo>
-                  <a:lnTo>
-                    <a:pt x="5210362" y="2673513"/>
-                  </a:lnTo>
-                  <a:lnTo>
-                    <a:pt x="5287996" y="2674067"/>
-                  </a:lnTo>
-                  <a:lnTo>
-                    <a:pt x="5365630" y="2674620"/>
-                  </a:lnTo>
-                  <a:lnTo>
-                    <a:pt x="5443264" y="2675172"/>
-                  </a:lnTo>
-                  <a:lnTo>
-                    <a:pt x="5520898" y="2675725"/>
-                  </a:lnTo>
-                  <a:lnTo>
-                    <a:pt x="5598532" y="2676277"/>
-                  </a:lnTo>
-                  <a:lnTo>
-                    <a:pt x="5676166" y="2676828"/>
-                  </a:lnTo>
-                  <a:lnTo>
-                    <a:pt x="5753800" y="2677379"/>
-                  </a:lnTo>
-                  <a:lnTo>
-                    <a:pt x="5831434" y="2677930"/>
-                  </a:lnTo>
-                  <a:lnTo>
-                    <a:pt x="5909068" y="2678481"/>
-                  </a:lnTo>
-                  <a:lnTo>
-                    <a:pt x="5986703" y="2679031"/>
-                  </a:lnTo>
-                  <a:lnTo>
-                    <a:pt x="6064337" y="2679580"/>
-                  </a:lnTo>
-                  <a:lnTo>
-                    <a:pt x="6141971" y="2680130"/>
-                  </a:lnTo>
-                  <a:lnTo>
-                    <a:pt x="6219605" y="2680679"/>
-                  </a:lnTo>
-                  <a:lnTo>
-                    <a:pt x="6297239" y="2681227"/>
-                  </a:lnTo>
-                  <a:lnTo>
-                    <a:pt x="6374873" y="2681775"/>
-                  </a:lnTo>
-                  <a:lnTo>
-                    <a:pt x="6452507" y="2682323"/>
-                  </a:lnTo>
-                  <a:lnTo>
-                    <a:pt x="6530141" y="2682871"/>
+                    <a:pt x="8748" y="16547"/>
+                  </a:lnTo>
+                  <a:lnTo>
+                    <a:pt x="85216" y="154991"/>
+                  </a:lnTo>
+                  <a:lnTo>
+                    <a:pt x="161685" y="287506"/>
+                  </a:lnTo>
+                  <a:lnTo>
+                    <a:pt x="238153" y="414347"/>
+                  </a:lnTo>
+                  <a:lnTo>
+                    <a:pt x="314621" y="535755"/>
+                  </a:lnTo>
+                  <a:lnTo>
+                    <a:pt x="391090" y="651965"/>
+                  </a:lnTo>
+                  <a:lnTo>
+                    <a:pt x="467558" y="763198"/>
+                  </a:lnTo>
+                  <a:lnTo>
+                    <a:pt x="544027" y="869667"/>
+                  </a:lnTo>
+                  <a:lnTo>
+                    <a:pt x="620495" y="971577"/>
+                  </a:lnTo>
+                  <a:lnTo>
+                    <a:pt x="696964" y="1069123"/>
+                  </a:lnTo>
+                  <a:lnTo>
+                    <a:pt x="773432" y="1162492"/>
+                  </a:lnTo>
+                  <a:lnTo>
+                    <a:pt x="849900" y="1251862"/>
+                  </a:lnTo>
+                  <a:lnTo>
+                    <a:pt x="926369" y="1337405"/>
+                  </a:lnTo>
+                  <a:lnTo>
+                    <a:pt x="1002837" y="1419285"/>
+                  </a:lnTo>
+                  <a:lnTo>
+                    <a:pt x="1079306" y="1497658"/>
+                  </a:lnTo>
+                  <a:lnTo>
+                    <a:pt x="1155774" y="1572675"/>
+                  </a:lnTo>
+                  <a:lnTo>
+                    <a:pt x="1232243" y="1644479"/>
+                  </a:lnTo>
+                  <a:lnTo>
+                    <a:pt x="1308711" y="1713209"/>
+                  </a:lnTo>
+                  <a:lnTo>
+                    <a:pt x="1385180" y="1778995"/>
+                  </a:lnTo>
+                  <a:lnTo>
+                    <a:pt x="1461648" y="1841964"/>
+                  </a:lnTo>
+                  <a:lnTo>
+                    <a:pt x="1538116" y="1902236"/>
+                  </a:lnTo>
+                  <a:lnTo>
+                    <a:pt x="1614585" y="1959928"/>
+                  </a:lnTo>
+                  <a:lnTo>
+                    <a:pt x="1691053" y="2015148"/>
+                  </a:lnTo>
+                  <a:lnTo>
+                    <a:pt x="1767522" y="2068004"/>
+                  </a:lnTo>
+                  <a:lnTo>
+                    <a:pt x="1843990" y="2118597"/>
+                  </a:lnTo>
+                  <a:lnTo>
+                    <a:pt x="1920459" y="2167023"/>
+                  </a:lnTo>
+                  <a:lnTo>
+                    <a:pt x="1996927" y="2213375"/>
+                  </a:lnTo>
+                  <a:lnTo>
+                    <a:pt x="2073395" y="2257742"/>
+                  </a:lnTo>
+                  <a:lnTo>
+                    <a:pt x="2149864" y="2300209"/>
+                  </a:lnTo>
+                  <a:lnTo>
+                    <a:pt x="2226332" y="2340857"/>
+                  </a:lnTo>
+                  <a:lnTo>
+                    <a:pt x="2302801" y="2379765"/>
+                  </a:lnTo>
+                  <a:lnTo>
+                    <a:pt x="2379269" y="2417007"/>
+                  </a:lnTo>
+                  <a:lnTo>
+                    <a:pt x="2455738" y="2452654"/>
+                  </a:lnTo>
+                  <a:lnTo>
+                    <a:pt x="2532206" y="2475912"/>
+                  </a:lnTo>
+                  <a:lnTo>
+                    <a:pt x="2608674" y="2476441"/>
+                  </a:lnTo>
+                  <a:lnTo>
+                    <a:pt x="2685143" y="2476969"/>
+                  </a:lnTo>
+                  <a:lnTo>
+                    <a:pt x="2761611" y="2477496"/>
+                  </a:lnTo>
+                  <a:lnTo>
+                    <a:pt x="2838080" y="2478024"/>
+                  </a:lnTo>
+                  <a:lnTo>
+                    <a:pt x="2914548" y="2478551"/>
+                  </a:lnTo>
+                  <a:lnTo>
+                    <a:pt x="2991017" y="2479077"/>
+                  </a:lnTo>
+                  <a:lnTo>
+                    <a:pt x="3067485" y="2479603"/>
+                  </a:lnTo>
+                  <a:lnTo>
+                    <a:pt x="3143953" y="2480129"/>
+                  </a:lnTo>
+                  <a:lnTo>
+                    <a:pt x="3220422" y="2480655"/>
+                  </a:lnTo>
+                  <a:lnTo>
+                    <a:pt x="3296890" y="2481180"/>
+                  </a:lnTo>
+                  <a:lnTo>
+                    <a:pt x="3373359" y="2481705"/>
+                  </a:lnTo>
+                  <a:lnTo>
+                    <a:pt x="3449827" y="2482229"/>
+                  </a:lnTo>
+                  <a:lnTo>
+                    <a:pt x="3526296" y="2482753"/>
+                  </a:lnTo>
+                  <a:lnTo>
+                    <a:pt x="3602764" y="2483277"/>
+                  </a:lnTo>
+                  <a:lnTo>
+                    <a:pt x="3679233" y="2483800"/>
+                  </a:lnTo>
+                  <a:lnTo>
+                    <a:pt x="3755701" y="2484323"/>
+                  </a:lnTo>
+                  <a:lnTo>
+                    <a:pt x="3832169" y="2484846"/>
+                  </a:lnTo>
+                  <a:lnTo>
+                    <a:pt x="3908638" y="2485368"/>
+                  </a:lnTo>
+                  <a:lnTo>
+                    <a:pt x="3985106" y="2485890"/>
+                  </a:lnTo>
+                  <a:lnTo>
+                    <a:pt x="4061575" y="2486411"/>
+                  </a:lnTo>
+                  <a:lnTo>
+                    <a:pt x="4138043" y="2486933"/>
+                  </a:lnTo>
+                  <a:lnTo>
+                    <a:pt x="4214512" y="2487453"/>
+                  </a:lnTo>
+                  <a:lnTo>
+                    <a:pt x="4290980" y="2487974"/>
+                  </a:lnTo>
+                  <a:lnTo>
+                    <a:pt x="4367448" y="2488494"/>
+                  </a:lnTo>
+                  <a:lnTo>
+                    <a:pt x="4443917" y="2489014"/>
+                  </a:lnTo>
+                  <a:lnTo>
+                    <a:pt x="4520385" y="2489533"/>
+                  </a:lnTo>
+                  <a:lnTo>
+                    <a:pt x="4596854" y="2490052"/>
+                  </a:lnTo>
+                  <a:lnTo>
+                    <a:pt x="4673322" y="2490571"/>
+                  </a:lnTo>
+                  <a:lnTo>
+                    <a:pt x="4749791" y="2491089"/>
+                  </a:lnTo>
+                  <a:lnTo>
+                    <a:pt x="4826259" y="2491607"/>
+                  </a:lnTo>
+                  <a:lnTo>
+                    <a:pt x="4902727" y="2492125"/>
+                  </a:lnTo>
+                  <a:lnTo>
+                    <a:pt x="4979196" y="2492642"/>
+                  </a:lnTo>
+                  <a:lnTo>
+                    <a:pt x="5055664" y="2493159"/>
+                  </a:lnTo>
+                  <a:lnTo>
+                    <a:pt x="5132133" y="2493676"/>
+                  </a:lnTo>
+                  <a:lnTo>
+                    <a:pt x="5208601" y="2494192"/>
+                  </a:lnTo>
+                  <a:lnTo>
+                    <a:pt x="5285070" y="2494708"/>
+                  </a:lnTo>
+                  <a:lnTo>
+                    <a:pt x="5361538" y="2495223"/>
+                  </a:lnTo>
+                  <a:lnTo>
+                    <a:pt x="5438006" y="2495738"/>
+                  </a:lnTo>
+                  <a:lnTo>
+                    <a:pt x="5514475" y="2496253"/>
+                  </a:lnTo>
+                  <a:lnTo>
+                    <a:pt x="5590943" y="2496768"/>
+                  </a:lnTo>
+                  <a:lnTo>
+                    <a:pt x="5667412" y="2497282"/>
+                  </a:lnTo>
+                  <a:lnTo>
+                    <a:pt x="5743880" y="2497796"/>
+                  </a:lnTo>
+                  <a:lnTo>
+                    <a:pt x="5820349" y="2498309"/>
+                  </a:lnTo>
+                  <a:lnTo>
+                    <a:pt x="5896817" y="2498822"/>
+                  </a:lnTo>
+                  <a:lnTo>
+                    <a:pt x="5973286" y="2499335"/>
+                  </a:lnTo>
+                  <a:lnTo>
+                    <a:pt x="6049754" y="2499847"/>
+                  </a:lnTo>
+                  <a:lnTo>
+                    <a:pt x="6126222" y="2500359"/>
+                  </a:lnTo>
+                  <a:lnTo>
+                    <a:pt x="6202691" y="2500871"/>
+                  </a:lnTo>
+                  <a:lnTo>
+                    <a:pt x="6279159" y="2501382"/>
+                  </a:lnTo>
+                  <a:lnTo>
+                    <a:pt x="6355628" y="2501893"/>
+                  </a:lnTo>
+                  <a:lnTo>
+                    <a:pt x="6432096" y="2502404"/>
                   </a:lnTo>
                 </a:path>
               </a:pathLst>
@@ -3862,297 +3862,297 @@
           </p:nvSpPr>
           <p:spPr>
             <a:xfrm>
-              <a:off x="817517" y="4702693"/>
-              <a:ext cx="7370972" cy="766828"/>
+              <a:off x="915645" y="4661503"/>
+              <a:ext cx="7260303" cy="715246"/>
             </a:xfrm>
             <a:custGeom>
               <a:avLst/>
               <a:pathLst>
-                <a:path w="7370972" h="766828">
+                <a:path w="7260303" h="715246">
                   <a:moveTo>
-                    <a:pt x="7370972" y="766828"/>
+                    <a:pt x="7260303" y="715246"/>
                   </a:moveTo>
                   <a:lnTo>
-                    <a:pt x="7293338" y="762903"/>
-                  </a:lnTo>
-                  <a:lnTo>
-                    <a:pt x="7215704" y="758803"/>
-                  </a:lnTo>
-                  <a:lnTo>
-                    <a:pt x="7138070" y="754519"/>
-                  </a:lnTo>
-                  <a:lnTo>
-                    <a:pt x="7060436" y="750043"/>
-                  </a:lnTo>
-                  <a:lnTo>
-                    <a:pt x="6982802" y="745367"/>
-                  </a:lnTo>
-                  <a:lnTo>
-                    <a:pt x="6905168" y="740482"/>
-                  </a:lnTo>
-                  <a:lnTo>
-                    <a:pt x="6827534" y="735378"/>
-                  </a:lnTo>
-                  <a:lnTo>
-                    <a:pt x="6749900" y="730046"/>
-                  </a:lnTo>
-                  <a:lnTo>
-                    <a:pt x="6672266" y="724475"/>
-                  </a:lnTo>
-                  <a:lnTo>
-                    <a:pt x="6594632" y="718656"/>
-                  </a:lnTo>
-                  <a:lnTo>
-                    <a:pt x="6516998" y="712575"/>
-                  </a:lnTo>
-                  <a:lnTo>
-                    <a:pt x="6439364" y="706223"/>
-                  </a:lnTo>
-                  <a:lnTo>
-                    <a:pt x="6361730" y="699587"/>
-                  </a:lnTo>
-                  <a:lnTo>
-                    <a:pt x="6284096" y="692654"/>
-                  </a:lnTo>
-                  <a:lnTo>
-                    <a:pt x="6206462" y="685410"/>
-                  </a:lnTo>
-                  <a:lnTo>
-                    <a:pt x="6128827" y="677842"/>
-                  </a:lnTo>
-                  <a:lnTo>
-                    <a:pt x="6051193" y="669936"/>
-                  </a:lnTo>
-                  <a:lnTo>
-                    <a:pt x="5973559" y="661676"/>
-                  </a:lnTo>
-                  <a:lnTo>
-                    <a:pt x="5895925" y="653047"/>
-                  </a:lnTo>
-                  <a:lnTo>
-                    <a:pt x="5818291" y="644031"/>
-                  </a:lnTo>
-                  <a:lnTo>
-                    <a:pt x="5740657" y="634612"/>
-                  </a:lnTo>
-                  <a:lnTo>
-                    <a:pt x="5663023" y="624772"/>
-                  </a:lnTo>
-                  <a:lnTo>
-                    <a:pt x="5585389" y="614492"/>
-                  </a:lnTo>
-                  <a:lnTo>
-                    <a:pt x="5507755" y="603751"/>
-                  </a:lnTo>
-                  <a:lnTo>
-                    <a:pt x="5430121" y="592530"/>
-                  </a:lnTo>
-                  <a:lnTo>
-                    <a:pt x="5352487" y="580807"/>
-                  </a:lnTo>
-                  <a:lnTo>
-                    <a:pt x="5274853" y="568559"/>
-                  </a:lnTo>
-                  <a:lnTo>
-                    <a:pt x="5197219" y="555764"/>
-                  </a:lnTo>
-                  <a:lnTo>
-                    <a:pt x="5119585" y="542396"/>
-                  </a:lnTo>
-                  <a:lnTo>
-                    <a:pt x="5041951" y="528430"/>
-                  </a:lnTo>
-                  <a:lnTo>
-                    <a:pt x="4964317" y="513839"/>
-                  </a:lnTo>
-                  <a:lnTo>
-                    <a:pt x="4886683" y="498595"/>
-                  </a:lnTo>
-                  <a:lnTo>
-                    <a:pt x="4809049" y="482670"/>
-                  </a:lnTo>
-                  <a:lnTo>
-                    <a:pt x="4731415" y="466032"/>
-                  </a:lnTo>
-                  <a:lnTo>
-                    <a:pt x="4653781" y="448649"/>
-                  </a:lnTo>
-                  <a:lnTo>
-                    <a:pt x="4576147" y="430489"/>
-                  </a:lnTo>
-                  <a:lnTo>
-                    <a:pt x="4498513" y="411516"/>
-                  </a:lnTo>
-                  <a:lnTo>
-                    <a:pt x="4420879" y="391694"/>
-                  </a:lnTo>
-                  <a:lnTo>
-                    <a:pt x="4343244" y="370986"/>
-                  </a:lnTo>
-                  <a:lnTo>
-                    <a:pt x="4265610" y="349351"/>
-                  </a:lnTo>
-                  <a:lnTo>
-                    <a:pt x="4187976" y="326748"/>
-                  </a:lnTo>
-                  <a:lnTo>
-                    <a:pt x="4110342" y="303134"/>
-                  </a:lnTo>
-                  <a:lnTo>
-                    <a:pt x="4032708" y="278463"/>
-                  </a:lnTo>
-                  <a:lnTo>
-                    <a:pt x="3955074" y="252689"/>
-                  </a:lnTo>
-                  <a:lnTo>
-                    <a:pt x="3877440" y="225761"/>
-                  </a:lnTo>
-                  <a:lnTo>
-                    <a:pt x="3799806" y="197629"/>
-                  </a:lnTo>
-                  <a:lnTo>
-                    <a:pt x="3722172" y="168238"/>
-                  </a:lnTo>
-                  <a:lnTo>
-                    <a:pt x="3644538" y="137532"/>
-                  </a:lnTo>
-                  <a:lnTo>
-                    <a:pt x="3566904" y="105453"/>
-                  </a:lnTo>
-                  <a:lnTo>
-                    <a:pt x="3489270" y="71938"/>
-                  </a:lnTo>
-                  <a:lnTo>
-                    <a:pt x="3411636" y="36923"/>
-                  </a:lnTo>
-                  <a:lnTo>
-                    <a:pt x="3334002" y="24712"/>
-                  </a:lnTo>
-                  <a:lnTo>
-                    <a:pt x="3256368" y="24145"/>
-                  </a:lnTo>
-                  <a:lnTo>
-                    <a:pt x="3178734" y="23577"/>
-                  </a:lnTo>
-                  <a:lnTo>
-                    <a:pt x="3101100" y="23009"/>
-                  </a:lnTo>
-                  <a:lnTo>
-                    <a:pt x="3023466" y="22441"/>
-                  </a:lnTo>
-                  <a:lnTo>
-                    <a:pt x="2945832" y="21872"/>
-                  </a:lnTo>
-                  <a:lnTo>
-                    <a:pt x="2868198" y="21303"/>
-                  </a:lnTo>
-                  <a:lnTo>
-                    <a:pt x="2790564" y="20733"/>
-                  </a:lnTo>
-                  <a:lnTo>
-                    <a:pt x="2712930" y="20163"/>
-                  </a:lnTo>
-                  <a:lnTo>
-                    <a:pt x="2635295" y="19593"/>
-                  </a:lnTo>
-                  <a:lnTo>
-                    <a:pt x="2557661" y="19022"/>
-                  </a:lnTo>
-                  <a:lnTo>
-                    <a:pt x="2480027" y="18451"/>
-                  </a:lnTo>
-                  <a:lnTo>
-                    <a:pt x="2402393" y="17880"/>
-                  </a:lnTo>
-                  <a:lnTo>
-                    <a:pt x="2324759" y="17308"/>
-                  </a:lnTo>
-                  <a:lnTo>
-                    <a:pt x="2247125" y="16735"/>
-                  </a:lnTo>
-                  <a:lnTo>
-                    <a:pt x="2169491" y="16163"/>
-                  </a:lnTo>
-                  <a:lnTo>
-                    <a:pt x="2091857" y="15590"/>
-                  </a:lnTo>
-                  <a:lnTo>
-                    <a:pt x="2014223" y="15016"/>
-                  </a:lnTo>
-                  <a:lnTo>
-                    <a:pt x="1936589" y="14442"/>
-                  </a:lnTo>
-                  <a:lnTo>
-                    <a:pt x="1858955" y="13868"/>
-                  </a:lnTo>
-                  <a:lnTo>
-                    <a:pt x="1781321" y="13293"/>
-                  </a:lnTo>
-                  <a:lnTo>
-                    <a:pt x="1703687" y="12718"/>
-                  </a:lnTo>
-                  <a:lnTo>
-                    <a:pt x="1626053" y="12143"/>
-                  </a:lnTo>
-                  <a:lnTo>
-                    <a:pt x="1548419" y="11567"/>
-                  </a:lnTo>
-                  <a:lnTo>
-                    <a:pt x="1470785" y="10991"/>
-                  </a:lnTo>
-                  <a:lnTo>
-                    <a:pt x="1393151" y="10414"/>
-                  </a:lnTo>
-                  <a:lnTo>
-                    <a:pt x="1315517" y="9837"/>
-                  </a:lnTo>
-                  <a:lnTo>
-                    <a:pt x="1237883" y="9260"/>
-                  </a:lnTo>
-                  <a:lnTo>
-                    <a:pt x="1160249" y="8682"/>
-                  </a:lnTo>
-                  <a:lnTo>
-                    <a:pt x="1082615" y="8104"/>
-                  </a:lnTo>
-                  <a:lnTo>
-                    <a:pt x="1004981" y="7525"/>
-                  </a:lnTo>
-                  <a:lnTo>
-                    <a:pt x="927346" y="6946"/>
-                  </a:lnTo>
-                  <a:lnTo>
-                    <a:pt x="849712" y="6367"/>
-                  </a:lnTo>
-                  <a:lnTo>
-                    <a:pt x="772078" y="5787"/>
-                  </a:lnTo>
-                  <a:lnTo>
-                    <a:pt x="694444" y="5207"/>
-                  </a:lnTo>
-                  <a:lnTo>
-                    <a:pt x="616810" y="4626"/>
-                  </a:lnTo>
-                  <a:lnTo>
-                    <a:pt x="539176" y="4045"/>
-                  </a:lnTo>
-                  <a:lnTo>
-                    <a:pt x="461542" y="3464"/>
-                  </a:lnTo>
-                  <a:lnTo>
-                    <a:pt x="383908" y="2882"/>
-                  </a:lnTo>
-                  <a:lnTo>
-                    <a:pt x="306274" y="2300"/>
-                  </a:lnTo>
-                  <a:lnTo>
-                    <a:pt x="228640" y="1718"/>
-                  </a:lnTo>
-                  <a:lnTo>
-                    <a:pt x="151006" y="1135"/>
-                  </a:lnTo>
-                  <a:lnTo>
-                    <a:pt x="73372" y="551"/>
+                    <a:pt x="7183835" y="711585"/>
+                  </a:lnTo>
+                  <a:lnTo>
+                    <a:pt x="7107366" y="707761"/>
+                  </a:lnTo>
+                  <a:lnTo>
+                    <a:pt x="7030898" y="703765"/>
+                  </a:lnTo>
+                  <a:lnTo>
+                    <a:pt x="6954429" y="699590"/>
+                  </a:lnTo>
+                  <a:lnTo>
+                    <a:pt x="6877961" y="695229"/>
+                  </a:lnTo>
+                  <a:lnTo>
+                    <a:pt x="6801492" y="690672"/>
+                  </a:lnTo>
+                  <a:lnTo>
+                    <a:pt x="6725024" y="685912"/>
+                  </a:lnTo>
+                  <a:lnTo>
+                    <a:pt x="6648556" y="680939"/>
+                  </a:lnTo>
+                  <a:lnTo>
+                    <a:pt x="6572087" y="675743"/>
+                  </a:lnTo>
+                  <a:lnTo>
+                    <a:pt x="6495619" y="670314"/>
+                  </a:lnTo>
+                  <a:lnTo>
+                    <a:pt x="6419150" y="664643"/>
+                  </a:lnTo>
+                  <a:lnTo>
+                    <a:pt x="6342682" y="658718"/>
+                  </a:lnTo>
+                  <a:lnTo>
+                    <a:pt x="6266213" y="652528"/>
+                  </a:lnTo>
+                  <a:lnTo>
+                    <a:pt x="6189745" y="646061"/>
+                  </a:lnTo>
+                  <a:lnTo>
+                    <a:pt x="6113277" y="639305"/>
+                  </a:lnTo>
+                  <a:lnTo>
+                    <a:pt x="6036808" y="632246"/>
+                  </a:lnTo>
+                  <a:lnTo>
+                    <a:pt x="5960340" y="624872"/>
+                  </a:lnTo>
+                  <a:lnTo>
+                    <a:pt x="5883871" y="617168"/>
+                  </a:lnTo>
+                  <a:lnTo>
+                    <a:pt x="5807403" y="609119"/>
+                  </a:lnTo>
+                  <a:lnTo>
+                    <a:pt x="5730934" y="600710"/>
+                  </a:lnTo>
+                  <a:lnTo>
+                    <a:pt x="5654466" y="591924"/>
+                  </a:lnTo>
+                  <a:lnTo>
+                    <a:pt x="5577998" y="582746"/>
+                  </a:lnTo>
+                  <a:lnTo>
+                    <a:pt x="5501529" y="573157"/>
+                  </a:lnTo>
+                  <a:lnTo>
+                    <a:pt x="5425061" y="563139"/>
+                  </a:lnTo>
+                  <a:lnTo>
+                    <a:pt x="5348592" y="552673"/>
+                  </a:lnTo>
+                  <a:lnTo>
+                    <a:pt x="5272124" y="541738"/>
+                  </a:lnTo>
+                  <a:lnTo>
+                    <a:pt x="5195655" y="530315"/>
+                  </a:lnTo>
+                  <a:lnTo>
+                    <a:pt x="5119187" y="518380"/>
+                  </a:lnTo>
+                  <a:lnTo>
+                    <a:pt x="5042719" y="505911"/>
+                  </a:lnTo>
+                  <a:lnTo>
+                    <a:pt x="4966250" y="492884"/>
+                  </a:lnTo>
+                  <a:lnTo>
+                    <a:pt x="4889782" y="479275"/>
+                  </a:lnTo>
+                  <a:lnTo>
+                    <a:pt x="4813313" y="465057"/>
+                  </a:lnTo>
+                  <a:lnTo>
+                    <a:pt x="4736845" y="450202"/>
+                  </a:lnTo>
+                  <a:lnTo>
+                    <a:pt x="4660376" y="434683"/>
+                  </a:lnTo>
+                  <a:lnTo>
+                    <a:pt x="4583908" y="418470"/>
+                  </a:lnTo>
+                  <a:lnTo>
+                    <a:pt x="4507439" y="401531"/>
+                  </a:lnTo>
+                  <a:lnTo>
+                    <a:pt x="4430971" y="383835"/>
+                  </a:lnTo>
+                  <a:lnTo>
+                    <a:pt x="4354503" y="365346"/>
+                  </a:lnTo>
+                  <a:lnTo>
+                    <a:pt x="4278034" y="346031"/>
+                  </a:lnTo>
+                  <a:lnTo>
+                    <a:pt x="4201566" y="325851"/>
+                  </a:lnTo>
+                  <a:lnTo>
+                    <a:pt x="4125097" y="304769"/>
+                  </a:lnTo>
+                  <a:lnTo>
+                    <a:pt x="4048629" y="282743"/>
+                  </a:lnTo>
+                  <a:lnTo>
+                    <a:pt x="3972160" y="259732"/>
+                  </a:lnTo>
+                  <a:lnTo>
+                    <a:pt x="3895692" y="235691"/>
+                  </a:lnTo>
+                  <a:lnTo>
+                    <a:pt x="3819224" y="210575"/>
+                  </a:lnTo>
+                  <a:lnTo>
+                    <a:pt x="3742755" y="184335"/>
+                  </a:lnTo>
+                  <a:lnTo>
+                    <a:pt x="3666287" y="156921"/>
+                  </a:lnTo>
+                  <a:lnTo>
+                    <a:pt x="3589818" y="128281"/>
+                  </a:lnTo>
+                  <a:lnTo>
+                    <a:pt x="3513350" y="98359"/>
+                  </a:lnTo>
+                  <a:lnTo>
+                    <a:pt x="3436881" y="67099"/>
+                  </a:lnTo>
+                  <a:lnTo>
+                    <a:pt x="3360413" y="34440"/>
+                  </a:lnTo>
+                  <a:lnTo>
+                    <a:pt x="3283945" y="23050"/>
+                  </a:lnTo>
+                  <a:lnTo>
+                    <a:pt x="3207476" y="22521"/>
+                  </a:lnTo>
+                  <a:lnTo>
+                    <a:pt x="3131008" y="21991"/>
+                  </a:lnTo>
+                  <a:lnTo>
+                    <a:pt x="3054539" y="21461"/>
+                  </a:lnTo>
+                  <a:lnTo>
+                    <a:pt x="2978071" y="20931"/>
+                  </a:lnTo>
+                  <a:lnTo>
+                    <a:pt x="2901602" y="20401"/>
+                  </a:lnTo>
+                  <a:lnTo>
+                    <a:pt x="2825134" y="19870"/>
+                  </a:lnTo>
+                  <a:lnTo>
+                    <a:pt x="2748666" y="19339"/>
+                  </a:lnTo>
+                  <a:lnTo>
+                    <a:pt x="2672197" y="18807"/>
+                  </a:lnTo>
+                  <a:lnTo>
+                    <a:pt x="2595729" y="18275"/>
+                  </a:lnTo>
+                  <a:lnTo>
+                    <a:pt x="2519260" y="17743"/>
+                  </a:lnTo>
+                  <a:lnTo>
+                    <a:pt x="2442792" y="17210"/>
+                  </a:lnTo>
+                  <a:lnTo>
+                    <a:pt x="2366323" y="16677"/>
+                  </a:lnTo>
+                  <a:lnTo>
+                    <a:pt x="2289855" y="16143"/>
+                  </a:lnTo>
+                  <a:lnTo>
+                    <a:pt x="2213386" y="15610"/>
+                  </a:lnTo>
+                  <a:lnTo>
+                    <a:pt x="2136918" y="15075"/>
+                  </a:lnTo>
+                  <a:lnTo>
+                    <a:pt x="2060450" y="14541"/>
+                  </a:lnTo>
+                  <a:lnTo>
+                    <a:pt x="1983981" y="14006"/>
+                  </a:lnTo>
+                  <a:lnTo>
+                    <a:pt x="1907513" y="13471"/>
+                  </a:lnTo>
+                  <a:lnTo>
+                    <a:pt x="1831044" y="12935"/>
+                  </a:lnTo>
+                  <a:lnTo>
+                    <a:pt x="1754576" y="12399"/>
+                  </a:lnTo>
+                  <a:lnTo>
+                    <a:pt x="1678107" y="11863"/>
+                  </a:lnTo>
+                  <a:lnTo>
+                    <a:pt x="1601639" y="11326"/>
+                  </a:lnTo>
+                  <a:lnTo>
+                    <a:pt x="1525171" y="10789"/>
+                  </a:lnTo>
+                  <a:lnTo>
+                    <a:pt x="1448702" y="10251"/>
+                  </a:lnTo>
+                  <a:lnTo>
+                    <a:pt x="1372234" y="9714"/>
+                  </a:lnTo>
+                  <a:lnTo>
+                    <a:pt x="1295765" y="9175"/>
+                  </a:lnTo>
+                  <a:lnTo>
+                    <a:pt x="1219297" y="8637"/>
+                  </a:lnTo>
+                  <a:lnTo>
+                    <a:pt x="1142828" y="8098"/>
+                  </a:lnTo>
+                  <a:lnTo>
+                    <a:pt x="1066360" y="7559"/>
+                  </a:lnTo>
+                  <a:lnTo>
+                    <a:pt x="989892" y="7019"/>
+                  </a:lnTo>
+                  <a:lnTo>
+                    <a:pt x="913423" y="6479"/>
+                  </a:lnTo>
+                  <a:lnTo>
+                    <a:pt x="836955" y="5939"/>
+                  </a:lnTo>
+                  <a:lnTo>
+                    <a:pt x="760486" y="5398"/>
+                  </a:lnTo>
+                  <a:lnTo>
+                    <a:pt x="684018" y="4857"/>
+                  </a:lnTo>
+                  <a:lnTo>
+                    <a:pt x="607549" y="4315"/>
+                  </a:lnTo>
+                  <a:lnTo>
+                    <a:pt x="531081" y="3773"/>
+                  </a:lnTo>
+                  <a:lnTo>
+                    <a:pt x="454613" y="3231"/>
+                  </a:lnTo>
+                  <a:lnTo>
+                    <a:pt x="378144" y="2688"/>
+                  </a:lnTo>
+                  <a:lnTo>
+                    <a:pt x="301676" y="2145"/>
+                  </a:lnTo>
+                  <a:lnTo>
+                    <a:pt x="225207" y="1602"/>
+                  </a:lnTo>
+                  <a:lnTo>
+                    <a:pt x="148739" y="1058"/>
+                  </a:lnTo>
+                  <a:lnTo>
+                    <a:pt x="72270" y="514"/>
                   </a:lnTo>
                   <a:lnTo>
                     <a:pt x="0" y="0"/>
@@ -4175,300 +4175,300 @@
           </p:nvSpPr>
           <p:spPr>
             <a:xfrm>
-              <a:off x="817517" y="3370424"/>
-              <a:ext cx="7370972" cy="1921760"/>
+              <a:off x="915645" y="3418851"/>
+              <a:ext cx="7260303" cy="1792490"/>
             </a:xfrm>
             <a:custGeom>
               <a:avLst/>
               <a:pathLst>
-                <a:path w="7370972" h="1921760">
+                <a:path w="7260303" h="1792490">
                   <a:moveTo>
                     <a:pt x="0" y="0"/>
                   </a:moveTo>
                   <a:lnTo>
-                    <a:pt x="73372" y="45483"/>
-                  </a:lnTo>
-                  <a:lnTo>
-                    <a:pt x="151006" y="92551"/>
-                  </a:lnTo>
-                  <a:lnTo>
-                    <a:pt x="228640" y="138584"/>
-                  </a:lnTo>
-                  <a:lnTo>
-                    <a:pt x="306274" y="183606"/>
-                  </a:lnTo>
-                  <a:lnTo>
-                    <a:pt x="383908" y="227637"/>
-                  </a:lnTo>
-                  <a:lnTo>
-                    <a:pt x="461542" y="270701"/>
-                  </a:lnTo>
-                  <a:lnTo>
-                    <a:pt x="539176" y="312819"/>
-                  </a:lnTo>
-                  <a:lnTo>
-                    <a:pt x="616810" y="354010"/>
-                  </a:lnTo>
-                  <a:lnTo>
-                    <a:pt x="694444" y="394296"/>
-                  </a:lnTo>
-                  <a:lnTo>
-                    <a:pt x="772078" y="433697"/>
-                  </a:lnTo>
-                  <a:lnTo>
-                    <a:pt x="849712" y="472232"/>
-                  </a:lnTo>
-                  <a:lnTo>
-                    <a:pt x="927346" y="509919"/>
-                  </a:lnTo>
-                  <a:lnTo>
-                    <a:pt x="1004981" y="546779"/>
-                  </a:lnTo>
-                  <a:lnTo>
-                    <a:pt x="1082615" y="582828"/>
-                  </a:lnTo>
-                  <a:lnTo>
-                    <a:pt x="1160249" y="618084"/>
-                  </a:lnTo>
-                  <a:lnTo>
-                    <a:pt x="1237883" y="652566"/>
-                  </a:lnTo>
-                  <a:lnTo>
-                    <a:pt x="1315517" y="686290"/>
-                  </a:lnTo>
-                  <a:lnTo>
-                    <a:pt x="1393151" y="719272"/>
-                  </a:lnTo>
-                  <a:lnTo>
-                    <a:pt x="1470785" y="751530"/>
-                  </a:lnTo>
-                  <a:lnTo>
-                    <a:pt x="1548419" y="783078"/>
-                  </a:lnTo>
-                  <a:lnTo>
-                    <a:pt x="1626053" y="813933"/>
-                  </a:lnTo>
-                  <a:lnTo>
-                    <a:pt x="1703687" y="844110"/>
-                  </a:lnTo>
-                  <a:lnTo>
-                    <a:pt x="1781321" y="873624"/>
-                  </a:lnTo>
-                  <a:lnTo>
-                    <a:pt x="1858955" y="902489"/>
-                  </a:lnTo>
-                  <a:lnTo>
-                    <a:pt x="1936589" y="930719"/>
-                  </a:lnTo>
-                  <a:lnTo>
-                    <a:pt x="2014223" y="958329"/>
-                  </a:lnTo>
-                  <a:lnTo>
-                    <a:pt x="2091857" y="985332"/>
-                  </a:lnTo>
-                  <a:lnTo>
-                    <a:pt x="2169491" y="1011741"/>
-                  </a:lnTo>
-                  <a:lnTo>
-                    <a:pt x="2247125" y="1037570"/>
-                  </a:lnTo>
-                  <a:lnTo>
-                    <a:pt x="2324759" y="1062831"/>
-                  </a:lnTo>
-                  <a:lnTo>
-                    <a:pt x="2402393" y="1087537"/>
-                  </a:lnTo>
-                  <a:lnTo>
-                    <a:pt x="2480027" y="1111700"/>
-                  </a:lnTo>
-                  <a:lnTo>
-                    <a:pt x="2557661" y="1135332"/>
-                  </a:lnTo>
-                  <a:lnTo>
-                    <a:pt x="2635295" y="1158444"/>
-                  </a:lnTo>
-                  <a:lnTo>
-                    <a:pt x="2712930" y="1181049"/>
-                  </a:lnTo>
-                  <a:lnTo>
-                    <a:pt x="2790564" y="1203156"/>
-                  </a:lnTo>
-                  <a:lnTo>
-                    <a:pt x="2868198" y="1224778"/>
-                  </a:lnTo>
-                  <a:lnTo>
-                    <a:pt x="2945832" y="1245924"/>
-                  </a:lnTo>
-                  <a:lnTo>
-                    <a:pt x="3023466" y="1266605"/>
-                  </a:lnTo>
-                  <a:lnTo>
-                    <a:pt x="3101100" y="1286832"/>
-                  </a:lnTo>
-                  <a:lnTo>
-                    <a:pt x="3178734" y="1306615"/>
-                  </a:lnTo>
-                  <a:lnTo>
-                    <a:pt x="3256368" y="1325962"/>
-                  </a:lnTo>
-                  <a:lnTo>
-                    <a:pt x="3334002" y="1344884"/>
-                  </a:lnTo>
-                  <a:lnTo>
-                    <a:pt x="3411636" y="1363390"/>
-                  </a:lnTo>
-                  <a:lnTo>
-                    <a:pt x="3489270" y="1381490"/>
-                  </a:lnTo>
-                  <a:lnTo>
-                    <a:pt x="3566904" y="1399192"/>
-                  </a:lnTo>
-                  <a:lnTo>
-                    <a:pt x="3644538" y="1416504"/>
-                  </a:lnTo>
-                  <a:lnTo>
-                    <a:pt x="3722172" y="1433436"/>
-                  </a:lnTo>
-                  <a:lnTo>
-                    <a:pt x="3799806" y="1449996"/>
-                  </a:lnTo>
-                  <a:lnTo>
-                    <a:pt x="3877440" y="1466192"/>
-                  </a:lnTo>
-                  <a:lnTo>
-                    <a:pt x="3955074" y="1482032"/>
-                  </a:lnTo>
-                  <a:lnTo>
-                    <a:pt x="4032708" y="1497524"/>
-                  </a:lnTo>
-                  <a:lnTo>
-                    <a:pt x="4110342" y="1512675"/>
-                  </a:lnTo>
-                  <a:lnTo>
-                    <a:pt x="4187976" y="1527493"/>
-                  </a:lnTo>
-                  <a:lnTo>
-                    <a:pt x="4265610" y="1541985"/>
-                  </a:lnTo>
-                  <a:lnTo>
-                    <a:pt x="4343244" y="1556159"/>
-                  </a:lnTo>
-                  <a:lnTo>
-                    <a:pt x="4420879" y="1570022"/>
-                  </a:lnTo>
-                  <a:lnTo>
-                    <a:pt x="4498513" y="1583579"/>
-                  </a:lnTo>
-                  <a:lnTo>
-                    <a:pt x="4576147" y="1596839"/>
-                  </a:lnTo>
-                  <a:lnTo>
-                    <a:pt x="4653781" y="1609807"/>
-                  </a:lnTo>
-                  <a:lnTo>
-                    <a:pt x="4731415" y="1622490"/>
-                  </a:lnTo>
-                  <a:lnTo>
-                    <a:pt x="4809049" y="1634895"/>
-                  </a:lnTo>
-                  <a:lnTo>
-                    <a:pt x="4886683" y="1647026"/>
-                  </a:lnTo>
-                  <a:lnTo>
-                    <a:pt x="4964317" y="1658891"/>
-                  </a:lnTo>
-                  <a:lnTo>
-                    <a:pt x="5041951" y="1670496"/>
-                  </a:lnTo>
-                  <a:lnTo>
-                    <a:pt x="5119585" y="1681845"/>
-                  </a:lnTo>
-                  <a:lnTo>
-                    <a:pt x="5197219" y="1692945"/>
-                  </a:lnTo>
-                  <a:lnTo>
-                    <a:pt x="5274853" y="1703800"/>
-                  </a:lnTo>
-                  <a:lnTo>
-                    <a:pt x="5352487" y="1714417"/>
-                  </a:lnTo>
-                  <a:lnTo>
-                    <a:pt x="5430121" y="1724801"/>
-                  </a:lnTo>
-                  <a:lnTo>
-                    <a:pt x="5507755" y="1734957"/>
-                  </a:lnTo>
-                  <a:lnTo>
-                    <a:pt x="5585389" y="1744889"/>
-                  </a:lnTo>
-                  <a:lnTo>
-                    <a:pt x="5663023" y="1754603"/>
-                  </a:lnTo>
-                  <a:lnTo>
-                    <a:pt x="5740657" y="1764103"/>
-                  </a:lnTo>
-                  <a:lnTo>
-                    <a:pt x="5818291" y="1773395"/>
-                  </a:lnTo>
-                  <a:lnTo>
-                    <a:pt x="5895925" y="1782482"/>
-                  </a:lnTo>
-                  <a:lnTo>
-                    <a:pt x="5973559" y="1791370"/>
-                  </a:lnTo>
-                  <a:lnTo>
-                    <a:pt x="6051193" y="1800062"/>
-                  </a:lnTo>
-                  <a:lnTo>
-                    <a:pt x="6128827" y="1808564"/>
-                  </a:lnTo>
-                  <a:lnTo>
-                    <a:pt x="6206462" y="1816878"/>
-                  </a:lnTo>
-                  <a:lnTo>
-                    <a:pt x="6284096" y="1825010"/>
-                  </a:lnTo>
-                  <a:lnTo>
-                    <a:pt x="6361730" y="1832963"/>
-                  </a:lnTo>
-                  <a:lnTo>
-                    <a:pt x="6439364" y="1840741"/>
-                  </a:lnTo>
-                  <a:lnTo>
-                    <a:pt x="6516998" y="1848348"/>
-                  </a:lnTo>
-                  <a:lnTo>
-                    <a:pt x="6594632" y="1855788"/>
-                  </a:lnTo>
-                  <a:lnTo>
-                    <a:pt x="6672266" y="1863064"/>
-                  </a:lnTo>
-                  <a:lnTo>
-                    <a:pt x="6749900" y="1870180"/>
-                  </a:lnTo>
-                  <a:lnTo>
-                    <a:pt x="6827534" y="1877140"/>
-                  </a:lnTo>
-                  <a:lnTo>
-                    <a:pt x="6905168" y="1883947"/>
-                  </a:lnTo>
-                  <a:lnTo>
-                    <a:pt x="6982802" y="1890605"/>
-                  </a:lnTo>
-                  <a:lnTo>
-                    <a:pt x="7060436" y="1897116"/>
-                  </a:lnTo>
-                  <a:lnTo>
-                    <a:pt x="7138070" y="1903484"/>
-                  </a:lnTo>
-                  <a:lnTo>
-                    <a:pt x="7215704" y="1909712"/>
-                  </a:lnTo>
-                  <a:lnTo>
-                    <a:pt x="7293338" y="1915803"/>
-                  </a:lnTo>
-                  <a:lnTo>
-                    <a:pt x="7370972" y="1921760"/>
+                    <a:pt x="72270" y="42424"/>
+                  </a:lnTo>
+                  <a:lnTo>
+                    <a:pt x="148739" y="86325"/>
+                  </a:lnTo>
+                  <a:lnTo>
+                    <a:pt x="225207" y="129262"/>
+                  </a:lnTo>
+                  <a:lnTo>
+                    <a:pt x="301676" y="171255"/>
+                  </a:lnTo>
+                  <a:lnTo>
+                    <a:pt x="378144" y="212325"/>
+                  </a:lnTo>
+                  <a:lnTo>
+                    <a:pt x="454613" y="252492"/>
+                  </a:lnTo>
+                  <a:lnTo>
+                    <a:pt x="531081" y="291776"/>
+                  </a:lnTo>
+                  <a:lnTo>
+                    <a:pt x="607549" y="330197"/>
+                  </a:lnTo>
+                  <a:lnTo>
+                    <a:pt x="684018" y="367774"/>
+                  </a:lnTo>
+                  <a:lnTo>
+                    <a:pt x="760486" y="404524"/>
+                  </a:lnTo>
+                  <a:lnTo>
+                    <a:pt x="836955" y="440466"/>
+                  </a:lnTo>
+                  <a:lnTo>
+                    <a:pt x="913423" y="475619"/>
+                  </a:lnTo>
+                  <a:lnTo>
+                    <a:pt x="989892" y="509999"/>
+                  </a:lnTo>
+                  <a:lnTo>
+                    <a:pt x="1066360" y="543623"/>
+                  </a:lnTo>
+                  <a:lnTo>
+                    <a:pt x="1142828" y="576508"/>
+                  </a:lnTo>
+                  <a:lnTo>
+                    <a:pt x="1219297" y="608670"/>
+                  </a:lnTo>
+                  <a:lnTo>
+                    <a:pt x="1295765" y="640126"/>
+                  </a:lnTo>
+                  <a:lnTo>
+                    <a:pt x="1372234" y="670889"/>
+                  </a:lnTo>
+                  <a:lnTo>
+                    <a:pt x="1448702" y="700977"/>
+                  </a:lnTo>
+                  <a:lnTo>
+                    <a:pt x="1525171" y="730403"/>
+                  </a:lnTo>
+                  <a:lnTo>
+                    <a:pt x="1601639" y="759183"/>
+                  </a:lnTo>
+                  <a:lnTo>
+                    <a:pt x="1678107" y="787330"/>
+                  </a:lnTo>
+                  <a:lnTo>
+                    <a:pt x="1754576" y="814858"/>
+                  </a:lnTo>
+                  <a:lnTo>
+                    <a:pt x="1831044" y="841781"/>
+                  </a:lnTo>
+                  <a:lnTo>
+                    <a:pt x="1907513" y="868113"/>
+                  </a:lnTo>
+                  <a:lnTo>
+                    <a:pt x="1983981" y="893865"/>
+                  </a:lnTo>
+                  <a:lnTo>
+                    <a:pt x="2060450" y="919052"/>
+                  </a:lnTo>
+                  <a:lnTo>
+                    <a:pt x="2136918" y="943685"/>
+                  </a:lnTo>
+                  <a:lnTo>
+                    <a:pt x="2213386" y="967777"/>
+                  </a:lnTo>
+                  <a:lnTo>
+                    <a:pt x="2289855" y="991339"/>
+                  </a:lnTo>
+                  <a:lnTo>
+                    <a:pt x="2366323" y="1014383"/>
+                  </a:lnTo>
+                  <a:lnTo>
+                    <a:pt x="2442792" y="1036920"/>
+                  </a:lnTo>
+                  <a:lnTo>
+                    <a:pt x="2519260" y="1058962"/>
+                  </a:lnTo>
+                  <a:lnTo>
+                    <a:pt x="2595729" y="1080520"/>
+                  </a:lnTo>
+                  <a:lnTo>
+                    <a:pt x="2672197" y="1101604"/>
+                  </a:lnTo>
+                  <a:lnTo>
+                    <a:pt x="2748666" y="1122224"/>
+                  </a:lnTo>
+                  <a:lnTo>
+                    <a:pt x="2825134" y="1142391"/>
+                  </a:lnTo>
+                  <a:lnTo>
+                    <a:pt x="2901602" y="1162115"/>
+                  </a:lnTo>
+                  <a:lnTo>
+                    <a:pt x="2978071" y="1181405"/>
+                  </a:lnTo>
+                  <a:lnTo>
+                    <a:pt x="3054539" y="1200272"/>
+                  </a:lnTo>
+                  <a:lnTo>
+                    <a:pt x="3131008" y="1218723"/>
+                  </a:lnTo>
+                  <a:lnTo>
+                    <a:pt x="3207476" y="1236769"/>
+                  </a:lnTo>
+                  <a:lnTo>
+                    <a:pt x="3283945" y="1254419"/>
+                  </a:lnTo>
+                  <a:lnTo>
+                    <a:pt x="3360413" y="1271680"/>
+                  </a:lnTo>
+                  <a:lnTo>
+                    <a:pt x="3436881" y="1288562"/>
+                  </a:lnTo>
+                  <a:lnTo>
+                    <a:pt x="3513350" y="1305073"/>
+                  </a:lnTo>
+                  <a:lnTo>
+                    <a:pt x="3589818" y="1321221"/>
+                  </a:lnTo>
+                  <a:lnTo>
+                    <a:pt x="3666287" y="1337014"/>
+                  </a:lnTo>
+                  <a:lnTo>
+                    <a:pt x="3742755" y="1352460"/>
+                  </a:lnTo>
+                  <a:lnTo>
+                    <a:pt x="3819224" y="1367567"/>
+                  </a:lnTo>
+                  <a:lnTo>
+                    <a:pt x="3895692" y="1382341"/>
+                  </a:lnTo>
+                  <a:lnTo>
+                    <a:pt x="3972160" y="1396791"/>
+                  </a:lnTo>
+                  <a:lnTo>
+                    <a:pt x="4048629" y="1410923"/>
+                  </a:lnTo>
+                  <a:lnTo>
+                    <a:pt x="4125097" y="1424744"/>
+                  </a:lnTo>
+                  <a:lnTo>
+                    <a:pt x="4201566" y="1438262"/>
+                  </a:lnTo>
+                  <a:lnTo>
+                    <a:pt x="4278034" y="1451482"/>
+                  </a:lnTo>
+                  <a:lnTo>
+                    <a:pt x="4354503" y="1464412"/>
+                  </a:lnTo>
+                  <a:lnTo>
+                    <a:pt x="4430971" y="1477058"/>
+                  </a:lnTo>
+                  <a:lnTo>
+                    <a:pt x="4507439" y="1489425"/>
+                  </a:lnTo>
+                  <a:lnTo>
+                    <a:pt x="4583908" y="1501521"/>
+                  </a:lnTo>
+                  <a:lnTo>
+                    <a:pt x="4660376" y="1513351"/>
+                  </a:lnTo>
+                  <a:lnTo>
+                    <a:pt x="4736845" y="1524921"/>
+                  </a:lnTo>
+                  <a:lnTo>
+                    <a:pt x="4813313" y="1536237"/>
+                  </a:lnTo>
+                  <a:lnTo>
+                    <a:pt x="4889782" y="1547304"/>
+                  </a:lnTo>
+                  <a:lnTo>
+                    <a:pt x="4966250" y="1558127"/>
+                  </a:lnTo>
+                  <a:lnTo>
+                    <a:pt x="5042719" y="1568713"/>
+                  </a:lnTo>
+                  <a:lnTo>
+                    <a:pt x="5119187" y="1579066"/>
+                  </a:lnTo>
+                  <a:lnTo>
+                    <a:pt x="5195655" y="1589192"/>
+                  </a:lnTo>
+                  <a:lnTo>
+                    <a:pt x="5272124" y="1599095"/>
+                  </a:lnTo>
+                  <a:lnTo>
+                    <a:pt x="5348592" y="1608780"/>
+                  </a:lnTo>
+                  <a:lnTo>
+                    <a:pt x="5425061" y="1618252"/>
+                  </a:lnTo>
+                  <a:lnTo>
+                    <a:pt x="5501529" y="1627517"/>
+                  </a:lnTo>
+                  <a:lnTo>
+                    <a:pt x="5577998" y="1636577"/>
+                  </a:lnTo>
+                  <a:lnTo>
+                    <a:pt x="5654466" y="1645439"/>
+                  </a:lnTo>
+                  <a:lnTo>
+                    <a:pt x="5730934" y="1654105"/>
+                  </a:lnTo>
+                  <a:lnTo>
+                    <a:pt x="5807403" y="1662581"/>
+                  </a:lnTo>
+                  <a:lnTo>
+                    <a:pt x="5883871" y="1670871"/>
+                  </a:lnTo>
+                  <a:lnTo>
+                    <a:pt x="5960340" y="1678979"/>
+                  </a:lnTo>
+                  <a:lnTo>
+                    <a:pt x="6036808" y="1686908"/>
+                  </a:lnTo>
+                  <a:lnTo>
+                    <a:pt x="6113277" y="1694663"/>
+                  </a:lnTo>
+                  <a:lnTo>
+                    <a:pt x="6189745" y="1702248"/>
+                  </a:lnTo>
+                  <a:lnTo>
+                    <a:pt x="6266213" y="1709666"/>
+                  </a:lnTo>
+                  <a:lnTo>
+                    <a:pt x="6342682" y="1716921"/>
+                  </a:lnTo>
+                  <a:lnTo>
+                    <a:pt x="6419150" y="1724016"/>
+                  </a:lnTo>
+                  <a:lnTo>
+                    <a:pt x="6495619" y="1730956"/>
+                  </a:lnTo>
+                  <a:lnTo>
+                    <a:pt x="6572087" y="1737742"/>
+                  </a:lnTo>
+                  <a:lnTo>
+                    <a:pt x="6648556" y="1744380"/>
+                  </a:lnTo>
+                  <a:lnTo>
+                    <a:pt x="6725024" y="1750872"/>
+                  </a:lnTo>
+                  <a:lnTo>
+                    <a:pt x="6801492" y="1757221"/>
+                  </a:lnTo>
+                  <a:lnTo>
+                    <a:pt x="6877961" y="1763431"/>
+                  </a:lnTo>
+                  <a:lnTo>
+                    <a:pt x="6954429" y="1769504"/>
+                  </a:lnTo>
+                  <a:lnTo>
+                    <a:pt x="7030898" y="1775443"/>
+                  </a:lnTo>
+                  <a:lnTo>
+                    <a:pt x="7107366" y="1781253"/>
+                  </a:lnTo>
+                  <a:lnTo>
+                    <a:pt x="7183835" y="1786934"/>
+                  </a:lnTo>
+                  <a:lnTo>
+                    <a:pt x="7260303" y="1792490"/>
                   </a:lnTo>
                 </a:path>
               </a:pathLst>
@@ -4497,21 +4497,21 @@
           </p:nvSpPr>
           <p:spPr>
             <a:xfrm>
-              <a:off x="817517" y="4727786"/>
-              <a:ext cx="7799693" cy="0"/>
+              <a:off x="915645" y="4684908"/>
+              <a:ext cx="7682587" cy="0"/>
             </a:xfrm>
             <a:custGeom>
               <a:avLst/>
               <a:pathLst>
-                <a:path w="7799693" h="0">
+                <a:path w="7682587" h="0">
                   <a:moveTo>
                     <a:pt x="0" y="0"/>
                   </a:moveTo>
                   <a:lnTo>
-                    <a:pt x="7799693" y="0"/>
-                  </a:lnTo>
-                  <a:lnTo>
-                    <a:pt x="7799693" y="0"/>
+                    <a:pt x="7682587" y="0"/>
+                  </a:lnTo>
+                  <a:lnTo>
+                    <a:pt x="7682587" y="0"/>
                   </a:lnTo>
                 </a:path>
               </a:pathLst>
@@ -4540,15 +4540,15 @@
           </p:nvSpPr>
           <p:spPr>
             <a:xfrm>
-              <a:off x="4203673" y="2073503"/>
-              <a:ext cx="0" cy="3649639"/>
+              <a:off x="4250960" y="2209169"/>
+              <a:ext cx="0" cy="3404141"/>
             </a:xfrm>
             <a:custGeom>
               <a:avLst/>
               <a:pathLst>
-                <a:path w="0" h="3649639">
+                <a:path w="0" h="3404141">
                   <a:moveTo>
-                    <a:pt x="0" y="3649639"/>
+                    <a:pt x="0" y="3404141"/>
                   </a:moveTo>
                   <a:lnTo>
                     <a:pt x="0" y="0"/>
@@ -4583,8 +4583,8 @@
           </p:nvSpPr>
           <p:spPr>
             <a:xfrm>
-              <a:off x="692708" y="5517199"/>
-              <a:ext cx="62179" cy="80101"/>
+              <a:off x="756929" y="5407599"/>
+              <a:ext cx="79004" cy="101955"/>
             </a:xfrm>
             <a:prstGeom prst="rect">
               <a:avLst/>
@@ -4597,7 +4597,7 @@
             <a:p>
               <a:pPr algn="l" marL="0" marR="0" indent="0">
                 <a:lnSpc>
-                  <a:spcPts val="880"/>
+                  <a:spcPts val="1120"/>
                 </a:lnSpc>
                 <a:spcBef>
                   <a:spcPts val="0"/>
@@ -4607,7 +4607,7 @@
                 </a:spcAft>
               </a:pPr>
               <a:r>
-                <a:rPr sz="880">
+                <a:rPr sz="1120">
                   <a:solidFill>
                     <a:srgbClr val="4D4D4D">
                       <a:alpha val="100000"/>
@@ -4629,8 +4629,8 @@
           </p:nvSpPr>
           <p:spPr>
             <a:xfrm>
-              <a:off x="692708" y="4687735"/>
-              <a:ext cx="62179" cy="80101"/>
+              <a:off x="756929" y="4633931"/>
+              <a:ext cx="79004" cy="101955"/>
             </a:xfrm>
             <a:prstGeom prst="rect">
               <a:avLst/>
@@ -4643,7 +4643,7 @@
             <a:p>
               <a:pPr algn="l" marL="0" marR="0" indent="0">
                 <a:lnSpc>
-                  <a:spcPts val="880"/>
+                  <a:spcPts val="1120"/>
                 </a:lnSpc>
                 <a:spcBef>
                   <a:spcPts val="0"/>
@@ -4653,7 +4653,7 @@
                 </a:spcAft>
               </a:pPr>
               <a:r>
-                <a:rPr sz="880">
+                <a:rPr sz="1120">
                   <a:solidFill>
                     <a:srgbClr val="4D4D4D">
                       <a:alpha val="100000"/>
@@ -4675,8 +4675,8 @@
           </p:nvSpPr>
           <p:spPr>
             <a:xfrm>
-              <a:off x="692708" y="3858272"/>
-              <a:ext cx="62179" cy="80101"/>
+              <a:off x="756929" y="3860262"/>
+              <a:ext cx="79004" cy="101955"/>
             </a:xfrm>
             <a:prstGeom prst="rect">
               <a:avLst/>
@@ -4689,7 +4689,7 @@
             <a:p>
               <a:pPr algn="l" marL="0" marR="0" indent="0">
                 <a:lnSpc>
-                  <a:spcPts val="880"/>
+                  <a:spcPts val="1120"/>
                 </a:lnSpc>
                 <a:spcBef>
                   <a:spcPts val="0"/>
@@ -4699,7 +4699,7 @@
                 </a:spcAft>
               </a:pPr>
               <a:r>
-                <a:rPr sz="880">
+                <a:rPr sz="1120">
                   <a:solidFill>
                     <a:srgbClr val="4D4D4D">
                       <a:alpha val="100000"/>
@@ -4721,8 +4721,8 @@
           </p:nvSpPr>
           <p:spPr>
             <a:xfrm>
-              <a:off x="692708" y="3028808"/>
-              <a:ext cx="62179" cy="80101"/>
+              <a:off x="756929" y="3086593"/>
+              <a:ext cx="79004" cy="101955"/>
             </a:xfrm>
             <a:prstGeom prst="rect">
               <a:avLst/>
@@ -4735,7 +4735,7 @@
             <a:p>
               <a:pPr algn="l" marL="0" marR="0" indent="0">
                 <a:lnSpc>
-                  <a:spcPts val="880"/>
+                  <a:spcPts val="1120"/>
                 </a:lnSpc>
                 <a:spcBef>
                   <a:spcPts val="0"/>
@@ -4745,7 +4745,7 @@
                 </a:spcAft>
               </a:pPr>
               <a:r>
-                <a:rPr sz="880">
+                <a:rPr sz="1120">
                   <a:solidFill>
                     <a:srgbClr val="4D4D4D">
                       <a:alpha val="100000"/>
@@ -4767,8 +4767,8 @@
           </p:nvSpPr>
           <p:spPr>
             <a:xfrm>
-              <a:off x="692708" y="2199345"/>
-              <a:ext cx="62179" cy="80101"/>
+              <a:off x="756929" y="2312925"/>
+              <a:ext cx="79004" cy="101955"/>
             </a:xfrm>
             <a:prstGeom prst="rect">
               <a:avLst/>
@@ -4781,7 +4781,7 @@
             <a:p>
               <a:pPr algn="l" marL="0" marR="0" indent="0">
                 <a:lnSpc>
-                  <a:spcPts val="880"/>
+                  <a:spcPts val="1120"/>
                 </a:lnSpc>
                 <a:spcBef>
                   <a:spcPts val="0"/>
@@ -4791,7 +4791,7 @@
                 </a:spcAft>
               </a:pPr>
               <a:r>
-                <a:rPr sz="880">
+                <a:rPr sz="1120">
                   <a:solidFill>
                     <a:srgbClr val="4D4D4D">
                       <a:alpha val="100000"/>
@@ -4813,8 +4813,8 @@
           </p:nvSpPr>
           <p:spPr>
             <a:xfrm>
-              <a:off x="2423864" y="5785772"/>
-              <a:ext cx="155356" cy="80101"/>
+              <a:off x="2475630" y="5693022"/>
+              <a:ext cx="197510" cy="101955"/>
             </a:xfrm>
             <a:prstGeom prst="rect">
               <a:avLst/>
@@ -4827,7 +4827,7 @@
             <a:p>
               <a:pPr algn="l" marL="0" marR="0" indent="0">
                 <a:lnSpc>
-                  <a:spcPts val="880"/>
+                  <a:spcPts val="1120"/>
                 </a:lnSpc>
                 <a:spcBef>
                   <a:spcPts val="0"/>
@@ -4837,7 +4837,7 @@
                 </a:spcAft>
               </a:pPr>
               <a:r>
-                <a:rPr sz="880">
+                <a:rPr sz="1120">
                   <a:solidFill>
                     <a:srgbClr val="4D4D4D">
                       <a:alpha val="100000"/>
@@ -4859,8 +4859,8 @@
           </p:nvSpPr>
           <p:spPr>
             <a:xfrm>
-              <a:off x="4196521" y="5785772"/>
-              <a:ext cx="155356" cy="80101"/>
+              <a:off x="4221672" y="5693022"/>
+              <a:ext cx="197510" cy="101955"/>
             </a:xfrm>
             <a:prstGeom prst="rect">
               <a:avLst/>
@@ -4873,7 +4873,7 @@
             <a:p>
               <a:pPr algn="l" marL="0" marR="0" indent="0">
                 <a:lnSpc>
-                  <a:spcPts val="880"/>
+                  <a:spcPts val="1120"/>
                 </a:lnSpc>
                 <a:spcBef>
                   <a:spcPts val="0"/>
@@ -4883,7 +4883,7 @@
                 </a:spcAft>
               </a:pPr>
               <a:r>
-                <a:rPr sz="880">
+                <a:rPr sz="1120">
                   <a:solidFill>
                     <a:srgbClr val="4D4D4D">
                       <a:alpha val="100000"/>
@@ -4905,8 +4905,8 @@
           </p:nvSpPr>
           <p:spPr>
             <a:xfrm>
-              <a:off x="5969179" y="5785772"/>
-              <a:ext cx="155356" cy="80101"/>
+              <a:off x="5967715" y="5693022"/>
+              <a:ext cx="197510" cy="101955"/>
             </a:xfrm>
             <a:prstGeom prst="rect">
               <a:avLst/>
@@ -4919,7 +4919,7 @@
             <a:p>
               <a:pPr algn="l" marL="0" marR="0" indent="0">
                 <a:lnSpc>
-                  <a:spcPts val="880"/>
+                  <a:spcPts val="1120"/>
                 </a:lnSpc>
                 <a:spcBef>
                   <a:spcPts val="0"/>
@@ -4929,7 +4929,7 @@
                 </a:spcAft>
               </a:pPr>
               <a:r>
-                <a:rPr sz="880">
+                <a:rPr sz="1120">
                   <a:solidFill>
                     <a:srgbClr val="4D4D4D">
                       <a:alpha val="100000"/>
@@ -4951,8 +4951,8 @@
           </p:nvSpPr>
           <p:spPr>
             <a:xfrm>
-              <a:off x="7741836" y="5785772"/>
-              <a:ext cx="155356" cy="80101"/>
+              <a:off x="7713757" y="5693022"/>
+              <a:ext cx="197510" cy="101955"/>
             </a:xfrm>
             <a:prstGeom prst="rect">
               <a:avLst/>
@@ -4965,7 +4965,7 @@
             <a:p>
               <a:pPr algn="l" marL="0" marR="0" indent="0">
                 <a:lnSpc>
-                  <a:spcPts val="880"/>
+                  <a:spcPts val="1120"/>
                 </a:lnSpc>
                 <a:spcBef>
                   <a:spcPts val="0"/>
@@ -4975,7 +4975,7 @@
                 </a:spcAft>
               </a:pPr>
               <a:r>
-                <a:rPr sz="880">
+                <a:rPr sz="1120">
                   <a:solidFill>
                     <a:srgbClr val="4D4D4D">
                       <a:alpha val="100000"/>
@@ -4997,8 +4997,8 @@
           </p:nvSpPr>
           <p:spPr>
             <a:xfrm>
-              <a:off x="3879271" y="5925448"/>
-              <a:ext cx="1676186" cy="100218"/>
+              <a:off x="3690153" y="5870717"/>
+              <a:ext cx="2133569" cy="127558"/>
             </a:xfrm>
             <a:prstGeom prst="rect">
               <a:avLst/>
@@ -5011,7 +5011,7 @@
             <a:p>
               <a:pPr algn="l" marL="0" marR="0" indent="0">
                 <a:lnSpc>
-                  <a:spcPts val="1100"/>
+                  <a:spcPts val="1400"/>
                 </a:lnSpc>
                 <a:spcBef>
                   <a:spcPts val="0"/>
@@ -5021,7 +5021,7 @@
                 </a:spcAft>
               </a:pPr>
               <a:r>
-                <a:rPr sz="1100">
+                <a:rPr sz="1400">
                   <a:solidFill>
                     <a:srgbClr val="000000">
                       <a:alpha val="100000"/>
@@ -5043,8 +5043,8 @@
           </p:nvSpPr>
           <p:spPr>
             <a:xfrm rot="-5400000">
-              <a:off x="68446" y="3848213"/>
-              <a:ext cx="1016904" cy="100218"/>
+              <a:off x="-37527" y="3847460"/>
+              <a:ext cx="1294150" cy="127558"/>
             </a:xfrm>
             <a:prstGeom prst="rect">
               <a:avLst/>
@@ -5057,7 +5057,7 @@
             <a:p>
               <a:pPr algn="l" marL="0" marR="0" indent="0">
                 <a:lnSpc>
-                  <a:spcPts val="1100"/>
+                  <a:spcPts val="1400"/>
                 </a:lnSpc>
                 <a:spcBef>
                   <a:spcPts val="0"/>
@@ -5067,7 +5067,7 @@
                 </a:spcAft>
               </a:pPr>
               <a:r>
-                <a:rPr sz="1100">
+                <a:rPr sz="1400">
                   <a:solidFill>
                     <a:srgbClr val="000000">
                       <a:alpha val="100000"/>
@@ -5089,8 +5089,8 @@
           </p:nvSpPr>
           <p:spPr>
             <a:xfrm>
-              <a:off x="817517" y="1896563"/>
-              <a:ext cx="4166463" cy="82021"/>
+              <a:off x="915645" y="1977589"/>
+              <a:ext cx="5556900" cy="109362"/>
             </a:xfrm>
             <a:prstGeom prst="rect">
               <a:avLst/>
@@ -5103,7 +5103,7 @@
             <a:p>
               <a:pPr algn="l" marL="0" marR="0" indent="0">
                 <a:lnSpc>
-                  <a:spcPts val="900"/>
+                  <a:spcPts val="1200"/>
                 </a:lnSpc>
                 <a:spcBef>
                   <a:spcPts val="0"/>
@@ -5113,7 +5113,7 @@
                 </a:spcAft>
               </a:pPr>
               <a:r>
-                <a:rPr sz="900">
+                <a:rPr sz="1200">
                   <a:solidFill>
                     <a:srgbClr val="404040">
                       <a:alpha val="100000"/>
@@ -5135,8 +5135,8 @@
           </p:nvSpPr>
           <p:spPr>
             <a:xfrm>
-              <a:off x="817517" y="1669789"/>
-              <a:ext cx="2234793" cy="120152"/>
+              <a:off x="915645" y="1688767"/>
+              <a:ext cx="2845064" cy="153070"/>
             </a:xfrm>
             <a:prstGeom prst="rect">
               <a:avLst/>
@@ -5149,7 +5149,7 @@
             <a:p>
               <a:pPr algn="l" marL="0" marR="0" indent="0">
                 <a:lnSpc>
-                  <a:spcPts val="1320"/>
+                  <a:spcPts val="1680"/>
                 </a:lnSpc>
                 <a:spcBef>
                   <a:spcPts val="0"/>
@@ -5159,7 +5159,7 @@
                 </a:spcAft>
               </a:pPr>
               <a:r>
-                <a:rPr sz="1320">
+                <a:rPr sz="1680">
                   <a:solidFill>
                     <a:srgbClr val="000000">
                       <a:alpha val="100000"/>
